--- a/reports/slides/fyp2_viva.pptx
+++ b/reports/slides/fyp2_viva.pptx
@@ -17,6 +17,7 @@
     <p:sldId id="265" r:id="rId17"/>
     <p:sldId id="266" r:id="rId18"/>
     <p:sldId id="267" r:id="rId19"/>
+    <p:sldId id="268" r:id="rId20"/>
   </p:sldIdLst>
   <p:sldSz cx="12191695" cy="6858000" type="screen4x3"/>
   <p:notesSz cx="6858000" cy="9144000"/>
@@ -593,44 +594,70 @@
           <a:lstStyle/>
           <a:p>
             <a:r>
-              <a:t>I tested the detector on 4,986 phishing emails generated by GPT-4.1, DeepSeek 3.2 and</a:t>
-            </a:r>
-          </a:p>
-          <a:p>
-            <a:r>
-              <a:t>LLaMA 3.3. None of these were used in training - this is a pure generalisation test.</a:t>
+              <a:t>All five configurations used the same split, the same preprocessing and the same default</a:t>
+            </a:r>
+          </a:p>
+          <a:p>
+            <a:r>
+              <a:t>threshold, so the comparison reflects only the classifier and the feature set.</a:t>
             </a:r>
           </a:p>
           <a:p/>
           <a:p>
             <a:r>
-              <a:t>It caught 92% at a recall-focused threshold and 84% at the deployed 0.55.</a:t>
+              <a:t>Naive Bayes was weakest at 0.968 - it predicts spam conservatively, so it has high precision</a:t>
+            </a:r>
+          </a:p>
+          <a:p>
+            <a:r>
+              <a:t>but the lowest recall at 0.950, missing about five percent of phishing.</a:t>
             </a:r>
           </a:p>
           <a:p/>
           <a:p>
             <a:r>
-              <a:t>The important observation is the shape of that curve: the catch rate falls faster than it does</a:t>
-            </a:r>
-          </a:p>
-          <a:p>
-            <a:r>
-              <a:t>on classic phishing, which means the model is systematically less confident on AI-written mail.</a:t>
-            </a:r>
-          </a:p>
-          <a:p>
-            <a:r>
-              <a:t>That is evidence these messages are genuinely harder, and it is the direct motivation for the</a:t>
-            </a:r>
-          </a:p>
-          <a:p>
-            <a:r>
-              <a:t>adaptive retraining mechanism I show next.</a:t>
-            </a:r>
-          </a:p>
-          <a:p>
-            <a:r>
-              <a:t>[2 minutes.]</a:t>
+              <a:t>Adding metadata raised recall for both linear classifiers: logistic regression from 0.990 to</a:t>
+            </a:r>
+          </a:p>
+          <a:p>
+            <a:r>
+              <a:t>0.994, SVM from 0.993 to 0.995. That is the fusion design working as intended.</a:t>
+            </a:r>
+          </a:p>
+          <a:p/>
+          <a:p>
+            <a:r>
+              <a:t>The SVM was marginally highest at 0.993 versus 0.992 - one thousandth. That is a marginal difference on a single held-out split, and I did not</a:t>
+            </a:r>
+          </a:p>
+          <a:p>
+            <a:r>
+              <a:t>run repeated trials or significance testing, so I would not claim the models are</a:t>
+            </a:r>
+          </a:p>
+          <a:p>
+            <a:r>
+              <a:t>statistically distinguishable. I deployed</a:t>
+            </a:r>
+          </a:p>
+          <a:p>
+            <a:r>
+              <a:t>logistic regression because it outputs a calibrated probability. That is what lets me tune the</a:t>
+            </a:r>
+          </a:p>
+          <a:p>
+            <a:r>
+              <a:t>threshold and show a confidence value and signal explanation. Explainability was a stated</a:t>
+            </a:r>
+          </a:p>
+          <a:p>
+            <a:r>
+              <a:t>objective, so I took the tunable model over a statistically indistinguishable alternative.</a:t>
+            </a:r>
+          </a:p>
+          <a:p>
+            <a:r>
+              <a:t>[1.5 minutes. Expect a question here - this answer is the answer.]</a:t>
             </a:r>
           </a:p>
         </p:txBody>
@@ -700,64 +727,44 @@
           <a:lstStyle/>
           <a:p>
             <a:r>
-              <a:t>After one reviewed retraining cycle on a disjoint feedback batch, ranking on the modern-threat</a:t>
-            </a:r>
-          </a:p>
-          <a:p>
-            <a:r>
-              <a:t>set improved from AUC 0.81 to 0.945, while recall held at 95% and main-corpus accuracy was</a:t>
-            </a:r>
-          </a:p>
-          <a:p>
-            <a:r>
-              <a:t>maintained at 0.991. In a controlled before-and-after on a held-out campaign, messages caught</a:t>
-            </a:r>
-          </a:p>
-          <a:p>
-            <a:r>
-              <a:t>rose from zero out of six to five out of six.</a:t>
+              <a:t>I tested the detector on 4,986 phishing emails generated by GPT-4.1, DeepSeek 3.2 and</a:t>
+            </a:r>
+          </a:p>
+          <a:p>
+            <a:r>
+              <a:t>LLaMA 3.3. None of these were used in training - this is a pure generalisation test.</a:t>
             </a:r>
           </a:p>
           <a:p/>
           <a:p>
             <a:r>
-              <a:t>I want to be honest about the scope. I measured the similarity between the feedback batch and</a:t>
-            </a:r>
-          </a:p>
-          <a:p>
-            <a:r>
-              <a:t>that test set: sixteen of the thirty test messages have a TF-IDF cosine similarity of 0.70 or</a:t>
-            </a:r>
-          </a:p>
-          <a:p>
-            <a:r>
-              <a:t>above to at least one feedback message, although no message appears in both sets. So this</a:t>
-            </a:r>
-          </a:p>
-          <a:p>
-            <a:r>
-              <a:t>should be read as adaptation to a threat family represented in the feedback, not as a general</a:t>
-            </a:r>
-          </a:p>
-          <a:p>
-            <a:r>
-              <a:t>gain on arbitrary unseen threats. I report that in Section 6.2.4.</a:t>
+              <a:t>It caught 92% at a recall-focused threshold and 84% at the deployed 0.55.</a:t>
             </a:r>
           </a:p>
           <a:p/>
           <a:p>
             <a:r>
-              <a:t>Retraining is reviewer-initiated, and a candidate model is deployed only if it does not reduce</a:t>
-            </a:r>
-          </a:p>
-          <a:p>
-            <a:r>
-              <a:t>ranking quality on the held-out split.</a:t>
-            </a:r>
-          </a:p>
-          <a:p>
-            <a:r>
-              <a:t>[2 minutes. Volunteering the similarity limit is the strongest thing you can do here.]</a:t>
+              <a:t>The important observation is the shape of that curve: the catch rate falls faster than it does</a:t>
+            </a:r>
+          </a:p>
+          <a:p>
+            <a:r>
+              <a:t>on classic phishing, which means the model is systematically less confident on AI-written mail.</a:t>
+            </a:r>
+          </a:p>
+          <a:p>
+            <a:r>
+              <a:t>That is evidence these messages are genuinely harder, and it is the direct motivation for the</a:t>
+            </a:r>
+          </a:p>
+          <a:p>
+            <a:r>
+              <a:t>adaptive retraining mechanism I show next.</a:t>
+            </a:r>
+          </a:p>
+          <a:p>
+            <a:r>
+              <a:t>[2 minutes.]</a:t>
             </a:r>
           </a:p>
         </p:txBody>
@@ -827,6 +834,133 @@
           <a:lstStyle/>
           <a:p>
             <a:r>
+              <a:t>After one reviewed retraining cycle on a disjoint feedback batch, ranking on the modern-threat</a:t>
+            </a:r>
+          </a:p>
+          <a:p>
+            <a:r>
+              <a:t>set improved from AUC 0.81 to 0.945, while recall held at 95% and main-corpus accuracy was</a:t>
+            </a:r>
+          </a:p>
+          <a:p>
+            <a:r>
+              <a:t>maintained at 0.991. In a controlled before-and-after on a held-out campaign, messages caught</a:t>
+            </a:r>
+          </a:p>
+          <a:p>
+            <a:r>
+              <a:t>rose from zero out of six to five out of six.</a:t>
+            </a:r>
+          </a:p>
+          <a:p/>
+          <a:p>
+            <a:r>
+              <a:t>I want to be honest about the scope. I measured the similarity between the feedback batch and</a:t>
+            </a:r>
+          </a:p>
+          <a:p>
+            <a:r>
+              <a:t>that test set: sixteen of the thirty test messages have a TF-IDF cosine similarity of 0.70 or</a:t>
+            </a:r>
+          </a:p>
+          <a:p>
+            <a:r>
+              <a:t>above to at least one feedback message, although no message appears in both sets. So this</a:t>
+            </a:r>
+          </a:p>
+          <a:p>
+            <a:r>
+              <a:t>should be read as adaptation to a threat family represented in the feedback, not as a general</a:t>
+            </a:r>
+          </a:p>
+          <a:p>
+            <a:r>
+              <a:t>gain on arbitrary unseen threats. I report that in Section 6.2.4.</a:t>
+            </a:r>
+          </a:p>
+          <a:p/>
+          <a:p>
+            <a:r>
+              <a:t>Retraining is reviewer-initiated, and a candidate model is deployed only if it does not reduce</a:t>
+            </a:r>
+          </a:p>
+          <a:p>
+            <a:r>
+              <a:t>ranking quality on the held-out split.</a:t>
+            </a:r>
+          </a:p>
+          <a:p>
+            <a:r>
+              <a:t>[2 minutes. Volunteering the similarity limit is the strongest thing you can do here.]</a:t>
+            </a:r>
+          </a:p>
+        </p:txBody>
+      </p:sp>
+      <p:sp>
+        <p:nvSpPr>
+          <p:cNvPr id="4" name="Slide Number Placeholder 3"/>
+          <p:cNvSpPr>
+            <a:spLocks noGrp="1"/>
+          </p:cNvSpPr>
+          <p:nvPr>
+            <p:ph type="sldNum" idx="5" sz="quarter"/>
+          </p:nvPr>
+        </p:nvSpPr>
+        <p:spPr/>
+      </p:sp>
+    </p:spTree>
+  </p:cSld>
+  <p:clrMapOvr>
+    <a:masterClrMapping/>
+  </p:clrMapOvr>
+</p:notes>
+</file>
+
+<file path=ppt/notesSlides/notesSlide13.xml><?xml version="1.0" encoding="utf-8"?>
+<p:notes xmlns:a="http://schemas.openxmlformats.org/drawingml/2006/main" xmlns:p="http://schemas.openxmlformats.org/presentationml/2006/main" xmlns:r="http://schemas.openxmlformats.org/officeDocument/2006/relationships">
+  <p:cSld>
+    <p:spTree>
+      <p:nvGrpSpPr>
+        <p:cNvPr id="1" name=""/>
+        <p:cNvGrpSpPr/>
+        <p:nvPr/>
+      </p:nvGrpSpPr>
+      <p:grpSpPr>
+        <a:xfrm>
+          <a:off x="0" y="0"/>
+          <a:ext cx="0" cy="0"/>
+          <a:chOff x="0" y="0"/>
+          <a:chExt cx="0" cy="0"/>
+        </a:xfrm>
+      </p:grpSpPr>
+      <p:sp>
+        <p:nvSpPr>
+          <p:cNvPr id="2" name="Slide Image Placeholder 1"/>
+          <p:cNvSpPr>
+            <a:spLocks noGrp="1"/>
+          </p:cNvSpPr>
+          <p:nvPr>
+            <p:ph type="sldImg" idx="2"/>
+          </p:nvPr>
+        </p:nvSpPr>
+        <p:spPr/>
+      </p:sp>
+      <p:sp>
+        <p:nvSpPr>
+          <p:cNvPr id="3" name="Notes Placeholder 2"/>
+          <p:cNvSpPr>
+            <a:spLocks noGrp="1"/>
+          </p:cNvSpPr>
+          <p:nvPr>
+            <p:ph type="body" idx="3" sz="quarter"/>
+          </p:nvPr>
+        </p:nvSpPr>
+        <p:spPr/>
+        <p:txBody>
+          <a:bodyPr/>
+          <a:lstStyle/>
+          <a:p>
+            <a:r>
               <a:t>To conclude: all four objectives were achieved. 99.2% accuracy at a 0.9% false-positive rate,</a:t>
             </a:r>
           </a:p>
@@ -1337,54 +1471,55 @@
           <a:lstStyle/>
           <a:p>
             <a:r>
-              <a:t>Each message is parsed to RFC 5322, then three feature streams are extracted.</a:t>
+              <a:t>The project tests two hypotheses.</a:t>
             </a:r>
           </a:p>
           <a:p/>
           <a:p>
             <a:r>
-              <a:t>Word TF-IDF captures phrasing. Character n-grams, three to five characters, survive</a:t>
-            </a:r>
-          </a:p>
-          <a:p>
-            <a:r>
-              <a:t>obfuscation such as inserted symbols. And thirteen structural metadata signals - URL count,</a:t>
-            </a:r>
-          </a:p>
-          <a:p>
-            <a:r>
-              <a:t>unique link domains, sender-to-link domain mismatch, reply-to presence, SPF and DKIM</a:t>
-            </a:r>
-          </a:p>
-          <a:p>
-            <a:r>
-              <a:t>indicators, casing and urgency statistics.</a:t>
+              <a:t>The first is that combining textual content with structural metadata gives more robust</a:t>
+            </a:r>
+          </a:p>
+          <a:p>
+            <a:r>
+              <a:t>detection than content alone. I tested this directly by training every classifier twice - once</a:t>
+            </a:r>
+          </a:p>
+          <a:p>
+            <a:r>
+              <a:t>on content only, once on the fused feature set - under identical conditions.</a:t>
             </a:r>
           </a:p>
           <a:p/>
           <a:p>
             <a:r>
-              <a:t>These are fused into a single sparse vector, the metadata is standardised so raw lengths</a:t>
-            </a:r>
-          </a:p>
-          <a:p>
-            <a:r>
-              <a:t>cannot dominate the normalised text features, and a class-balanced logistic regression</a:t>
-            </a:r>
-          </a:p>
-          <a:p>
-            <a:r>
-              <a:t>produces a spam probability. Above the threshold the message is quarantined - never deleted.</a:t>
-            </a:r>
-          </a:p>
-          <a:p>
-            <a:r>
-              <a:t>Every decision goes to a review queue, and reviewer corrections feed the next retraining cycle.</a:t>
-            </a:r>
-          </a:p>
-          <a:p>
-            <a:r>
-              <a:t>[2 minutes. This is the core slide. Point at each stream as you name it.]</a:t>
+              <a:t>The second is that reviewed, validation-gated retraining improves detection of represented</a:t>
+            </a:r>
+          </a:p>
+          <a:p>
+            <a:r>
+              <a:t>modern threats while maintaining performance on the main corpus. I tested this with a</a:t>
+            </a:r>
+          </a:p>
+          <a:p>
+            <a:r>
+              <a:t>before-and-after experiment on a held-out modern-threat set, checking main-corpus accuracy</a:t>
+            </a:r>
+          </a:p>
+          <a:p>
+            <a:r>
+              <a:t>was not degraded.</a:t>
+            </a:r>
+          </a:p>
+          <a:p/>
+          <a:p>
+            <a:r>
+              <a:t>Both are answered in the results section.</a:t>
+            </a:r>
+          </a:p>
+          <a:p>
+            <a:r>
+              <a:t>[1 minute. This slide connects your problem analysis directly to your experiments.]</a:t>
             </a:r>
           </a:p>
         </p:txBody>
@@ -1454,33 +1589,54 @@
           <a:lstStyle/>
           <a:p>
             <a:r>
-              <a:t>The system is implemented in Python with scikit-learn and FastAPI. It trained on 81,152</a:t>
-            </a:r>
-          </a:p>
-          <a:p>
-            <a:r>
-              <a:t>de-duplicated public emails from six merged corpora, and it runs entirely on a commodity CPU -</a:t>
-            </a:r>
-          </a:p>
-          <a:p>
-            <a:r>
-              <a:t>no graphics processor - at a median of thirteen milliseconds per email.</a:t>
+              <a:t>Each message is parsed to RFC 5322, then three feature streams are extracted.</a:t>
             </a:r>
           </a:p>
           <a:p/>
           <a:p>
             <a:r>
-              <a:t>It includes a live IMAP watcher that connects over TLS on port 993, a quarantine action, a</a:t>
-            </a:r>
-          </a:p>
-          <a:p>
-            <a:r>
-              <a:t>browser review console and a feedback store for retraining.</a:t>
-            </a:r>
-          </a:p>
-          <a:p>
-            <a:r>
-              <a:t>[1.5 minutes.]</a:t>
+              <a:t>Word TF-IDF captures phrasing. Character n-grams, three to five characters, survive</a:t>
+            </a:r>
+          </a:p>
+          <a:p>
+            <a:r>
+              <a:t>obfuscation such as inserted symbols. And thirteen structural metadata signals - URL count,</a:t>
+            </a:r>
+          </a:p>
+          <a:p>
+            <a:r>
+              <a:t>unique link domains, sender-to-link domain mismatch, reply-to presence, SPF and DKIM</a:t>
+            </a:r>
+          </a:p>
+          <a:p>
+            <a:r>
+              <a:t>indicators, casing and urgency statistics.</a:t>
+            </a:r>
+          </a:p>
+          <a:p/>
+          <a:p>
+            <a:r>
+              <a:t>These are fused into a single sparse vector, the metadata is standardised so raw lengths</a:t>
+            </a:r>
+          </a:p>
+          <a:p>
+            <a:r>
+              <a:t>cannot dominate the normalised text features, and a class-balanced logistic regression</a:t>
+            </a:r>
+          </a:p>
+          <a:p>
+            <a:r>
+              <a:t>produces a spam probability. Above the threshold the message is quarantined - never deleted.</a:t>
+            </a:r>
+          </a:p>
+          <a:p>
+            <a:r>
+              <a:t>Every decision goes to a review queue, and reviewer corrections feed the next retraining cycle.</a:t>
+            </a:r>
+          </a:p>
+          <a:p>
+            <a:r>
+              <a:t>[2 minutes. This is the core slide. Point at each stream as you name it.]</a:t>
             </a:r>
           </a:p>
         </p:txBody>
@@ -1550,44 +1706,33 @@
           <a:lstStyle/>
           <a:p>
             <a:r>
-              <a:t>On the held-out split of 20,288 emails the fused model reached 99.2% accuracy, precision</a:t>
-            </a:r>
-          </a:p>
-          <a:p>
-            <a:r>
-              <a:t>0.991, recall 0.992 and ROC-AUC of 1.000.</a:t>
+              <a:t>The system is implemented in Python with scikit-learn and FastAPI. It trained on 81,152</a:t>
+            </a:r>
+          </a:p>
+          <a:p>
+            <a:r>
+              <a:t>de-duplicated public emails from six merged corpora, and it runs entirely on a commodity CPU -</a:t>
+            </a:r>
+          </a:p>
+          <a:p>
+            <a:r>
+              <a:t>no graphics processor - at a median of thirteen milliseconds per email.</a:t>
             </a:r>
           </a:p>
           <a:p/>
           <a:p>
             <a:r>
-              <a:t>The number that matters operationally is the false-positive rate of 0.9% - ninety of nine</a:t>
-            </a:r>
-          </a:p>
-          <a:p>
-            <a:r>
-              <a:t>thousand eight hundred legitimate messages. Blocking legitimate mail is the costlier error in</a:t>
-            </a:r>
-          </a:p>
-          <a:p>
-            <a:r>
-              <a:t>an organisation, so that is the figure I optimised around.</a:t>
-            </a:r>
-          </a:p>
-          <a:p/>
-          <a:p>
-            <a:r>
-              <a:t>One clarification: the ROC-AUC of 1.000 is rounded. It is not literally perfect - it means the</a:t>
-            </a:r>
-          </a:p>
-          <a:p>
-            <a:r>
-              <a:t>model ranks spam above legitimate mail almost without exception on this corpus.</a:t>
-            </a:r>
-          </a:p>
-          <a:p>
-            <a:r>
-              <a:t>[2.5 minutes. Volunteer the AUC rounding point - it pre-empts a question.]</a:t>
+              <a:t>It includes a live IMAP watcher that connects over TLS on port 993, a quarantine action, a</a:t>
+            </a:r>
+          </a:p>
+          <a:p>
+            <a:r>
+              <a:t>browser review console and a feedback store for retraining.</a:t>
+            </a:r>
+          </a:p>
+          <a:p>
+            <a:r>
+              <a:t>[1.5 minutes.]</a:t>
             </a:r>
           </a:p>
         </p:txBody>
@@ -1657,60 +1802,44 @@
           <a:lstStyle/>
           <a:p>
             <a:r>
-              <a:t>All five configurations used the same split, the same preprocessing and the same default</a:t>
-            </a:r>
-          </a:p>
-          <a:p>
-            <a:r>
-              <a:t>threshold, so the comparison reflects only the classifier and the feature set.</a:t>
+              <a:t>On the held-out split of 20,288 emails the fused model reached 99.2% accuracy, precision</a:t>
+            </a:r>
+          </a:p>
+          <a:p>
+            <a:r>
+              <a:t>0.991, recall 0.992 and ROC-AUC of 1.000.</a:t>
             </a:r>
           </a:p>
           <a:p/>
           <a:p>
             <a:r>
-              <a:t>Naive Bayes was weakest at 0.968 - it predicts spam conservatively, so it has high precision</a:t>
-            </a:r>
-          </a:p>
-          <a:p>
-            <a:r>
-              <a:t>but the lowest recall at 0.950, missing about five percent of phishing.</a:t>
+              <a:t>The number that matters operationally is the false-positive rate of 0.9% - ninety of nine</a:t>
+            </a:r>
+          </a:p>
+          <a:p>
+            <a:r>
+              <a:t>thousand eight hundred legitimate messages. Blocking legitimate mail is the costlier error in</a:t>
+            </a:r>
+          </a:p>
+          <a:p>
+            <a:r>
+              <a:t>an organisation, so that is the figure I optimised around.</a:t>
             </a:r>
           </a:p>
           <a:p/>
           <a:p>
             <a:r>
-              <a:t>Adding metadata raised recall for both linear classifiers: logistic regression from 0.990 to</a:t>
-            </a:r>
-          </a:p>
-          <a:p>
-            <a:r>
-              <a:t>0.994, SVM from 0.993 to 0.995. That is the fusion design working as intended.</a:t>
-            </a:r>
-          </a:p>
-          <a:p/>
-          <a:p>
-            <a:r>
-              <a:t>The SVM was marginally highest at 0.993 versus 0.992 - one thousandth, within noise. I deployed</a:t>
-            </a:r>
-          </a:p>
-          <a:p>
-            <a:r>
-              <a:t>logistic regression because it outputs a calibrated probability. That is what lets me tune the</a:t>
-            </a:r>
-          </a:p>
-          <a:p>
-            <a:r>
-              <a:t>threshold and show a confidence value and signal explanation. Explainability was a stated</a:t>
-            </a:r>
-          </a:p>
-          <a:p>
-            <a:r>
-              <a:t>objective, so I took the tunable model over a statistically indistinguishable alternative.</a:t>
-            </a:r>
-          </a:p>
-          <a:p>
-            <a:r>
-              <a:t>[1.5 minutes. Expect a question here - this answer is the answer.]</a:t>
+              <a:t>One clarification: the ROC-AUC of 1.000 is rounded. It is not literally perfect - it means the</a:t>
+            </a:r>
+          </a:p>
+          <a:p>
+            <a:r>
+              <a:t>model ranks spam above legitimate mail almost without exception on this corpus.</a:t>
+            </a:r>
+          </a:p>
+          <a:p>
+            <a:r>
+              <a:t>[2.5 minutes. Volunteer the AUC rounding point - it pre-empts a question.]</a:t>
             </a:r>
           </a:p>
         </p:txBody>
@@ -4975,7 +5104,7 @@
                 </a:solidFill>
                 <a:latin typeface="Calibri"/>
               </a:rPr>
-              <a:t>Generalisation to AI-Generated Phishing</a:t>
+              <a:t>Classifier and Feature-Group Comparison</a:t>
             </a:r>
           </a:p>
           <a:p>
@@ -4991,4390 +5120,7 @@
                 </a:solidFill>
                 <a:latin typeface="Calibri"/>
               </a:rPr>
-              <a:t>4,986 emails from GPT-4.1, DeepSeek 3.2 and LLaMA 3.3 — never trained on</a:t>
-            </a:r>
-          </a:p>
-        </p:txBody>
-      </p:sp>
-      <p:sp>
-        <p:nvSpPr>
-          <p:cNvPr id="4" name="Rounded Rectangle 3"/>
-          <p:cNvSpPr/>
-          <p:nvPr/>
-        </p:nvSpPr>
-        <p:spPr>
-          <a:xfrm>
-            <a:off x="731520" y="1463040"/>
-            <a:ext cx="3108960" cy="1508760"/>
-          </a:xfrm>
-          <a:prstGeom prst="roundRect">
-            <a:avLst>
-              <a:gd name="adj" fmla="val 6000"/>
-            </a:avLst>
-          </a:prstGeom>
-          <a:solidFill>
-            <a:srgbClr val="EFF4FB"/>
-          </a:solidFill>
-          <a:ln w="15875">
-            <a:solidFill>
-              <a:srgbClr val="C7DAF2"/>
-            </a:solidFill>
-          </a:ln>
-          <a:effectLst/>
-        </p:spPr>
-        <p:style>
-          <a:lnRef idx="1">
-            <a:schemeClr val="accent1"/>
-          </a:lnRef>
-          <a:fillRef idx="3">
-            <a:schemeClr val="accent1"/>
-          </a:fillRef>
-          <a:effectRef idx="2">
-            <a:schemeClr val="accent1"/>
-          </a:effectRef>
-          <a:fontRef idx="minor">
-            <a:schemeClr val="lt1"/>
-          </a:fontRef>
-        </p:style>
-        <p:txBody>
-          <a:bodyPr rtlCol="0" anchor="ctr"/>
-          <a:lstStyle/>
-          <a:p>
-            <a:pPr algn="ctr"/>
-          </a:p>
-        </p:txBody>
-      </p:sp>
-      <p:sp>
-        <p:nvSpPr>
-          <p:cNvPr id="5" name="TextBox 4"/>
-          <p:cNvSpPr txBox="1"/>
-          <p:nvPr/>
-        </p:nvSpPr>
-        <p:spPr>
-          <a:xfrm>
-            <a:off x="731520" y="1627632"/>
-            <a:ext cx="3108960" cy="1188720"/>
-          </a:xfrm>
-          <a:prstGeom prst="rect">
-            <a:avLst/>
-          </a:prstGeom>
-          <a:noFill/>
-        </p:spPr>
-        <p:txBody>
-          <a:bodyPr wrap="square">
-            <a:spAutoFit/>
-          </a:bodyPr>
-          <a:lstStyle/>
-          <a:p>
-            <a:pPr algn="ctr"/>
-            <a:r>
-              <a:rPr sz="3800" b="1">
-                <a:solidFill>
-                  <a:srgbClr val="1A73E8"/>
-                </a:solidFill>
-              </a:rPr>
-              <a:t>92%</a:t>
-            </a:r>
-          </a:p>
-          <a:p>
-            <a:pPr algn="ctr"/>
-            <a:r>
-              <a:rPr sz="1300">
-                <a:solidFill>
-                  <a:srgbClr val="5B6672"/>
-                </a:solidFill>
-              </a:rPr>
-              <a:t>caught at a recall-focused threshold (4,565 / 4,986)</a:t>
-            </a:r>
-          </a:p>
-        </p:txBody>
-      </p:sp>
-      <p:sp>
-        <p:nvSpPr>
-          <p:cNvPr id="6" name="Rounded Rectangle 5"/>
-          <p:cNvSpPr/>
-          <p:nvPr/>
-        </p:nvSpPr>
-        <p:spPr>
-          <a:xfrm>
-            <a:off x="4069080" y="1463040"/>
-            <a:ext cx="3108960" cy="1508760"/>
-          </a:xfrm>
-          <a:prstGeom prst="roundRect">
-            <a:avLst>
-              <a:gd name="adj" fmla="val 6000"/>
-            </a:avLst>
-          </a:prstGeom>
-          <a:solidFill>
-            <a:srgbClr val="EFF4FB"/>
-          </a:solidFill>
-          <a:ln w="15875">
-            <a:solidFill>
-              <a:srgbClr val="C7DAF2"/>
-            </a:solidFill>
-          </a:ln>
-          <a:effectLst/>
-        </p:spPr>
-        <p:style>
-          <a:lnRef idx="1">
-            <a:schemeClr val="accent1"/>
-          </a:lnRef>
-          <a:fillRef idx="3">
-            <a:schemeClr val="accent1"/>
-          </a:fillRef>
-          <a:effectRef idx="2">
-            <a:schemeClr val="accent1"/>
-          </a:effectRef>
-          <a:fontRef idx="minor">
-            <a:schemeClr val="lt1"/>
-          </a:fontRef>
-        </p:style>
-        <p:txBody>
-          <a:bodyPr rtlCol="0" anchor="ctr"/>
-          <a:lstStyle/>
-          <a:p>
-            <a:pPr algn="ctr"/>
-          </a:p>
-        </p:txBody>
-      </p:sp>
-      <p:sp>
-        <p:nvSpPr>
-          <p:cNvPr id="7" name="TextBox 6"/>
-          <p:cNvSpPr txBox="1"/>
-          <p:nvPr/>
-        </p:nvSpPr>
-        <p:spPr>
-          <a:xfrm>
-            <a:off x="4069080" y="1627632"/>
-            <a:ext cx="3108960" cy="1188720"/>
-          </a:xfrm>
-          <a:prstGeom prst="rect">
-            <a:avLst/>
-          </a:prstGeom>
-          <a:noFill/>
-        </p:spPr>
-        <p:txBody>
-          <a:bodyPr wrap="square">
-            <a:spAutoFit/>
-          </a:bodyPr>
-          <a:lstStyle/>
-          <a:p>
-            <a:pPr algn="ctr"/>
-            <a:r>
-              <a:rPr sz="3800" b="1">
-                <a:solidFill>
-                  <a:srgbClr val="1A73E8"/>
-                </a:solidFill>
-              </a:rPr>
-              <a:t>84%</a:t>
-            </a:r>
-          </a:p>
-          <a:p>
-            <a:pPr algn="ctr"/>
-            <a:r>
-              <a:rPr sz="1300">
-                <a:solidFill>
-                  <a:srgbClr val="5B6672"/>
-                </a:solidFill>
-              </a:rPr>
-              <a:t>caught at the deployed 0.55 threshold</a:t>
-            </a:r>
-          </a:p>
-        </p:txBody>
-      </p:sp>
-      <p:sp>
-        <p:nvSpPr>
-          <p:cNvPr id="8" name="Rounded Rectangle 7"/>
-          <p:cNvSpPr/>
-          <p:nvPr/>
-        </p:nvSpPr>
-        <p:spPr>
-          <a:xfrm>
-            <a:off x="7406640" y="1463040"/>
-            <a:ext cx="3108960" cy="1508760"/>
-          </a:xfrm>
-          <a:prstGeom prst="roundRect">
-            <a:avLst>
-              <a:gd name="adj" fmla="val 6000"/>
-            </a:avLst>
-          </a:prstGeom>
-          <a:solidFill>
-            <a:srgbClr val="EFF4FB"/>
-          </a:solidFill>
-          <a:ln w="15875">
-            <a:solidFill>
-              <a:srgbClr val="C7DAF2"/>
-            </a:solidFill>
-          </a:ln>
-          <a:effectLst/>
-        </p:spPr>
-        <p:style>
-          <a:lnRef idx="1">
-            <a:schemeClr val="accent1"/>
-          </a:lnRef>
-          <a:fillRef idx="3">
-            <a:schemeClr val="accent1"/>
-          </a:fillRef>
-          <a:effectRef idx="2">
-            <a:schemeClr val="accent1"/>
-          </a:effectRef>
-          <a:fontRef idx="minor">
-            <a:schemeClr val="lt1"/>
-          </a:fontRef>
-        </p:style>
-        <p:txBody>
-          <a:bodyPr rtlCol="0" anchor="ctr"/>
-          <a:lstStyle/>
-          <a:p>
-            <a:pPr algn="ctr"/>
-          </a:p>
-        </p:txBody>
-      </p:sp>
-      <p:sp>
-        <p:nvSpPr>
-          <p:cNvPr id="9" name="TextBox 8"/>
-          <p:cNvSpPr txBox="1"/>
-          <p:nvPr/>
-        </p:nvSpPr>
-        <p:spPr>
-          <a:xfrm>
-            <a:off x="7406640" y="1627632"/>
-            <a:ext cx="3108960" cy="1188720"/>
-          </a:xfrm>
-          <a:prstGeom prst="rect">
-            <a:avLst/>
-          </a:prstGeom>
-          <a:noFill/>
-        </p:spPr>
-        <p:txBody>
-          <a:bodyPr wrap="square">
-            <a:spAutoFit/>
-          </a:bodyPr>
-          <a:lstStyle/>
-          <a:p>
-            <a:pPr algn="ctr"/>
-            <a:r>
-              <a:rPr sz="3800" b="1">
-                <a:solidFill>
-                  <a:srgbClr val="1A73E8"/>
-                </a:solidFill>
-              </a:rPr>
-              <a:t>0</a:t>
-            </a:r>
-          </a:p>
-          <a:p>
-            <a:pPr algn="ctr"/>
-            <a:r>
-              <a:rPr sz="1300">
-                <a:solidFill>
-                  <a:srgbClr val="5B6672"/>
-                </a:solidFill>
-              </a:rPr>
-              <a:t>AI-generated emails used in training</a:t>
-            </a:r>
-          </a:p>
-        </p:txBody>
-      </p:sp>
-      <p:sp>
-        <p:nvSpPr>
-          <p:cNvPr id="10" name="Rounded Rectangle 9"/>
-          <p:cNvSpPr/>
-          <p:nvPr/>
-        </p:nvSpPr>
-        <p:spPr>
-          <a:xfrm>
-            <a:off x="2377440" y="3291840"/>
-            <a:ext cx="7406640" cy="2926080"/>
-          </a:xfrm>
-          <a:prstGeom prst="roundRect">
-            <a:avLst>
-              <a:gd name="adj" fmla="val 6000"/>
-            </a:avLst>
-          </a:prstGeom>
-          <a:solidFill>
-            <a:srgbClr val="F7F9FC"/>
-          </a:solidFill>
-          <a:ln w="15875">
-            <a:solidFill>
-              <a:srgbClr val="B6C6DA"/>
-            </a:solidFill>
-          </a:ln>
-          <a:effectLst/>
-        </p:spPr>
-        <p:style>
-          <a:lnRef idx="1">
-            <a:schemeClr val="accent1"/>
-          </a:lnRef>
-          <a:fillRef idx="3">
-            <a:schemeClr val="accent1"/>
-          </a:fillRef>
-          <a:effectRef idx="2">
-            <a:schemeClr val="accent1"/>
-          </a:effectRef>
-          <a:fontRef idx="minor">
-            <a:schemeClr val="lt1"/>
-          </a:fontRef>
-        </p:style>
-        <p:txBody>
-          <a:bodyPr rtlCol="0" anchor="ctr"/>
-          <a:lstStyle/>
-          <a:p>
-            <a:pPr algn="ctr"/>
-          </a:p>
-        </p:txBody>
-      </p:sp>
-      <p:sp>
-        <p:nvSpPr>
-          <p:cNvPr id="11" name="TextBox 10"/>
-          <p:cNvSpPr txBox="1"/>
-          <p:nvPr/>
-        </p:nvSpPr>
-        <p:spPr>
-          <a:xfrm>
-            <a:off x="2377440" y="4480560"/>
-            <a:ext cx="7406640" cy="548640"/>
-          </a:xfrm>
-          <a:prstGeom prst="rect">
-            <a:avLst/>
-          </a:prstGeom>
-          <a:noFill/>
-        </p:spPr>
-        <p:txBody>
-          <a:bodyPr wrap="none">
-            <a:spAutoFit/>
-          </a:bodyPr>
-          <a:lstStyle/>
-          <a:p>
-            <a:pPr algn="ctr"/>
-            <a:r>
-              <a:rPr sz="1400" i="1">
-                <a:solidFill>
-                  <a:srgbClr val="5B6672"/>
-                </a:solidFill>
-              </a:rPr>
-              <a:t>[ INSERT Figure 6.3 — catch rate versus decision threshold ]</a:t>
-            </a:r>
-          </a:p>
-        </p:txBody>
-      </p:sp>
-    </p:spTree>
-  </p:cSld>
-  <p:clrMapOvr>
-    <a:masterClrMapping/>
-  </p:clrMapOvr>
-</p:sld>
-</file>
-
-<file path=ppt/slides/slide11.xml><?xml version="1.0" encoding="utf-8"?>
-<p:sld xmlns:a="http://schemas.openxmlformats.org/drawingml/2006/main" xmlns:p="http://schemas.openxmlformats.org/presentationml/2006/main" xmlns:r="http://schemas.openxmlformats.org/officeDocument/2006/relationships">
-  <p:cSld>
-    <p:spTree>
-      <p:nvGrpSpPr>
-        <p:cNvPr id="1" name=""/>
-        <p:cNvGrpSpPr/>
-        <p:nvPr/>
-      </p:nvGrpSpPr>
-      <p:grpSpPr/>
-      <p:sp>
-        <p:nvSpPr>
-          <p:cNvPr id="2" name="Rectangle 1"/>
-          <p:cNvSpPr/>
-          <p:nvPr/>
-        </p:nvSpPr>
-        <p:spPr>
-          <a:xfrm>
-            <a:off x="0" y="0"/>
-            <a:ext cx="12191695" cy="960120"/>
-          </a:xfrm>
-          <a:prstGeom prst="rect">
-            <a:avLst/>
-          </a:prstGeom>
-          <a:solidFill>
-            <a:srgbClr val="0B2B5B"/>
-          </a:solidFill>
-          <a:ln>
-            <a:noFill/>
-          </a:ln>
-          <a:effectLst/>
-        </p:spPr>
-        <p:style>
-          <a:lnRef idx="1">
-            <a:schemeClr val="accent1"/>
-          </a:lnRef>
-          <a:fillRef idx="3">
-            <a:schemeClr val="accent1"/>
-          </a:fillRef>
-          <a:effectRef idx="2">
-            <a:schemeClr val="accent1"/>
-          </a:effectRef>
-          <a:fontRef idx="minor">
-            <a:schemeClr val="lt1"/>
-          </a:fontRef>
-        </p:style>
-        <p:txBody>
-          <a:bodyPr rtlCol="0" anchor="ctr"/>
-          <a:lstStyle/>
-          <a:p>
-            <a:pPr algn="ctr"/>
-          </a:p>
-        </p:txBody>
-      </p:sp>
-      <p:sp>
-        <p:nvSpPr>
-          <p:cNvPr id="3" name="TextBox 2"/>
-          <p:cNvSpPr txBox="1"/>
-          <p:nvPr/>
-        </p:nvSpPr>
-        <p:spPr>
-          <a:xfrm>
-            <a:off x="502920" y="128016"/>
-            <a:ext cx="11155680" cy="731520"/>
-          </a:xfrm>
-          <a:prstGeom prst="rect">
-            <a:avLst/>
-          </a:prstGeom>
-          <a:noFill/>
-        </p:spPr>
-        <p:txBody>
-          <a:bodyPr wrap="square">
-            <a:spAutoFit/>
-          </a:bodyPr>
-          <a:lstStyle/>
-          <a:p>
-            <a:pPr>
-              <a:spcAft>
-                <a:spcPts val="0"/>
-              </a:spcAft>
-            </a:pPr>
-            <a:r>
-              <a:rPr sz="3000" b="1">
-                <a:solidFill>
-                  <a:srgbClr val="FFFFFF"/>
-                </a:solidFill>
-                <a:latin typeface="Calibri"/>
-              </a:rPr>
-              <a:t>Adaptive Retraining</a:t>
-            </a:r>
-          </a:p>
-          <a:p>
-            <a:pPr>
-              <a:spcAft>
-                <a:spcPts val="0"/>
-              </a:spcAft>
-            </a:pPr>
-            <a:r>
-              <a:rPr sz="1300" b="0">
-                <a:solidFill>
-                  <a:srgbClr val="C7DAF2"/>
-                </a:solidFill>
-                <a:latin typeface="Calibri"/>
-              </a:rPr>
-              <a:t>One reviewed retraining cycle on a disjoint feedback batch</a:t>
-            </a:r>
-          </a:p>
-        </p:txBody>
-      </p:sp>
-      <p:graphicFrame>
-        <p:nvGraphicFramePr>
-          <p:cNvPr id="4" name="Table 3"/>
-          <p:cNvGraphicFramePr>
-            <a:graphicFrameLocks noGrp="1"/>
-          </p:cNvGraphicFramePr>
-          <p:nvPr/>
-        </p:nvGraphicFramePr>
-        <p:xfrm>
-          <a:off x="731520" y="1463040"/>
-          <a:ext cx="6583680" cy="1920240"/>
-        </p:xfrm>
-        <a:graphic>
-          <a:graphicData uri="http://schemas.openxmlformats.org/drawingml/2006/table">
-            <a:tbl>
-              <a:tblPr firstRow="1" bandRow="1">
-                <a:tableStyleId>{5C22544A-7EE6-4342-B048-85BDC9FD1C3A}</a:tableStyleId>
-              </a:tblPr>
-              <a:tblGrid>
-                <a:gridCol w="3474720"/>
-                <a:gridCol w="1554480"/>
-                <a:gridCol w="1554480"/>
-              </a:tblGrid>
-              <a:tr h="384048">
-                <a:tc>
-                  <a:txBody>
-                    <a:bodyPr/>
-                    <a:lstStyle/>
-                    <a:p>
-                      <a:pPr algn="l"/>
-                      <a:r>
-                        <a:rPr sz="1500" b="1">
-                          <a:solidFill>
-                            <a:srgbClr val="FFFFFF"/>
-                          </a:solidFill>
-                          <a:latin typeface="Calibri"/>
-                        </a:rPr>
-                        <a:t>Measure</a:t>
-                      </a:r>
-                    </a:p>
-                  </a:txBody>
-                  <a:tcPr/>
-                </a:tc>
-                <a:tc>
-                  <a:txBody>
-                    <a:bodyPr/>
-                    <a:lstStyle/>
-                    <a:p>
-                      <a:pPr algn="ctr"/>
-                      <a:r>
-                        <a:rPr sz="1500" b="1">
-                          <a:solidFill>
-                            <a:srgbClr val="FFFFFF"/>
-                          </a:solidFill>
-                          <a:latin typeface="Calibri"/>
-                        </a:rPr>
-                        <a:t>Before</a:t>
-                      </a:r>
-                    </a:p>
-                  </a:txBody>
-                  <a:tcPr/>
-                </a:tc>
-                <a:tc>
-                  <a:txBody>
-                    <a:bodyPr/>
-                    <a:lstStyle/>
-                    <a:p>
-                      <a:pPr algn="ctr"/>
-                      <a:r>
-                        <a:rPr sz="1500" b="1">
-                          <a:solidFill>
-                            <a:srgbClr val="FFFFFF"/>
-                          </a:solidFill>
-                          <a:latin typeface="Calibri"/>
-                        </a:rPr>
-                        <a:t>After</a:t>
-                      </a:r>
-                    </a:p>
-                  </a:txBody>
-                  <a:tcPr/>
-                </a:tc>
-              </a:tr>
-              <a:tr h="384048">
-                <a:tc>
-                  <a:txBody>
-                    <a:bodyPr/>
-                    <a:lstStyle/>
-                    <a:p>
-                      <a:pPr algn="l"/>
-                      <a:r>
-                        <a:rPr sz="1500" b="0">
-                          <a:solidFill>
-                            <a:srgbClr val="1F2A37"/>
-                          </a:solidFill>
-                          <a:latin typeface="Calibri"/>
-                        </a:rPr>
-                        <a:t>ROC-AUC (modern-threat set)</a:t>
-                      </a:r>
-                    </a:p>
-                  </a:txBody>
-                  <a:tcPr/>
-                </a:tc>
-                <a:tc>
-                  <a:txBody>
-                    <a:bodyPr/>
-                    <a:lstStyle/>
-                    <a:p>
-                      <a:pPr algn="ctr"/>
-                      <a:r>
-                        <a:rPr sz="1500" b="0">
-                          <a:solidFill>
-                            <a:srgbClr val="1F2A37"/>
-                          </a:solidFill>
-                          <a:latin typeface="Calibri"/>
-                        </a:rPr>
-                        <a:t>0.810</a:t>
-                      </a:r>
-                    </a:p>
-                  </a:txBody>
-                  <a:tcPr/>
-                </a:tc>
-                <a:tc>
-                  <a:txBody>
-                    <a:bodyPr/>
-                    <a:lstStyle/>
-                    <a:p>
-                      <a:pPr algn="ctr"/>
-                      <a:r>
-                        <a:rPr sz="1500" b="0">
-                          <a:solidFill>
-                            <a:srgbClr val="1F2A37"/>
-                          </a:solidFill>
-                          <a:latin typeface="Calibri"/>
-                        </a:rPr>
-                        <a:t>0.945</a:t>
-                      </a:r>
-                    </a:p>
-                  </a:txBody>
-                  <a:tcPr/>
-                </a:tc>
-              </a:tr>
-              <a:tr h="384048">
-                <a:tc>
-                  <a:txBody>
-                    <a:bodyPr/>
-                    <a:lstStyle/>
-                    <a:p>
-                      <a:pPr algn="l"/>
-                      <a:r>
-                        <a:rPr sz="1500" b="0">
-                          <a:solidFill>
-                            <a:srgbClr val="1F2A37"/>
-                          </a:solidFill>
-                          <a:latin typeface="Calibri"/>
-                        </a:rPr>
-                        <a:t>Phishing recall at 0.55</a:t>
-                      </a:r>
-                    </a:p>
-                  </a:txBody>
-                  <a:tcPr/>
-                </a:tc>
-                <a:tc>
-                  <a:txBody>
-                    <a:bodyPr/>
-                    <a:lstStyle/>
-                    <a:p>
-                      <a:pPr algn="ctr"/>
-                      <a:r>
-                        <a:rPr sz="1500" b="0">
-                          <a:solidFill>
-                            <a:srgbClr val="1F2A37"/>
-                          </a:solidFill>
-                          <a:latin typeface="Calibri"/>
-                        </a:rPr>
-                        <a:t>95%</a:t>
-                      </a:r>
-                    </a:p>
-                  </a:txBody>
-                  <a:tcPr/>
-                </a:tc>
-                <a:tc>
-                  <a:txBody>
-                    <a:bodyPr/>
-                    <a:lstStyle/>
-                    <a:p>
-                      <a:pPr algn="ctr"/>
-                      <a:r>
-                        <a:rPr sz="1500" b="0">
-                          <a:solidFill>
-                            <a:srgbClr val="1F2A37"/>
-                          </a:solidFill>
-                          <a:latin typeface="Calibri"/>
-                        </a:rPr>
-                        <a:t>95%</a:t>
-                      </a:r>
-                    </a:p>
-                  </a:txBody>
-                  <a:tcPr/>
-                </a:tc>
-              </a:tr>
-              <a:tr h="384048">
-                <a:tc>
-                  <a:txBody>
-                    <a:bodyPr/>
-                    <a:lstStyle/>
-                    <a:p>
-                      <a:pPr algn="l"/>
-                      <a:r>
-                        <a:rPr sz="1500" b="0">
-                          <a:solidFill>
-                            <a:srgbClr val="1F2A37"/>
-                          </a:solidFill>
-                          <a:latin typeface="Calibri"/>
-                        </a:rPr>
-                        <a:t>Main-corpus accuracy</a:t>
-                      </a:r>
-                    </a:p>
-                  </a:txBody>
-                  <a:tcPr/>
-                </a:tc>
-                <a:tc>
-                  <a:txBody>
-                    <a:bodyPr/>
-                    <a:lstStyle/>
-                    <a:p>
-                      <a:pPr algn="ctr"/>
-                      <a:r>
-                        <a:rPr sz="1500" b="0">
-                          <a:solidFill>
-                            <a:srgbClr val="1F2A37"/>
-                          </a:solidFill>
-                          <a:latin typeface="Calibri"/>
-                        </a:rPr>
-                        <a:t>0.991</a:t>
-                      </a:r>
-                    </a:p>
-                  </a:txBody>
-                  <a:tcPr/>
-                </a:tc>
-                <a:tc>
-                  <a:txBody>
-                    <a:bodyPr/>
-                    <a:lstStyle/>
-                    <a:p>
-                      <a:pPr algn="ctr"/>
-                      <a:r>
-                        <a:rPr sz="1500" b="0">
-                          <a:solidFill>
-                            <a:srgbClr val="1F2A37"/>
-                          </a:solidFill>
-                          <a:latin typeface="Calibri"/>
-                        </a:rPr>
-                        <a:t>0.991</a:t>
-                      </a:r>
-                    </a:p>
-                  </a:txBody>
-                  <a:tcPr/>
-                </a:tc>
-              </a:tr>
-              <a:tr h="384048">
-                <a:tc>
-                  <a:txBody>
-                    <a:bodyPr/>
-                    <a:lstStyle/>
-                    <a:p>
-                      <a:pPr algn="l"/>
-                      <a:r>
-                        <a:rPr sz="1500" b="0">
-                          <a:solidFill>
-                            <a:srgbClr val="1F2A37"/>
-                          </a:solidFill>
-                          <a:latin typeface="Calibri"/>
-                        </a:rPr>
-                        <a:t>Demo campaign caught</a:t>
-                      </a:r>
-                    </a:p>
-                  </a:txBody>
-                  <a:tcPr/>
-                </a:tc>
-                <a:tc>
-                  <a:txBody>
-                    <a:bodyPr/>
-                    <a:lstStyle/>
-                    <a:p>
-                      <a:pPr algn="ctr"/>
-                      <a:r>
-                        <a:rPr sz="1500" b="0">
-                          <a:solidFill>
-                            <a:srgbClr val="1F2A37"/>
-                          </a:solidFill>
-                          <a:latin typeface="Calibri"/>
-                        </a:rPr>
-                        <a:t>0 / 6</a:t>
-                      </a:r>
-                    </a:p>
-                  </a:txBody>
-                  <a:tcPr/>
-                </a:tc>
-                <a:tc>
-                  <a:txBody>
-                    <a:bodyPr/>
-                    <a:lstStyle/>
-                    <a:p>
-                      <a:pPr algn="ctr"/>
-                      <a:r>
-                        <a:rPr sz="1500" b="0">
-                          <a:solidFill>
-                            <a:srgbClr val="1F2A37"/>
-                          </a:solidFill>
-                          <a:latin typeface="Calibri"/>
-                        </a:rPr>
-                        <a:t>5 / 6</a:t>
-                      </a:r>
-                    </a:p>
-                  </a:txBody>
-                  <a:tcPr/>
-                </a:tc>
-              </a:tr>
-            </a:tbl>
-          </a:graphicData>
-        </a:graphic>
-      </p:graphicFrame>
-      <p:sp>
-        <p:nvSpPr>
-          <p:cNvPr id="5" name="Rounded Rectangle 4"/>
-          <p:cNvSpPr/>
-          <p:nvPr/>
-        </p:nvSpPr>
-        <p:spPr>
-          <a:xfrm>
-            <a:off x="7680960" y="1463040"/>
-            <a:ext cx="3749039" cy="3108960"/>
-          </a:xfrm>
-          <a:prstGeom prst="roundRect">
-            <a:avLst>
-              <a:gd name="adj" fmla="val 6000"/>
-            </a:avLst>
-          </a:prstGeom>
-          <a:solidFill>
-            <a:srgbClr val="FFF7E6"/>
-          </a:solidFill>
-          <a:ln w="15875">
-            <a:solidFill>
-              <a:srgbClr val="E8C46A"/>
-            </a:solidFill>
-          </a:ln>
-          <a:effectLst/>
-        </p:spPr>
-        <p:style>
-          <a:lnRef idx="1">
-            <a:schemeClr val="accent1"/>
-          </a:lnRef>
-          <a:fillRef idx="3">
-            <a:schemeClr val="accent1"/>
-          </a:fillRef>
-          <a:effectRef idx="2">
-            <a:schemeClr val="accent1"/>
-          </a:effectRef>
-          <a:fontRef idx="minor">
-            <a:schemeClr val="lt1"/>
-          </a:fontRef>
-        </p:style>
-        <p:txBody>
-          <a:bodyPr rtlCol="0" anchor="ctr"/>
-          <a:lstStyle/>
-          <a:p>
-            <a:pPr algn="ctr"/>
-          </a:p>
-        </p:txBody>
-      </p:sp>
-      <p:sp>
-        <p:nvSpPr>
-          <p:cNvPr id="6" name="TextBox 5"/>
-          <p:cNvSpPr txBox="1"/>
-          <p:nvPr/>
-        </p:nvSpPr>
-        <p:spPr>
-          <a:xfrm>
-            <a:off x="7955279" y="1691640"/>
-            <a:ext cx="3200400" cy="2743200"/>
-          </a:xfrm>
-          <a:prstGeom prst="rect">
-            <a:avLst/>
-          </a:prstGeom>
-          <a:noFill/>
-        </p:spPr>
-        <p:txBody>
-          <a:bodyPr wrap="square">
-            <a:spAutoFit/>
-          </a:bodyPr>
-          <a:lstStyle/>
-          <a:p>
-            <a:pPr>
-              <a:spcAft>
-                <a:spcPts val="600"/>
-              </a:spcAft>
-            </a:pPr>
-            <a:r>
-              <a:rPr sz="1700" b="1">
-                <a:solidFill>
-                  <a:srgbClr val="0B2B5B"/>
-                </a:solidFill>
-                <a:latin typeface="Calibri"/>
-              </a:rPr>
-              <a:t>Scope of the claim</a:t>
-            </a:r>
-          </a:p>
-          <a:p>
-            <a:pPr>
-              <a:spcAft>
-                <a:spcPts val="600"/>
-              </a:spcAft>
-            </a:pPr>
-            <a:r>
-              <a:rPr sz="1300" b="0">
-                <a:solidFill>
-                  <a:srgbClr val="1F2A37"/>
-                </a:solidFill>
-                <a:latin typeface="Calibri"/>
-              </a:rPr>
-              <a:t>16 of the 30 test messages share a threat family with the feedback batch (TF-IDF cosine ≥ 0.70). No message appears in both sets.</a:t>
-            </a:r>
-          </a:p>
-          <a:p>
-            <a:pPr>
-              <a:spcAft>
-                <a:spcPts val="600"/>
-              </a:spcAft>
-            </a:pPr>
-            <a:r>
-              <a:rPr sz="1300" b="1">
-                <a:solidFill>
-                  <a:srgbClr val="1F2A37"/>
-                </a:solidFill>
-                <a:latin typeface="Calibri"/>
-              </a:rPr>
-              <a:t>Read as adaptation to a represented threat family, not a general gain.</a:t>
-            </a:r>
-          </a:p>
-        </p:txBody>
-      </p:sp>
-      <p:sp>
-        <p:nvSpPr>
-          <p:cNvPr id="7" name="TextBox 6"/>
-          <p:cNvSpPr txBox="1"/>
-          <p:nvPr/>
-        </p:nvSpPr>
-        <p:spPr>
-          <a:xfrm>
-            <a:off x="822960" y="4846320"/>
-            <a:ext cx="10515600" cy="1463040"/>
-          </a:xfrm>
-          <a:prstGeom prst="rect">
-            <a:avLst/>
-          </a:prstGeom>
-          <a:noFill/>
-        </p:spPr>
-        <p:txBody>
-          <a:bodyPr wrap="square">
-            <a:spAutoFit/>
-          </a:bodyPr>
-          <a:lstStyle/>
-          <a:p>
-            <a:pPr>
-              <a:spcAft>
-                <a:spcPts val="1400"/>
-              </a:spcAft>
-            </a:pPr>
-            <a:r>
-              <a:rPr sz="1700">
-                <a:solidFill>
-                  <a:srgbClr val="1F2A37"/>
-                </a:solidFill>
-                <a:latin typeface="Calibri"/>
-              </a:rPr>
-              <a:t>•  Validation gate: a candidate model replaces the deployed one only if ranking quality on the held-out split is not reduced</a:t>
-            </a:r>
-          </a:p>
-        </p:txBody>
-      </p:sp>
-    </p:spTree>
-  </p:cSld>
-  <p:clrMapOvr>
-    <a:masterClrMapping/>
-  </p:clrMapOvr>
-</p:sld>
-</file>
-
-<file path=ppt/slides/slide12.xml><?xml version="1.0" encoding="utf-8"?>
-<p:sld xmlns:a="http://schemas.openxmlformats.org/drawingml/2006/main" xmlns:p="http://schemas.openxmlformats.org/presentationml/2006/main" xmlns:r="http://schemas.openxmlformats.org/officeDocument/2006/relationships">
-  <p:cSld>
-    <p:spTree>
-      <p:nvGrpSpPr>
-        <p:cNvPr id="1" name=""/>
-        <p:cNvGrpSpPr/>
-        <p:nvPr/>
-      </p:nvGrpSpPr>
-      <p:grpSpPr/>
-      <p:sp>
-        <p:nvSpPr>
-          <p:cNvPr id="2" name="Rectangle 1"/>
-          <p:cNvSpPr/>
-          <p:nvPr/>
-        </p:nvSpPr>
-        <p:spPr>
-          <a:xfrm>
-            <a:off x="0" y="0"/>
-            <a:ext cx="12191695" cy="960120"/>
-          </a:xfrm>
-          <a:prstGeom prst="rect">
-            <a:avLst/>
-          </a:prstGeom>
-          <a:solidFill>
-            <a:srgbClr val="0B2B5B"/>
-          </a:solidFill>
-          <a:ln>
-            <a:noFill/>
-          </a:ln>
-          <a:effectLst/>
-        </p:spPr>
-        <p:style>
-          <a:lnRef idx="1">
-            <a:schemeClr val="accent1"/>
-          </a:lnRef>
-          <a:fillRef idx="3">
-            <a:schemeClr val="accent1"/>
-          </a:fillRef>
-          <a:effectRef idx="2">
-            <a:schemeClr val="accent1"/>
-          </a:effectRef>
-          <a:fontRef idx="minor">
-            <a:schemeClr val="lt1"/>
-          </a:fontRef>
-        </p:style>
-        <p:txBody>
-          <a:bodyPr rtlCol="0" anchor="ctr"/>
-          <a:lstStyle/>
-          <a:p>
-            <a:pPr algn="ctr"/>
-          </a:p>
-        </p:txBody>
-      </p:sp>
-      <p:sp>
-        <p:nvSpPr>
-          <p:cNvPr id="3" name="TextBox 2"/>
-          <p:cNvSpPr txBox="1"/>
-          <p:nvPr/>
-        </p:nvSpPr>
-        <p:spPr>
-          <a:xfrm>
-            <a:off x="502920" y="128016"/>
-            <a:ext cx="11155680" cy="731520"/>
-          </a:xfrm>
-          <a:prstGeom prst="rect">
-            <a:avLst/>
-          </a:prstGeom>
-          <a:noFill/>
-        </p:spPr>
-        <p:txBody>
-          <a:bodyPr wrap="square">
-            <a:spAutoFit/>
-          </a:bodyPr>
-          <a:lstStyle/>
-          <a:p>
-            <a:pPr>
-              <a:spcAft>
-                <a:spcPts val="0"/>
-              </a:spcAft>
-            </a:pPr>
-            <a:r>
-              <a:rPr sz="3000" b="1">
-                <a:solidFill>
-                  <a:srgbClr val="FFFFFF"/>
-                </a:solidFill>
-                <a:latin typeface="Calibri"/>
-              </a:rPr>
-              <a:t>Conclusion, Limitations and Future Work</a:t>
-            </a:r>
-          </a:p>
-        </p:txBody>
-      </p:sp>
-      <p:sp>
-        <p:nvSpPr>
-          <p:cNvPr id="4" name="TextBox 3"/>
-          <p:cNvSpPr txBox="1"/>
-          <p:nvPr/>
-        </p:nvSpPr>
-        <p:spPr>
-          <a:xfrm>
-            <a:off x="731520" y="1371600"/>
-            <a:ext cx="5303520" cy="2743200"/>
-          </a:xfrm>
-          <a:prstGeom prst="rect">
-            <a:avLst/>
-          </a:prstGeom>
-          <a:noFill/>
-        </p:spPr>
-        <p:txBody>
-          <a:bodyPr wrap="square">
-            <a:spAutoFit/>
-          </a:bodyPr>
-          <a:lstStyle/>
-          <a:p>
-            <a:pPr>
-              <a:spcAft>
-                <a:spcPts val="1400"/>
-              </a:spcAft>
-            </a:pPr>
-            <a:r>
-              <a:rPr sz="1800">
-                <a:solidFill>
-                  <a:srgbClr val="1F2A37"/>
-                </a:solidFill>
-                <a:latin typeface="Calibri"/>
-              </a:rPr>
-              <a:t>•  All four objectives achieved</a:t>
-            </a:r>
-          </a:p>
-          <a:p>
-            <a:pPr>
-              <a:spcAft>
-                <a:spcPts val="1400"/>
-              </a:spcAft>
-            </a:pPr>
-            <a:r>
-              <a:rPr sz="1800">
-                <a:solidFill>
-                  <a:srgbClr val="1F2A37"/>
-                </a:solidFill>
-                <a:latin typeface="Calibri"/>
-              </a:rPr>
-              <a:t>•  99.2% accuracy, 0.9% FPR, 13 ms on CPU</a:t>
-            </a:r>
-          </a:p>
-          <a:p>
-            <a:pPr>
-              <a:spcAft>
-                <a:spcPts val="1400"/>
-              </a:spcAft>
-            </a:pPr>
-            <a:r>
-              <a:rPr sz="1800">
-                <a:solidFill>
-                  <a:srgbClr val="1F2A37"/>
-                </a:solidFill>
-                <a:latin typeface="Calibri"/>
-              </a:rPr>
-              <a:t>•  92% on unseen LLM-generated phishing</a:t>
-            </a:r>
-          </a:p>
-          <a:p>
-            <a:pPr>
-              <a:spcAft>
-                <a:spcPts val="1400"/>
-              </a:spcAft>
-            </a:pPr>
-            <a:r>
-              <a:rPr sz="1800">
-                <a:solidFill>
-                  <a:srgbClr val="1F2A37"/>
-                </a:solidFill>
-                <a:latin typeface="Calibri"/>
-              </a:rPr>
-              <a:t>•  Measurable adaptation from reviewed feedback</a:t>
-            </a:r>
-          </a:p>
-        </p:txBody>
-      </p:sp>
-      <p:sp>
-        <p:nvSpPr>
-          <p:cNvPr id="5" name="Rounded Rectangle 4"/>
-          <p:cNvSpPr/>
-          <p:nvPr/>
-        </p:nvSpPr>
-        <p:spPr>
-          <a:xfrm>
-            <a:off x="6309360" y="1325880"/>
-            <a:ext cx="5120640" cy="3017520"/>
-          </a:xfrm>
-          <a:prstGeom prst="roundRect">
-            <a:avLst>
-              <a:gd name="adj" fmla="val 6000"/>
-            </a:avLst>
-          </a:prstGeom>
-          <a:solidFill>
-            <a:srgbClr val="EFF4FB"/>
-          </a:solidFill>
-          <a:ln w="15875">
-            <a:solidFill>
-              <a:srgbClr val="C7DAF2"/>
-            </a:solidFill>
-          </a:ln>
-          <a:effectLst/>
-        </p:spPr>
-        <p:style>
-          <a:lnRef idx="1">
-            <a:schemeClr val="accent1"/>
-          </a:lnRef>
-          <a:fillRef idx="3">
-            <a:schemeClr val="accent1"/>
-          </a:fillRef>
-          <a:effectRef idx="2">
-            <a:schemeClr val="accent1"/>
-          </a:effectRef>
-          <a:fontRef idx="minor">
-            <a:schemeClr val="lt1"/>
-          </a:fontRef>
-        </p:style>
-        <p:txBody>
-          <a:bodyPr rtlCol="0" anchor="ctr"/>
-          <a:lstStyle/>
-          <a:p>
-            <a:pPr algn="ctr"/>
-          </a:p>
-        </p:txBody>
-      </p:sp>
-      <p:sp>
-        <p:nvSpPr>
-          <p:cNvPr id="6" name="TextBox 5"/>
-          <p:cNvSpPr txBox="1"/>
-          <p:nvPr/>
-        </p:nvSpPr>
-        <p:spPr>
-          <a:xfrm>
-            <a:off x="6583680" y="1554480"/>
-            <a:ext cx="4572000" cy="2743200"/>
-          </a:xfrm>
-          <a:prstGeom prst="rect">
-            <a:avLst/>
-          </a:prstGeom>
-          <a:noFill/>
-        </p:spPr>
-        <p:txBody>
-          <a:bodyPr wrap="square">
-            <a:spAutoFit/>
-          </a:bodyPr>
-          <a:lstStyle/>
-          <a:p>
-            <a:pPr>
-              <a:spcAft>
-                <a:spcPts val="600"/>
-              </a:spcAft>
-            </a:pPr>
-            <a:r>
-              <a:rPr sz="1700" b="1">
-                <a:solidFill>
-                  <a:srgbClr val="0B2B5B"/>
-                </a:solidFill>
-                <a:latin typeface="Calibri"/>
-              </a:rPr>
-              <a:t>Two limitations I measured</a:t>
-            </a:r>
-          </a:p>
-          <a:p>
-            <a:pPr>
-              <a:spcAft>
-                <a:spcPts val="600"/>
-              </a:spcAft>
-            </a:pPr>
-            <a:r>
-              <a:rPr sz="1300" b="0">
-                <a:solidFill>
-                  <a:srgbClr val="1F2A37"/>
-                </a:solidFill>
-                <a:latin typeface="Calibri"/>
-              </a:rPr>
-              <a:t>URL counting reads only the plain-text MIME part, so links inside HTML are not counted.</a:t>
-            </a:r>
-          </a:p>
-          <a:p>
-            <a:pPr>
-              <a:spcAft>
-                <a:spcPts val="600"/>
-              </a:spcAft>
-            </a:pPr>
-            <a:r>
-              <a:rPr sz="1300" b="0">
-                <a:solidFill>
-                  <a:srgbClr val="1F2A37"/>
-                </a:solidFill>
-                <a:latin typeface="Calibri"/>
-              </a:rPr>
-              <a:t>Authentication signals learned inversely: the corpus's legitimate mail predates SPF, so SPF presence correlates with spam. Same message scored 11.5% without auth headers, 100% with.</a:t>
-            </a:r>
-          </a:p>
-        </p:txBody>
-      </p:sp>
-      <p:sp>
-        <p:nvSpPr>
-          <p:cNvPr id="7" name="TextBox 6"/>
-          <p:cNvSpPr txBox="1"/>
-          <p:nvPr/>
-        </p:nvSpPr>
-        <p:spPr>
-          <a:xfrm>
-            <a:off x="731520" y="4572000"/>
-            <a:ext cx="10698480" cy="1828800"/>
-          </a:xfrm>
-          <a:prstGeom prst="rect">
-            <a:avLst/>
-          </a:prstGeom>
-          <a:noFill/>
-        </p:spPr>
-        <p:txBody>
-          <a:bodyPr wrap="square">
-            <a:spAutoFit/>
-          </a:bodyPr>
-          <a:lstStyle/>
-          <a:p>
-            <a:pPr>
-              <a:spcAft>
-                <a:spcPts val="1400"/>
-              </a:spcAft>
-            </a:pPr>
-            <a:r>
-              <a:rPr sz="1700">
-                <a:solidFill>
-                  <a:srgbClr val="1F2A37"/>
-                </a:solidFill>
-                <a:latin typeface="Calibri"/>
-              </a:rPr>
-              <a:t>•  Future work: HTML-aware URL extraction; a corpus with modern legitimate mail; head-to-head commercial comparison on one shared labelled set</a:t>
-            </a:r>
-          </a:p>
-        </p:txBody>
-      </p:sp>
-    </p:spTree>
-  </p:cSld>
-  <p:clrMapOvr>
-    <a:masterClrMapping/>
-  </p:clrMapOvr>
-</p:sld>
-</file>
-
-<file path=ppt/slides/slide2.xml><?xml version="1.0" encoding="utf-8"?>
-<p:sld xmlns:a="http://schemas.openxmlformats.org/drawingml/2006/main" xmlns:p="http://schemas.openxmlformats.org/presentationml/2006/main" xmlns:r="http://schemas.openxmlformats.org/officeDocument/2006/relationships">
-  <p:cSld>
-    <p:spTree>
-      <p:nvGrpSpPr>
-        <p:cNvPr id="1" name=""/>
-        <p:cNvGrpSpPr/>
-        <p:nvPr/>
-      </p:nvGrpSpPr>
-      <p:grpSpPr/>
-      <p:sp>
-        <p:nvSpPr>
-          <p:cNvPr id="2" name="Rectangle 1"/>
-          <p:cNvSpPr/>
-          <p:nvPr/>
-        </p:nvSpPr>
-        <p:spPr>
-          <a:xfrm>
-            <a:off x="0" y="0"/>
-            <a:ext cx="12191695" cy="960120"/>
-          </a:xfrm>
-          <a:prstGeom prst="rect">
-            <a:avLst/>
-          </a:prstGeom>
-          <a:solidFill>
-            <a:srgbClr val="0B2B5B"/>
-          </a:solidFill>
-          <a:ln>
-            <a:noFill/>
-          </a:ln>
-          <a:effectLst/>
-        </p:spPr>
-        <p:style>
-          <a:lnRef idx="1">
-            <a:schemeClr val="accent1"/>
-          </a:lnRef>
-          <a:fillRef idx="3">
-            <a:schemeClr val="accent1"/>
-          </a:fillRef>
-          <a:effectRef idx="2">
-            <a:schemeClr val="accent1"/>
-          </a:effectRef>
-          <a:fontRef idx="minor">
-            <a:schemeClr val="lt1"/>
-          </a:fontRef>
-        </p:style>
-        <p:txBody>
-          <a:bodyPr rtlCol="0" anchor="ctr"/>
-          <a:lstStyle/>
-          <a:p>
-            <a:pPr algn="ctr"/>
-          </a:p>
-        </p:txBody>
-      </p:sp>
-      <p:sp>
-        <p:nvSpPr>
-          <p:cNvPr id="3" name="TextBox 2"/>
-          <p:cNvSpPr txBox="1"/>
-          <p:nvPr/>
-        </p:nvSpPr>
-        <p:spPr>
-          <a:xfrm>
-            <a:off x="502920" y="128016"/>
-            <a:ext cx="11155680" cy="731520"/>
-          </a:xfrm>
-          <a:prstGeom prst="rect">
-            <a:avLst/>
-          </a:prstGeom>
-          <a:noFill/>
-        </p:spPr>
-        <p:txBody>
-          <a:bodyPr wrap="square">
-            <a:spAutoFit/>
-          </a:bodyPr>
-          <a:lstStyle/>
-          <a:p>
-            <a:pPr>
-              <a:spcAft>
-                <a:spcPts val="0"/>
-              </a:spcAft>
-            </a:pPr>
-            <a:r>
-              <a:rPr sz="3000" b="1">
-                <a:solidFill>
-                  <a:srgbClr val="FFFFFF"/>
-                </a:solidFill>
-                <a:latin typeface="Calibri"/>
-              </a:rPr>
-              <a:t>Outline</a:t>
-            </a:r>
-          </a:p>
-        </p:txBody>
-      </p:sp>
-      <p:sp>
-        <p:nvSpPr>
-          <p:cNvPr id="4" name="TextBox 3"/>
-          <p:cNvSpPr txBox="1"/>
-          <p:nvPr/>
-        </p:nvSpPr>
-        <p:spPr>
-          <a:xfrm>
-            <a:off x="1280160" y="1554480"/>
-            <a:ext cx="9601200" cy="4572000"/>
-          </a:xfrm>
-          <a:prstGeom prst="rect">
-            <a:avLst/>
-          </a:prstGeom>
-          <a:noFill/>
-        </p:spPr>
-        <p:txBody>
-          <a:bodyPr wrap="square">
-            <a:spAutoFit/>
-          </a:bodyPr>
-          <a:lstStyle/>
-          <a:p>
-            <a:pPr>
-              <a:spcAft>
-                <a:spcPts val="1400"/>
-              </a:spcAft>
-            </a:pPr>
-            <a:r>
-              <a:rPr sz="2000">
-                <a:solidFill>
-                  <a:srgbClr val="1F2A37"/>
-                </a:solidFill>
-                <a:latin typeface="Calibri"/>
-              </a:rPr>
-              <a:t>•  The problem and why it is getting harder</a:t>
-            </a:r>
-          </a:p>
-          <a:p>
-            <a:pPr>
-              <a:spcAft>
-                <a:spcPts val="1400"/>
-              </a:spcAft>
-            </a:pPr>
-            <a:r>
-              <a:rPr sz="2000">
-                <a:solidFill>
-                  <a:srgbClr val="1F2A37"/>
-                </a:solidFill>
-                <a:latin typeface="Calibri"/>
-              </a:rPr>
-              <a:t>•  Gap in existing detection approaches</a:t>
-            </a:r>
-          </a:p>
-          <a:p>
-            <a:pPr>
-              <a:spcAft>
-                <a:spcPts val="1400"/>
-              </a:spcAft>
-            </a:pPr>
-            <a:r>
-              <a:rPr sz="2000">
-                <a:solidFill>
-                  <a:srgbClr val="1F2A37"/>
-                </a:solidFill>
-                <a:latin typeface="Calibri"/>
-              </a:rPr>
-              <a:t>•  Objectives</a:t>
-            </a:r>
-          </a:p>
-          <a:p>
-            <a:pPr>
-              <a:spcAft>
-                <a:spcPts val="1400"/>
-              </a:spcAft>
-            </a:pPr>
-            <a:r>
-              <a:rPr sz="2000">
-                <a:solidFill>
-                  <a:srgbClr val="1F2A37"/>
-                </a:solidFill>
-                <a:latin typeface="Calibri"/>
-              </a:rPr>
-              <a:t>•  System design and implementation</a:t>
-            </a:r>
-          </a:p>
-          <a:p>
-            <a:pPr>
-              <a:spcAft>
-                <a:spcPts val="1400"/>
-              </a:spcAft>
-            </a:pPr>
-            <a:r>
-              <a:rPr sz="2000">
-                <a:solidFill>
-                  <a:srgbClr val="1F2A37"/>
-                </a:solidFill>
-                <a:latin typeface="Calibri"/>
-              </a:rPr>
-              <a:t>•  Results: main corpus, classifier comparison, AI-generated phishing, adaptation</a:t>
-            </a:r>
-          </a:p>
-          <a:p>
-            <a:pPr>
-              <a:spcAft>
-                <a:spcPts val="1400"/>
-              </a:spcAft>
-            </a:pPr>
-            <a:r>
-              <a:rPr sz="2000">
-                <a:solidFill>
-                  <a:srgbClr val="1F2A37"/>
-                </a:solidFill>
-                <a:latin typeface="Calibri"/>
-              </a:rPr>
-              <a:t>•  Conclusion, limitations and future work</a:t>
-            </a:r>
-          </a:p>
-        </p:txBody>
-      </p:sp>
-    </p:spTree>
-  </p:cSld>
-  <p:clrMapOvr>
-    <a:masterClrMapping/>
-  </p:clrMapOvr>
-</p:sld>
-</file>
-
-<file path=ppt/slides/slide3.xml><?xml version="1.0" encoding="utf-8"?>
-<p:sld xmlns:a="http://schemas.openxmlformats.org/drawingml/2006/main" xmlns:p="http://schemas.openxmlformats.org/presentationml/2006/main" xmlns:r="http://schemas.openxmlformats.org/officeDocument/2006/relationships">
-  <p:cSld>
-    <p:spTree>
-      <p:nvGrpSpPr>
-        <p:cNvPr id="1" name=""/>
-        <p:cNvGrpSpPr/>
-        <p:nvPr/>
-      </p:nvGrpSpPr>
-      <p:grpSpPr/>
-      <p:sp>
-        <p:nvSpPr>
-          <p:cNvPr id="2" name="Rectangle 1"/>
-          <p:cNvSpPr/>
-          <p:nvPr/>
-        </p:nvSpPr>
-        <p:spPr>
-          <a:xfrm>
-            <a:off x="0" y="0"/>
-            <a:ext cx="12191695" cy="960120"/>
-          </a:xfrm>
-          <a:prstGeom prst="rect">
-            <a:avLst/>
-          </a:prstGeom>
-          <a:solidFill>
-            <a:srgbClr val="0B2B5B"/>
-          </a:solidFill>
-          <a:ln>
-            <a:noFill/>
-          </a:ln>
-          <a:effectLst/>
-        </p:spPr>
-        <p:style>
-          <a:lnRef idx="1">
-            <a:schemeClr val="accent1"/>
-          </a:lnRef>
-          <a:fillRef idx="3">
-            <a:schemeClr val="accent1"/>
-          </a:fillRef>
-          <a:effectRef idx="2">
-            <a:schemeClr val="accent1"/>
-          </a:effectRef>
-          <a:fontRef idx="minor">
-            <a:schemeClr val="lt1"/>
-          </a:fontRef>
-        </p:style>
-        <p:txBody>
-          <a:bodyPr rtlCol="0" anchor="ctr"/>
-          <a:lstStyle/>
-          <a:p>
-            <a:pPr algn="ctr"/>
-          </a:p>
-        </p:txBody>
-      </p:sp>
-      <p:sp>
-        <p:nvSpPr>
-          <p:cNvPr id="3" name="TextBox 2"/>
-          <p:cNvSpPr txBox="1"/>
-          <p:nvPr/>
-        </p:nvSpPr>
-        <p:spPr>
-          <a:xfrm>
-            <a:off x="502920" y="128016"/>
-            <a:ext cx="11155680" cy="731520"/>
-          </a:xfrm>
-          <a:prstGeom prst="rect">
-            <a:avLst/>
-          </a:prstGeom>
-          <a:noFill/>
-        </p:spPr>
-        <p:txBody>
-          <a:bodyPr wrap="square">
-            <a:spAutoFit/>
-          </a:bodyPr>
-          <a:lstStyle/>
-          <a:p>
-            <a:pPr>
-              <a:spcAft>
-                <a:spcPts val="0"/>
-              </a:spcAft>
-            </a:pPr>
-            <a:r>
-              <a:rPr sz="3000" b="1">
-                <a:solidFill>
-                  <a:srgbClr val="FFFFFF"/>
-                </a:solidFill>
-                <a:latin typeface="Calibri"/>
-              </a:rPr>
-              <a:t>The Problem</a:t>
-            </a:r>
-          </a:p>
-          <a:p>
-            <a:pPr>
-              <a:spcAft>
-                <a:spcPts val="0"/>
-              </a:spcAft>
-            </a:pPr>
-            <a:r>
-              <a:rPr sz="1300" b="0">
-                <a:solidFill>
-                  <a:srgbClr val="C7DAF2"/>
-                </a:solidFill>
-                <a:latin typeface="Calibri"/>
-              </a:rPr>
-              <a:t>Email remains the primary attack vector</a:t>
-            </a:r>
-          </a:p>
-        </p:txBody>
-      </p:sp>
-      <p:sp>
-        <p:nvSpPr>
-          <p:cNvPr id="4" name="Rounded Rectangle 3"/>
-          <p:cNvSpPr/>
-          <p:nvPr/>
-        </p:nvSpPr>
-        <p:spPr>
-          <a:xfrm>
-            <a:off x="640080" y="1371600"/>
-            <a:ext cx="3474720" cy="1508760"/>
-          </a:xfrm>
-          <a:prstGeom prst="roundRect">
-            <a:avLst>
-              <a:gd name="adj" fmla="val 6000"/>
-            </a:avLst>
-          </a:prstGeom>
-          <a:solidFill>
-            <a:srgbClr val="EFF4FB"/>
-          </a:solidFill>
-          <a:ln w="15875">
-            <a:solidFill>
-              <a:srgbClr val="C7DAF2"/>
-            </a:solidFill>
-          </a:ln>
-          <a:effectLst/>
-        </p:spPr>
-        <p:style>
-          <a:lnRef idx="1">
-            <a:schemeClr val="accent1"/>
-          </a:lnRef>
-          <a:fillRef idx="3">
-            <a:schemeClr val="accent1"/>
-          </a:fillRef>
-          <a:effectRef idx="2">
-            <a:schemeClr val="accent1"/>
-          </a:effectRef>
-          <a:fontRef idx="minor">
-            <a:schemeClr val="lt1"/>
-          </a:fontRef>
-        </p:style>
-        <p:txBody>
-          <a:bodyPr rtlCol="0" anchor="ctr"/>
-          <a:lstStyle/>
-          <a:p>
-            <a:pPr algn="ctr"/>
-          </a:p>
-        </p:txBody>
-      </p:sp>
-      <p:sp>
-        <p:nvSpPr>
-          <p:cNvPr id="5" name="TextBox 4"/>
-          <p:cNvSpPr txBox="1"/>
-          <p:nvPr/>
-        </p:nvSpPr>
-        <p:spPr>
-          <a:xfrm>
-            <a:off x="640080" y="1536192"/>
-            <a:ext cx="3474720" cy="1188720"/>
-          </a:xfrm>
-          <a:prstGeom prst="rect">
-            <a:avLst/>
-          </a:prstGeom>
-          <a:noFill/>
-        </p:spPr>
-        <p:txBody>
-          <a:bodyPr wrap="square">
-            <a:spAutoFit/>
-          </a:bodyPr>
-          <a:lstStyle/>
-          <a:p>
-            <a:pPr algn="ctr"/>
-            <a:r>
-              <a:rPr sz="3800" b="1">
-                <a:solidFill>
-                  <a:srgbClr val="1A73E8"/>
-                </a:solidFill>
-              </a:rPr>
-              <a:t>~47%</a:t>
-            </a:r>
-          </a:p>
-          <a:p>
-            <a:pPr algn="ctr"/>
-            <a:r>
-              <a:rPr sz="1300">
-                <a:solidFill>
-                  <a:srgbClr val="5B6672"/>
-                </a:solidFill>
-              </a:rPr>
-              <a:t>of world email traffic is spam (Kaspersky, 2024)</a:t>
-            </a:r>
-          </a:p>
-        </p:txBody>
-      </p:sp>
-      <p:sp>
-        <p:nvSpPr>
-          <p:cNvPr id="6" name="Rounded Rectangle 5"/>
-          <p:cNvSpPr/>
-          <p:nvPr/>
-        </p:nvSpPr>
-        <p:spPr>
-          <a:xfrm>
-            <a:off x="4343400" y="1371600"/>
-            <a:ext cx="3474720" cy="1508760"/>
-          </a:xfrm>
-          <a:prstGeom prst="roundRect">
-            <a:avLst>
-              <a:gd name="adj" fmla="val 6000"/>
-            </a:avLst>
-          </a:prstGeom>
-          <a:solidFill>
-            <a:srgbClr val="EFF4FB"/>
-          </a:solidFill>
-          <a:ln w="15875">
-            <a:solidFill>
-              <a:srgbClr val="C7DAF2"/>
-            </a:solidFill>
-          </a:ln>
-          <a:effectLst/>
-        </p:spPr>
-        <p:style>
-          <a:lnRef idx="1">
-            <a:schemeClr val="accent1"/>
-          </a:lnRef>
-          <a:fillRef idx="3">
-            <a:schemeClr val="accent1"/>
-          </a:fillRef>
-          <a:effectRef idx="2">
-            <a:schemeClr val="accent1"/>
-          </a:effectRef>
-          <a:fontRef idx="minor">
-            <a:schemeClr val="lt1"/>
-          </a:fontRef>
-        </p:style>
-        <p:txBody>
-          <a:bodyPr rtlCol="0" anchor="ctr"/>
-          <a:lstStyle/>
-          <a:p>
-            <a:pPr algn="ctr"/>
-          </a:p>
-        </p:txBody>
-      </p:sp>
-      <p:sp>
-        <p:nvSpPr>
-          <p:cNvPr id="7" name="TextBox 6"/>
-          <p:cNvSpPr txBox="1"/>
-          <p:nvPr/>
-        </p:nvSpPr>
-        <p:spPr>
-          <a:xfrm>
-            <a:off x="4343400" y="1536192"/>
-            <a:ext cx="3474720" cy="1188720"/>
-          </a:xfrm>
-          <a:prstGeom prst="rect">
-            <a:avLst/>
-          </a:prstGeom>
-          <a:noFill/>
-        </p:spPr>
-        <p:txBody>
-          <a:bodyPr wrap="square">
-            <a:spAutoFit/>
-          </a:bodyPr>
-          <a:lstStyle/>
-          <a:p>
-            <a:pPr algn="ctr"/>
-            <a:r>
-              <a:rPr sz="3800" b="1">
-                <a:solidFill>
-                  <a:srgbClr val="1A73E8"/>
-                </a:solidFill>
-              </a:rPr>
-              <a:t>USD 2.77bn</a:t>
-            </a:r>
-          </a:p>
-          <a:p>
-            <a:pPr algn="ctr"/>
-            <a:r>
-              <a:rPr sz="1300">
-                <a:solidFill>
-                  <a:srgbClr val="5B6672"/>
-                </a:solidFill>
-              </a:rPr>
-              <a:t>BEC losses, 21,442 complaints (FBI IC3, 2024)</a:t>
-            </a:r>
-          </a:p>
-        </p:txBody>
-      </p:sp>
-      <p:sp>
-        <p:nvSpPr>
-          <p:cNvPr id="8" name="Rounded Rectangle 7"/>
-          <p:cNvSpPr/>
-          <p:nvPr/>
-        </p:nvSpPr>
-        <p:spPr>
-          <a:xfrm>
-            <a:off x="8046720" y="1371600"/>
-            <a:ext cx="3474720" cy="1508760"/>
-          </a:xfrm>
-          <a:prstGeom prst="roundRect">
-            <a:avLst>
-              <a:gd name="adj" fmla="val 6000"/>
-            </a:avLst>
-          </a:prstGeom>
-          <a:solidFill>
-            <a:srgbClr val="EFF4FB"/>
-          </a:solidFill>
-          <a:ln w="15875">
-            <a:solidFill>
-              <a:srgbClr val="C7DAF2"/>
-            </a:solidFill>
-          </a:ln>
-          <a:effectLst/>
-        </p:spPr>
-        <p:style>
-          <a:lnRef idx="1">
-            <a:schemeClr val="accent1"/>
-          </a:lnRef>
-          <a:fillRef idx="3">
-            <a:schemeClr val="accent1"/>
-          </a:fillRef>
-          <a:effectRef idx="2">
-            <a:schemeClr val="accent1"/>
-          </a:effectRef>
-          <a:fontRef idx="minor">
-            <a:schemeClr val="lt1"/>
-          </a:fontRef>
-        </p:style>
-        <p:txBody>
-          <a:bodyPr rtlCol="0" anchor="ctr"/>
-          <a:lstStyle/>
-          <a:p>
-            <a:pPr algn="ctr"/>
-          </a:p>
-        </p:txBody>
-      </p:sp>
-      <p:sp>
-        <p:nvSpPr>
-          <p:cNvPr id="9" name="TextBox 8"/>
-          <p:cNvSpPr txBox="1"/>
-          <p:nvPr/>
-        </p:nvSpPr>
-        <p:spPr>
-          <a:xfrm>
-            <a:off x="8046720" y="1536192"/>
-            <a:ext cx="3474720" cy="1188720"/>
-          </a:xfrm>
-          <a:prstGeom prst="rect">
-            <a:avLst/>
-          </a:prstGeom>
-          <a:noFill/>
-        </p:spPr>
-        <p:txBody>
-          <a:bodyPr wrap="square">
-            <a:spAutoFit/>
-          </a:bodyPr>
-          <a:lstStyle/>
-          <a:p>
-            <a:pPr algn="ctr"/>
-            <a:r>
-              <a:rPr sz="3800" b="1">
-                <a:solidFill>
-                  <a:srgbClr val="1A73E8"/>
-                </a:solidFill>
-              </a:rPr>
-              <a:t>21 s</a:t>
-            </a:r>
-          </a:p>
-          <a:p>
-            <a:pPr algn="ctr"/>
-            <a:r>
-              <a:rPr sz="1300">
-                <a:solidFill>
-                  <a:srgbClr val="5B6672"/>
-                </a:solidFill>
-              </a:rPr>
-              <a:t>median time to click a phishing link (Verizon DBIR)</a:t>
-            </a:r>
-          </a:p>
-        </p:txBody>
-      </p:sp>
-      <p:sp>
-        <p:nvSpPr>
-          <p:cNvPr id="10" name="TextBox 9"/>
-          <p:cNvSpPr txBox="1"/>
-          <p:nvPr/>
-        </p:nvSpPr>
-        <p:spPr>
-          <a:xfrm>
-            <a:off x="822960" y="3291840"/>
-            <a:ext cx="10515600" cy="2743200"/>
-          </a:xfrm>
-          <a:prstGeom prst="rect">
-            <a:avLst/>
-          </a:prstGeom>
-          <a:noFill/>
-        </p:spPr>
-        <p:txBody>
-          <a:bodyPr wrap="square">
-            <a:spAutoFit/>
-          </a:bodyPr>
-          <a:lstStyle/>
-          <a:p>
-            <a:pPr>
-              <a:spcAft>
-                <a:spcPts val="1400"/>
-              </a:spcAft>
-            </a:pPr>
-            <a:r>
-              <a:rPr sz="1800">
-                <a:solidFill>
-                  <a:srgbClr val="1F2A37"/>
-                </a:solidFill>
-                <a:latin typeface="Calibri"/>
-              </a:rPr>
-              <a:t>•  Business email compromise contains no links and no keywords — signature filters miss it</a:t>
-            </a:r>
-          </a:p>
-          <a:p>
-            <a:pPr>
-              <a:spcAft>
-                <a:spcPts val="1400"/>
-              </a:spcAft>
-            </a:pPr>
-            <a:r>
-              <a:rPr sz="1800">
-                <a:solidFill>
-                  <a:srgbClr val="1F2A37"/>
-                </a:solidFill>
-                <a:latin typeface="Calibri"/>
-              </a:rPr>
-              <a:t>•  Large language models now write fluent, personalised phishing at scale</a:t>
-            </a:r>
-          </a:p>
-          <a:p>
-            <a:pPr>
-              <a:spcAft>
-                <a:spcPts val="1400"/>
-              </a:spcAft>
-            </a:pPr>
-            <a:r>
-              <a:rPr sz="1800">
-                <a:solidFill>
-                  <a:srgbClr val="1F2A37"/>
-                </a:solidFill>
-                <a:latin typeface="Calibri"/>
-              </a:rPr>
-              <a:t>•  Concept drift: a model trained once degrades as campaigns evolve</a:t>
-            </a:r>
-          </a:p>
-        </p:txBody>
-      </p:sp>
-    </p:spTree>
-  </p:cSld>
-  <p:clrMapOvr>
-    <a:masterClrMapping/>
-  </p:clrMapOvr>
-</p:sld>
-</file>
-
-<file path=ppt/slides/slide4.xml><?xml version="1.0" encoding="utf-8"?>
-<p:sld xmlns:a="http://schemas.openxmlformats.org/drawingml/2006/main" xmlns:p="http://schemas.openxmlformats.org/presentationml/2006/main" xmlns:r="http://schemas.openxmlformats.org/officeDocument/2006/relationships">
-  <p:cSld>
-    <p:spTree>
-      <p:nvGrpSpPr>
-        <p:cNvPr id="1" name=""/>
-        <p:cNvGrpSpPr/>
-        <p:nvPr/>
-      </p:nvGrpSpPr>
-      <p:grpSpPr/>
-      <p:sp>
-        <p:nvSpPr>
-          <p:cNvPr id="2" name="Rectangle 1"/>
-          <p:cNvSpPr/>
-          <p:nvPr/>
-        </p:nvSpPr>
-        <p:spPr>
-          <a:xfrm>
-            <a:off x="0" y="0"/>
-            <a:ext cx="12191695" cy="960120"/>
-          </a:xfrm>
-          <a:prstGeom prst="rect">
-            <a:avLst/>
-          </a:prstGeom>
-          <a:solidFill>
-            <a:srgbClr val="0B2B5B"/>
-          </a:solidFill>
-          <a:ln>
-            <a:noFill/>
-          </a:ln>
-          <a:effectLst/>
-        </p:spPr>
-        <p:style>
-          <a:lnRef idx="1">
-            <a:schemeClr val="accent1"/>
-          </a:lnRef>
-          <a:fillRef idx="3">
-            <a:schemeClr val="accent1"/>
-          </a:fillRef>
-          <a:effectRef idx="2">
-            <a:schemeClr val="accent1"/>
-          </a:effectRef>
-          <a:fontRef idx="minor">
-            <a:schemeClr val="lt1"/>
-          </a:fontRef>
-        </p:style>
-        <p:txBody>
-          <a:bodyPr rtlCol="0" anchor="ctr"/>
-          <a:lstStyle/>
-          <a:p>
-            <a:pPr algn="ctr"/>
-          </a:p>
-        </p:txBody>
-      </p:sp>
-      <p:sp>
-        <p:nvSpPr>
-          <p:cNvPr id="3" name="TextBox 2"/>
-          <p:cNvSpPr txBox="1"/>
-          <p:nvPr/>
-        </p:nvSpPr>
-        <p:spPr>
-          <a:xfrm>
-            <a:off x="502920" y="128016"/>
-            <a:ext cx="11155680" cy="731520"/>
-          </a:xfrm>
-          <a:prstGeom prst="rect">
-            <a:avLst/>
-          </a:prstGeom>
-          <a:noFill/>
-        </p:spPr>
-        <p:txBody>
-          <a:bodyPr wrap="square">
-            <a:spAutoFit/>
-          </a:bodyPr>
-          <a:lstStyle/>
-          <a:p>
-            <a:pPr>
-              <a:spcAft>
-                <a:spcPts val="0"/>
-              </a:spcAft>
-            </a:pPr>
-            <a:r>
-              <a:rPr sz="3000" b="1">
-                <a:solidFill>
-                  <a:srgbClr val="FFFFFF"/>
-                </a:solidFill>
-                <a:latin typeface="Calibri"/>
-              </a:rPr>
-              <a:t>Gap in Existing Approaches</a:t>
-            </a:r>
-          </a:p>
-        </p:txBody>
-      </p:sp>
-      <p:graphicFrame>
-        <p:nvGraphicFramePr>
-          <p:cNvPr id="4" name="Table 3"/>
-          <p:cNvGraphicFramePr>
-            <a:graphicFrameLocks noGrp="1"/>
-          </p:cNvGraphicFramePr>
-          <p:nvPr/>
-        </p:nvGraphicFramePr>
-        <p:xfrm>
-          <a:off x="731520" y="1463040"/>
-          <a:ext cx="10698480" cy="1920240"/>
-        </p:xfrm>
-        <a:graphic>
-          <a:graphicData uri="http://schemas.openxmlformats.org/drawingml/2006/table">
-            <a:tbl>
-              <a:tblPr firstRow="1" bandRow="1">
-                <a:tableStyleId>{5C22544A-7EE6-4342-B048-85BDC9FD1C3A}</a:tableStyleId>
-              </a:tblPr>
-              <a:tblGrid>
-                <a:gridCol w="2926080"/>
-                <a:gridCol w="3291840"/>
-                <a:gridCol w="4480560"/>
-              </a:tblGrid>
-              <a:tr h="384048">
-                <a:tc>
-                  <a:txBody>
-                    <a:bodyPr/>
-                    <a:lstStyle/>
-                    <a:p>
-                      <a:pPr algn="l"/>
-                      <a:r>
-                        <a:rPr sz="1500" b="1">
-                          <a:solidFill>
-                            <a:srgbClr val="FFFFFF"/>
-                          </a:solidFill>
-                          <a:latin typeface="Calibri"/>
-                        </a:rPr>
-                        <a:t>Approach</a:t>
-                      </a:r>
-                    </a:p>
-                  </a:txBody>
-                  <a:tcPr/>
-                </a:tc>
-                <a:tc>
-                  <a:txBody>
-                    <a:bodyPr/>
-                    <a:lstStyle/>
-                    <a:p>
-                      <a:pPr algn="ctr"/>
-                      <a:r>
-                        <a:rPr sz="1500" b="1">
-                          <a:solidFill>
-                            <a:srgbClr val="FFFFFF"/>
-                          </a:solidFill>
-                          <a:latin typeface="Calibri"/>
-                        </a:rPr>
-                        <a:t>Strength</a:t>
-                      </a:r>
-                    </a:p>
-                  </a:txBody>
-                  <a:tcPr/>
-                </a:tc>
-                <a:tc>
-                  <a:txBody>
-                    <a:bodyPr/>
-                    <a:lstStyle/>
-                    <a:p>
-                      <a:pPr algn="ctr"/>
-                      <a:r>
-                        <a:rPr sz="1500" b="1">
-                          <a:solidFill>
-                            <a:srgbClr val="FFFFFF"/>
-                          </a:solidFill>
-                          <a:latin typeface="Calibri"/>
-                        </a:rPr>
-                        <a:t>Weakness</a:t>
-                      </a:r>
-                    </a:p>
-                  </a:txBody>
-                  <a:tcPr/>
-                </a:tc>
-              </a:tr>
-              <a:tr h="384048">
-                <a:tc>
-                  <a:txBody>
-                    <a:bodyPr/>
-                    <a:lstStyle/>
-                    <a:p>
-                      <a:pPr algn="l"/>
-                      <a:r>
-                        <a:rPr sz="1500" b="0">
-                          <a:solidFill>
-                            <a:srgbClr val="1F2A37"/>
-                          </a:solidFill>
-                          <a:latin typeface="Calibri"/>
-                        </a:rPr>
-                        <a:t>Rule / keyword filters</a:t>
-                      </a:r>
-                    </a:p>
-                  </a:txBody>
-                  <a:tcPr/>
-                </a:tc>
-                <a:tc>
-                  <a:txBody>
-                    <a:bodyPr/>
-                    <a:lstStyle/>
-                    <a:p>
-                      <a:pPr algn="ctr"/>
-                      <a:r>
-                        <a:rPr sz="1500" b="0">
-                          <a:solidFill>
-                            <a:srgbClr val="1F2A37"/>
-                          </a:solidFill>
-                          <a:latin typeface="Calibri"/>
-                        </a:rPr>
-                        <a:t>Explainable</a:t>
-                      </a:r>
-                    </a:p>
-                  </a:txBody>
-                  <a:tcPr/>
-                </a:tc>
-                <a:tc>
-                  <a:txBody>
-                    <a:bodyPr/>
-                    <a:lstStyle/>
-                    <a:p>
-                      <a:pPr algn="ctr"/>
-                      <a:r>
-                        <a:rPr sz="1500" b="0">
-                          <a:solidFill>
-                            <a:srgbClr val="1F2A37"/>
-                          </a:solidFill>
-                          <a:latin typeface="Calibri"/>
-                        </a:rPr>
-                        <a:t>Brittle; evaded by rewording</a:t>
-                      </a:r>
-                    </a:p>
-                  </a:txBody>
-                  <a:tcPr/>
-                </a:tc>
-              </a:tr>
-              <a:tr h="384048">
-                <a:tc>
-                  <a:txBody>
-                    <a:bodyPr/>
-                    <a:lstStyle/>
-                    <a:p>
-                      <a:pPr algn="l"/>
-                      <a:r>
-                        <a:rPr sz="1500" b="0">
-                          <a:solidFill>
-                            <a:srgbClr val="1F2A37"/>
-                          </a:solidFill>
-                          <a:latin typeface="Calibri"/>
-                        </a:rPr>
-                        <a:t>Content classifiers</a:t>
-                      </a:r>
-                    </a:p>
-                  </a:txBody>
-                  <a:tcPr/>
-                </a:tc>
-                <a:tc>
-                  <a:txBody>
-                    <a:bodyPr/>
-                    <a:lstStyle/>
-                    <a:p>
-                      <a:pPr algn="ctr"/>
-                      <a:r>
-                        <a:rPr sz="1500" b="0">
-                          <a:solidFill>
-                            <a:srgbClr val="1F2A37"/>
-                          </a:solidFill>
-                          <a:latin typeface="Calibri"/>
-                        </a:rPr>
-                        <a:t>Learns from data</a:t>
-                      </a:r>
-                    </a:p>
-                  </a:txBody>
-                  <a:tcPr/>
-                </a:tc>
-                <a:tc>
-                  <a:txBody>
-                    <a:bodyPr/>
-                    <a:lstStyle/>
-                    <a:p>
-                      <a:pPr algn="ctr"/>
-                      <a:r>
-                        <a:rPr sz="1500" b="0">
-                          <a:solidFill>
-                            <a:srgbClr val="1F2A37"/>
-                          </a:solidFill>
-                          <a:latin typeface="Calibri"/>
-                        </a:rPr>
-                        <a:t>Ignores message structure</a:t>
-                      </a:r>
-                    </a:p>
-                  </a:txBody>
-                  <a:tcPr/>
-                </a:tc>
-              </a:tr>
-              <a:tr h="384048">
-                <a:tc>
-                  <a:txBody>
-                    <a:bodyPr/>
-                    <a:lstStyle/>
-                    <a:p>
-                      <a:pPr algn="l"/>
-                      <a:r>
-                        <a:rPr sz="1500" b="0">
-                          <a:solidFill>
-                            <a:srgbClr val="1F2A37"/>
-                          </a:solidFill>
-                          <a:latin typeface="Calibri"/>
-                        </a:rPr>
-                        <a:t>Metadata / reputation</a:t>
-                      </a:r>
-                    </a:p>
-                  </a:txBody>
-                  <a:tcPr/>
-                </a:tc>
-                <a:tc>
-                  <a:txBody>
-                    <a:bodyPr/>
-                    <a:lstStyle/>
-                    <a:p>
-                      <a:pPr algn="ctr"/>
-                      <a:r>
-                        <a:rPr sz="1500" b="0">
-                          <a:solidFill>
-                            <a:srgbClr val="1F2A37"/>
-                          </a:solidFill>
-                          <a:latin typeface="Calibri"/>
-                        </a:rPr>
-                        <a:t>Catches anomalies</a:t>
-                      </a:r>
-                    </a:p>
-                  </a:txBody>
-                  <a:tcPr/>
-                </a:tc>
-                <a:tc>
-                  <a:txBody>
-                    <a:bodyPr/>
-                    <a:lstStyle/>
-                    <a:p>
-                      <a:pPr algn="ctr"/>
-                      <a:r>
-                        <a:rPr sz="1500" b="0">
-                          <a:solidFill>
-                            <a:srgbClr val="1F2A37"/>
-                          </a:solidFill>
-                          <a:latin typeface="Calibri"/>
-                        </a:rPr>
-                        <a:t>Weak alone; evaded by clean BEC</a:t>
-                      </a:r>
-                    </a:p>
-                  </a:txBody>
-                  <a:tcPr/>
-                </a:tc>
-              </a:tr>
-              <a:tr h="384048">
-                <a:tc>
-                  <a:txBody>
-                    <a:bodyPr/>
-                    <a:lstStyle/>
-                    <a:p>
-                      <a:pPr algn="l"/>
-                      <a:r>
-                        <a:rPr sz="1500" b="0">
-                          <a:solidFill>
-                            <a:srgbClr val="1F2A37"/>
-                          </a:solidFill>
-                          <a:latin typeface="Calibri"/>
-                        </a:rPr>
-                        <a:t>Commercial cloud filters</a:t>
-                      </a:r>
-                    </a:p>
-                  </a:txBody>
-                  <a:tcPr/>
-                </a:tc>
-                <a:tc>
-                  <a:txBody>
-                    <a:bodyPr/>
-                    <a:lstStyle/>
-                    <a:p>
-                      <a:pPr algn="ctr"/>
-                      <a:r>
-                        <a:rPr sz="1500" b="0">
-                          <a:solidFill>
-                            <a:srgbClr val="1F2A37"/>
-                          </a:solidFill>
-                          <a:latin typeface="Calibri"/>
-                        </a:rPr>
-                        <a:t>Massive scale</a:t>
-                      </a:r>
-                    </a:p>
-                  </a:txBody>
-                  <a:tcPr/>
-                </a:tc>
-                <a:tc>
-                  <a:txBody>
-                    <a:bodyPr/>
-                    <a:lstStyle/>
-                    <a:p>
-                      <a:pPr algn="ctr"/>
-                      <a:r>
-                        <a:rPr sz="1500" b="0">
-                          <a:solidFill>
-                            <a:srgbClr val="1F2A37"/>
-                          </a:solidFill>
-                          <a:latin typeface="Calibri"/>
-                        </a:rPr>
-                        <a:t>Proprietary; not reproducible</a:t>
-                      </a:r>
-                    </a:p>
-                  </a:txBody>
-                  <a:tcPr/>
-                </a:tc>
-              </a:tr>
-            </a:tbl>
-          </a:graphicData>
-        </a:graphic>
-      </p:graphicFrame>
-      <p:sp>
-        <p:nvSpPr>
-          <p:cNvPr id="5" name="TextBox 4"/>
-          <p:cNvSpPr txBox="1"/>
-          <p:nvPr/>
-        </p:nvSpPr>
-        <p:spPr>
-          <a:xfrm>
-            <a:off x="822960" y="4206240"/>
-            <a:ext cx="10515600" cy="1828800"/>
-          </a:xfrm>
-          <a:prstGeom prst="rect">
-            <a:avLst/>
-          </a:prstGeom>
-          <a:noFill/>
-        </p:spPr>
-        <p:txBody>
-          <a:bodyPr wrap="square">
-            <a:spAutoFit/>
-          </a:bodyPr>
-          <a:lstStyle/>
-          <a:p>
-            <a:pPr>
-              <a:spcAft>
-                <a:spcPts val="1400"/>
-              </a:spcAft>
-            </a:pPr>
-            <a:r>
-              <a:rPr sz="1800">
-                <a:solidFill>
-                  <a:srgbClr val="1F2A37"/>
-                </a:solidFill>
-                <a:latin typeface="Calibri"/>
-              </a:rPr>
-              <a:t>•  Content and metadata are complementary, not competing</a:t>
-            </a:r>
-          </a:p>
-          <a:p>
-            <a:pPr>
-              <a:spcAft>
-                <a:spcPts val="1400"/>
-              </a:spcAft>
-            </a:pPr>
-            <a:r>
-              <a:rPr sz="1800">
-                <a:solidFill>
-                  <a:srgbClr val="1F2A37"/>
-                </a:solidFill>
-                <a:latin typeface="Calibri"/>
-              </a:rPr>
-              <a:t>•  Few published systems are locally deployable, explainable AND adaptive</a:t>
-            </a:r>
-          </a:p>
-        </p:txBody>
-      </p:sp>
-    </p:spTree>
-  </p:cSld>
-  <p:clrMapOvr>
-    <a:masterClrMapping/>
-  </p:clrMapOvr>
-</p:sld>
-</file>
-
-<file path=ppt/slides/slide5.xml><?xml version="1.0" encoding="utf-8"?>
-<p:sld xmlns:a="http://schemas.openxmlformats.org/drawingml/2006/main" xmlns:p="http://schemas.openxmlformats.org/presentationml/2006/main" xmlns:r="http://schemas.openxmlformats.org/officeDocument/2006/relationships">
-  <p:cSld>
-    <p:spTree>
-      <p:nvGrpSpPr>
-        <p:cNvPr id="1" name=""/>
-        <p:cNvGrpSpPr/>
-        <p:nvPr/>
-      </p:nvGrpSpPr>
-      <p:grpSpPr/>
-      <p:sp>
-        <p:nvSpPr>
-          <p:cNvPr id="2" name="Rectangle 1"/>
-          <p:cNvSpPr/>
-          <p:nvPr/>
-        </p:nvSpPr>
-        <p:spPr>
-          <a:xfrm>
-            <a:off x="0" y="0"/>
-            <a:ext cx="12191695" cy="960120"/>
-          </a:xfrm>
-          <a:prstGeom prst="rect">
-            <a:avLst/>
-          </a:prstGeom>
-          <a:solidFill>
-            <a:srgbClr val="0B2B5B"/>
-          </a:solidFill>
-          <a:ln>
-            <a:noFill/>
-          </a:ln>
-          <a:effectLst/>
-        </p:spPr>
-        <p:style>
-          <a:lnRef idx="1">
-            <a:schemeClr val="accent1"/>
-          </a:lnRef>
-          <a:fillRef idx="3">
-            <a:schemeClr val="accent1"/>
-          </a:fillRef>
-          <a:effectRef idx="2">
-            <a:schemeClr val="accent1"/>
-          </a:effectRef>
-          <a:fontRef idx="minor">
-            <a:schemeClr val="lt1"/>
-          </a:fontRef>
-        </p:style>
-        <p:txBody>
-          <a:bodyPr rtlCol="0" anchor="ctr"/>
-          <a:lstStyle/>
-          <a:p>
-            <a:pPr algn="ctr"/>
-          </a:p>
-        </p:txBody>
-      </p:sp>
-      <p:sp>
-        <p:nvSpPr>
-          <p:cNvPr id="3" name="TextBox 2"/>
-          <p:cNvSpPr txBox="1"/>
-          <p:nvPr/>
-        </p:nvSpPr>
-        <p:spPr>
-          <a:xfrm>
-            <a:off x="502920" y="128016"/>
-            <a:ext cx="11155680" cy="731520"/>
-          </a:xfrm>
-          <a:prstGeom prst="rect">
-            <a:avLst/>
-          </a:prstGeom>
-          <a:noFill/>
-        </p:spPr>
-        <p:txBody>
-          <a:bodyPr wrap="square">
-            <a:spAutoFit/>
-          </a:bodyPr>
-          <a:lstStyle/>
-          <a:p>
-            <a:pPr>
-              <a:spcAft>
-                <a:spcPts val="0"/>
-              </a:spcAft>
-            </a:pPr>
-            <a:r>
-              <a:rPr sz="3000" b="1">
-                <a:solidFill>
-                  <a:srgbClr val="FFFFFF"/>
-                </a:solidFill>
-                <a:latin typeface="Calibri"/>
-              </a:rPr>
-              <a:t>Objectives</a:t>
-            </a:r>
-          </a:p>
-        </p:txBody>
-      </p:sp>
-      <p:sp>
-        <p:nvSpPr>
-          <p:cNvPr id="4" name="TextBox 3"/>
-          <p:cNvSpPr txBox="1"/>
-          <p:nvPr/>
-        </p:nvSpPr>
-        <p:spPr>
-          <a:xfrm>
-            <a:off x="1005840" y="1645920"/>
-            <a:ext cx="10058400" cy="4572000"/>
-          </a:xfrm>
-          <a:prstGeom prst="rect">
-            <a:avLst/>
-          </a:prstGeom>
-          <a:noFill/>
-        </p:spPr>
-        <p:txBody>
-          <a:bodyPr wrap="square">
-            <a:spAutoFit/>
-          </a:bodyPr>
-          <a:lstStyle/>
-          <a:p>
-            <a:pPr>
-              <a:spcAft>
-                <a:spcPts val="1400"/>
-              </a:spcAft>
-            </a:pPr>
-            <a:r>
-              <a:rPr sz="1900">
-                <a:solidFill>
-                  <a:srgbClr val="1F2A37"/>
-                </a:solidFill>
-                <a:latin typeface="Calibri"/>
-              </a:rPr>
-              <a:t>•  Extract content features (body, subject, URLs) and metadata features (sender, header attributes) from raw email</a:t>
-            </a:r>
-          </a:p>
-          <a:p>
-            <a:pPr>
-              <a:spcAft>
-                <a:spcPts val="1400"/>
-              </a:spcAft>
-            </a:pPr>
-            <a:r>
-              <a:rPr sz="1900">
-                <a:solidFill>
-                  <a:srgbClr val="1F2A37"/>
-                </a:solidFill>
-                <a:latin typeface="Calibri"/>
-              </a:rPr>
-              <a:t>•  Design a content–metadata fusion framework combining both in one machine-learning pipeline</a:t>
-            </a:r>
-          </a:p>
-          <a:p>
-            <a:pPr>
-              <a:spcAft>
-                <a:spcPts val="1400"/>
-              </a:spcAft>
-            </a:pPr>
-            <a:r>
-              <a:rPr sz="1900">
-                <a:solidFill>
-                  <a:srgbClr val="1F2A37"/>
-                </a:solidFill>
-                <a:latin typeface="Calibri"/>
-              </a:rPr>
-              <a:t>•  Train and evaluate Naïve Bayes, logistic regression and support vector machines on the fused feature set</a:t>
-            </a:r>
-          </a:p>
-          <a:p>
-            <a:pPr>
-              <a:spcAft>
-                <a:spcPts val="1400"/>
-              </a:spcAft>
-            </a:pPr>
-            <a:r>
-              <a:rPr sz="1900">
-                <a:solidFill>
-                  <a:srgbClr val="1F2A37"/>
-                </a:solidFill>
-                <a:latin typeface="Calibri"/>
-              </a:rPr>
-              <a:t>•  Implement an adaptive retraining mechanism that updates the model with newly reviewed samples</a:t>
-            </a:r>
-          </a:p>
-        </p:txBody>
-      </p:sp>
-    </p:spTree>
-  </p:cSld>
-  <p:clrMapOvr>
-    <a:masterClrMapping/>
-  </p:clrMapOvr>
-</p:sld>
-</file>
-
-<file path=ppt/slides/slide6.xml><?xml version="1.0" encoding="utf-8"?>
-<p:sld xmlns:a="http://schemas.openxmlformats.org/drawingml/2006/main" xmlns:p="http://schemas.openxmlformats.org/presentationml/2006/main" xmlns:r="http://schemas.openxmlformats.org/officeDocument/2006/relationships">
-  <p:cSld>
-    <p:spTree>
-      <p:nvGrpSpPr>
-        <p:cNvPr id="1" name=""/>
-        <p:cNvGrpSpPr/>
-        <p:nvPr/>
-      </p:nvGrpSpPr>
-      <p:grpSpPr/>
-      <p:sp>
-        <p:nvSpPr>
-          <p:cNvPr id="2" name="Rectangle 1"/>
-          <p:cNvSpPr/>
-          <p:nvPr/>
-        </p:nvSpPr>
-        <p:spPr>
-          <a:xfrm>
-            <a:off x="0" y="0"/>
-            <a:ext cx="12191695" cy="960120"/>
-          </a:xfrm>
-          <a:prstGeom prst="rect">
-            <a:avLst/>
-          </a:prstGeom>
-          <a:solidFill>
-            <a:srgbClr val="0B2B5B"/>
-          </a:solidFill>
-          <a:ln>
-            <a:noFill/>
-          </a:ln>
-          <a:effectLst/>
-        </p:spPr>
-        <p:style>
-          <a:lnRef idx="1">
-            <a:schemeClr val="accent1"/>
-          </a:lnRef>
-          <a:fillRef idx="3">
-            <a:schemeClr val="accent1"/>
-          </a:fillRef>
-          <a:effectRef idx="2">
-            <a:schemeClr val="accent1"/>
-          </a:effectRef>
-          <a:fontRef idx="minor">
-            <a:schemeClr val="lt1"/>
-          </a:fontRef>
-        </p:style>
-        <p:txBody>
-          <a:bodyPr rtlCol="0" anchor="ctr"/>
-          <a:lstStyle/>
-          <a:p>
-            <a:pPr algn="ctr"/>
-          </a:p>
-        </p:txBody>
-      </p:sp>
-      <p:sp>
-        <p:nvSpPr>
-          <p:cNvPr id="3" name="TextBox 2"/>
-          <p:cNvSpPr txBox="1"/>
-          <p:nvPr/>
-        </p:nvSpPr>
-        <p:spPr>
-          <a:xfrm>
-            <a:off x="502920" y="128016"/>
-            <a:ext cx="11155680" cy="731520"/>
-          </a:xfrm>
-          <a:prstGeom prst="rect">
-            <a:avLst/>
-          </a:prstGeom>
-          <a:noFill/>
-        </p:spPr>
-        <p:txBody>
-          <a:bodyPr wrap="square">
-            <a:spAutoFit/>
-          </a:bodyPr>
-          <a:lstStyle/>
-          <a:p>
-            <a:pPr>
-              <a:spcAft>
-                <a:spcPts val="0"/>
-              </a:spcAft>
-            </a:pPr>
-            <a:r>
-              <a:rPr sz="3000" b="1">
-                <a:solidFill>
-                  <a:srgbClr val="FFFFFF"/>
-                </a:solidFill>
-                <a:latin typeface="Calibri"/>
-              </a:rPr>
-              <a:t>System Design</a:t>
-            </a:r>
-          </a:p>
-          <a:p>
-            <a:pPr>
-              <a:spcAft>
-                <a:spcPts val="0"/>
-              </a:spcAft>
-            </a:pPr>
-            <a:r>
-              <a:rPr sz="1300" b="0">
-                <a:solidFill>
-                  <a:srgbClr val="C7DAF2"/>
-                </a:solidFill>
-                <a:latin typeface="Calibri"/>
-              </a:rPr>
-              <a:t>Three feature streams fused into one classifier</a:t>
-            </a:r>
-          </a:p>
-        </p:txBody>
-      </p:sp>
-      <p:sp>
-        <p:nvSpPr>
-          <p:cNvPr id="4" name="Rounded Rectangle 3"/>
-          <p:cNvSpPr/>
-          <p:nvPr/>
-        </p:nvSpPr>
-        <p:spPr>
-          <a:xfrm>
-            <a:off x="731520" y="1371600"/>
-            <a:ext cx="10698480" cy="4846320"/>
-          </a:xfrm>
-          <a:prstGeom prst="roundRect">
-            <a:avLst>
-              <a:gd name="adj" fmla="val 6000"/>
-            </a:avLst>
-          </a:prstGeom>
-          <a:solidFill>
-            <a:srgbClr val="F7F9FC"/>
-          </a:solidFill>
-          <a:ln w="15875">
-            <a:solidFill>
-              <a:srgbClr val="B6C6DA"/>
-            </a:solidFill>
-          </a:ln>
-          <a:effectLst/>
-        </p:spPr>
-        <p:style>
-          <a:lnRef idx="1">
-            <a:schemeClr val="accent1"/>
-          </a:lnRef>
-          <a:fillRef idx="3">
-            <a:schemeClr val="accent1"/>
-          </a:fillRef>
-          <a:effectRef idx="2">
-            <a:schemeClr val="accent1"/>
-          </a:effectRef>
-          <a:fontRef idx="minor">
-            <a:schemeClr val="lt1"/>
-          </a:fontRef>
-        </p:style>
-        <p:txBody>
-          <a:bodyPr rtlCol="0" anchor="ctr"/>
-          <a:lstStyle/>
-          <a:p>
-            <a:pPr algn="ctr"/>
-          </a:p>
-        </p:txBody>
-      </p:sp>
-      <p:sp>
-        <p:nvSpPr>
-          <p:cNvPr id="5" name="TextBox 4"/>
-          <p:cNvSpPr txBox="1"/>
-          <p:nvPr/>
-        </p:nvSpPr>
-        <p:spPr>
-          <a:xfrm>
-            <a:off x="731520" y="3520440"/>
-            <a:ext cx="10698480" cy="548640"/>
-          </a:xfrm>
-          <a:prstGeom prst="rect">
-            <a:avLst/>
-          </a:prstGeom>
-          <a:noFill/>
-        </p:spPr>
-        <p:txBody>
-          <a:bodyPr wrap="none">
-            <a:spAutoFit/>
-          </a:bodyPr>
-          <a:lstStyle/>
-          <a:p>
-            <a:pPr algn="ctr"/>
-            <a:r>
-              <a:rPr sz="1400" i="1">
-                <a:solidFill>
-                  <a:srgbClr val="5B6672"/>
-                </a:solidFill>
-              </a:rPr>
-              <a:t>[ INSERT Figure 4.1 — system block diagram ]</a:t>
-            </a:r>
-          </a:p>
-        </p:txBody>
-      </p:sp>
-    </p:spTree>
-  </p:cSld>
-  <p:clrMapOvr>
-    <a:masterClrMapping/>
-  </p:clrMapOvr>
-</p:sld>
-</file>
-
-<file path=ppt/slides/slide7.xml><?xml version="1.0" encoding="utf-8"?>
-<p:sld xmlns:a="http://schemas.openxmlformats.org/drawingml/2006/main" xmlns:p="http://schemas.openxmlformats.org/presentationml/2006/main" xmlns:r="http://schemas.openxmlformats.org/officeDocument/2006/relationships">
-  <p:cSld>
-    <p:spTree>
-      <p:nvGrpSpPr>
-        <p:cNvPr id="1" name=""/>
-        <p:cNvGrpSpPr/>
-        <p:nvPr/>
-      </p:nvGrpSpPr>
-      <p:grpSpPr/>
-      <p:sp>
-        <p:nvSpPr>
-          <p:cNvPr id="2" name="Rectangle 1"/>
-          <p:cNvSpPr/>
-          <p:nvPr/>
-        </p:nvSpPr>
-        <p:spPr>
-          <a:xfrm>
-            <a:off x="0" y="0"/>
-            <a:ext cx="12191695" cy="960120"/>
-          </a:xfrm>
-          <a:prstGeom prst="rect">
-            <a:avLst/>
-          </a:prstGeom>
-          <a:solidFill>
-            <a:srgbClr val="0B2B5B"/>
-          </a:solidFill>
-          <a:ln>
-            <a:noFill/>
-          </a:ln>
-          <a:effectLst/>
-        </p:spPr>
-        <p:style>
-          <a:lnRef idx="1">
-            <a:schemeClr val="accent1"/>
-          </a:lnRef>
-          <a:fillRef idx="3">
-            <a:schemeClr val="accent1"/>
-          </a:fillRef>
-          <a:effectRef idx="2">
-            <a:schemeClr val="accent1"/>
-          </a:effectRef>
-          <a:fontRef idx="minor">
-            <a:schemeClr val="lt1"/>
-          </a:fontRef>
-        </p:style>
-        <p:txBody>
-          <a:bodyPr rtlCol="0" anchor="ctr"/>
-          <a:lstStyle/>
-          <a:p>
-            <a:pPr algn="ctr"/>
-          </a:p>
-        </p:txBody>
-      </p:sp>
-      <p:sp>
-        <p:nvSpPr>
-          <p:cNvPr id="3" name="TextBox 2"/>
-          <p:cNvSpPr txBox="1"/>
-          <p:nvPr/>
-        </p:nvSpPr>
-        <p:spPr>
-          <a:xfrm>
-            <a:off x="502920" y="128016"/>
-            <a:ext cx="11155680" cy="731520"/>
-          </a:xfrm>
-          <a:prstGeom prst="rect">
-            <a:avLst/>
-          </a:prstGeom>
-          <a:noFill/>
-        </p:spPr>
-        <p:txBody>
-          <a:bodyPr wrap="square">
-            <a:spAutoFit/>
-          </a:bodyPr>
-          <a:lstStyle/>
-          <a:p>
-            <a:pPr>
-              <a:spcAft>
-                <a:spcPts val="0"/>
-              </a:spcAft>
-            </a:pPr>
-            <a:r>
-              <a:rPr sz="3000" b="1">
-                <a:solidFill>
-                  <a:srgbClr val="FFFFFF"/>
-                </a:solidFill>
-                <a:latin typeface="Calibri"/>
-              </a:rPr>
-              <a:t>Implementation</a:t>
-            </a:r>
-          </a:p>
-        </p:txBody>
-      </p:sp>
-      <p:sp>
-        <p:nvSpPr>
-          <p:cNvPr id="4" name="TextBox 3"/>
-          <p:cNvSpPr txBox="1"/>
-          <p:nvPr/>
-        </p:nvSpPr>
-        <p:spPr>
-          <a:xfrm>
-            <a:off x="822960" y="1463040"/>
-            <a:ext cx="5120640" cy="4572000"/>
-          </a:xfrm>
-          <a:prstGeom prst="rect">
-            <a:avLst/>
-          </a:prstGeom>
-          <a:noFill/>
-        </p:spPr>
-        <p:txBody>
-          <a:bodyPr wrap="square">
-            <a:spAutoFit/>
-          </a:bodyPr>
-          <a:lstStyle/>
-          <a:p>
-            <a:pPr>
-              <a:spcAft>
-                <a:spcPts val="1400"/>
-              </a:spcAft>
-            </a:pPr>
-            <a:r>
-              <a:rPr sz="1800">
-                <a:solidFill>
-                  <a:srgbClr val="1F2A37"/>
-                </a:solidFill>
-                <a:latin typeface="Calibri"/>
-              </a:rPr>
-              <a:t>•  Python 3.13, scikit-learn, FastAPI</a:t>
-            </a:r>
-          </a:p>
-          <a:p>
-            <a:pPr>
-              <a:spcAft>
-                <a:spcPts val="1400"/>
-              </a:spcAft>
-            </a:pPr>
-            <a:r>
-              <a:rPr sz="1800">
-                <a:solidFill>
-                  <a:srgbClr val="1F2A37"/>
-                </a:solidFill>
-                <a:latin typeface="Calibri"/>
-              </a:rPr>
-              <a:t>•  Trained on 81,152 de-duplicated public emails</a:t>
-            </a:r>
-          </a:p>
-          <a:p>
-            <a:pPr>
-              <a:spcAft>
-                <a:spcPts val="1400"/>
-              </a:spcAft>
-            </a:pPr>
-            <a:r>
-              <a:rPr sz="1800">
-                <a:solidFill>
-                  <a:srgbClr val="1F2A37"/>
-                </a:solidFill>
-                <a:latin typeface="Calibri"/>
-              </a:rPr>
-              <a:t>•  Runs on a commodity CPU — no GPU required</a:t>
-            </a:r>
-          </a:p>
-          <a:p>
-            <a:pPr>
-              <a:spcAft>
-                <a:spcPts val="1400"/>
-              </a:spcAft>
-            </a:pPr>
-            <a:r>
-              <a:rPr sz="1800">
-                <a:solidFill>
-                  <a:srgbClr val="1F2A37"/>
-                </a:solidFill>
-                <a:latin typeface="Calibri"/>
-              </a:rPr>
-              <a:t>•  Live IMAP watcher over TLS, port 993</a:t>
-            </a:r>
-          </a:p>
-          <a:p>
-            <a:pPr>
-              <a:spcAft>
-                <a:spcPts val="1400"/>
-              </a:spcAft>
-            </a:pPr>
-            <a:r>
-              <a:rPr sz="1800">
-                <a:solidFill>
-                  <a:srgbClr val="1F2A37"/>
-                </a:solidFill>
-                <a:latin typeface="Calibri"/>
-              </a:rPr>
-              <a:t>•  Quarantine, review console, feedback store</a:t>
-            </a:r>
-          </a:p>
-        </p:txBody>
-      </p:sp>
-      <p:sp>
-        <p:nvSpPr>
-          <p:cNvPr id="5" name="Rounded Rectangle 4"/>
-          <p:cNvSpPr/>
-          <p:nvPr/>
-        </p:nvSpPr>
-        <p:spPr>
-          <a:xfrm>
-            <a:off x="6400800" y="1554480"/>
-            <a:ext cx="2377440" cy="1508760"/>
-          </a:xfrm>
-          <a:prstGeom prst="roundRect">
-            <a:avLst>
-              <a:gd name="adj" fmla="val 6000"/>
-            </a:avLst>
-          </a:prstGeom>
-          <a:solidFill>
-            <a:srgbClr val="EFF4FB"/>
-          </a:solidFill>
-          <a:ln w="15875">
-            <a:solidFill>
-              <a:srgbClr val="C7DAF2"/>
-            </a:solidFill>
-          </a:ln>
-          <a:effectLst/>
-        </p:spPr>
-        <p:style>
-          <a:lnRef idx="1">
-            <a:schemeClr val="accent1"/>
-          </a:lnRef>
-          <a:fillRef idx="3">
-            <a:schemeClr val="accent1"/>
-          </a:fillRef>
-          <a:effectRef idx="2">
-            <a:schemeClr val="accent1"/>
-          </a:effectRef>
-          <a:fontRef idx="minor">
-            <a:schemeClr val="lt1"/>
-          </a:fontRef>
-        </p:style>
-        <p:txBody>
-          <a:bodyPr rtlCol="0" anchor="ctr"/>
-          <a:lstStyle/>
-          <a:p>
-            <a:pPr algn="ctr"/>
-          </a:p>
-        </p:txBody>
-      </p:sp>
-      <p:sp>
-        <p:nvSpPr>
-          <p:cNvPr id="6" name="TextBox 5"/>
-          <p:cNvSpPr txBox="1"/>
-          <p:nvPr/>
-        </p:nvSpPr>
-        <p:spPr>
-          <a:xfrm>
-            <a:off x="6400800" y="1719072"/>
-            <a:ext cx="2377440" cy="1188720"/>
-          </a:xfrm>
-          <a:prstGeom prst="rect">
-            <a:avLst/>
-          </a:prstGeom>
-          <a:noFill/>
-        </p:spPr>
-        <p:txBody>
-          <a:bodyPr wrap="square">
-            <a:spAutoFit/>
-          </a:bodyPr>
-          <a:lstStyle/>
-          <a:p>
-            <a:pPr algn="ctr"/>
-            <a:r>
-              <a:rPr sz="3800" b="1">
-                <a:solidFill>
-                  <a:srgbClr val="1A73E8"/>
-                </a:solidFill>
-              </a:rPr>
-              <a:t>81,152</a:t>
-            </a:r>
-          </a:p>
-          <a:p>
-            <a:pPr algn="ctr"/>
-            <a:r>
-              <a:rPr sz="1300">
-                <a:solidFill>
-                  <a:srgbClr val="5B6672"/>
-                </a:solidFill>
-              </a:rPr>
-              <a:t>emails after de-duplication</a:t>
-            </a:r>
-          </a:p>
-        </p:txBody>
-      </p:sp>
-      <p:sp>
-        <p:nvSpPr>
-          <p:cNvPr id="7" name="Rounded Rectangle 6"/>
-          <p:cNvSpPr/>
-          <p:nvPr/>
-        </p:nvSpPr>
-        <p:spPr>
-          <a:xfrm>
-            <a:off x="9052560" y="1554480"/>
-            <a:ext cx="2377440" cy="1508760"/>
-          </a:xfrm>
-          <a:prstGeom prst="roundRect">
-            <a:avLst>
-              <a:gd name="adj" fmla="val 6000"/>
-            </a:avLst>
-          </a:prstGeom>
-          <a:solidFill>
-            <a:srgbClr val="EFF4FB"/>
-          </a:solidFill>
-          <a:ln w="15875">
-            <a:solidFill>
-              <a:srgbClr val="C7DAF2"/>
-            </a:solidFill>
-          </a:ln>
-          <a:effectLst/>
-        </p:spPr>
-        <p:style>
-          <a:lnRef idx="1">
-            <a:schemeClr val="accent1"/>
-          </a:lnRef>
-          <a:fillRef idx="3">
-            <a:schemeClr val="accent1"/>
-          </a:fillRef>
-          <a:effectRef idx="2">
-            <a:schemeClr val="accent1"/>
-          </a:effectRef>
-          <a:fontRef idx="minor">
-            <a:schemeClr val="lt1"/>
-          </a:fontRef>
-        </p:style>
-        <p:txBody>
-          <a:bodyPr rtlCol="0" anchor="ctr"/>
-          <a:lstStyle/>
-          <a:p>
-            <a:pPr algn="ctr"/>
-          </a:p>
-        </p:txBody>
-      </p:sp>
-      <p:sp>
-        <p:nvSpPr>
-          <p:cNvPr id="8" name="TextBox 7"/>
-          <p:cNvSpPr txBox="1"/>
-          <p:nvPr/>
-        </p:nvSpPr>
-        <p:spPr>
-          <a:xfrm>
-            <a:off x="9052560" y="1719072"/>
-            <a:ext cx="2377440" cy="1188720"/>
-          </a:xfrm>
-          <a:prstGeom prst="rect">
-            <a:avLst/>
-          </a:prstGeom>
-          <a:noFill/>
-        </p:spPr>
-        <p:txBody>
-          <a:bodyPr wrap="square">
-            <a:spAutoFit/>
-          </a:bodyPr>
-          <a:lstStyle/>
-          <a:p>
-            <a:pPr algn="ctr"/>
-            <a:r>
-              <a:rPr sz="3800" b="1">
-                <a:solidFill>
-                  <a:srgbClr val="1A73E8"/>
-                </a:solidFill>
-              </a:rPr>
-              <a:t>13 ms</a:t>
-            </a:r>
-          </a:p>
-          <a:p>
-            <a:pPr algn="ctr"/>
-            <a:r>
-              <a:rPr sz="1300">
-                <a:solidFill>
-                  <a:srgbClr val="5B6672"/>
-                </a:solidFill>
-              </a:rPr>
-              <a:t>median latency per email (CPU)</a:t>
-            </a:r>
-          </a:p>
-        </p:txBody>
-      </p:sp>
-      <p:sp>
-        <p:nvSpPr>
-          <p:cNvPr id="9" name="Rounded Rectangle 8"/>
-          <p:cNvSpPr/>
-          <p:nvPr/>
-        </p:nvSpPr>
-        <p:spPr>
-          <a:xfrm>
-            <a:off x="6400800" y="3383280"/>
-            <a:ext cx="2377440" cy="1508760"/>
-          </a:xfrm>
-          <a:prstGeom prst="roundRect">
-            <a:avLst>
-              <a:gd name="adj" fmla="val 6000"/>
-            </a:avLst>
-          </a:prstGeom>
-          <a:solidFill>
-            <a:srgbClr val="EFF4FB"/>
-          </a:solidFill>
-          <a:ln w="15875">
-            <a:solidFill>
-              <a:srgbClr val="C7DAF2"/>
-            </a:solidFill>
-          </a:ln>
-          <a:effectLst/>
-        </p:spPr>
-        <p:style>
-          <a:lnRef idx="1">
-            <a:schemeClr val="accent1"/>
-          </a:lnRef>
-          <a:fillRef idx="3">
-            <a:schemeClr val="accent1"/>
-          </a:fillRef>
-          <a:effectRef idx="2">
-            <a:schemeClr val="accent1"/>
-          </a:effectRef>
-          <a:fontRef idx="minor">
-            <a:schemeClr val="lt1"/>
-          </a:fontRef>
-        </p:style>
-        <p:txBody>
-          <a:bodyPr rtlCol="0" anchor="ctr"/>
-          <a:lstStyle/>
-          <a:p>
-            <a:pPr algn="ctr"/>
-          </a:p>
-        </p:txBody>
-      </p:sp>
-      <p:sp>
-        <p:nvSpPr>
-          <p:cNvPr id="10" name="TextBox 9"/>
-          <p:cNvSpPr txBox="1"/>
-          <p:nvPr/>
-        </p:nvSpPr>
-        <p:spPr>
-          <a:xfrm>
-            <a:off x="6400800" y="3547872"/>
-            <a:ext cx="2377440" cy="1188720"/>
-          </a:xfrm>
-          <a:prstGeom prst="rect">
-            <a:avLst/>
-          </a:prstGeom>
-          <a:noFill/>
-        </p:spPr>
-        <p:txBody>
-          <a:bodyPr wrap="square">
-            <a:spAutoFit/>
-          </a:bodyPr>
-          <a:lstStyle/>
-          <a:p>
-            <a:pPr algn="ctr"/>
-            <a:r>
-              <a:rPr sz="3800" b="1">
-                <a:solidFill>
-                  <a:srgbClr val="1A73E8"/>
-                </a:solidFill>
-              </a:rPr>
-              <a:t>13</a:t>
-            </a:r>
-          </a:p>
-          <a:p>
-            <a:pPr algn="ctr"/>
-            <a:r>
-              <a:rPr sz="1300">
-                <a:solidFill>
-                  <a:srgbClr val="5B6672"/>
-                </a:solidFill>
-              </a:rPr>
-              <a:t>structural metadata signals</a:t>
-            </a:r>
-          </a:p>
-        </p:txBody>
-      </p:sp>
-      <p:sp>
-        <p:nvSpPr>
-          <p:cNvPr id="11" name="Rounded Rectangle 10"/>
-          <p:cNvSpPr/>
-          <p:nvPr/>
-        </p:nvSpPr>
-        <p:spPr>
-          <a:xfrm>
-            <a:off x="9052560" y="3383280"/>
-            <a:ext cx="2377440" cy="1508760"/>
-          </a:xfrm>
-          <a:prstGeom prst="roundRect">
-            <a:avLst>
-              <a:gd name="adj" fmla="val 6000"/>
-            </a:avLst>
-          </a:prstGeom>
-          <a:solidFill>
-            <a:srgbClr val="EFF4FB"/>
-          </a:solidFill>
-          <a:ln w="15875">
-            <a:solidFill>
-              <a:srgbClr val="C7DAF2"/>
-            </a:solidFill>
-          </a:ln>
-          <a:effectLst/>
-        </p:spPr>
-        <p:style>
-          <a:lnRef idx="1">
-            <a:schemeClr val="accent1"/>
-          </a:lnRef>
-          <a:fillRef idx="3">
-            <a:schemeClr val="accent1"/>
-          </a:fillRef>
-          <a:effectRef idx="2">
-            <a:schemeClr val="accent1"/>
-          </a:effectRef>
-          <a:fontRef idx="minor">
-            <a:schemeClr val="lt1"/>
-          </a:fontRef>
-        </p:style>
-        <p:txBody>
-          <a:bodyPr rtlCol="0" anchor="ctr"/>
-          <a:lstStyle/>
-          <a:p>
-            <a:pPr algn="ctr"/>
-          </a:p>
-        </p:txBody>
-      </p:sp>
-      <p:sp>
-        <p:nvSpPr>
-          <p:cNvPr id="12" name="TextBox 11"/>
-          <p:cNvSpPr txBox="1"/>
-          <p:nvPr/>
-        </p:nvSpPr>
-        <p:spPr>
-          <a:xfrm>
-            <a:off x="9052560" y="3547872"/>
-            <a:ext cx="2377440" cy="1188720"/>
-          </a:xfrm>
-          <a:prstGeom prst="rect">
-            <a:avLst/>
-          </a:prstGeom>
-          <a:noFill/>
-        </p:spPr>
-        <p:txBody>
-          <a:bodyPr wrap="square">
-            <a:spAutoFit/>
-          </a:bodyPr>
-          <a:lstStyle/>
-          <a:p>
-            <a:pPr algn="ctr"/>
-            <a:r>
-              <a:rPr sz="3800" b="1">
-                <a:solidFill>
-                  <a:srgbClr val="1A73E8"/>
-                </a:solidFill>
-              </a:rPr>
-              <a:t>75 / 25</a:t>
-            </a:r>
-          </a:p>
-          <a:p>
-            <a:pPr algn="ctr"/>
-            <a:r>
-              <a:rPr sz="1300">
-                <a:solidFill>
-                  <a:srgbClr val="5B6672"/>
-                </a:solidFill>
-              </a:rPr>
-              <a:t>stratified train / test split</a:t>
-            </a:r>
-          </a:p>
-        </p:txBody>
-      </p:sp>
-    </p:spTree>
-  </p:cSld>
-  <p:clrMapOvr>
-    <a:masterClrMapping/>
-  </p:clrMapOvr>
-</p:sld>
-</file>
-
-<file path=ppt/slides/slide8.xml><?xml version="1.0" encoding="utf-8"?>
-<p:sld xmlns:a="http://schemas.openxmlformats.org/drawingml/2006/main" xmlns:p="http://schemas.openxmlformats.org/presentationml/2006/main" xmlns:r="http://schemas.openxmlformats.org/officeDocument/2006/relationships">
-  <p:cSld>
-    <p:spTree>
-      <p:nvGrpSpPr>
-        <p:cNvPr id="1" name=""/>
-        <p:cNvGrpSpPr/>
-        <p:nvPr/>
-      </p:nvGrpSpPr>
-      <p:grpSpPr/>
-      <p:sp>
-        <p:nvSpPr>
-          <p:cNvPr id="2" name="Rectangle 1"/>
-          <p:cNvSpPr/>
-          <p:nvPr/>
-        </p:nvSpPr>
-        <p:spPr>
-          <a:xfrm>
-            <a:off x="0" y="0"/>
-            <a:ext cx="12191695" cy="960120"/>
-          </a:xfrm>
-          <a:prstGeom prst="rect">
-            <a:avLst/>
-          </a:prstGeom>
-          <a:solidFill>
-            <a:srgbClr val="0B2B5B"/>
-          </a:solidFill>
-          <a:ln>
-            <a:noFill/>
-          </a:ln>
-          <a:effectLst/>
-        </p:spPr>
-        <p:style>
-          <a:lnRef idx="1">
-            <a:schemeClr val="accent1"/>
-          </a:lnRef>
-          <a:fillRef idx="3">
-            <a:schemeClr val="accent1"/>
-          </a:fillRef>
-          <a:effectRef idx="2">
-            <a:schemeClr val="accent1"/>
-          </a:effectRef>
-          <a:fontRef idx="minor">
-            <a:schemeClr val="lt1"/>
-          </a:fontRef>
-        </p:style>
-        <p:txBody>
-          <a:bodyPr rtlCol="0" anchor="ctr"/>
-          <a:lstStyle/>
-          <a:p>
-            <a:pPr algn="ctr"/>
-          </a:p>
-        </p:txBody>
-      </p:sp>
-      <p:sp>
-        <p:nvSpPr>
-          <p:cNvPr id="3" name="TextBox 2"/>
-          <p:cNvSpPr txBox="1"/>
-          <p:nvPr/>
-        </p:nvSpPr>
-        <p:spPr>
-          <a:xfrm>
-            <a:off x="502920" y="128016"/>
-            <a:ext cx="11155680" cy="731520"/>
-          </a:xfrm>
-          <a:prstGeom prst="rect">
-            <a:avLst/>
-          </a:prstGeom>
-          <a:noFill/>
-        </p:spPr>
-        <p:txBody>
-          <a:bodyPr wrap="square">
-            <a:spAutoFit/>
-          </a:bodyPr>
-          <a:lstStyle/>
-          <a:p>
-            <a:pPr>
-              <a:spcAft>
-                <a:spcPts val="0"/>
-              </a:spcAft>
-            </a:pPr>
-            <a:r>
-              <a:rPr sz="3000" b="1">
-                <a:solidFill>
-                  <a:srgbClr val="FFFFFF"/>
-                </a:solidFill>
-                <a:latin typeface="Calibri"/>
-              </a:rPr>
-              <a:t>Results — Held-out Test Split</a:t>
-            </a:r>
-          </a:p>
-          <a:p>
-            <a:pPr>
-              <a:spcAft>
-                <a:spcPts val="0"/>
-              </a:spcAft>
-            </a:pPr>
-            <a:r>
-              <a:rPr sz="1300" b="0">
-                <a:solidFill>
-                  <a:srgbClr val="C7DAF2"/>
-                </a:solidFill>
-                <a:latin typeface="Calibri"/>
-              </a:rPr>
-              <a:t>n = 20,288 emails never seen in training</a:t>
-            </a:r>
-          </a:p>
-        </p:txBody>
-      </p:sp>
-      <p:sp>
-        <p:nvSpPr>
-          <p:cNvPr id="4" name="Rounded Rectangle 3"/>
-          <p:cNvSpPr/>
-          <p:nvPr/>
-        </p:nvSpPr>
-        <p:spPr>
-          <a:xfrm>
-            <a:off x="640080" y="1325880"/>
-            <a:ext cx="2651760" cy="1508760"/>
-          </a:xfrm>
-          <a:prstGeom prst="roundRect">
-            <a:avLst>
-              <a:gd name="adj" fmla="val 6000"/>
-            </a:avLst>
-          </a:prstGeom>
-          <a:solidFill>
-            <a:srgbClr val="EFF4FB"/>
-          </a:solidFill>
-          <a:ln w="15875">
-            <a:solidFill>
-              <a:srgbClr val="C7DAF2"/>
-            </a:solidFill>
-          </a:ln>
-          <a:effectLst/>
-        </p:spPr>
-        <p:style>
-          <a:lnRef idx="1">
-            <a:schemeClr val="accent1"/>
-          </a:lnRef>
-          <a:fillRef idx="3">
-            <a:schemeClr val="accent1"/>
-          </a:fillRef>
-          <a:effectRef idx="2">
-            <a:schemeClr val="accent1"/>
-          </a:effectRef>
-          <a:fontRef idx="minor">
-            <a:schemeClr val="lt1"/>
-          </a:fontRef>
-        </p:style>
-        <p:txBody>
-          <a:bodyPr rtlCol="0" anchor="ctr"/>
-          <a:lstStyle/>
-          <a:p>
-            <a:pPr algn="ctr"/>
-          </a:p>
-        </p:txBody>
-      </p:sp>
-      <p:sp>
-        <p:nvSpPr>
-          <p:cNvPr id="5" name="TextBox 4"/>
-          <p:cNvSpPr txBox="1"/>
-          <p:nvPr/>
-        </p:nvSpPr>
-        <p:spPr>
-          <a:xfrm>
-            <a:off x="640080" y="1490472"/>
-            <a:ext cx="2651760" cy="1188720"/>
-          </a:xfrm>
-          <a:prstGeom prst="rect">
-            <a:avLst/>
-          </a:prstGeom>
-          <a:noFill/>
-        </p:spPr>
-        <p:txBody>
-          <a:bodyPr wrap="square">
-            <a:spAutoFit/>
-          </a:bodyPr>
-          <a:lstStyle/>
-          <a:p>
-            <a:pPr algn="ctr"/>
-            <a:r>
-              <a:rPr sz="3800" b="1">
-                <a:solidFill>
-                  <a:srgbClr val="1A73E8"/>
-                </a:solidFill>
-              </a:rPr>
-              <a:t>99.2%</a:t>
-            </a:r>
-          </a:p>
-          <a:p>
-            <a:pPr algn="ctr"/>
-            <a:r>
-              <a:rPr sz="1300">
-                <a:solidFill>
-                  <a:srgbClr val="5B6672"/>
-                </a:solidFill>
-              </a:rPr>
-              <a:t>Accuracy</a:t>
-            </a:r>
-          </a:p>
-        </p:txBody>
-      </p:sp>
-      <p:sp>
-        <p:nvSpPr>
-          <p:cNvPr id="6" name="Rounded Rectangle 5"/>
-          <p:cNvSpPr/>
-          <p:nvPr/>
-        </p:nvSpPr>
-        <p:spPr>
-          <a:xfrm>
-            <a:off x="3429000" y="1325880"/>
-            <a:ext cx="2651760" cy="1508760"/>
-          </a:xfrm>
-          <a:prstGeom prst="roundRect">
-            <a:avLst>
-              <a:gd name="adj" fmla="val 6000"/>
-            </a:avLst>
-          </a:prstGeom>
-          <a:solidFill>
-            <a:srgbClr val="EFF4FB"/>
-          </a:solidFill>
-          <a:ln w="15875">
-            <a:solidFill>
-              <a:srgbClr val="C7DAF2"/>
-            </a:solidFill>
-          </a:ln>
-          <a:effectLst/>
-        </p:spPr>
-        <p:style>
-          <a:lnRef idx="1">
-            <a:schemeClr val="accent1"/>
-          </a:lnRef>
-          <a:fillRef idx="3">
-            <a:schemeClr val="accent1"/>
-          </a:fillRef>
-          <a:effectRef idx="2">
-            <a:schemeClr val="accent1"/>
-          </a:effectRef>
-          <a:fontRef idx="minor">
-            <a:schemeClr val="lt1"/>
-          </a:fontRef>
-        </p:style>
-        <p:txBody>
-          <a:bodyPr rtlCol="0" anchor="ctr"/>
-          <a:lstStyle/>
-          <a:p>
-            <a:pPr algn="ctr"/>
-          </a:p>
-        </p:txBody>
-      </p:sp>
-      <p:sp>
-        <p:nvSpPr>
-          <p:cNvPr id="7" name="TextBox 6"/>
-          <p:cNvSpPr txBox="1"/>
-          <p:nvPr/>
-        </p:nvSpPr>
-        <p:spPr>
-          <a:xfrm>
-            <a:off x="3429000" y="1490472"/>
-            <a:ext cx="2651760" cy="1188720"/>
-          </a:xfrm>
-          <a:prstGeom prst="rect">
-            <a:avLst/>
-          </a:prstGeom>
-          <a:noFill/>
-        </p:spPr>
-        <p:txBody>
-          <a:bodyPr wrap="square">
-            <a:spAutoFit/>
-          </a:bodyPr>
-          <a:lstStyle/>
-          <a:p>
-            <a:pPr algn="ctr"/>
-            <a:r>
-              <a:rPr sz="3800" b="1">
-                <a:solidFill>
-                  <a:srgbClr val="1A73E8"/>
-                </a:solidFill>
-              </a:rPr>
-              <a:t>0.991</a:t>
-            </a:r>
-          </a:p>
-          <a:p>
-            <a:pPr algn="ctr"/>
-            <a:r>
-              <a:rPr sz="1300">
-                <a:solidFill>
-                  <a:srgbClr val="5B6672"/>
-                </a:solidFill>
-              </a:rPr>
-              <a:t>Precision</a:t>
-            </a:r>
-          </a:p>
-        </p:txBody>
-      </p:sp>
-      <p:sp>
-        <p:nvSpPr>
-          <p:cNvPr id="8" name="Rounded Rectangle 7"/>
-          <p:cNvSpPr/>
-          <p:nvPr/>
-        </p:nvSpPr>
-        <p:spPr>
-          <a:xfrm>
-            <a:off x="6217920" y="1325880"/>
-            <a:ext cx="2651760" cy="1508760"/>
-          </a:xfrm>
-          <a:prstGeom prst="roundRect">
-            <a:avLst>
-              <a:gd name="adj" fmla="val 6000"/>
-            </a:avLst>
-          </a:prstGeom>
-          <a:solidFill>
-            <a:srgbClr val="EFF4FB"/>
-          </a:solidFill>
-          <a:ln w="15875">
-            <a:solidFill>
-              <a:srgbClr val="C7DAF2"/>
-            </a:solidFill>
-          </a:ln>
-          <a:effectLst/>
-        </p:spPr>
-        <p:style>
-          <a:lnRef idx="1">
-            <a:schemeClr val="accent1"/>
-          </a:lnRef>
-          <a:fillRef idx="3">
-            <a:schemeClr val="accent1"/>
-          </a:fillRef>
-          <a:effectRef idx="2">
-            <a:schemeClr val="accent1"/>
-          </a:effectRef>
-          <a:fontRef idx="minor">
-            <a:schemeClr val="lt1"/>
-          </a:fontRef>
-        </p:style>
-        <p:txBody>
-          <a:bodyPr rtlCol="0" anchor="ctr"/>
-          <a:lstStyle/>
-          <a:p>
-            <a:pPr algn="ctr"/>
-          </a:p>
-        </p:txBody>
-      </p:sp>
-      <p:sp>
-        <p:nvSpPr>
-          <p:cNvPr id="9" name="TextBox 8"/>
-          <p:cNvSpPr txBox="1"/>
-          <p:nvPr/>
-        </p:nvSpPr>
-        <p:spPr>
-          <a:xfrm>
-            <a:off x="6217920" y="1490472"/>
-            <a:ext cx="2651760" cy="1188720"/>
-          </a:xfrm>
-          <a:prstGeom prst="rect">
-            <a:avLst/>
-          </a:prstGeom>
-          <a:noFill/>
-        </p:spPr>
-        <p:txBody>
-          <a:bodyPr wrap="square">
-            <a:spAutoFit/>
-          </a:bodyPr>
-          <a:lstStyle/>
-          <a:p>
-            <a:pPr algn="ctr"/>
-            <a:r>
-              <a:rPr sz="3800" b="1">
-                <a:solidFill>
-                  <a:srgbClr val="1A73E8"/>
-                </a:solidFill>
-              </a:rPr>
-              <a:t>0.992</a:t>
-            </a:r>
-          </a:p>
-          <a:p>
-            <a:pPr algn="ctr"/>
-            <a:r>
-              <a:rPr sz="1300">
-                <a:solidFill>
-                  <a:srgbClr val="5B6672"/>
-                </a:solidFill>
-              </a:rPr>
-              <a:t>Recall</a:t>
-            </a:r>
-          </a:p>
-        </p:txBody>
-      </p:sp>
-      <p:sp>
-        <p:nvSpPr>
-          <p:cNvPr id="10" name="Rounded Rectangle 9"/>
-          <p:cNvSpPr/>
-          <p:nvPr/>
-        </p:nvSpPr>
-        <p:spPr>
-          <a:xfrm>
-            <a:off x="9006840" y="1325880"/>
-            <a:ext cx="2651760" cy="1508760"/>
-          </a:xfrm>
-          <a:prstGeom prst="roundRect">
-            <a:avLst>
-              <a:gd name="adj" fmla="val 6000"/>
-            </a:avLst>
-          </a:prstGeom>
-          <a:solidFill>
-            <a:srgbClr val="EFF4FB"/>
-          </a:solidFill>
-          <a:ln w="15875">
-            <a:solidFill>
-              <a:srgbClr val="C7DAF2"/>
-            </a:solidFill>
-          </a:ln>
-          <a:effectLst/>
-        </p:spPr>
-        <p:style>
-          <a:lnRef idx="1">
-            <a:schemeClr val="accent1"/>
-          </a:lnRef>
-          <a:fillRef idx="3">
-            <a:schemeClr val="accent1"/>
-          </a:fillRef>
-          <a:effectRef idx="2">
-            <a:schemeClr val="accent1"/>
-          </a:effectRef>
-          <a:fontRef idx="minor">
-            <a:schemeClr val="lt1"/>
-          </a:fontRef>
-        </p:style>
-        <p:txBody>
-          <a:bodyPr rtlCol="0" anchor="ctr"/>
-          <a:lstStyle/>
-          <a:p>
-            <a:pPr algn="ctr"/>
-          </a:p>
-        </p:txBody>
-      </p:sp>
-      <p:sp>
-        <p:nvSpPr>
-          <p:cNvPr id="11" name="TextBox 10"/>
-          <p:cNvSpPr txBox="1"/>
-          <p:nvPr/>
-        </p:nvSpPr>
-        <p:spPr>
-          <a:xfrm>
-            <a:off x="9006840" y="1490472"/>
-            <a:ext cx="2651760" cy="1188720"/>
-          </a:xfrm>
-          <a:prstGeom prst="rect">
-            <a:avLst/>
-          </a:prstGeom>
-          <a:noFill/>
-        </p:spPr>
-        <p:txBody>
-          <a:bodyPr wrap="square">
-            <a:spAutoFit/>
-          </a:bodyPr>
-          <a:lstStyle/>
-          <a:p>
-            <a:pPr algn="ctr"/>
-            <a:r>
-              <a:rPr sz="3800" b="1">
-                <a:solidFill>
-                  <a:srgbClr val="1A73E8"/>
-                </a:solidFill>
-              </a:rPr>
-              <a:t>1.000</a:t>
-            </a:r>
-          </a:p>
-          <a:p>
-            <a:pPr algn="ctr"/>
-            <a:r>
-              <a:rPr sz="1300">
-                <a:solidFill>
-                  <a:srgbClr val="5B6672"/>
-                </a:solidFill>
-              </a:rPr>
-              <a:t>ROC-AUC</a:t>
-            </a:r>
-          </a:p>
-        </p:txBody>
-      </p:sp>
-      <p:graphicFrame>
-        <p:nvGraphicFramePr>
-          <p:cNvPr id="12" name="Table 11"/>
-          <p:cNvGraphicFramePr>
-            <a:graphicFrameLocks noGrp="1"/>
-          </p:cNvGraphicFramePr>
-          <p:nvPr/>
-        </p:nvGraphicFramePr>
-        <p:xfrm>
-          <a:off x="731520" y="3200400"/>
-          <a:ext cx="5669280" cy="1920240"/>
-        </p:xfrm>
-        <a:graphic>
-          <a:graphicData uri="http://schemas.openxmlformats.org/drawingml/2006/table">
-            <a:tbl>
-              <a:tblPr firstRow="1" bandRow="1">
-                <a:tableStyleId>{5C22544A-7EE6-4342-B048-85BDC9FD1C3A}</a:tableStyleId>
-              </a:tblPr>
-              <a:tblGrid>
-                <a:gridCol w="3840480"/>
-                <a:gridCol w="1828800"/>
-              </a:tblGrid>
-              <a:tr h="384048">
-                <a:tc>
-                  <a:txBody>
-                    <a:bodyPr/>
-                    <a:lstStyle/>
-                    <a:p>
-                      <a:pPr algn="l"/>
-                      <a:r>
-                        <a:rPr sz="1400" b="1">
-                          <a:solidFill>
-                            <a:srgbClr val="FFFFFF"/>
-                          </a:solidFill>
-                          <a:latin typeface="Calibri"/>
-                        </a:rPr>
-                        <a:t>Confusion matrix</a:t>
-                      </a:r>
-                    </a:p>
-                  </a:txBody>
-                  <a:tcPr/>
-                </a:tc>
-                <a:tc>
-                  <a:txBody>
-                    <a:bodyPr/>
-                    <a:lstStyle/>
-                    <a:p>
-                      <a:pPr algn="ctr"/>
-                      <a:r>
-                        <a:rPr sz="1400" b="1">
-                          <a:solidFill>
-                            <a:srgbClr val="FFFFFF"/>
-                          </a:solidFill>
-                          <a:latin typeface="Calibri"/>
-                        </a:rPr>
-                        <a:t>Count</a:t>
-                      </a:r>
-                    </a:p>
-                  </a:txBody>
-                  <a:tcPr/>
-                </a:tc>
-              </a:tr>
-              <a:tr h="384048">
-                <a:tc>
-                  <a:txBody>
-                    <a:bodyPr/>
-                    <a:lstStyle/>
-                    <a:p>
-                      <a:pPr algn="l"/>
-                      <a:r>
-                        <a:rPr sz="1400" b="0">
-                          <a:solidFill>
-                            <a:srgbClr val="1F2A37"/>
-                          </a:solidFill>
-                          <a:latin typeface="Calibri"/>
-                        </a:rPr>
-                        <a:t>True positives (phishing caught)</a:t>
-                      </a:r>
-                    </a:p>
-                  </a:txBody>
-                  <a:tcPr/>
-                </a:tc>
-                <a:tc>
-                  <a:txBody>
-                    <a:bodyPr/>
-                    <a:lstStyle/>
-                    <a:p>
-                      <a:pPr algn="ctr"/>
-                      <a:r>
-                        <a:rPr sz="1400" b="0">
-                          <a:solidFill>
-                            <a:srgbClr val="1F2A37"/>
-                          </a:solidFill>
-                          <a:latin typeface="Calibri"/>
-                        </a:rPr>
-                        <a:t>10,399</a:t>
-                      </a:r>
-                    </a:p>
-                  </a:txBody>
-                  <a:tcPr/>
-                </a:tc>
-              </a:tr>
-              <a:tr h="384048">
-                <a:tc>
-                  <a:txBody>
-                    <a:bodyPr/>
-                    <a:lstStyle/>
-                    <a:p>
-                      <a:pPr algn="l"/>
-                      <a:r>
-                        <a:rPr sz="1400" b="0">
-                          <a:solidFill>
-                            <a:srgbClr val="1F2A37"/>
-                          </a:solidFill>
-                          <a:latin typeface="Calibri"/>
-                        </a:rPr>
-                        <a:t>False negatives (phishing missed)</a:t>
-                      </a:r>
-                    </a:p>
-                  </a:txBody>
-                  <a:tcPr/>
-                </a:tc>
-                <a:tc>
-                  <a:txBody>
-                    <a:bodyPr/>
-                    <a:lstStyle/>
-                    <a:p>
-                      <a:pPr algn="ctr"/>
-                      <a:r>
-                        <a:rPr sz="1400" b="0">
-                          <a:solidFill>
-                            <a:srgbClr val="1F2A37"/>
-                          </a:solidFill>
-                          <a:latin typeface="Calibri"/>
-                        </a:rPr>
-                        <a:t>80</a:t>
-                      </a:r>
-                    </a:p>
-                  </a:txBody>
-                  <a:tcPr/>
-                </a:tc>
-              </a:tr>
-              <a:tr h="384048">
-                <a:tc>
-                  <a:txBody>
-                    <a:bodyPr/>
-                    <a:lstStyle/>
-                    <a:p>
-                      <a:pPr algn="l"/>
-                      <a:r>
-                        <a:rPr sz="1400" b="0">
-                          <a:solidFill>
-                            <a:srgbClr val="1F2A37"/>
-                          </a:solidFill>
-                          <a:latin typeface="Calibri"/>
-                        </a:rPr>
-                        <a:t>True negatives (legitimate passed)</a:t>
-                      </a:r>
-                    </a:p>
-                  </a:txBody>
-                  <a:tcPr/>
-                </a:tc>
-                <a:tc>
-                  <a:txBody>
-                    <a:bodyPr/>
-                    <a:lstStyle/>
-                    <a:p>
-                      <a:pPr algn="ctr"/>
-                      <a:r>
-                        <a:rPr sz="1400" b="0">
-                          <a:solidFill>
-                            <a:srgbClr val="1F2A37"/>
-                          </a:solidFill>
-                          <a:latin typeface="Calibri"/>
-                        </a:rPr>
-                        <a:t>9,719</a:t>
-                      </a:r>
-                    </a:p>
-                  </a:txBody>
-                  <a:tcPr/>
-                </a:tc>
-              </a:tr>
-              <a:tr h="384048">
-                <a:tc>
-                  <a:txBody>
-                    <a:bodyPr/>
-                    <a:lstStyle/>
-                    <a:p>
-                      <a:pPr algn="l"/>
-                      <a:r>
-                        <a:rPr sz="1400" b="0">
-                          <a:solidFill>
-                            <a:srgbClr val="1F2A37"/>
-                          </a:solidFill>
-                          <a:latin typeface="Calibri"/>
-                        </a:rPr>
-                        <a:t>False positives (legitimate flagged)</a:t>
-                      </a:r>
-                    </a:p>
-                  </a:txBody>
-                  <a:tcPr/>
-                </a:tc>
-                <a:tc>
-                  <a:txBody>
-                    <a:bodyPr/>
-                    <a:lstStyle/>
-                    <a:p>
-                      <a:pPr algn="ctr"/>
-                      <a:r>
-                        <a:rPr sz="1400" b="0">
-                          <a:solidFill>
-                            <a:srgbClr val="1F2A37"/>
-                          </a:solidFill>
-                          <a:latin typeface="Calibri"/>
-                        </a:rPr>
-                        <a:t>90</a:t>
-                      </a:r>
-                    </a:p>
-                  </a:txBody>
-                  <a:tcPr/>
-                </a:tc>
-              </a:tr>
-            </a:tbl>
-          </a:graphicData>
-        </a:graphic>
-      </p:graphicFrame>
-      <p:sp>
-        <p:nvSpPr>
-          <p:cNvPr id="13" name="Rounded Rectangle 12"/>
-          <p:cNvSpPr/>
-          <p:nvPr/>
-        </p:nvSpPr>
-        <p:spPr>
-          <a:xfrm>
-            <a:off x="6858000" y="3200400"/>
-            <a:ext cx="4572000" cy="1920240"/>
-          </a:xfrm>
-          <a:prstGeom prst="roundRect">
-            <a:avLst>
-              <a:gd name="adj" fmla="val 6000"/>
-            </a:avLst>
-          </a:prstGeom>
-          <a:solidFill>
-            <a:srgbClr val="EFF4FB"/>
-          </a:solidFill>
-          <a:ln w="15875">
-            <a:solidFill>
-              <a:srgbClr val="C7DAF2"/>
-            </a:solidFill>
-          </a:ln>
-          <a:effectLst/>
-        </p:spPr>
-        <p:style>
-          <a:lnRef idx="1">
-            <a:schemeClr val="accent1"/>
-          </a:lnRef>
-          <a:fillRef idx="3">
-            <a:schemeClr val="accent1"/>
-          </a:fillRef>
-          <a:effectRef idx="2">
-            <a:schemeClr val="accent1"/>
-          </a:effectRef>
-          <a:fontRef idx="minor">
-            <a:schemeClr val="lt1"/>
-          </a:fontRef>
-        </p:style>
-        <p:txBody>
-          <a:bodyPr rtlCol="0" anchor="ctr"/>
-          <a:lstStyle/>
-          <a:p>
-            <a:pPr algn="ctr"/>
-          </a:p>
-        </p:txBody>
-      </p:sp>
-      <p:sp>
-        <p:nvSpPr>
-          <p:cNvPr id="14" name="TextBox 13"/>
-          <p:cNvSpPr txBox="1"/>
-          <p:nvPr/>
-        </p:nvSpPr>
-        <p:spPr>
-          <a:xfrm>
-            <a:off x="7132320" y="3429000"/>
-            <a:ext cx="4023360" cy="1554480"/>
-          </a:xfrm>
-          <a:prstGeom prst="rect">
-            <a:avLst/>
-          </a:prstGeom>
-          <a:noFill/>
-        </p:spPr>
-        <p:txBody>
-          <a:bodyPr wrap="square">
-            <a:spAutoFit/>
-          </a:bodyPr>
-          <a:lstStyle/>
-          <a:p>
-            <a:pPr>
-              <a:spcAft>
-                <a:spcPts val="600"/>
-              </a:spcAft>
-            </a:pPr>
-            <a:r>
-              <a:rPr sz="2000" b="1">
-                <a:solidFill>
-                  <a:srgbClr val="0B2B5B"/>
-                </a:solidFill>
-                <a:latin typeface="Calibri"/>
-              </a:rPr>
-              <a:t>False-positive rate ≈ 0.9%</a:t>
-            </a:r>
-          </a:p>
-          <a:p>
-            <a:pPr>
-              <a:spcAft>
-                <a:spcPts val="600"/>
-              </a:spcAft>
-            </a:pPr>
-            <a:r>
-              <a:rPr sz="1400" b="0">
-                <a:solidFill>
-                  <a:srgbClr val="1F2A37"/>
-                </a:solidFill>
-                <a:latin typeface="Calibri"/>
-              </a:rPr>
-              <a:t>90 of 9,809 legitimate messages flagged.</a:t>
-            </a:r>
-          </a:p>
-          <a:p>
-            <a:pPr>
-              <a:spcAft>
-                <a:spcPts val="600"/>
-              </a:spcAft>
-            </a:pPr>
-            <a:r>
-              <a:rPr sz="1300" b="0">
-                <a:solidFill>
-                  <a:srgbClr val="5B6672"/>
-                </a:solidFill>
-                <a:latin typeface="Calibri"/>
-              </a:rPr>
-              <a:t>Blocking legitimate mail is the costlier error, so this is the operationally important figure.</a:t>
-            </a:r>
-          </a:p>
-        </p:txBody>
-      </p:sp>
-    </p:spTree>
-  </p:cSld>
-  <p:clrMapOvr>
-    <a:masterClrMapping/>
-  </p:clrMapOvr>
-</p:sld>
-</file>
-
-<file path=ppt/slides/slide9.xml><?xml version="1.0" encoding="utf-8"?>
-<p:sld xmlns:a="http://schemas.openxmlformats.org/drawingml/2006/main" xmlns:p="http://schemas.openxmlformats.org/presentationml/2006/main" xmlns:r="http://schemas.openxmlformats.org/officeDocument/2006/relationships">
-  <p:cSld>
-    <p:spTree>
-      <p:nvGrpSpPr>
-        <p:cNvPr id="1" name=""/>
-        <p:cNvGrpSpPr/>
-        <p:nvPr/>
-      </p:nvGrpSpPr>
-      <p:grpSpPr/>
-      <p:sp>
-        <p:nvSpPr>
-          <p:cNvPr id="2" name="Rectangle 1"/>
-          <p:cNvSpPr/>
-          <p:nvPr/>
-        </p:nvSpPr>
-        <p:spPr>
-          <a:xfrm>
-            <a:off x="0" y="0"/>
-            <a:ext cx="12191695" cy="960120"/>
-          </a:xfrm>
-          <a:prstGeom prst="rect">
-            <a:avLst/>
-          </a:prstGeom>
-          <a:solidFill>
-            <a:srgbClr val="0B2B5B"/>
-          </a:solidFill>
-          <a:ln>
-            <a:noFill/>
-          </a:ln>
-          <a:effectLst/>
-        </p:spPr>
-        <p:style>
-          <a:lnRef idx="1">
-            <a:schemeClr val="accent1"/>
-          </a:lnRef>
-          <a:fillRef idx="3">
-            <a:schemeClr val="accent1"/>
-          </a:fillRef>
-          <a:effectRef idx="2">
-            <a:schemeClr val="accent1"/>
-          </a:effectRef>
-          <a:fontRef idx="minor">
-            <a:schemeClr val="lt1"/>
-          </a:fontRef>
-        </p:style>
-        <p:txBody>
-          <a:bodyPr rtlCol="0" anchor="ctr"/>
-          <a:lstStyle/>
-          <a:p>
-            <a:pPr algn="ctr"/>
-          </a:p>
-        </p:txBody>
-      </p:sp>
-      <p:sp>
-        <p:nvSpPr>
-          <p:cNvPr id="3" name="TextBox 2"/>
-          <p:cNvSpPr txBox="1"/>
-          <p:nvPr/>
-        </p:nvSpPr>
-        <p:spPr>
-          <a:xfrm>
-            <a:off x="502920" y="128016"/>
-            <a:ext cx="11155680" cy="731520"/>
-          </a:xfrm>
-          <a:prstGeom prst="rect">
-            <a:avLst/>
-          </a:prstGeom>
-          <a:noFill/>
-        </p:spPr>
-        <p:txBody>
-          <a:bodyPr wrap="square">
-            <a:spAutoFit/>
-          </a:bodyPr>
-          <a:lstStyle/>
-          <a:p>
-            <a:pPr>
-              <a:spcAft>
-                <a:spcPts val="0"/>
-              </a:spcAft>
-            </a:pPr>
-            <a:r>
-              <a:rPr sz="3000" b="1">
-                <a:solidFill>
-                  <a:srgbClr val="FFFFFF"/>
-                </a:solidFill>
-                <a:latin typeface="Calibri"/>
-              </a:rPr>
-              <a:t>Classifier and Feature-Group Comparison</a:t>
-            </a:r>
-          </a:p>
-          <a:p>
-            <a:pPr>
-              <a:spcAft>
-                <a:spcPts val="0"/>
-              </a:spcAft>
-            </a:pPr>
-            <a:r>
-              <a:rPr sz="1300" b="0">
-                <a:solidFill>
-                  <a:srgbClr val="C7DAF2"/>
-                </a:solidFill>
-                <a:latin typeface="Calibri"/>
-              </a:rPr>
-              <a:t>Same split, same preprocessing, 0.5 threshold</a:t>
+              <a:t>Same split and preprocessing  •  comparison at the default 0.5 threshold</a:t>
             </a:r>
           </a:p>
         </p:txBody>
@@ -10155,7 +5901,4713 @@
                 </a:solidFill>
                 <a:latin typeface="Calibri"/>
               </a:rPr>
-              <a:t>•  SVM led by 0.001 (within noise); logistic regression deployed for calibrated probability, tunable threshold and explainable signals</a:t>
+              <a:t>•  SVM led by 0.001 on this split; logistic regression deployed for calibrated probability, tunable threshold and explainable signals</a:t>
+            </a:r>
+          </a:p>
+        </p:txBody>
+      </p:sp>
+    </p:spTree>
+  </p:cSld>
+  <p:clrMapOvr>
+    <a:masterClrMapping/>
+  </p:clrMapOvr>
+</p:sld>
+</file>
+
+<file path=ppt/slides/slide11.xml><?xml version="1.0" encoding="utf-8"?>
+<p:sld xmlns:a="http://schemas.openxmlformats.org/drawingml/2006/main" xmlns:p="http://schemas.openxmlformats.org/presentationml/2006/main" xmlns:r="http://schemas.openxmlformats.org/officeDocument/2006/relationships">
+  <p:cSld>
+    <p:spTree>
+      <p:nvGrpSpPr>
+        <p:cNvPr id="1" name=""/>
+        <p:cNvGrpSpPr/>
+        <p:nvPr/>
+      </p:nvGrpSpPr>
+      <p:grpSpPr/>
+      <p:sp>
+        <p:nvSpPr>
+          <p:cNvPr id="2" name="Rectangle 1"/>
+          <p:cNvSpPr/>
+          <p:nvPr/>
+        </p:nvSpPr>
+        <p:spPr>
+          <a:xfrm>
+            <a:off x="0" y="0"/>
+            <a:ext cx="12191695" cy="960120"/>
+          </a:xfrm>
+          <a:prstGeom prst="rect">
+            <a:avLst/>
+          </a:prstGeom>
+          <a:solidFill>
+            <a:srgbClr val="0B2B5B"/>
+          </a:solidFill>
+          <a:ln>
+            <a:noFill/>
+          </a:ln>
+          <a:effectLst/>
+        </p:spPr>
+        <p:style>
+          <a:lnRef idx="1">
+            <a:schemeClr val="accent1"/>
+          </a:lnRef>
+          <a:fillRef idx="3">
+            <a:schemeClr val="accent1"/>
+          </a:fillRef>
+          <a:effectRef idx="2">
+            <a:schemeClr val="accent1"/>
+          </a:effectRef>
+          <a:fontRef idx="minor">
+            <a:schemeClr val="lt1"/>
+          </a:fontRef>
+        </p:style>
+        <p:txBody>
+          <a:bodyPr rtlCol="0" anchor="ctr"/>
+          <a:lstStyle/>
+          <a:p>
+            <a:pPr algn="ctr"/>
+          </a:p>
+        </p:txBody>
+      </p:sp>
+      <p:sp>
+        <p:nvSpPr>
+          <p:cNvPr id="3" name="TextBox 2"/>
+          <p:cNvSpPr txBox="1"/>
+          <p:nvPr/>
+        </p:nvSpPr>
+        <p:spPr>
+          <a:xfrm>
+            <a:off x="502920" y="128016"/>
+            <a:ext cx="11155680" cy="731520"/>
+          </a:xfrm>
+          <a:prstGeom prst="rect">
+            <a:avLst/>
+          </a:prstGeom>
+          <a:noFill/>
+        </p:spPr>
+        <p:txBody>
+          <a:bodyPr wrap="square">
+            <a:spAutoFit/>
+          </a:bodyPr>
+          <a:lstStyle/>
+          <a:p>
+            <a:pPr>
+              <a:spcAft>
+                <a:spcPts val="0"/>
+              </a:spcAft>
+            </a:pPr>
+            <a:r>
+              <a:rPr sz="3000" b="1">
+                <a:solidFill>
+                  <a:srgbClr val="FFFFFF"/>
+                </a:solidFill>
+                <a:latin typeface="Calibri"/>
+              </a:rPr>
+              <a:t>Generalisation to AI-Generated Phishing</a:t>
+            </a:r>
+          </a:p>
+          <a:p>
+            <a:pPr>
+              <a:spcAft>
+                <a:spcPts val="0"/>
+              </a:spcAft>
+            </a:pPr>
+            <a:r>
+              <a:rPr sz="1300" b="0">
+                <a:solidFill>
+                  <a:srgbClr val="C7DAF2"/>
+                </a:solidFill>
+                <a:latin typeface="Calibri"/>
+              </a:rPr>
+              <a:t>4,986 emails from GPT-4.1, DeepSeek 3.2 and LLaMA 3.3 — never trained on</a:t>
+            </a:r>
+          </a:p>
+        </p:txBody>
+      </p:sp>
+      <p:sp>
+        <p:nvSpPr>
+          <p:cNvPr id="4" name="Rounded Rectangle 3"/>
+          <p:cNvSpPr/>
+          <p:nvPr/>
+        </p:nvSpPr>
+        <p:spPr>
+          <a:xfrm>
+            <a:off x="731520" y="1463040"/>
+            <a:ext cx="3108960" cy="1508760"/>
+          </a:xfrm>
+          <a:prstGeom prst="roundRect">
+            <a:avLst>
+              <a:gd name="adj" fmla="val 6000"/>
+            </a:avLst>
+          </a:prstGeom>
+          <a:solidFill>
+            <a:srgbClr val="EFF4FB"/>
+          </a:solidFill>
+          <a:ln w="15875">
+            <a:solidFill>
+              <a:srgbClr val="C7DAF2"/>
+            </a:solidFill>
+          </a:ln>
+          <a:effectLst/>
+        </p:spPr>
+        <p:style>
+          <a:lnRef idx="1">
+            <a:schemeClr val="accent1"/>
+          </a:lnRef>
+          <a:fillRef idx="3">
+            <a:schemeClr val="accent1"/>
+          </a:fillRef>
+          <a:effectRef idx="2">
+            <a:schemeClr val="accent1"/>
+          </a:effectRef>
+          <a:fontRef idx="minor">
+            <a:schemeClr val="lt1"/>
+          </a:fontRef>
+        </p:style>
+        <p:txBody>
+          <a:bodyPr rtlCol="0" anchor="ctr"/>
+          <a:lstStyle/>
+          <a:p>
+            <a:pPr algn="ctr"/>
+          </a:p>
+        </p:txBody>
+      </p:sp>
+      <p:sp>
+        <p:nvSpPr>
+          <p:cNvPr id="5" name="TextBox 4"/>
+          <p:cNvSpPr txBox="1"/>
+          <p:nvPr/>
+        </p:nvSpPr>
+        <p:spPr>
+          <a:xfrm>
+            <a:off x="731520" y="1627632"/>
+            <a:ext cx="3108960" cy="1188720"/>
+          </a:xfrm>
+          <a:prstGeom prst="rect">
+            <a:avLst/>
+          </a:prstGeom>
+          <a:noFill/>
+        </p:spPr>
+        <p:txBody>
+          <a:bodyPr wrap="square">
+            <a:spAutoFit/>
+          </a:bodyPr>
+          <a:lstStyle/>
+          <a:p>
+            <a:pPr algn="ctr"/>
+            <a:r>
+              <a:rPr sz="3800" b="1">
+                <a:solidFill>
+                  <a:srgbClr val="1A73E8"/>
+                </a:solidFill>
+              </a:rPr>
+              <a:t>92%</a:t>
+            </a:r>
+          </a:p>
+          <a:p>
+            <a:pPr algn="ctr"/>
+            <a:r>
+              <a:rPr sz="1300">
+                <a:solidFill>
+                  <a:srgbClr val="5B6672"/>
+                </a:solidFill>
+              </a:rPr>
+              <a:t>caught at a recall-focused threshold (4,565 / 4,986)</a:t>
+            </a:r>
+          </a:p>
+        </p:txBody>
+      </p:sp>
+      <p:sp>
+        <p:nvSpPr>
+          <p:cNvPr id="6" name="Rounded Rectangle 5"/>
+          <p:cNvSpPr/>
+          <p:nvPr/>
+        </p:nvSpPr>
+        <p:spPr>
+          <a:xfrm>
+            <a:off x="4069080" y="1463040"/>
+            <a:ext cx="3108960" cy="1508760"/>
+          </a:xfrm>
+          <a:prstGeom prst="roundRect">
+            <a:avLst>
+              <a:gd name="adj" fmla="val 6000"/>
+            </a:avLst>
+          </a:prstGeom>
+          <a:solidFill>
+            <a:srgbClr val="EFF4FB"/>
+          </a:solidFill>
+          <a:ln w="15875">
+            <a:solidFill>
+              <a:srgbClr val="C7DAF2"/>
+            </a:solidFill>
+          </a:ln>
+          <a:effectLst/>
+        </p:spPr>
+        <p:style>
+          <a:lnRef idx="1">
+            <a:schemeClr val="accent1"/>
+          </a:lnRef>
+          <a:fillRef idx="3">
+            <a:schemeClr val="accent1"/>
+          </a:fillRef>
+          <a:effectRef idx="2">
+            <a:schemeClr val="accent1"/>
+          </a:effectRef>
+          <a:fontRef idx="minor">
+            <a:schemeClr val="lt1"/>
+          </a:fontRef>
+        </p:style>
+        <p:txBody>
+          <a:bodyPr rtlCol="0" anchor="ctr"/>
+          <a:lstStyle/>
+          <a:p>
+            <a:pPr algn="ctr"/>
+          </a:p>
+        </p:txBody>
+      </p:sp>
+      <p:sp>
+        <p:nvSpPr>
+          <p:cNvPr id="7" name="TextBox 6"/>
+          <p:cNvSpPr txBox="1"/>
+          <p:nvPr/>
+        </p:nvSpPr>
+        <p:spPr>
+          <a:xfrm>
+            <a:off x="4069080" y="1627632"/>
+            <a:ext cx="3108960" cy="1188720"/>
+          </a:xfrm>
+          <a:prstGeom prst="rect">
+            <a:avLst/>
+          </a:prstGeom>
+          <a:noFill/>
+        </p:spPr>
+        <p:txBody>
+          <a:bodyPr wrap="square">
+            <a:spAutoFit/>
+          </a:bodyPr>
+          <a:lstStyle/>
+          <a:p>
+            <a:pPr algn="ctr"/>
+            <a:r>
+              <a:rPr sz="3800" b="1">
+                <a:solidFill>
+                  <a:srgbClr val="1A73E8"/>
+                </a:solidFill>
+              </a:rPr>
+              <a:t>84%</a:t>
+            </a:r>
+          </a:p>
+          <a:p>
+            <a:pPr algn="ctr"/>
+            <a:r>
+              <a:rPr sz="1300">
+                <a:solidFill>
+                  <a:srgbClr val="5B6672"/>
+                </a:solidFill>
+              </a:rPr>
+              <a:t>caught at the deployed 0.55 threshold</a:t>
+            </a:r>
+          </a:p>
+        </p:txBody>
+      </p:sp>
+      <p:sp>
+        <p:nvSpPr>
+          <p:cNvPr id="8" name="Rounded Rectangle 7"/>
+          <p:cNvSpPr/>
+          <p:nvPr/>
+        </p:nvSpPr>
+        <p:spPr>
+          <a:xfrm>
+            <a:off x="7406640" y="1463040"/>
+            <a:ext cx="3108960" cy="1508760"/>
+          </a:xfrm>
+          <a:prstGeom prst="roundRect">
+            <a:avLst>
+              <a:gd name="adj" fmla="val 6000"/>
+            </a:avLst>
+          </a:prstGeom>
+          <a:solidFill>
+            <a:srgbClr val="EFF4FB"/>
+          </a:solidFill>
+          <a:ln w="15875">
+            <a:solidFill>
+              <a:srgbClr val="C7DAF2"/>
+            </a:solidFill>
+          </a:ln>
+          <a:effectLst/>
+        </p:spPr>
+        <p:style>
+          <a:lnRef idx="1">
+            <a:schemeClr val="accent1"/>
+          </a:lnRef>
+          <a:fillRef idx="3">
+            <a:schemeClr val="accent1"/>
+          </a:fillRef>
+          <a:effectRef idx="2">
+            <a:schemeClr val="accent1"/>
+          </a:effectRef>
+          <a:fontRef idx="minor">
+            <a:schemeClr val="lt1"/>
+          </a:fontRef>
+        </p:style>
+        <p:txBody>
+          <a:bodyPr rtlCol="0" anchor="ctr"/>
+          <a:lstStyle/>
+          <a:p>
+            <a:pPr algn="ctr"/>
+          </a:p>
+        </p:txBody>
+      </p:sp>
+      <p:sp>
+        <p:nvSpPr>
+          <p:cNvPr id="9" name="TextBox 8"/>
+          <p:cNvSpPr txBox="1"/>
+          <p:nvPr/>
+        </p:nvSpPr>
+        <p:spPr>
+          <a:xfrm>
+            <a:off x="7406640" y="1627632"/>
+            <a:ext cx="3108960" cy="1188720"/>
+          </a:xfrm>
+          <a:prstGeom prst="rect">
+            <a:avLst/>
+          </a:prstGeom>
+          <a:noFill/>
+        </p:spPr>
+        <p:txBody>
+          <a:bodyPr wrap="square">
+            <a:spAutoFit/>
+          </a:bodyPr>
+          <a:lstStyle/>
+          <a:p>
+            <a:pPr algn="ctr"/>
+            <a:r>
+              <a:rPr sz="3800" b="1">
+                <a:solidFill>
+                  <a:srgbClr val="1A73E8"/>
+                </a:solidFill>
+              </a:rPr>
+              <a:t>0</a:t>
+            </a:r>
+          </a:p>
+          <a:p>
+            <a:pPr algn="ctr"/>
+            <a:r>
+              <a:rPr sz="1300">
+                <a:solidFill>
+                  <a:srgbClr val="5B6672"/>
+                </a:solidFill>
+              </a:rPr>
+              <a:t>AI-generated emails used in training</a:t>
+            </a:r>
+          </a:p>
+        </p:txBody>
+      </p:sp>
+      <p:sp>
+        <p:nvSpPr>
+          <p:cNvPr id="10" name="Rounded Rectangle 9"/>
+          <p:cNvSpPr/>
+          <p:nvPr/>
+        </p:nvSpPr>
+        <p:spPr>
+          <a:xfrm>
+            <a:off x="2377440" y="3291840"/>
+            <a:ext cx="7406640" cy="2926080"/>
+          </a:xfrm>
+          <a:prstGeom prst="roundRect">
+            <a:avLst>
+              <a:gd name="adj" fmla="val 6000"/>
+            </a:avLst>
+          </a:prstGeom>
+          <a:solidFill>
+            <a:srgbClr val="F7F9FC"/>
+          </a:solidFill>
+          <a:ln w="15875">
+            <a:solidFill>
+              <a:srgbClr val="B6C6DA"/>
+            </a:solidFill>
+          </a:ln>
+          <a:effectLst/>
+        </p:spPr>
+        <p:style>
+          <a:lnRef idx="1">
+            <a:schemeClr val="accent1"/>
+          </a:lnRef>
+          <a:fillRef idx="3">
+            <a:schemeClr val="accent1"/>
+          </a:fillRef>
+          <a:effectRef idx="2">
+            <a:schemeClr val="accent1"/>
+          </a:effectRef>
+          <a:fontRef idx="minor">
+            <a:schemeClr val="lt1"/>
+          </a:fontRef>
+        </p:style>
+        <p:txBody>
+          <a:bodyPr rtlCol="0" anchor="ctr"/>
+          <a:lstStyle/>
+          <a:p>
+            <a:pPr algn="ctr"/>
+          </a:p>
+        </p:txBody>
+      </p:sp>
+      <p:sp>
+        <p:nvSpPr>
+          <p:cNvPr id="11" name="TextBox 10"/>
+          <p:cNvSpPr txBox="1"/>
+          <p:nvPr/>
+        </p:nvSpPr>
+        <p:spPr>
+          <a:xfrm>
+            <a:off x="2377440" y="4480560"/>
+            <a:ext cx="7406640" cy="548640"/>
+          </a:xfrm>
+          <a:prstGeom prst="rect">
+            <a:avLst/>
+          </a:prstGeom>
+          <a:noFill/>
+        </p:spPr>
+        <p:txBody>
+          <a:bodyPr wrap="none">
+            <a:spAutoFit/>
+          </a:bodyPr>
+          <a:lstStyle/>
+          <a:p>
+            <a:pPr algn="ctr"/>
+            <a:r>
+              <a:rPr sz="1400" i="1">
+                <a:solidFill>
+                  <a:srgbClr val="5B6672"/>
+                </a:solidFill>
+              </a:rPr>
+              <a:t>[ INSERT Figure 6.3 — catch rate versus decision threshold ]</a:t>
+            </a:r>
+          </a:p>
+        </p:txBody>
+      </p:sp>
+    </p:spTree>
+  </p:cSld>
+  <p:clrMapOvr>
+    <a:masterClrMapping/>
+  </p:clrMapOvr>
+</p:sld>
+</file>
+
+<file path=ppt/slides/slide12.xml><?xml version="1.0" encoding="utf-8"?>
+<p:sld xmlns:a="http://schemas.openxmlformats.org/drawingml/2006/main" xmlns:p="http://schemas.openxmlformats.org/presentationml/2006/main" xmlns:r="http://schemas.openxmlformats.org/officeDocument/2006/relationships">
+  <p:cSld>
+    <p:spTree>
+      <p:nvGrpSpPr>
+        <p:cNvPr id="1" name=""/>
+        <p:cNvGrpSpPr/>
+        <p:nvPr/>
+      </p:nvGrpSpPr>
+      <p:grpSpPr/>
+      <p:sp>
+        <p:nvSpPr>
+          <p:cNvPr id="2" name="Rectangle 1"/>
+          <p:cNvSpPr/>
+          <p:nvPr/>
+        </p:nvSpPr>
+        <p:spPr>
+          <a:xfrm>
+            <a:off x="0" y="0"/>
+            <a:ext cx="12191695" cy="960120"/>
+          </a:xfrm>
+          <a:prstGeom prst="rect">
+            <a:avLst/>
+          </a:prstGeom>
+          <a:solidFill>
+            <a:srgbClr val="0B2B5B"/>
+          </a:solidFill>
+          <a:ln>
+            <a:noFill/>
+          </a:ln>
+          <a:effectLst/>
+        </p:spPr>
+        <p:style>
+          <a:lnRef idx="1">
+            <a:schemeClr val="accent1"/>
+          </a:lnRef>
+          <a:fillRef idx="3">
+            <a:schemeClr val="accent1"/>
+          </a:fillRef>
+          <a:effectRef idx="2">
+            <a:schemeClr val="accent1"/>
+          </a:effectRef>
+          <a:fontRef idx="minor">
+            <a:schemeClr val="lt1"/>
+          </a:fontRef>
+        </p:style>
+        <p:txBody>
+          <a:bodyPr rtlCol="0" anchor="ctr"/>
+          <a:lstStyle/>
+          <a:p>
+            <a:pPr algn="ctr"/>
+          </a:p>
+        </p:txBody>
+      </p:sp>
+      <p:sp>
+        <p:nvSpPr>
+          <p:cNvPr id="3" name="TextBox 2"/>
+          <p:cNvSpPr txBox="1"/>
+          <p:nvPr/>
+        </p:nvSpPr>
+        <p:spPr>
+          <a:xfrm>
+            <a:off x="502920" y="128016"/>
+            <a:ext cx="11155680" cy="731520"/>
+          </a:xfrm>
+          <a:prstGeom prst="rect">
+            <a:avLst/>
+          </a:prstGeom>
+          <a:noFill/>
+        </p:spPr>
+        <p:txBody>
+          <a:bodyPr wrap="square">
+            <a:spAutoFit/>
+          </a:bodyPr>
+          <a:lstStyle/>
+          <a:p>
+            <a:pPr>
+              <a:spcAft>
+                <a:spcPts val="0"/>
+              </a:spcAft>
+            </a:pPr>
+            <a:r>
+              <a:rPr sz="3000" b="1">
+                <a:solidFill>
+                  <a:srgbClr val="FFFFFF"/>
+                </a:solidFill>
+                <a:latin typeface="Calibri"/>
+              </a:rPr>
+              <a:t>Adaptive Retraining</a:t>
+            </a:r>
+          </a:p>
+          <a:p>
+            <a:pPr>
+              <a:spcAft>
+                <a:spcPts val="0"/>
+              </a:spcAft>
+            </a:pPr>
+            <a:r>
+              <a:rPr sz="1300" b="0">
+                <a:solidFill>
+                  <a:srgbClr val="C7DAF2"/>
+                </a:solidFill>
+                <a:latin typeface="Calibri"/>
+              </a:rPr>
+              <a:t>One reviewed retraining cycle on a disjoint feedback batch</a:t>
+            </a:r>
+          </a:p>
+        </p:txBody>
+      </p:sp>
+      <p:graphicFrame>
+        <p:nvGraphicFramePr>
+          <p:cNvPr id="4" name="Table 3"/>
+          <p:cNvGraphicFramePr>
+            <a:graphicFrameLocks noGrp="1"/>
+          </p:cNvGraphicFramePr>
+          <p:nvPr/>
+        </p:nvGraphicFramePr>
+        <p:xfrm>
+          <a:off x="731520" y="1463040"/>
+          <a:ext cx="6583680" cy="1920240"/>
+        </p:xfrm>
+        <a:graphic>
+          <a:graphicData uri="http://schemas.openxmlformats.org/drawingml/2006/table">
+            <a:tbl>
+              <a:tblPr firstRow="1" bandRow="1">
+                <a:tableStyleId>{5C22544A-7EE6-4342-B048-85BDC9FD1C3A}</a:tableStyleId>
+              </a:tblPr>
+              <a:tblGrid>
+                <a:gridCol w="3474720"/>
+                <a:gridCol w="1554480"/>
+                <a:gridCol w="1554480"/>
+              </a:tblGrid>
+              <a:tr h="384048">
+                <a:tc>
+                  <a:txBody>
+                    <a:bodyPr/>
+                    <a:lstStyle/>
+                    <a:p>
+                      <a:pPr algn="l"/>
+                      <a:r>
+                        <a:rPr sz="1500" b="1">
+                          <a:solidFill>
+                            <a:srgbClr val="FFFFFF"/>
+                          </a:solidFill>
+                          <a:latin typeface="Calibri"/>
+                        </a:rPr>
+                        <a:t>Measure</a:t>
+                      </a:r>
+                    </a:p>
+                  </a:txBody>
+                  <a:tcPr/>
+                </a:tc>
+                <a:tc>
+                  <a:txBody>
+                    <a:bodyPr/>
+                    <a:lstStyle/>
+                    <a:p>
+                      <a:pPr algn="ctr"/>
+                      <a:r>
+                        <a:rPr sz="1500" b="1">
+                          <a:solidFill>
+                            <a:srgbClr val="FFFFFF"/>
+                          </a:solidFill>
+                          <a:latin typeface="Calibri"/>
+                        </a:rPr>
+                        <a:t>Before</a:t>
+                      </a:r>
+                    </a:p>
+                  </a:txBody>
+                  <a:tcPr/>
+                </a:tc>
+                <a:tc>
+                  <a:txBody>
+                    <a:bodyPr/>
+                    <a:lstStyle/>
+                    <a:p>
+                      <a:pPr algn="ctr"/>
+                      <a:r>
+                        <a:rPr sz="1500" b="1">
+                          <a:solidFill>
+                            <a:srgbClr val="FFFFFF"/>
+                          </a:solidFill>
+                          <a:latin typeface="Calibri"/>
+                        </a:rPr>
+                        <a:t>After</a:t>
+                      </a:r>
+                    </a:p>
+                  </a:txBody>
+                  <a:tcPr/>
+                </a:tc>
+              </a:tr>
+              <a:tr h="384048">
+                <a:tc>
+                  <a:txBody>
+                    <a:bodyPr/>
+                    <a:lstStyle/>
+                    <a:p>
+                      <a:pPr algn="l"/>
+                      <a:r>
+                        <a:rPr sz="1500" b="0">
+                          <a:solidFill>
+                            <a:srgbClr val="1F2A37"/>
+                          </a:solidFill>
+                          <a:latin typeface="Calibri"/>
+                        </a:rPr>
+                        <a:t>ROC-AUC (modern-threat set)</a:t>
+                      </a:r>
+                    </a:p>
+                  </a:txBody>
+                  <a:tcPr/>
+                </a:tc>
+                <a:tc>
+                  <a:txBody>
+                    <a:bodyPr/>
+                    <a:lstStyle/>
+                    <a:p>
+                      <a:pPr algn="ctr"/>
+                      <a:r>
+                        <a:rPr sz="1500" b="0">
+                          <a:solidFill>
+                            <a:srgbClr val="1F2A37"/>
+                          </a:solidFill>
+                          <a:latin typeface="Calibri"/>
+                        </a:rPr>
+                        <a:t>0.810</a:t>
+                      </a:r>
+                    </a:p>
+                  </a:txBody>
+                  <a:tcPr/>
+                </a:tc>
+                <a:tc>
+                  <a:txBody>
+                    <a:bodyPr/>
+                    <a:lstStyle/>
+                    <a:p>
+                      <a:pPr algn="ctr"/>
+                      <a:r>
+                        <a:rPr sz="1500" b="0">
+                          <a:solidFill>
+                            <a:srgbClr val="1F2A37"/>
+                          </a:solidFill>
+                          <a:latin typeface="Calibri"/>
+                        </a:rPr>
+                        <a:t>0.945</a:t>
+                      </a:r>
+                    </a:p>
+                  </a:txBody>
+                  <a:tcPr/>
+                </a:tc>
+              </a:tr>
+              <a:tr h="384048">
+                <a:tc>
+                  <a:txBody>
+                    <a:bodyPr/>
+                    <a:lstStyle/>
+                    <a:p>
+                      <a:pPr algn="l"/>
+                      <a:r>
+                        <a:rPr sz="1500" b="0">
+                          <a:solidFill>
+                            <a:srgbClr val="1F2A37"/>
+                          </a:solidFill>
+                          <a:latin typeface="Calibri"/>
+                        </a:rPr>
+                        <a:t>Phishing recall at 0.55</a:t>
+                      </a:r>
+                    </a:p>
+                  </a:txBody>
+                  <a:tcPr/>
+                </a:tc>
+                <a:tc>
+                  <a:txBody>
+                    <a:bodyPr/>
+                    <a:lstStyle/>
+                    <a:p>
+                      <a:pPr algn="ctr"/>
+                      <a:r>
+                        <a:rPr sz="1500" b="0">
+                          <a:solidFill>
+                            <a:srgbClr val="1F2A37"/>
+                          </a:solidFill>
+                          <a:latin typeface="Calibri"/>
+                        </a:rPr>
+                        <a:t>95%</a:t>
+                      </a:r>
+                    </a:p>
+                  </a:txBody>
+                  <a:tcPr/>
+                </a:tc>
+                <a:tc>
+                  <a:txBody>
+                    <a:bodyPr/>
+                    <a:lstStyle/>
+                    <a:p>
+                      <a:pPr algn="ctr"/>
+                      <a:r>
+                        <a:rPr sz="1500" b="0">
+                          <a:solidFill>
+                            <a:srgbClr val="1F2A37"/>
+                          </a:solidFill>
+                          <a:latin typeface="Calibri"/>
+                        </a:rPr>
+                        <a:t>95%</a:t>
+                      </a:r>
+                    </a:p>
+                  </a:txBody>
+                  <a:tcPr/>
+                </a:tc>
+              </a:tr>
+              <a:tr h="384048">
+                <a:tc>
+                  <a:txBody>
+                    <a:bodyPr/>
+                    <a:lstStyle/>
+                    <a:p>
+                      <a:pPr algn="l"/>
+                      <a:r>
+                        <a:rPr sz="1500" b="0">
+                          <a:solidFill>
+                            <a:srgbClr val="1F2A37"/>
+                          </a:solidFill>
+                          <a:latin typeface="Calibri"/>
+                        </a:rPr>
+                        <a:t>Main-corpus accuracy</a:t>
+                      </a:r>
+                    </a:p>
+                  </a:txBody>
+                  <a:tcPr/>
+                </a:tc>
+                <a:tc>
+                  <a:txBody>
+                    <a:bodyPr/>
+                    <a:lstStyle/>
+                    <a:p>
+                      <a:pPr algn="ctr"/>
+                      <a:r>
+                        <a:rPr sz="1500" b="0">
+                          <a:solidFill>
+                            <a:srgbClr val="1F2A37"/>
+                          </a:solidFill>
+                          <a:latin typeface="Calibri"/>
+                        </a:rPr>
+                        <a:t>0.991</a:t>
+                      </a:r>
+                    </a:p>
+                  </a:txBody>
+                  <a:tcPr/>
+                </a:tc>
+                <a:tc>
+                  <a:txBody>
+                    <a:bodyPr/>
+                    <a:lstStyle/>
+                    <a:p>
+                      <a:pPr algn="ctr"/>
+                      <a:r>
+                        <a:rPr sz="1500" b="0">
+                          <a:solidFill>
+                            <a:srgbClr val="1F2A37"/>
+                          </a:solidFill>
+                          <a:latin typeface="Calibri"/>
+                        </a:rPr>
+                        <a:t>0.991</a:t>
+                      </a:r>
+                    </a:p>
+                  </a:txBody>
+                  <a:tcPr/>
+                </a:tc>
+              </a:tr>
+              <a:tr h="384048">
+                <a:tc>
+                  <a:txBody>
+                    <a:bodyPr/>
+                    <a:lstStyle/>
+                    <a:p>
+                      <a:pPr algn="l"/>
+                      <a:r>
+                        <a:rPr sz="1500" b="0">
+                          <a:solidFill>
+                            <a:srgbClr val="1F2A37"/>
+                          </a:solidFill>
+                          <a:latin typeface="Calibri"/>
+                        </a:rPr>
+                        <a:t>Demo campaign caught</a:t>
+                      </a:r>
+                    </a:p>
+                  </a:txBody>
+                  <a:tcPr/>
+                </a:tc>
+                <a:tc>
+                  <a:txBody>
+                    <a:bodyPr/>
+                    <a:lstStyle/>
+                    <a:p>
+                      <a:pPr algn="ctr"/>
+                      <a:r>
+                        <a:rPr sz="1500" b="0">
+                          <a:solidFill>
+                            <a:srgbClr val="1F2A37"/>
+                          </a:solidFill>
+                          <a:latin typeface="Calibri"/>
+                        </a:rPr>
+                        <a:t>0 / 6</a:t>
+                      </a:r>
+                    </a:p>
+                  </a:txBody>
+                  <a:tcPr/>
+                </a:tc>
+                <a:tc>
+                  <a:txBody>
+                    <a:bodyPr/>
+                    <a:lstStyle/>
+                    <a:p>
+                      <a:pPr algn="ctr"/>
+                      <a:r>
+                        <a:rPr sz="1500" b="0">
+                          <a:solidFill>
+                            <a:srgbClr val="1F2A37"/>
+                          </a:solidFill>
+                          <a:latin typeface="Calibri"/>
+                        </a:rPr>
+                        <a:t>5 / 6</a:t>
+                      </a:r>
+                    </a:p>
+                  </a:txBody>
+                  <a:tcPr/>
+                </a:tc>
+              </a:tr>
+            </a:tbl>
+          </a:graphicData>
+        </a:graphic>
+      </p:graphicFrame>
+      <p:sp>
+        <p:nvSpPr>
+          <p:cNvPr id="5" name="Rounded Rectangle 4"/>
+          <p:cNvSpPr/>
+          <p:nvPr/>
+        </p:nvSpPr>
+        <p:spPr>
+          <a:xfrm>
+            <a:off x="7680960" y="1463040"/>
+            <a:ext cx="3749039" cy="3108960"/>
+          </a:xfrm>
+          <a:prstGeom prst="roundRect">
+            <a:avLst>
+              <a:gd name="adj" fmla="val 6000"/>
+            </a:avLst>
+          </a:prstGeom>
+          <a:solidFill>
+            <a:srgbClr val="FFF7E6"/>
+          </a:solidFill>
+          <a:ln w="15875">
+            <a:solidFill>
+              <a:srgbClr val="E8C46A"/>
+            </a:solidFill>
+          </a:ln>
+          <a:effectLst/>
+        </p:spPr>
+        <p:style>
+          <a:lnRef idx="1">
+            <a:schemeClr val="accent1"/>
+          </a:lnRef>
+          <a:fillRef idx="3">
+            <a:schemeClr val="accent1"/>
+          </a:fillRef>
+          <a:effectRef idx="2">
+            <a:schemeClr val="accent1"/>
+          </a:effectRef>
+          <a:fontRef idx="minor">
+            <a:schemeClr val="lt1"/>
+          </a:fontRef>
+        </p:style>
+        <p:txBody>
+          <a:bodyPr rtlCol="0" anchor="ctr"/>
+          <a:lstStyle/>
+          <a:p>
+            <a:pPr algn="ctr"/>
+          </a:p>
+        </p:txBody>
+      </p:sp>
+      <p:sp>
+        <p:nvSpPr>
+          <p:cNvPr id="6" name="TextBox 5"/>
+          <p:cNvSpPr txBox="1"/>
+          <p:nvPr/>
+        </p:nvSpPr>
+        <p:spPr>
+          <a:xfrm>
+            <a:off x="7955279" y="1691640"/>
+            <a:ext cx="3200400" cy="2743200"/>
+          </a:xfrm>
+          <a:prstGeom prst="rect">
+            <a:avLst/>
+          </a:prstGeom>
+          <a:noFill/>
+        </p:spPr>
+        <p:txBody>
+          <a:bodyPr wrap="square">
+            <a:spAutoFit/>
+          </a:bodyPr>
+          <a:lstStyle/>
+          <a:p>
+            <a:pPr>
+              <a:spcAft>
+                <a:spcPts val="600"/>
+              </a:spcAft>
+            </a:pPr>
+            <a:r>
+              <a:rPr sz="1700" b="1">
+                <a:solidFill>
+                  <a:srgbClr val="0B2B5B"/>
+                </a:solidFill>
+                <a:latin typeface="Calibri"/>
+              </a:rPr>
+              <a:t>Scope of the claim</a:t>
+            </a:r>
+          </a:p>
+          <a:p>
+            <a:pPr>
+              <a:spcAft>
+                <a:spcPts val="600"/>
+              </a:spcAft>
+            </a:pPr>
+            <a:r>
+              <a:rPr sz="1300" b="0">
+                <a:solidFill>
+                  <a:srgbClr val="1F2A37"/>
+                </a:solidFill>
+                <a:latin typeface="Calibri"/>
+              </a:rPr>
+              <a:t>16 of the 30 test messages share a threat family with the feedback batch (TF-IDF cosine ≥ 0.70). No message appears in both sets.</a:t>
+            </a:r>
+          </a:p>
+          <a:p>
+            <a:pPr>
+              <a:spcAft>
+                <a:spcPts val="600"/>
+              </a:spcAft>
+            </a:pPr>
+            <a:r>
+              <a:rPr sz="1300" b="1">
+                <a:solidFill>
+                  <a:srgbClr val="1F2A37"/>
+                </a:solidFill>
+                <a:latin typeface="Calibri"/>
+              </a:rPr>
+              <a:t>Read as adaptation to a represented threat family, not a general gain.</a:t>
+            </a:r>
+          </a:p>
+        </p:txBody>
+      </p:sp>
+      <p:sp>
+        <p:nvSpPr>
+          <p:cNvPr id="7" name="TextBox 6"/>
+          <p:cNvSpPr txBox="1"/>
+          <p:nvPr/>
+        </p:nvSpPr>
+        <p:spPr>
+          <a:xfrm>
+            <a:off x="822960" y="4846320"/>
+            <a:ext cx="10515600" cy="1463040"/>
+          </a:xfrm>
+          <a:prstGeom prst="rect">
+            <a:avLst/>
+          </a:prstGeom>
+          <a:noFill/>
+        </p:spPr>
+        <p:txBody>
+          <a:bodyPr wrap="square">
+            <a:spAutoFit/>
+          </a:bodyPr>
+          <a:lstStyle/>
+          <a:p>
+            <a:pPr>
+              <a:spcAft>
+                <a:spcPts val="1400"/>
+              </a:spcAft>
+            </a:pPr>
+            <a:r>
+              <a:rPr sz="1700">
+                <a:solidFill>
+                  <a:srgbClr val="1F2A37"/>
+                </a:solidFill>
+                <a:latin typeface="Calibri"/>
+              </a:rPr>
+              <a:t>•  Validation gate: a candidate model replaces the deployed one only if ranking quality on the held-out split is not reduced</a:t>
+            </a:r>
+          </a:p>
+        </p:txBody>
+      </p:sp>
+    </p:spTree>
+  </p:cSld>
+  <p:clrMapOvr>
+    <a:masterClrMapping/>
+  </p:clrMapOvr>
+</p:sld>
+</file>
+
+<file path=ppt/slides/slide13.xml><?xml version="1.0" encoding="utf-8"?>
+<p:sld xmlns:a="http://schemas.openxmlformats.org/drawingml/2006/main" xmlns:p="http://schemas.openxmlformats.org/presentationml/2006/main" xmlns:r="http://schemas.openxmlformats.org/officeDocument/2006/relationships">
+  <p:cSld>
+    <p:spTree>
+      <p:nvGrpSpPr>
+        <p:cNvPr id="1" name=""/>
+        <p:cNvGrpSpPr/>
+        <p:nvPr/>
+      </p:nvGrpSpPr>
+      <p:grpSpPr/>
+      <p:sp>
+        <p:nvSpPr>
+          <p:cNvPr id="2" name="Rectangle 1"/>
+          <p:cNvSpPr/>
+          <p:nvPr/>
+        </p:nvSpPr>
+        <p:spPr>
+          <a:xfrm>
+            <a:off x="0" y="0"/>
+            <a:ext cx="12191695" cy="960120"/>
+          </a:xfrm>
+          <a:prstGeom prst="rect">
+            <a:avLst/>
+          </a:prstGeom>
+          <a:solidFill>
+            <a:srgbClr val="0B2B5B"/>
+          </a:solidFill>
+          <a:ln>
+            <a:noFill/>
+          </a:ln>
+          <a:effectLst/>
+        </p:spPr>
+        <p:style>
+          <a:lnRef idx="1">
+            <a:schemeClr val="accent1"/>
+          </a:lnRef>
+          <a:fillRef idx="3">
+            <a:schemeClr val="accent1"/>
+          </a:fillRef>
+          <a:effectRef idx="2">
+            <a:schemeClr val="accent1"/>
+          </a:effectRef>
+          <a:fontRef idx="minor">
+            <a:schemeClr val="lt1"/>
+          </a:fontRef>
+        </p:style>
+        <p:txBody>
+          <a:bodyPr rtlCol="0" anchor="ctr"/>
+          <a:lstStyle/>
+          <a:p>
+            <a:pPr algn="ctr"/>
+          </a:p>
+        </p:txBody>
+      </p:sp>
+      <p:sp>
+        <p:nvSpPr>
+          <p:cNvPr id="3" name="TextBox 2"/>
+          <p:cNvSpPr txBox="1"/>
+          <p:nvPr/>
+        </p:nvSpPr>
+        <p:spPr>
+          <a:xfrm>
+            <a:off x="502920" y="128016"/>
+            <a:ext cx="11155680" cy="731520"/>
+          </a:xfrm>
+          <a:prstGeom prst="rect">
+            <a:avLst/>
+          </a:prstGeom>
+          <a:noFill/>
+        </p:spPr>
+        <p:txBody>
+          <a:bodyPr wrap="square">
+            <a:spAutoFit/>
+          </a:bodyPr>
+          <a:lstStyle/>
+          <a:p>
+            <a:pPr>
+              <a:spcAft>
+                <a:spcPts val="0"/>
+              </a:spcAft>
+            </a:pPr>
+            <a:r>
+              <a:rPr sz="3000" b="1">
+                <a:solidFill>
+                  <a:srgbClr val="FFFFFF"/>
+                </a:solidFill>
+                <a:latin typeface="Calibri"/>
+              </a:rPr>
+              <a:t>Conclusion, Limitations and Future Work</a:t>
+            </a:r>
+          </a:p>
+        </p:txBody>
+      </p:sp>
+      <p:sp>
+        <p:nvSpPr>
+          <p:cNvPr id="4" name="TextBox 3"/>
+          <p:cNvSpPr txBox="1"/>
+          <p:nvPr/>
+        </p:nvSpPr>
+        <p:spPr>
+          <a:xfrm>
+            <a:off x="731520" y="1371600"/>
+            <a:ext cx="5303520" cy="2743200"/>
+          </a:xfrm>
+          <a:prstGeom prst="rect">
+            <a:avLst/>
+          </a:prstGeom>
+          <a:noFill/>
+        </p:spPr>
+        <p:txBody>
+          <a:bodyPr wrap="square">
+            <a:spAutoFit/>
+          </a:bodyPr>
+          <a:lstStyle/>
+          <a:p>
+            <a:pPr>
+              <a:spcAft>
+                <a:spcPts val="1400"/>
+              </a:spcAft>
+            </a:pPr>
+            <a:r>
+              <a:rPr sz="1800">
+                <a:solidFill>
+                  <a:srgbClr val="1F2A37"/>
+                </a:solidFill>
+                <a:latin typeface="Calibri"/>
+              </a:rPr>
+              <a:t>•  All four objectives achieved</a:t>
+            </a:r>
+          </a:p>
+          <a:p>
+            <a:pPr>
+              <a:spcAft>
+                <a:spcPts val="1400"/>
+              </a:spcAft>
+            </a:pPr>
+            <a:r>
+              <a:rPr sz="1800">
+                <a:solidFill>
+                  <a:srgbClr val="1F2A37"/>
+                </a:solidFill>
+                <a:latin typeface="Calibri"/>
+              </a:rPr>
+              <a:t>•  99.2% accuracy, 0.9% FPR, 13 ms on CPU</a:t>
+            </a:r>
+          </a:p>
+          <a:p>
+            <a:pPr>
+              <a:spcAft>
+                <a:spcPts val="1400"/>
+              </a:spcAft>
+            </a:pPr>
+            <a:r>
+              <a:rPr sz="1800">
+                <a:solidFill>
+                  <a:srgbClr val="1F2A37"/>
+                </a:solidFill>
+                <a:latin typeface="Calibri"/>
+              </a:rPr>
+              <a:t>•  92% on unseen LLM-generated phishing</a:t>
+            </a:r>
+          </a:p>
+          <a:p>
+            <a:pPr>
+              <a:spcAft>
+                <a:spcPts val="1400"/>
+              </a:spcAft>
+            </a:pPr>
+            <a:r>
+              <a:rPr sz="1800">
+                <a:solidFill>
+                  <a:srgbClr val="1F2A37"/>
+                </a:solidFill>
+                <a:latin typeface="Calibri"/>
+              </a:rPr>
+              <a:t>•  Measurable adaptation from reviewed feedback</a:t>
+            </a:r>
+          </a:p>
+        </p:txBody>
+      </p:sp>
+      <p:sp>
+        <p:nvSpPr>
+          <p:cNvPr id="5" name="Rounded Rectangle 4"/>
+          <p:cNvSpPr/>
+          <p:nvPr/>
+        </p:nvSpPr>
+        <p:spPr>
+          <a:xfrm>
+            <a:off x="6309360" y="1325880"/>
+            <a:ext cx="5120640" cy="3017520"/>
+          </a:xfrm>
+          <a:prstGeom prst="roundRect">
+            <a:avLst>
+              <a:gd name="adj" fmla="val 6000"/>
+            </a:avLst>
+          </a:prstGeom>
+          <a:solidFill>
+            <a:srgbClr val="EFF4FB"/>
+          </a:solidFill>
+          <a:ln w="15875">
+            <a:solidFill>
+              <a:srgbClr val="C7DAF2"/>
+            </a:solidFill>
+          </a:ln>
+          <a:effectLst/>
+        </p:spPr>
+        <p:style>
+          <a:lnRef idx="1">
+            <a:schemeClr val="accent1"/>
+          </a:lnRef>
+          <a:fillRef idx="3">
+            <a:schemeClr val="accent1"/>
+          </a:fillRef>
+          <a:effectRef idx="2">
+            <a:schemeClr val="accent1"/>
+          </a:effectRef>
+          <a:fontRef idx="minor">
+            <a:schemeClr val="lt1"/>
+          </a:fontRef>
+        </p:style>
+        <p:txBody>
+          <a:bodyPr rtlCol="0" anchor="ctr"/>
+          <a:lstStyle/>
+          <a:p>
+            <a:pPr algn="ctr"/>
+          </a:p>
+        </p:txBody>
+      </p:sp>
+      <p:sp>
+        <p:nvSpPr>
+          <p:cNvPr id="6" name="TextBox 5"/>
+          <p:cNvSpPr txBox="1"/>
+          <p:nvPr/>
+        </p:nvSpPr>
+        <p:spPr>
+          <a:xfrm>
+            <a:off x="6583680" y="1554480"/>
+            <a:ext cx="4572000" cy="2743200"/>
+          </a:xfrm>
+          <a:prstGeom prst="rect">
+            <a:avLst/>
+          </a:prstGeom>
+          <a:noFill/>
+        </p:spPr>
+        <p:txBody>
+          <a:bodyPr wrap="square">
+            <a:spAutoFit/>
+          </a:bodyPr>
+          <a:lstStyle/>
+          <a:p>
+            <a:pPr>
+              <a:spcAft>
+                <a:spcPts val="600"/>
+              </a:spcAft>
+            </a:pPr>
+            <a:r>
+              <a:rPr sz="1700" b="1">
+                <a:solidFill>
+                  <a:srgbClr val="0B2B5B"/>
+                </a:solidFill>
+                <a:latin typeface="Calibri"/>
+              </a:rPr>
+              <a:t>Two limitations I measured</a:t>
+            </a:r>
+          </a:p>
+          <a:p>
+            <a:pPr>
+              <a:spcAft>
+                <a:spcPts val="600"/>
+              </a:spcAft>
+            </a:pPr>
+            <a:r>
+              <a:rPr sz="1300" b="0">
+                <a:solidFill>
+                  <a:srgbClr val="1F2A37"/>
+                </a:solidFill>
+                <a:latin typeface="Calibri"/>
+              </a:rPr>
+              <a:t>URL counting reads only the plain-text MIME part, so links inside HTML are not counted.</a:t>
+            </a:r>
+          </a:p>
+          <a:p>
+            <a:pPr>
+              <a:spcAft>
+                <a:spcPts val="600"/>
+              </a:spcAft>
+            </a:pPr>
+            <a:r>
+              <a:rPr sz="1300" b="0">
+                <a:solidFill>
+                  <a:srgbClr val="1F2A37"/>
+                </a:solidFill>
+                <a:latin typeface="Calibri"/>
+              </a:rPr>
+              <a:t>Authentication signals learned inversely: the corpus's legitimate mail predates SPF, so SPF presence correlates with spam. Same message scored 11.5% without auth headers, 100% with.</a:t>
+            </a:r>
+          </a:p>
+        </p:txBody>
+      </p:sp>
+      <p:sp>
+        <p:nvSpPr>
+          <p:cNvPr id="7" name="TextBox 6"/>
+          <p:cNvSpPr txBox="1"/>
+          <p:nvPr/>
+        </p:nvSpPr>
+        <p:spPr>
+          <a:xfrm>
+            <a:off x="731520" y="4572000"/>
+            <a:ext cx="10698480" cy="1828800"/>
+          </a:xfrm>
+          <a:prstGeom prst="rect">
+            <a:avLst/>
+          </a:prstGeom>
+          <a:noFill/>
+        </p:spPr>
+        <p:txBody>
+          <a:bodyPr wrap="square">
+            <a:spAutoFit/>
+          </a:bodyPr>
+          <a:lstStyle/>
+          <a:p>
+            <a:pPr>
+              <a:spcAft>
+                <a:spcPts val="1400"/>
+              </a:spcAft>
+            </a:pPr>
+            <a:r>
+              <a:rPr sz="1700">
+                <a:solidFill>
+                  <a:srgbClr val="1F2A37"/>
+                </a:solidFill>
+                <a:latin typeface="Calibri"/>
+              </a:rPr>
+              <a:t>•  Future work: HTML-aware URL extraction; a corpus with modern legitimate mail; head-to-head commercial comparison on one shared labelled set</a:t>
+            </a:r>
+          </a:p>
+        </p:txBody>
+      </p:sp>
+    </p:spTree>
+  </p:cSld>
+  <p:clrMapOvr>
+    <a:masterClrMapping/>
+  </p:clrMapOvr>
+</p:sld>
+</file>
+
+<file path=ppt/slides/slide2.xml><?xml version="1.0" encoding="utf-8"?>
+<p:sld xmlns:a="http://schemas.openxmlformats.org/drawingml/2006/main" xmlns:p="http://schemas.openxmlformats.org/presentationml/2006/main" xmlns:r="http://schemas.openxmlformats.org/officeDocument/2006/relationships">
+  <p:cSld>
+    <p:spTree>
+      <p:nvGrpSpPr>
+        <p:cNvPr id="1" name=""/>
+        <p:cNvGrpSpPr/>
+        <p:nvPr/>
+      </p:nvGrpSpPr>
+      <p:grpSpPr/>
+      <p:sp>
+        <p:nvSpPr>
+          <p:cNvPr id="2" name="Rectangle 1"/>
+          <p:cNvSpPr/>
+          <p:nvPr/>
+        </p:nvSpPr>
+        <p:spPr>
+          <a:xfrm>
+            <a:off x="0" y="0"/>
+            <a:ext cx="12191695" cy="960120"/>
+          </a:xfrm>
+          <a:prstGeom prst="rect">
+            <a:avLst/>
+          </a:prstGeom>
+          <a:solidFill>
+            <a:srgbClr val="0B2B5B"/>
+          </a:solidFill>
+          <a:ln>
+            <a:noFill/>
+          </a:ln>
+          <a:effectLst/>
+        </p:spPr>
+        <p:style>
+          <a:lnRef idx="1">
+            <a:schemeClr val="accent1"/>
+          </a:lnRef>
+          <a:fillRef idx="3">
+            <a:schemeClr val="accent1"/>
+          </a:fillRef>
+          <a:effectRef idx="2">
+            <a:schemeClr val="accent1"/>
+          </a:effectRef>
+          <a:fontRef idx="minor">
+            <a:schemeClr val="lt1"/>
+          </a:fontRef>
+        </p:style>
+        <p:txBody>
+          <a:bodyPr rtlCol="0" anchor="ctr"/>
+          <a:lstStyle/>
+          <a:p>
+            <a:pPr algn="ctr"/>
+          </a:p>
+        </p:txBody>
+      </p:sp>
+      <p:sp>
+        <p:nvSpPr>
+          <p:cNvPr id="3" name="TextBox 2"/>
+          <p:cNvSpPr txBox="1"/>
+          <p:nvPr/>
+        </p:nvSpPr>
+        <p:spPr>
+          <a:xfrm>
+            <a:off x="502920" y="128016"/>
+            <a:ext cx="11155680" cy="731520"/>
+          </a:xfrm>
+          <a:prstGeom prst="rect">
+            <a:avLst/>
+          </a:prstGeom>
+          <a:noFill/>
+        </p:spPr>
+        <p:txBody>
+          <a:bodyPr wrap="square">
+            <a:spAutoFit/>
+          </a:bodyPr>
+          <a:lstStyle/>
+          <a:p>
+            <a:pPr>
+              <a:spcAft>
+                <a:spcPts val="0"/>
+              </a:spcAft>
+            </a:pPr>
+            <a:r>
+              <a:rPr sz="3000" b="1">
+                <a:solidFill>
+                  <a:srgbClr val="FFFFFF"/>
+                </a:solidFill>
+                <a:latin typeface="Calibri"/>
+              </a:rPr>
+              <a:t>Outline</a:t>
+            </a:r>
+          </a:p>
+        </p:txBody>
+      </p:sp>
+      <p:sp>
+        <p:nvSpPr>
+          <p:cNvPr id="4" name="TextBox 3"/>
+          <p:cNvSpPr txBox="1"/>
+          <p:nvPr/>
+        </p:nvSpPr>
+        <p:spPr>
+          <a:xfrm>
+            <a:off x="1280160" y="1554480"/>
+            <a:ext cx="9601200" cy="4572000"/>
+          </a:xfrm>
+          <a:prstGeom prst="rect">
+            <a:avLst/>
+          </a:prstGeom>
+          <a:noFill/>
+        </p:spPr>
+        <p:txBody>
+          <a:bodyPr wrap="square">
+            <a:spAutoFit/>
+          </a:bodyPr>
+          <a:lstStyle/>
+          <a:p>
+            <a:pPr>
+              <a:spcAft>
+                <a:spcPts val="1400"/>
+              </a:spcAft>
+            </a:pPr>
+            <a:r>
+              <a:rPr sz="2000">
+                <a:solidFill>
+                  <a:srgbClr val="1F2A37"/>
+                </a:solidFill>
+                <a:latin typeface="Calibri"/>
+              </a:rPr>
+              <a:t>•  The problem and why it is getting harder</a:t>
+            </a:r>
+          </a:p>
+          <a:p>
+            <a:pPr>
+              <a:spcAft>
+                <a:spcPts val="1400"/>
+              </a:spcAft>
+            </a:pPr>
+            <a:r>
+              <a:rPr sz="2000">
+                <a:solidFill>
+                  <a:srgbClr val="1F2A37"/>
+                </a:solidFill>
+                <a:latin typeface="Calibri"/>
+              </a:rPr>
+              <a:t>•  Gap in existing detection approaches</a:t>
+            </a:r>
+          </a:p>
+          <a:p>
+            <a:pPr>
+              <a:spcAft>
+                <a:spcPts val="1400"/>
+              </a:spcAft>
+            </a:pPr>
+            <a:r>
+              <a:rPr sz="2000">
+                <a:solidFill>
+                  <a:srgbClr val="1F2A37"/>
+                </a:solidFill>
+                <a:latin typeface="Calibri"/>
+              </a:rPr>
+              <a:t>•  Objectives</a:t>
+            </a:r>
+          </a:p>
+          <a:p>
+            <a:pPr>
+              <a:spcAft>
+                <a:spcPts val="1400"/>
+              </a:spcAft>
+            </a:pPr>
+            <a:r>
+              <a:rPr sz="2000">
+                <a:solidFill>
+                  <a:srgbClr val="1F2A37"/>
+                </a:solidFill>
+                <a:latin typeface="Calibri"/>
+              </a:rPr>
+              <a:t>•  System design and implementation</a:t>
+            </a:r>
+          </a:p>
+          <a:p>
+            <a:pPr>
+              <a:spcAft>
+                <a:spcPts val="1400"/>
+              </a:spcAft>
+            </a:pPr>
+            <a:r>
+              <a:rPr sz="2000">
+                <a:solidFill>
+                  <a:srgbClr val="1F2A37"/>
+                </a:solidFill>
+                <a:latin typeface="Calibri"/>
+              </a:rPr>
+              <a:t>•  Results: main corpus, classifier comparison, AI-generated phishing, adaptation</a:t>
+            </a:r>
+          </a:p>
+          <a:p>
+            <a:pPr>
+              <a:spcAft>
+                <a:spcPts val="1400"/>
+              </a:spcAft>
+            </a:pPr>
+            <a:r>
+              <a:rPr sz="2000">
+                <a:solidFill>
+                  <a:srgbClr val="1F2A37"/>
+                </a:solidFill>
+                <a:latin typeface="Calibri"/>
+              </a:rPr>
+              <a:t>•  Conclusion, limitations and future work</a:t>
+            </a:r>
+          </a:p>
+        </p:txBody>
+      </p:sp>
+    </p:spTree>
+  </p:cSld>
+  <p:clrMapOvr>
+    <a:masterClrMapping/>
+  </p:clrMapOvr>
+</p:sld>
+</file>
+
+<file path=ppt/slides/slide3.xml><?xml version="1.0" encoding="utf-8"?>
+<p:sld xmlns:a="http://schemas.openxmlformats.org/drawingml/2006/main" xmlns:p="http://schemas.openxmlformats.org/presentationml/2006/main" xmlns:r="http://schemas.openxmlformats.org/officeDocument/2006/relationships">
+  <p:cSld>
+    <p:spTree>
+      <p:nvGrpSpPr>
+        <p:cNvPr id="1" name=""/>
+        <p:cNvGrpSpPr/>
+        <p:nvPr/>
+      </p:nvGrpSpPr>
+      <p:grpSpPr/>
+      <p:sp>
+        <p:nvSpPr>
+          <p:cNvPr id="2" name="Rectangle 1"/>
+          <p:cNvSpPr/>
+          <p:nvPr/>
+        </p:nvSpPr>
+        <p:spPr>
+          <a:xfrm>
+            <a:off x="0" y="0"/>
+            <a:ext cx="12191695" cy="960120"/>
+          </a:xfrm>
+          <a:prstGeom prst="rect">
+            <a:avLst/>
+          </a:prstGeom>
+          <a:solidFill>
+            <a:srgbClr val="0B2B5B"/>
+          </a:solidFill>
+          <a:ln>
+            <a:noFill/>
+          </a:ln>
+          <a:effectLst/>
+        </p:spPr>
+        <p:style>
+          <a:lnRef idx="1">
+            <a:schemeClr val="accent1"/>
+          </a:lnRef>
+          <a:fillRef idx="3">
+            <a:schemeClr val="accent1"/>
+          </a:fillRef>
+          <a:effectRef idx="2">
+            <a:schemeClr val="accent1"/>
+          </a:effectRef>
+          <a:fontRef idx="minor">
+            <a:schemeClr val="lt1"/>
+          </a:fontRef>
+        </p:style>
+        <p:txBody>
+          <a:bodyPr rtlCol="0" anchor="ctr"/>
+          <a:lstStyle/>
+          <a:p>
+            <a:pPr algn="ctr"/>
+          </a:p>
+        </p:txBody>
+      </p:sp>
+      <p:sp>
+        <p:nvSpPr>
+          <p:cNvPr id="3" name="TextBox 2"/>
+          <p:cNvSpPr txBox="1"/>
+          <p:nvPr/>
+        </p:nvSpPr>
+        <p:spPr>
+          <a:xfrm>
+            <a:off x="502920" y="128016"/>
+            <a:ext cx="11155680" cy="731520"/>
+          </a:xfrm>
+          <a:prstGeom prst="rect">
+            <a:avLst/>
+          </a:prstGeom>
+          <a:noFill/>
+        </p:spPr>
+        <p:txBody>
+          <a:bodyPr wrap="square">
+            <a:spAutoFit/>
+          </a:bodyPr>
+          <a:lstStyle/>
+          <a:p>
+            <a:pPr>
+              <a:spcAft>
+                <a:spcPts val="0"/>
+              </a:spcAft>
+            </a:pPr>
+            <a:r>
+              <a:rPr sz="3000" b="1">
+                <a:solidFill>
+                  <a:srgbClr val="FFFFFF"/>
+                </a:solidFill>
+                <a:latin typeface="Calibri"/>
+              </a:rPr>
+              <a:t>The Problem</a:t>
+            </a:r>
+          </a:p>
+          <a:p>
+            <a:pPr>
+              <a:spcAft>
+                <a:spcPts val="0"/>
+              </a:spcAft>
+            </a:pPr>
+            <a:r>
+              <a:rPr sz="1300" b="0">
+                <a:solidFill>
+                  <a:srgbClr val="C7DAF2"/>
+                </a:solidFill>
+                <a:latin typeface="Calibri"/>
+              </a:rPr>
+              <a:t>Email remains the primary attack vector</a:t>
+            </a:r>
+          </a:p>
+        </p:txBody>
+      </p:sp>
+      <p:sp>
+        <p:nvSpPr>
+          <p:cNvPr id="4" name="Rounded Rectangle 3"/>
+          <p:cNvSpPr/>
+          <p:nvPr/>
+        </p:nvSpPr>
+        <p:spPr>
+          <a:xfrm>
+            <a:off x="640080" y="1371600"/>
+            <a:ext cx="3474720" cy="1508760"/>
+          </a:xfrm>
+          <a:prstGeom prst="roundRect">
+            <a:avLst>
+              <a:gd name="adj" fmla="val 6000"/>
+            </a:avLst>
+          </a:prstGeom>
+          <a:solidFill>
+            <a:srgbClr val="EFF4FB"/>
+          </a:solidFill>
+          <a:ln w="15875">
+            <a:solidFill>
+              <a:srgbClr val="C7DAF2"/>
+            </a:solidFill>
+          </a:ln>
+          <a:effectLst/>
+        </p:spPr>
+        <p:style>
+          <a:lnRef idx="1">
+            <a:schemeClr val="accent1"/>
+          </a:lnRef>
+          <a:fillRef idx="3">
+            <a:schemeClr val="accent1"/>
+          </a:fillRef>
+          <a:effectRef idx="2">
+            <a:schemeClr val="accent1"/>
+          </a:effectRef>
+          <a:fontRef idx="minor">
+            <a:schemeClr val="lt1"/>
+          </a:fontRef>
+        </p:style>
+        <p:txBody>
+          <a:bodyPr rtlCol="0" anchor="ctr"/>
+          <a:lstStyle/>
+          <a:p>
+            <a:pPr algn="ctr"/>
+          </a:p>
+        </p:txBody>
+      </p:sp>
+      <p:sp>
+        <p:nvSpPr>
+          <p:cNvPr id="5" name="TextBox 4"/>
+          <p:cNvSpPr txBox="1"/>
+          <p:nvPr/>
+        </p:nvSpPr>
+        <p:spPr>
+          <a:xfrm>
+            <a:off x="640080" y="1536192"/>
+            <a:ext cx="3474720" cy="1188720"/>
+          </a:xfrm>
+          <a:prstGeom prst="rect">
+            <a:avLst/>
+          </a:prstGeom>
+          <a:noFill/>
+        </p:spPr>
+        <p:txBody>
+          <a:bodyPr wrap="square">
+            <a:spAutoFit/>
+          </a:bodyPr>
+          <a:lstStyle/>
+          <a:p>
+            <a:pPr algn="ctr"/>
+            <a:r>
+              <a:rPr sz="3800" b="1">
+                <a:solidFill>
+                  <a:srgbClr val="1A73E8"/>
+                </a:solidFill>
+              </a:rPr>
+              <a:t>~47%</a:t>
+            </a:r>
+          </a:p>
+          <a:p>
+            <a:pPr algn="ctr"/>
+            <a:r>
+              <a:rPr sz="1300">
+                <a:solidFill>
+                  <a:srgbClr val="5B6672"/>
+                </a:solidFill>
+              </a:rPr>
+              <a:t>of world email traffic is spam (Kaspersky, 2024)</a:t>
+            </a:r>
+          </a:p>
+        </p:txBody>
+      </p:sp>
+      <p:sp>
+        <p:nvSpPr>
+          <p:cNvPr id="6" name="Rounded Rectangle 5"/>
+          <p:cNvSpPr/>
+          <p:nvPr/>
+        </p:nvSpPr>
+        <p:spPr>
+          <a:xfrm>
+            <a:off x="4343400" y="1371600"/>
+            <a:ext cx="3474720" cy="1508760"/>
+          </a:xfrm>
+          <a:prstGeom prst="roundRect">
+            <a:avLst>
+              <a:gd name="adj" fmla="val 6000"/>
+            </a:avLst>
+          </a:prstGeom>
+          <a:solidFill>
+            <a:srgbClr val="EFF4FB"/>
+          </a:solidFill>
+          <a:ln w="15875">
+            <a:solidFill>
+              <a:srgbClr val="C7DAF2"/>
+            </a:solidFill>
+          </a:ln>
+          <a:effectLst/>
+        </p:spPr>
+        <p:style>
+          <a:lnRef idx="1">
+            <a:schemeClr val="accent1"/>
+          </a:lnRef>
+          <a:fillRef idx="3">
+            <a:schemeClr val="accent1"/>
+          </a:fillRef>
+          <a:effectRef idx="2">
+            <a:schemeClr val="accent1"/>
+          </a:effectRef>
+          <a:fontRef idx="minor">
+            <a:schemeClr val="lt1"/>
+          </a:fontRef>
+        </p:style>
+        <p:txBody>
+          <a:bodyPr rtlCol="0" anchor="ctr"/>
+          <a:lstStyle/>
+          <a:p>
+            <a:pPr algn="ctr"/>
+          </a:p>
+        </p:txBody>
+      </p:sp>
+      <p:sp>
+        <p:nvSpPr>
+          <p:cNvPr id="7" name="TextBox 6"/>
+          <p:cNvSpPr txBox="1"/>
+          <p:nvPr/>
+        </p:nvSpPr>
+        <p:spPr>
+          <a:xfrm>
+            <a:off x="4343400" y="1536192"/>
+            <a:ext cx="3474720" cy="1188720"/>
+          </a:xfrm>
+          <a:prstGeom prst="rect">
+            <a:avLst/>
+          </a:prstGeom>
+          <a:noFill/>
+        </p:spPr>
+        <p:txBody>
+          <a:bodyPr wrap="square">
+            <a:spAutoFit/>
+          </a:bodyPr>
+          <a:lstStyle/>
+          <a:p>
+            <a:pPr algn="ctr"/>
+            <a:r>
+              <a:rPr sz="3800" b="1">
+                <a:solidFill>
+                  <a:srgbClr val="1A73E8"/>
+                </a:solidFill>
+              </a:rPr>
+              <a:t>USD 2.77bn</a:t>
+            </a:r>
+          </a:p>
+          <a:p>
+            <a:pPr algn="ctr"/>
+            <a:r>
+              <a:rPr sz="1300">
+                <a:solidFill>
+                  <a:srgbClr val="5B6672"/>
+                </a:solidFill>
+              </a:rPr>
+              <a:t>BEC losses, 21,442 complaints (FBI IC3, 2024)</a:t>
+            </a:r>
+          </a:p>
+        </p:txBody>
+      </p:sp>
+      <p:sp>
+        <p:nvSpPr>
+          <p:cNvPr id="8" name="Rounded Rectangle 7"/>
+          <p:cNvSpPr/>
+          <p:nvPr/>
+        </p:nvSpPr>
+        <p:spPr>
+          <a:xfrm>
+            <a:off x="8046720" y="1371600"/>
+            <a:ext cx="3474720" cy="1508760"/>
+          </a:xfrm>
+          <a:prstGeom prst="roundRect">
+            <a:avLst>
+              <a:gd name="adj" fmla="val 6000"/>
+            </a:avLst>
+          </a:prstGeom>
+          <a:solidFill>
+            <a:srgbClr val="EFF4FB"/>
+          </a:solidFill>
+          <a:ln w="15875">
+            <a:solidFill>
+              <a:srgbClr val="C7DAF2"/>
+            </a:solidFill>
+          </a:ln>
+          <a:effectLst/>
+        </p:spPr>
+        <p:style>
+          <a:lnRef idx="1">
+            <a:schemeClr val="accent1"/>
+          </a:lnRef>
+          <a:fillRef idx="3">
+            <a:schemeClr val="accent1"/>
+          </a:fillRef>
+          <a:effectRef idx="2">
+            <a:schemeClr val="accent1"/>
+          </a:effectRef>
+          <a:fontRef idx="minor">
+            <a:schemeClr val="lt1"/>
+          </a:fontRef>
+        </p:style>
+        <p:txBody>
+          <a:bodyPr rtlCol="0" anchor="ctr"/>
+          <a:lstStyle/>
+          <a:p>
+            <a:pPr algn="ctr"/>
+          </a:p>
+        </p:txBody>
+      </p:sp>
+      <p:sp>
+        <p:nvSpPr>
+          <p:cNvPr id="9" name="TextBox 8"/>
+          <p:cNvSpPr txBox="1"/>
+          <p:nvPr/>
+        </p:nvSpPr>
+        <p:spPr>
+          <a:xfrm>
+            <a:off x="8046720" y="1536192"/>
+            <a:ext cx="3474720" cy="1188720"/>
+          </a:xfrm>
+          <a:prstGeom prst="rect">
+            <a:avLst/>
+          </a:prstGeom>
+          <a:noFill/>
+        </p:spPr>
+        <p:txBody>
+          <a:bodyPr wrap="square">
+            <a:spAutoFit/>
+          </a:bodyPr>
+          <a:lstStyle/>
+          <a:p>
+            <a:pPr algn="ctr"/>
+            <a:r>
+              <a:rPr sz="3800" b="1">
+                <a:solidFill>
+                  <a:srgbClr val="1A73E8"/>
+                </a:solidFill>
+              </a:rPr>
+              <a:t>21 s</a:t>
+            </a:r>
+          </a:p>
+          <a:p>
+            <a:pPr algn="ctr"/>
+            <a:r>
+              <a:rPr sz="1300">
+                <a:solidFill>
+                  <a:srgbClr val="5B6672"/>
+                </a:solidFill>
+              </a:rPr>
+              <a:t>median time to click a phishing link (Verizon DBIR)</a:t>
+            </a:r>
+          </a:p>
+        </p:txBody>
+      </p:sp>
+      <p:sp>
+        <p:nvSpPr>
+          <p:cNvPr id="10" name="TextBox 9"/>
+          <p:cNvSpPr txBox="1"/>
+          <p:nvPr/>
+        </p:nvSpPr>
+        <p:spPr>
+          <a:xfrm>
+            <a:off x="822960" y="3291840"/>
+            <a:ext cx="10515600" cy="2743200"/>
+          </a:xfrm>
+          <a:prstGeom prst="rect">
+            <a:avLst/>
+          </a:prstGeom>
+          <a:noFill/>
+        </p:spPr>
+        <p:txBody>
+          <a:bodyPr wrap="square">
+            <a:spAutoFit/>
+          </a:bodyPr>
+          <a:lstStyle/>
+          <a:p>
+            <a:pPr>
+              <a:spcAft>
+                <a:spcPts val="1400"/>
+              </a:spcAft>
+            </a:pPr>
+            <a:r>
+              <a:rPr sz="1800">
+                <a:solidFill>
+                  <a:srgbClr val="1F2A37"/>
+                </a:solidFill>
+                <a:latin typeface="Calibri"/>
+              </a:rPr>
+              <a:t>•  Business email compromise contains no links and no keywords — signature filters miss it</a:t>
+            </a:r>
+          </a:p>
+          <a:p>
+            <a:pPr>
+              <a:spcAft>
+                <a:spcPts val="1400"/>
+              </a:spcAft>
+            </a:pPr>
+            <a:r>
+              <a:rPr sz="1800">
+                <a:solidFill>
+                  <a:srgbClr val="1F2A37"/>
+                </a:solidFill>
+                <a:latin typeface="Calibri"/>
+              </a:rPr>
+              <a:t>•  Large language models now write fluent, personalised phishing at scale</a:t>
+            </a:r>
+          </a:p>
+          <a:p>
+            <a:pPr>
+              <a:spcAft>
+                <a:spcPts val="1400"/>
+              </a:spcAft>
+            </a:pPr>
+            <a:r>
+              <a:rPr sz="1800">
+                <a:solidFill>
+                  <a:srgbClr val="1F2A37"/>
+                </a:solidFill>
+                <a:latin typeface="Calibri"/>
+              </a:rPr>
+              <a:t>•  Concept drift: a model trained once degrades as campaigns evolve</a:t>
+            </a:r>
+          </a:p>
+        </p:txBody>
+      </p:sp>
+    </p:spTree>
+  </p:cSld>
+  <p:clrMapOvr>
+    <a:masterClrMapping/>
+  </p:clrMapOvr>
+</p:sld>
+</file>
+
+<file path=ppt/slides/slide4.xml><?xml version="1.0" encoding="utf-8"?>
+<p:sld xmlns:a="http://schemas.openxmlformats.org/drawingml/2006/main" xmlns:p="http://schemas.openxmlformats.org/presentationml/2006/main" xmlns:r="http://schemas.openxmlformats.org/officeDocument/2006/relationships">
+  <p:cSld>
+    <p:spTree>
+      <p:nvGrpSpPr>
+        <p:cNvPr id="1" name=""/>
+        <p:cNvGrpSpPr/>
+        <p:nvPr/>
+      </p:nvGrpSpPr>
+      <p:grpSpPr/>
+      <p:sp>
+        <p:nvSpPr>
+          <p:cNvPr id="2" name="Rectangle 1"/>
+          <p:cNvSpPr/>
+          <p:nvPr/>
+        </p:nvSpPr>
+        <p:spPr>
+          <a:xfrm>
+            <a:off x="0" y="0"/>
+            <a:ext cx="12191695" cy="960120"/>
+          </a:xfrm>
+          <a:prstGeom prst="rect">
+            <a:avLst/>
+          </a:prstGeom>
+          <a:solidFill>
+            <a:srgbClr val="0B2B5B"/>
+          </a:solidFill>
+          <a:ln>
+            <a:noFill/>
+          </a:ln>
+          <a:effectLst/>
+        </p:spPr>
+        <p:style>
+          <a:lnRef idx="1">
+            <a:schemeClr val="accent1"/>
+          </a:lnRef>
+          <a:fillRef idx="3">
+            <a:schemeClr val="accent1"/>
+          </a:fillRef>
+          <a:effectRef idx="2">
+            <a:schemeClr val="accent1"/>
+          </a:effectRef>
+          <a:fontRef idx="minor">
+            <a:schemeClr val="lt1"/>
+          </a:fontRef>
+        </p:style>
+        <p:txBody>
+          <a:bodyPr rtlCol="0" anchor="ctr"/>
+          <a:lstStyle/>
+          <a:p>
+            <a:pPr algn="ctr"/>
+          </a:p>
+        </p:txBody>
+      </p:sp>
+      <p:sp>
+        <p:nvSpPr>
+          <p:cNvPr id="3" name="TextBox 2"/>
+          <p:cNvSpPr txBox="1"/>
+          <p:nvPr/>
+        </p:nvSpPr>
+        <p:spPr>
+          <a:xfrm>
+            <a:off x="502920" y="128016"/>
+            <a:ext cx="11155680" cy="731520"/>
+          </a:xfrm>
+          <a:prstGeom prst="rect">
+            <a:avLst/>
+          </a:prstGeom>
+          <a:noFill/>
+        </p:spPr>
+        <p:txBody>
+          <a:bodyPr wrap="square">
+            <a:spAutoFit/>
+          </a:bodyPr>
+          <a:lstStyle/>
+          <a:p>
+            <a:pPr>
+              <a:spcAft>
+                <a:spcPts val="0"/>
+              </a:spcAft>
+            </a:pPr>
+            <a:r>
+              <a:rPr sz="3000" b="1">
+                <a:solidFill>
+                  <a:srgbClr val="FFFFFF"/>
+                </a:solidFill>
+                <a:latin typeface="Calibri"/>
+              </a:rPr>
+              <a:t>Gap in Existing Approaches</a:t>
+            </a:r>
+          </a:p>
+        </p:txBody>
+      </p:sp>
+      <p:graphicFrame>
+        <p:nvGraphicFramePr>
+          <p:cNvPr id="4" name="Table 3"/>
+          <p:cNvGraphicFramePr>
+            <a:graphicFrameLocks noGrp="1"/>
+          </p:cNvGraphicFramePr>
+          <p:nvPr/>
+        </p:nvGraphicFramePr>
+        <p:xfrm>
+          <a:off x="731520" y="1463040"/>
+          <a:ext cx="10698480" cy="1920240"/>
+        </p:xfrm>
+        <a:graphic>
+          <a:graphicData uri="http://schemas.openxmlformats.org/drawingml/2006/table">
+            <a:tbl>
+              <a:tblPr firstRow="1" bandRow="1">
+                <a:tableStyleId>{5C22544A-7EE6-4342-B048-85BDC9FD1C3A}</a:tableStyleId>
+              </a:tblPr>
+              <a:tblGrid>
+                <a:gridCol w="2926080"/>
+                <a:gridCol w="3291840"/>
+                <a:gridCol w="4480560"/>
+              </a:tblGrid>
+              <a:tr h="384048">
+                <a:tc>
+                  <a:txBody>
+                    <a:bodyPr/>
+                    <a:lstStyle/>
+                    <a:p>
+                      <a:pPr algn="l"/>
+                      <a:r>
+                        <a:rPr sz="1500" b="1">
+                          <a:solidFill>
+                            <a:srgbClr val="FFFFFF"/>
+                          </a:solidFill>
+                          <a:latin typeface="Calibri"/>
+                        </a:rPr>
+                        <a:t>Approach</a:t>
+                      </a:r>
+                    </a:p>
+                  </a:txBody>
+                  <a:tcPr/>
+                </a:tc>
+                <a:tc>
+                  <a:txBody>
+                    <a:bodyPr/>
+                    <a:lstStyle/>
+                    <a:p>
+                      <a:pPr algn="ctr"/>
+                      <a:r>
+                        <a:rPr sz="1500" b="1">
+                          <a:solidFill>
+                            <a:srgbClr val="FFFFFF"/>
+                          </a:solidFill>
+                          <a:latin typeface="Calibri"/>
+                        </a:rPr>
+                        <a:t>Strength</a:t>
+                      </a:r>
+                    </a:p>
+                  </a:txBody>
+                  <a:tcPr/>
+                </a:tc>
+                <a:tc>
+                  <a:txBody>
+                    <a:bodyPr/>
+                    <a:lstStyle/>
+                    <a:p>
+                      <a:pPr algn="ctr"/>
+                      <a:r>
+                        <a:rPr sz="1500" b="1">
+                          <a:solidFill>
+                            <a:srgbClr val="FFFFFF"/>
+                          </a:solidFill>
+                          <a:latin typeface="Calibri"/>
+                        </a:rPr>
+                        <a:t>Weakness</a:t>
+                      </a:r>
+                    </a:p>
+                  </a:txBody>
+                  <a:tcPr/>
+                </a:tc>
+              </a:tr>
+              <a:tr h="384048">
+                <a:tc>
+                  <a:txBody>
+                    <a:bodyPr/>
+                    <a:lstStyle/>
+                    <a:p>
+                      <a:pPr algn="l"/>
+                      <a:r>
+                        <a:rPr sz="1500" b="0">
+                          <a:solidFill>
+                            <a:srgbClr val="1F2A37"/>
+                          </a:solidFill>
+                          <a:latin typeface="Calibri"/>
+                        </a:rPr>
+                        <a:t>Rule / keyword filters</a:t>
+                      </a:r>
+                    </a:p>
+                  </a:txBody>
+                  <a:tcPr/>
+                </a:tc>
+                <a:tc>
+                  <a:txBody>
+                    <a:bodyPr/>
+                    <a:lstStyle/>
+                    <a:p>
+                      <a:pPr algn="ctr"/>
+                      <a:r>
+                        <a:rPr sz="1500" b="0">
+                          <a:solidFill>
+                            <a:srgbClr val="1F2A37"/>
+                          </a:solidFill>
+                          <a:latin typeface="Calibri"/>
+                        </a:rPr>
+                        <a:t>Explainable</a:t>
+                      </a:r>
+                    </a:p>
+                  </a:txBody>
+                  <a:tcPr/>
+                </a:tc>
+                <a:tc>
+                  <a:txBody>
+                    <a:bodyPr/>
+                    <a:lstStyle/>
+                    <a:p>
+                      <a:pPr algn="ctr"/>
+                      <a:r>
+                        <a:rPr sz="1500" b="0">
+                          <a:solidFill>
+                            <a:srgbClr val="1F2A37"/>
+                          </a:solidFill>
+                          <a:latin typeface="Calibri"/>
+                        </a:rPr>
+                        <a:t>Brittle; evaded by rewording</a:t>
+                      </a:r>
+                    </a:p>
+                  </a:txBody>
+                  <a:tcPr/>
+                </a:tc>
+              </a:tr>
+              <a:tr h="384048">
+                <a:tc>
+                  <a:txBody>
+                    <a:bodyPr/>
+                    <a:lstStyle/>
+                    <a:p>
+                      <a:pPr algn="l"/>
+                      <a:r>
+                        <a:rPr sz="1500" b="0">
+                          <a:solidFill>
+                            <a:srgbClr val="1F2A37"/>
+                          </a:solidFill>
+                          <a:latin typeface="Calibri"/>
+                        </a:rPr>
+                        <a:t>Content classifiers</a:t>
+                      </a:r>
+                    </a:p>
+                  </a:txBody>
+                  <a:tcPr/>
+                </a:tc>
+                <a:tc>
+                  <a:txBody>
+                    <a:bodyPr/>
+                    <a:lstStyle/>
+                    <a:p>
+                      <a:pPr algn="ctr"/>
+                      <a:r>
+                        <a:rPr sz="1500" b="0">
+                          <a:solidFill>
+                            <a:srgbClr val="1F2A37"/>
+                          </a:solidFill>
+                          <a:latin typeface="Calibri"/>
+                        </a:rPr>
+                        <a:t>Learns from data</a:t>
+                      </a:r>
+                    </a:p>
+                  </a:txBody>
+                  <a:tcPr/>
+                </a:tc>
+                <a:tc>
+                  <a:txBody>
+                    <a:bodyPr/>
+                    <a:lstStyle/>
+                    <a:p>
+                      <a:pPr algn="ctr"/>
+                      <a:r>
+                        <a:rPr sz="1500" b="0">
+                          <a:solidFill>
+                            <a:srgbClr val="1F2A37"/>
+                          </a:solidFill>
+                          <a:latin typeface="Calibri"/>
+                        </a:rPr>
+                        <a:t>Ignores message structure</a:t>
+                      </a:r>
+                    </a:p>
+                  </a:txBody>
+                  <a:tcPr/>
+                </a:tc>
+              </a:tr>
+              <a:tr h="384048">
+                <a:tc>
+                  <a:txBody>
+                    <a:bodyPr/>
+                    <a:lstStyle/>
+                    <a:p>
+                      <a:pPr algn="l"/>
+                      <a:r>
+                        <a:rPr sz="1500" b="0">
+                          <a:solidFill>
+                            <a:srgbClr val="1F2A37"/>
+                          </a:solidFill>
+                          <a:latin typeface="Calibri"/>
+                        </a:rPr>
+                        <a:t>Metadata / reputation</a:t>
+                      </a:r>
+                    </a:p>
+                  </a:txBody>
+                  <a:tcPr/>
+                </a:tc>
+                <a:tc>
+                  <a:txBody>
+                    <a:bodyPr/>
+                    <a:lstStyle/>
+                    <a:p>
+                      <a:pPr algn="ctr"/>
+                      <a:r>
+                        <a:rPr sz="1500" b="0">
+                          <a:solidFill>
+                            <a:srgbClr val="1F2A37"/>
+                          </a:solidFill>
+                          <a:latin typeface="Calibri"/>
+                        </a:rPr>
+                        <a:t>Catches anomalies</a:t>
+                      </a:r>
+                    </a:p>
+                  </a:txBody>
+                  <a:tcPr/>
+                </a:tc>
+                <a:tc>
+                  <a:txBody>
+                    <a:bodyPr/>
+                    <a:lstStyle/>
+                    <a:p>
+                      <a:pPr algn="ctr"/>
+                      <a:r>
+                        <a:rPr sz="1500" b="0">
+                          <a:solidFill>
+                            <a:srgbClr val="1F2A37"/>
+                          </a:solidFill>
+                          <a:latin typeface="Calibri"/>
+                        </a:rPr>
+                        <a:t>Weak alone; evaded by clean BEC</a:t>
+                      </a:r>
+                    </a:p>
+                  </a:txBody>
+                  <a:tcPr/>
+                </a:tc>
+              </a:tr>
+              <a:tr h="384048">
+                <a:tc>
+                  <a:txBody>
+                    <a:bodyPr/>
+                    <a:lstStyle/>
+                    <a:p>
+                      <a:pPr algn="l"/>
+                      <a:r>
+                        <a:rPr sz="1500" b="0">
+                          <a:solidFill>
+                            <a:srgbClr val="1F2A37"/>
+                          </a:solidFill>
+                          <a:latin typeface="Calibri"/>
+                        </a:rPr>
+                        <a:t>Commercial cloud filters</a:t>
+                      </a:r>
+                    </a:p>
+                  </a:txBody>
+                  <a:tcPr/>
+                </a:tc>
+                <a:tc>
+                  <a:txBody>
+                    <a:bodyPr/>
+                    <a:lstStyle/>
+                    <a:p>
+                      <a:pPr algn="ctr"/>
+                      <a:r>
+                        <a:rPr sz="1500" b="0">
+                          <a:solidFill>
+                            <a:srgbClr val="1F2A37"/>
+                          </a:solidFill>
+                          <a:latin typeface="Calibri"/>
+                        </a:rPr>
+                        <a:t>Massive scale</a:t>
+                      </a:r>
+                    </a:p>
+                  </a:txBody>
+                  <a:tcPr/>
+                </a:tc>
+                <a:tc>
+                  <a:txBody>
+                    <a:bodyPr/>
+                    <a:lstStyle/>
+                    <a:p>
+                      <a:pPr algn="ctr"/>
+                      <a:r>
+                        <a:rPr sz="1500" b="0">
+                          <a:solidFill>
+                            <a:srgbClr val="1F2A37"/>
+                          </a:solidFill>
+                          <a:latin typeface="Calibri"/>
+                        </a:rPr>
+                        <a:t>Proprietary; not reproducible</a:t>
+                      </a:r>
+                    </a:p>
+                  </a:txBody>
+                  <a:tcPr/>
+                </a:tc>
+              </a:tr>
+            </a:tbl>
+          </a:graphicData>
+        </a:graphic>
+      </p:graphicFrame>
+      <p:sp>
+        <p:nvSpPr>
+          <p:cNvPr id="5" name="TextBox 4"/>
+          <p:cNvSpPr txBox="1"/>
+          <p:nvPr/>
+        </p:nvSpPr>
+        <p:spPr>
+          <a:xfrm>
+            <a:off x="822960" y="4206240"/>
+            <a:ext cx="10515600" cy="1828800"/>
+          </a:xfrm>
+          <a:prstGeom prst="rect">
+            <a:avLst/>
+          </a:prstGeom>
+          <a:noFill/>
+        </p:spPr>
+        <p:txBody>
+          <a:bodyPr wrap="square">
+            <a:spAutoFit/>
+          </a:bodyPr>
+          <a:lstStyle/>
+          <a:p>
+            <a:pPr>
+              <a:spcAft>
+                <a:spcPts val="1400"/>
+              </a:spcAft>
+            </a:pPr>
+            <a:r>
+              <a:rPr sz="1800">
+                <a:solidFill>
+                  <a:srgbClr val="1F2A37"/>
+                </a:solidFill>
+                <a:latin typeface="Calibri"/>
+              </a:rPr>
+              <a:t>•  Content and metadata are complementary, not competing</a:t>
+            </a:r>
+          </a:p>
+          <a:p>
+            <a:pPr>
+              <a:spcAft>
+                <a:spcPts val="1400"/>
+              </a:spcAft>
+            </a:pPr>
+            <a:r>
+              <a:rPr sz="1800">
+                <a:solidFill>
+                  <a:srgbClr val="1F2A37"/>
+                </a:solidFill>
+                <a:latin typeface="Calibri"/>
+              </a:rPr>
+              <a:t>•  Few published systems are locally deployable, explainable AND adaptive</a:t>
+            </a:r>
+          </a:p>
+        </p:txBody>
+      </p:sp>
+    </p:spTree>
+  </p:cSld>
+  <p:clrMapOvr>
+    <a:masterClrMapping/>
+  </p:clrMapOvr>
+</p:sld>
+</file>
+
+<file path=ppt/slides/slide5.xml><?xml version="1.0" encoding="utf-8"?>
+<p:sld xmlns:a="http://schemas.openxmlformats.org/drawingml/2006/main" xmlns:p="http://schemas.openxmlformats.org/presentationml/2006/main" xmlns:r="http://schemas.openxmlformats.org/officeDocument/2006/relationships">
+  <p:cSld>
+    <p:spTree>
+      <p:nvGrpSpPr>
+        <p:cNvPr id="1" name=""/>
+        <p:cNvGrpSpPr/>
+        <p:nvPr/>
+      </p:nvGrpSpPr>
+      <p:grpSpPr/>
+      <p:sp>
+        <p:nvSpPr>
+          <p:cNvPr id="2" name="Rectangle 1"/>
+          <p:cNvSpPr/>
+          <p:nvPr/>
+        </p:nvSpPr>
+        <p:spPr>
+          <a:xfrm>
+            <a:off x="0" y="0"/>
+            <a:ext cx="12191695" cy="960120"/>
+          </a:xfrm>
+          <a:prstGeom prst="rect">
+            <a:avLst/>
+          </a:prstGeom>
+          <a:solidFill>
+            <a:srgbClr val="0B2B5B"/>
+          </a:solidFill>
+          <a:ln>
+            <a:noFill/>
+          </a:ln>
+          <a:effectLst/>
+        </p:spPr>
+        <p:style>
+          <a:lnRef idx="1">
+            <a:schemeClr val="accent1"/>
+          </a:lnRef>
+          <a:fillRef idx="3">
+            <a:schemeClr val="accent1"/>
+          </a:fillRef>
+          <a:effectRef idx="2">
+            <a:schemeClr val="accent1"/>
+          </a:effectRef>
+          <a:fontRef idx="minor">
+            <a:schemeClr val="lt1"/>
+          </a:fontRef>
+        </p:style>
+        <p:txBody>
+          <a:bodyPr rtlCol="0" anchor="ctr"/>
+          <a:lstStyle/>
+          <a:p>
+            <a:pPr algn="ctr"/>
+          </a:p>
+        </p:txBody>
+      </p:sp>
+      <p:sp>
+        <p:nvSpPr>
+          <p:cNvPr id="3" name="TextBox 2"/>
+          <p:cNvSpPr txBox="1"/>
+          <p:nvPr/>
+        </p:nvSpPr>
+        <p:spPr>
+          <a:xfrm>
+            <a:off x="502920" y="128016"/>
+            <a:ext cx="11155680" cy="731520"/>
+          </a:xfrm>
+          <a:prstGeom prst="rect">
+            <a:avLst/>
+          </a:prstGeom>
+          <a:noFill/>
+        </p:spPr>
+        <p:txBody>
+          <a:bodyPr wrap="square">
+            <a:spAutoFit/>
+          </a:bodyPr>
+          <a:lstStyle/>
+          <a:p>
+            <a:pPr>
+              <a:spcAft>
+                <a:spcPts val="0"/>
+              </a:spcAft>
+            </a:pPr>
+            <a:r>
+              <a:rPr sz="3000" b="1">
+                <a:solidFill>
+                  <a:srgbClr val="FFFFFF"/>
+                </a:solidFill>
+                <a:latin typeface="Calibri"/>
+              </a:rPr>
+              <a:t>Objectives</a:t>
+            </a:r>
+          </a:p>
+        </p:txBody>
+      </p:sp>
+      <p:sp>
+        <p:nvSpPr>
+          <p:cNvPr id="4" name="TextBox 3"/>
+          <p:cNvSpPr txBox="1"/>
+          <p:nvPr/>
+        </p:nvSpPr>
+        <p:spPr>
+          <a:xfrm>
+            <a:off x="1005840" y="1645920"/>
+            <a:ext cx="10058400" cy="4572000"/>
+          </a:xfrm>
+          <a:prstGeom prst="rect">
+            <a:avLst/>
+          </a:prstGeom>
+          <a:noFill/>
+        </p:spPr>
+        <p:txBody>
+          <a:bodyPr wrap="square">
+            <a:spAutoFit/>
+          </a:bodyPr>
+          <a:lstStyle/>
+          <a:p>
+            <a:pPr>
+              <a:spcAft>
+                <a:spcPts val="1400"/>
+              </a:spcAft>
+            </a:pPr>
+            <a:r>
+              <a:rPr sz="1900">
+                <a:solidFill>
+                  <a:srgbClr val="1F2A37"/>
+                </a:solidFill>
+                <a:latin typeface="Calibri"/>
+              </a:rPr>
+              <a:t>•  Extract content features (body, subject, URLs) and metadata features (sender, header attributes) from raw email</a:t>
+            </a:r>
+          </a:p>
+          <a:p>
+            <a:pPr>
+              <a:spcAft>
+                <a:spcPts val="1400"/>
+              </a:spcAft>
+            </a:pPr>
+            <a:r>
+              <a:rPr sz="1900">
+                <a:solidFill>
+                  <a:srgbClr val="1F2A37"/>
+                </a:solidFill>
+                <a:latin typeface="Calibri"/>
+              </a:rPr>
+              <a:t>•  Design a content–metadata fusion framework combining both in one machine-learning pipeline</a:t>
+            </a:r>
+          </a:p>
+          <a:p>
+            <a:pPr>
+              <a:spcAft>
+                <a:spcPts val="1400"/>
+              </a:spcAft>
+            </a:pPr>
+            <a:r>
+              <a:rPr sz="1900">
+                <a:solidFill>
+                  <a:srgbClr val="1F2A37"/>
+                </a:solidFill>
+                <a:latin typeface="Calibri"/>
+              </a:rPr>
+              <a:t>•  Train and evaluate Naïve Bayes, logistic regression and support vector machines on the fused feature set</a:t>
+            </a:r>
+          </a:p>
+          <a:p>
+            <a:pPr>
+              <a:spcAft>
+                <a:spcPts val="1400"/>
+              </a:spcAft>
+            </a:pPr>
+            <a:r>
+              <a:rPr sz="1900">
+                <a:solidFill>
+                  <a:srgbClr val="1F2A37"/>
+                </a:solidFill>
+                <a:latin typeface="Calibri"/>
+              </a:rPr>
+              <a:t>•  Implement an adaptive retraining mechanism that updates the model with newly reviewed samples</a:t>
+            </a:r>
+          </a:p>
+        </p:txBody>
+      </p:sp>
+    </p:spTree>
+  </p:cSld>
+  <p:clrMapOvr>
+    <a:masterClrMapping/>
+  </p:clrMapOvr>
+</p:sld>
+</file>
+
+<file path=ppt/slides/slide6.xml><?xml version="1.0" encoding="utf-8"?>
+<p:sld xmlns:a="http://schemas.openxmlformats.org/drawingml/2006/main" xmlns:p="http://schemas.openxmlformats.org/presentationml/2006/main" xmlns:r="http://schemas.openxmlformats.org/officeDocument/2006/relationships">
+  <p:cSld>
+    <p:spTree>
+      <p:nvGrpSpPr>
+        <p:cNvPr id="1" name=""/>
+        <p:cNvGrpSpPr/>
+        <p:nvPr/>
+      </p:nvGrpSpPr>
+      <p:grpSpPr/>
+      <p:sp>
+        <p:nvSpPr>
+          <p:cNvPr id="2" name="Rectangle 1"/>
+          <p:cNvSpPr/>
+          <p:nvPr/>
+        </p:nvSpPr>
+        <p:spPr>
+          <a:xfrm>
+            <a:off x="0" y="0"/>
+            <a:ext cx="12191695" cy="960120"/>
+          </a:xfrm>
+          <a:prstGeom prst="rect">
+            <a:avLst/>
+          </a:prstGeom>
+          <a:solidFill>
+            <a:srgbClr val="0B2B5B"/>
+          </a:solidFill>
+          <a:ln>
+            <a:noFill/>
+          </a:ln>
+          <a:effectLst/>
+        </p:spPr>
+        <p:style>
+          <a:lnRef idx="1">
+            <a:schemeClr val="accent1"/>
+          </a:lnRef>
+          <a:fillRef idx="3">
+            <a:schemeClr val="accent1"/>
+          </a:fillRef>
+          <a:effectRef idx="2">
+            <a:schemeClr val="accent1"/>
+          </a:effectRef>
+          <a:fontRef idx="minor">
+            <a:schemeClr val="lt1"/>
+          </a:fontRef>
+        </p:style>
+        <p:txBody>
+          <a:bodyPr rtlCol="0" anchor="ctr"/>
+          <a:lstStyle/>
+          <a:p>
+            <a:pPr algn="ctr"/>
+          </a:p>
+        </p:txBody>
+      </p:sp>
+      <p:sp>
+        <p:nvSpPr>
+          <p:cNvPr id="3" name="TextBox 2"/>
+          <p:cNvSpPr txBox="1"/>
+          <p:nvPr/>
+        </p:nvSpPr>
+        <p:spPr>
+          <a:xfrm>
+            <a:off x="502920" y="128016"/>
+            <a:ext cx="11155680" cy="731520"/>
+          </a:xfrm>
+          <a:prstGeom prst="rect">
+            <a:avLst/>
+          </a:prstGeom>
+          <a:noFill/>
+        </p:spPr>
+        <p:txBody>
+          <a:bodyPr wrap="square">
+            <a:spAutoFit/>
+          </a:bodyPr>
+          <a:lstStyle/>
+          <a:p>
+            <a:pPr>
+              <a:spcAft>
+                <a:spcPts val="0"/>
+              </a:spcAft>
+            </a:pPr>
+            <a:r>
+              <a:rPr sz="3000" b="1">
+                <a:solidFill>
+                  <a:srgbClr val="FFFFFF"/>
+                </a:solidFill>
+                <a:latin typeface="Calibri"/>
+              </a:rPr>
+              <a:t>Hypotheses</a:t>
+            </a:r>
+          </a:p>
+          <a:p>
+            <a:pPr>
+              <a:spcAft>
+                <a:spcPts val="0"/>
+              </a:spcAft>
+            </a:pPr>
+            <a:r>
+              <a:rPr sz="1300" b="0">
+                <a:solidFill>
+                  <a:srgbClr val="C7DAF2"/>
+                </a:solidFill>
+                <a:latin typeface="Calibri"/>
+              </a:rPr>
+              <a:t>Each is tested by a specific experiment in Chapter 6</a:t>
+            </a:r>
+          </a:p>
+        </p:txBody>
+      </p:sp>
+      <p:sp>
+        <p:nvSpPr>
+          <p:cNvPr id="4" name="Rounded Rectangle 3"/>
+          <p:cNvSpPr/>
+          <p:nvPr/>
+        </p:nvSpPr>
+        <p:spPr>
+          <a:xfrm>
+            <a:off x="731520" y="1371600"/>
+            <a:ext cx="10698480" cy="1600200"/>
+          </a:xfrm>
+          <a:prstGeom prst="roundRect">
+            <a:avLst>
+              <a:gd name="adj" fmla="val 6000"/>
+            </a:avLst>
+          </a:prstGeom>
+          <a:solidFill>
+            <a:srgbClr val="EFF4FB"/>
+          </a:solidFill>
+          <a:ln w="15875">
+            <a:solidFill>
+              <a:srgbClr val="C7DAF2"/>
+            </a:solidFill>
+          </a:ln>
+          <a:effectLst/>
+        </p:spPr>
+        <p:style>
+          <a:lnRef idx="1">
+            <a:schemeClr val="accent1"/>
+          </a:lnRef>
+          <a:fillRef idx="3">
+            <a:schemeClr val="accent1"/>
+          </a:fillRef>
+          <a:effectRef idx="2">
+            <a:schemeClr val="accent1"/>
+          </a:effectRef>
+          <a:fontRef idx="minor">
+            <a:schemeClr val="lt1"/>
+          </a:fontRef>
+        </p:style>
+        <p:txBody>
+          <a:bodyPr rtlCol="0" anchor="ctr"/>
+          <a:lstStyle/>
+          <a:p>
+            <a:pPr algn="ctr"/>
+          </a:p>
+        </p:txBody>
+      </p:sp>
+      <p:sp>
+        <p:nvSpPr>
+          <p:cNvPr id="5" name="TextBox 4"/>
+          <p:cNvSpPr txBox="1"/>
+          <p:nvPr/>
+        </p:nvSpPr>
+        <p:spPr>
+          <a:xfrm>
+            <a:off x="1005840" y="1572768"/>
+            <a:ext cx="10149840" cy="1280160"/>
+          </a:xfrm>
+          <a:prstGeom prst="rect">
+            <a:avLst/>
+          </a:prstGeom>
+          <a:noFill/>
+        </p:spPr>
+        <p:txBody>
+          <a:bodyPr wrap="square">
+            <a:spAutoFit/>
+          </a:bodyPr>
+          <a:lstStyle/>
+          <a:p>
+            <a:pPr>
+              <a:spcAft>
+                <a:spcPts val="600"/>
+              </a:spcAft>
+            </a:pPr>
+            <a:r>
+              <a:rPr sz="1800" b="1">
+                <a:solidFill>
+                  <a:srgbClr val="0B2B5B"/>
+                </a:solidFill>
+                <a:latin typeface="Calibri"/>
+              </a:rPr>
+              <a:t>H1  Combining textual content with structural metadata gives more robust detection than content alone.</a:t>
+            </a:r>
+          </a:p>
+          <a:p>
+            <a:pPr>
+              <a:spcAft>
+                <a:spcPts val="600"/>
+              </a:spcAft>
+            </a:pPr>
+            <a:r>
+              <a:rPr sz="1500" b="0">
+                <a:solidFill>
+                  <a:srgbClr val="1F2A37"/>
+                </a:solidFill>
+                <a:latin typeface="Calibri"/>
+              </a:rPr>
+              <a:t>Tested by the content-only versus content–metadata comparison (Table 6.2).</a:t>
+            </a:r>
+          </a:p>
+        </p:txBody>
+      </p:sp>
+      <p:sp>
+        <p:nvSpPr>
+          <p:cNvPr id="6" name="Rounded Rectangle 5"/>
+          <p:cNvSpPr/>
+          <p:nvPr/>
+        </p:nvSpPr>
+        <p:spPr>
+          <a:xfrm>
+            <a:off x="731520" y="3200400"/>
+            <a:ext cx="10698480" cy="1600200"/>
+          </a:xfrm>
+          <a:prstGeom prst="roundRect">
+            <a:avLst>
+              <a:gd name="adj" fmla="val 6000"/>
+            </a:avLst>
+          </a:prstGeom>
+          <a:solidFill>
+            <a:srgbClr val="EFF4FB"/>
+          </a:solidFill>
+          <a:ln w="15875">
+            <a:solidFill>
+              <a:srgbClr val="C7DAF2"/>
+            </a:solidFill>
+          </a:ln>
+          <a:effectLst/>
+        </p:spPr>
+        <p:style>
+          <a:lnRef idx="1">
+            <a:schemeClr val="accent1"/>
+          </a:lnRef>
+          <a:fillRef idx="3">
+            <a:schemeClr val="accent1"/>
+          </a:fillRef>
+          <a:effectRef idx="2">
+            <a:schemeClr val="accent1"/>
+          </a:effectRef>
+          <a:fontRef idx="minor">
+            <a:schemeClr val="lt1"/>
+          </a:fontRef>
+        </p:style>
+        <p:txBody>
+          <a:bodyPr rtlCol="0" anchor="ctr"/>
+          <a:lstStyle/>
+          <a:p>
+            <a:pPr algn="ctr"/>
+          </a:p>
+        </p:txBody>
+      </p:sp>
+      <p:sp>
+        <p:nvSpPr>
+          <p:cNvPr id="7" name="TextBox 6"/>
+          <p:cNvSpPr txBox="1"/>
+          <p:nvPr/>
+        </p:nvSpPr>
+        <p:spPr>
+          <a:xfrm>
+            <a:off x="1005840" y="3401568"/>
+            <a:ext cx="10149840" cy="1280160"/>
+          </a:xfrm>
+          <a:prstGeom prst="rect">
+            <a:avLst/>
+          </a:prstGeom>
+          <a:noFill/>
+        </p:spPr>
+        <p:txBody>
+          <a:bodyPr wrap="square">
+            <a:spAutoFit/>
+          </a:bodyPr>
+          <a:lstStyle/>
+          <a:p>
+            <a:pPr>
+              <a:spcAft>
+                <a:spcPts val="600"/>
+              </a:spcAft>
+            </a:pPr>
+            <a:r>
+              <a:rPr sz="1800" b="1">
+                <a:solidFill>
+                  <a:srgbClr val="0B2B5B"/>
+                </a:solidFill>
+                <a:latin typeface="Calibri"/>
+              </a:rPr>
+              <a:t>H2  Reviewed, validation-gated retraining improves detection of represented modern threats while maintaining main-corpus performance.</a:t>
+            </a:r>
+          </a:p>
+          <a:p>
+            <a:pPr>
+              <a:spcAft>
+                <a:spcPts val="600"/>
+              </a:spcAft>
+            </a:pPr>
+            <a:r>
+              <a:rPr sz="1500" b="0">
+                <a:solidFill>
+                  <a:srgbClr val="1F2A37"/>
+                </a:solidFill>
+                <a:latin typeface="Calibri"/>
+              </a:rPr>
+              <a:t>Tested by the before/after adaptive-retraining experiment (Table 6.4).</a:t>
+            </a:r>
+          </a:p>
+        </p:txBody>
+      </p:sp>
+    </p:spTree>
+  </p:cSld>
+  <p:clrMapOvr>
+    <a:masterClrMapping/>
+  </p:clrMapOvr>
+</p:sld>
+</file>
+
+<file path=ppt/slides/slide7.xml><?xml version="1.0" encoding="utf-8"?>
+<p:sld xmlns:a="http://schemas.openxmlformats.org/drawingml/2006/main" xmlns:p="http://schemas.openxmlformats.org/presentationml/2006/main" xmlns:r="http://schemas.openxmlformats.org/officeDocument/2006/relationships">
+  <p:cSld>
+    <p:spTree>
+      <p:nvGrpSpPr>
+        <p:cNvPr id="1" name=""/>
+        <p:cNvGrpSpPr/>
+        <p:nvPr/>
+      </p:nvGrpSpPr>
+      <p:grpSpPr/>
+      <p:sp>
+        <p:nvSpPr>
+          <p:cNvPr id="2" name="Rectangle 1"/>
+          <p:cNvSpPr/>
+          <p:nvPr/>
+        </p:nvSpPr>
+        <p:spPr>
+          <a:xfrm>
+            <a:off x="0" y="0"/>
+            <a:ext cx="12191695" cy="960120"/>
+          </a:xfrm>
+          <a:prstGeom prst="rect">
+            <a:avLst/>
+          </a:prstGeom>
+          <a:solidFill>
+            <a:srgbClr val="0B2B5B"/>
+          </a:solidFill>
+          <a:ln>
+            <a:noFill/>
+          </a:ln>
+          <a:effectLst/>
+        </p:spPr>
+        <p:style>
+          <a:lnRef idx="1">
+            <a:schemeClr val="accent1"/>
+          </a:lnRef>
+          <a:fillRef idx="3">
+            <a:schemeClr val="accent1"/>
+          </a:fillRef>
+          <a:effectRef idx="2">
+            <a:schemeClr val="accent1"/>
+          </a:effectRef>
+          <a:fontRef idx="minor">
+            <a:schemeClr val="lt1"/>
+          </a:fontRef>
+        </p:style>
+        <p:txBody>
+          <a:bodyPr rtlCol="0" anchor="ctr"/>
+          <a:lstStyle/>
+          <a:p>
+            <a:pPr algn="ctr"/>
+          </a:p>
+        </p:txBody>
+      </p:sp>
+      <p:sp>
+        <p:nvSpPr>
+          <p:cNvPr id="3" name="TextBox 2"/>
+          <p:cNvSpPr txBox="1"/>
+          <p:nvPr/>
+        </p:nvSpPr>
+        <p:spPr>
+          <a:xfrm>
+            <a:off x="502920" y="128016"/>
+            <a:ext cx="11155680" cy="731520"/>
+          </a:xfrm>
+          <a:prstGeom prst="rect">
+            <a:avLst/>
+          </a:prstGeom>
+          <a:noFill/>
+        </p:spPr>
+        <p:txBody>
+          <a:bodyPr wrap="square">
+            <a:spAutoFit/>
+          </a:bodyPr>
+          <a:lstStyle/>
+          <a:p>
+            <a:pPr>
+              <a:spcAft>
+                <a:spcPts val="0"/>
+              </a:spcAft>
+            </a:pPr>
+            <a:r>
+              <a:rPr sz="3000" b="1">
+                <a:solidFill>
+                  <a:srgbClr val="FFFFFF"/>
+                </a:solidFill>
+                <a:latin typeface="Calibri"/>
+              </a:rPr>
+              <a:t>System Design</a:t>
+            </a:r>
+          </a:p>
+          <a:p>
+            <a:pPr>
+              <a:spcAft>
+                <a:spcPts val="0"/>
+              </a:spcAft>
+            </a:pPr>
+            <a:r>
+              <a:rPr sz="1300" b="0">
+                <a:solidFill>
+                  <a:srgbClr val="C7DAF2"/>
+                </a:solidFill>
+                <a:latin typeface="Calibri"/>
+              </a:rPr>
+              <a:t>Three feature streams fused into one classifier</a:t>
+            </a:r>
+          </a:p>
+        </p:txBody>
+      </p:sp>
+      <p:sp>
+        <p:nvSpPr>
+          <p:cNvPr id="4" name="Rounded Rectangle 3"/>
+          <p:cNvSpPr/>
+          <p:nvPr/>
+        </p:nvSpPr>
+        <p:spPr>
+          <a:xfrm>
+            <a:off x="731520" y="1371600"/>
+            <a:ext cx="10698480" cy="4846320"/>
+          </a:xfrm>
+          <a:prstGeom prst="roundRect">
+            <a:avLst>
+              <a:gd name="adj" fmla="val 6000"/>
+            </a:avLst>
+          </a:prstGeom>
+          <a:solidFill>
+            <a:srgbClr val="F7F9FC"/>
+          </a:solidFill>
+          <a:ln w="15875">
+            <a:solidFill>
+              <a:srgbClr val="B6C6DA"/>
+            </a:solidFill>
+          </a:ln>
+          <a:effectLst/>
+        </p:spPr>
+        <p:style>
+          <a:lnRef idx="1">
+            <a:schemeClr val="accent1"/>
+          </a:lnRef>
+          <a:fillRef idx="3">
+            <a:schemeClr val="accent1"/>
+          </a:fillRef>
+          <a:effectRef idx="2">
+            <a:schemeClr val="accent1"/>
+          </a:effectRef>
+          <a:fontRef idx="minor">
+            <a:schemeClr val="lt1"/>
+          </a:fontRef>
+        </p:style>
+        <p:txBody>
+          <a:bodyPr rtlCol="0" anchor="ctr"/>
+          <a:lstStyle/>
+          <a:p>
+            <a:pPr algn="ctr"/>
+          </a:p>
+        </p:txBody>
+      </p:sp>
+      <p:sp>
+        <p:nvSpPr>
+          <p:cNvPr id="5" name="TextBox 4"/>
+          <p:cNvSpPr txBox="1"/>
+          <p:nvPr/>
+        </p:nvSpPr>
+        <p:spPr>
+          <a:xfrm>
+            <a:off x="731520" y="3520440"/>
+            <a:ext cx="10698480" cy="548640"/>
+          </a:xfrm>
+          <a:prstGeom prst="rect">
+            <a:avLst/>
+          </a:prstGeom>
+          <a:noFill/>
+        </p:spPr>
+        <p:txBody>
+          <a:bodyPr wrap="none">
+            <a:spAutoFit/>
+          </a:bodyPr>
+          <a:lstStyle/>
+          <a:p>
+            <a:pPr algn="ctr"/>
+            <a:r>
+              <a:rPr sz="1400" i="1">
+                <a:solidFill>
+                  <a:srgbClr val="5B6672"/>
+                </a:solidFill>
+              </a:rPr>
+              <a:t>[ INSERT Figure 4.1 — system block diagram ]</a:t>
+            </a:r>
+          </a:p>
+        </p:txBody>
+      </p:sp>
+    </p:spTree>
+  </p:cSld>
+  <p:clrMapOvr>
+    <a:masterClrMapping/>
+  </p:clrMapOvr>
+</p:sld>
+</file>
+
+<file path=ppt/slides/slide8.xml><?xml version="1.0" encoding="utf-8"?>
+<p:sld xmlns:a="http://schemas.openxmlformats.org/drawingml/2006/main" xmlns:p="http://schemas.openxmlformats.org/presentationml/2006/main" xmlns:r="http://schemas.openxmlformats.org/officeDocument/2006/relationships">
+  <p:cSld>
+    <p:spTree>
+      <p:nvGrpSpPr>
+        <p:cNvPr id="1" name=""/>
+        <p:cNvGrpSpPr/>
+        <p:nvPr/>
+      </p:nvGrpSpPr>
+      <p:grpSpPr/>
+      <p:sp>
+        <p:nvSpPr>
+          <p:cNvPr id="2" name="Rectangle 1"/>
+          <p:cNvSpPr/>
+          <p:nvPr/>
+        </p:nvSpPr>
+        <p:spPr>
+          <a:xfrm>
+            <a:off x="0" y="0"/>
+            <a:ext cx="12191695" cy="960120"/>
+          </a:xfrm>
+          <a:prstGeom prst="rect">
+            <a:avLst/>
+          </a:prstGeom>
+          <a:solidFill>
+            <a:srgbClr val="0B2B5B"/>
+          </a:solidFill>
+          <a:ln>
+            <a:noFill/>
+          </a:ln>
+          <a:effectLst/>
+        </p:spPr>
+        <p:style>
+          <a:lnRef idx="1">
+            <a:schemeClr val="accent1"/>
+          </a:lnRef>
+          <a:fillRef idx="3">
+            <a:schemeClr val="accent1"/>
+          </a:fillRef>
+          <a:effectRef idx="2">
+            <a:schemeClr val="accent1"/>
+          </a:effectRef>
+          <a:fontRef idx="minor">
+            <a:schemeClr val="lt1"/>
+          </a:fontRef>
+        </p:style>
+        <p:txBody>
+          <a:bodyPr rtlCol="0" anchor="ctr"/>
+          <a:lstStyle/>
+          <a:p>
+            <a:pPr algn="ctr"/>
+          </a:p>
+        </p:txBody>
+      </p:sp>
+      <p:sp>
+        <p:nvSpPr>
+          <p:cNvPr id="3" name="TextBox 2"/>
+          <p:cNvSpPr txBox="1"/>
+          <p:nvPr/>
+        </p:nvSpPr>
+        <p:spPr>
+          <a:xfrm>
+            <a:off x="502920" y="128016"/>
+            <a:ext cx="11155680" cy="731520"/>
+          </a:xfrm>
+          <a:prstGeom prst="rect">
+            <a:avLst/>
+          </a:prstGeom>
+          <a:noFill/>
+        </p:spPr>
+        <p:txBody>
+          <a:bodyPr wrap="square">
+            <a:spAutoFit/>
+          </a:bodyPr>
+          <a:lstStyle/>
+          <a:p>
+            <a:pPr>
+              <a:spcAft>
+                <a:spcPts val="0"/>
+              </a:spcAft>
+            </a:pPr>
+            <a:r>
+              <a:rPr sz="3000" b="1">
+                <a:solidFill>
+                  <a:srgbClr val="FFFFFF"/>
+                </a:solidFill>
+                <a:latin typeface="Calibri"/>
+              </a:rPr>
+              <a:t>Implementation</a:t>
+            </a:r>
+          </a:p>
+        </p:txBody>
+      </p:sp>
+      <p:sp>
+        <p:nvSpPr>
+          <p:cNvPr id="4" name="TextBox 3"/>
+          <p:cNvSpPr txBox="1"/>
+          <p:nvPr/>
+        </p:nvSpPr>
+        <p:spPr>
+          <a:xfrm>
+            <a:off x="822960" y="1463040"/>
+            <a:ext cx="5120640" cy="4572000"/>
+          </a:xfrm>
+          <a:prstGeom prst="rect">
+            <a:avLst/>
+          </a:prstGeom>
+          <a:noFill/>
+        </p:spPr>
+        <p:txBody>
+          <a:bodyPr wrap="square">
+            <a:spAutoFit/>
+          </a:bodyPr>
+          <a:lstStyle/>
+          <a:p>
+            <a:pPr>
+              <a:spcAft>
+                <a:spcPts val="1400"/>
+              </a:spcAft>
+            </a:pPr>
+            <a:r>
+              <a:rPr sz="1800">
+                <a:solidFill>
+                  <a:srgbClr val="1F2A37"/>
+                </a:solidFill>
+                <a:latin typeface="Calibri"/>
+              </a:rPr>
+              <a:t>•  Python 3.13, scikit-learn, FastAPI</a:t>
+            </a:r>
+          </a:p>
+          <a:p>
+            <a:pPr>
+              <a:spcAft>
+                <a:spcPts val="1400"/>
+              </a:spcAft>
+            </a:pPr>
+            <a:r>
+              <a:rPr sz="1800">
+                <a:solidFill>
+                  <a:srgbClr val="1F2A37"/>
+                </a:solidFill>
+                <a:latin typeface="Calibri"/>
+              </a:rPr>
+              <a:t>•  Trained on 81,152 de-duplicated public emails</a:t>
+            </a:r>
+          </a:p>
+          <a:p>
+            <a:pPr>
+              <a:spcAft>
+                <a:spcPts val="1400"/>
+              </a:spcAft>
+            </a:pPr>
+            <a:r>
+              <a:rPr sz="1800">
+                <a:solidFill>
+                  <a:srgbClr val="1F2A37"/>
+                </a:solidFill>
+                <a:latin typeface="Calibri"/>
+              </a:rPr>
+              <a:t>•  Runs on a commodity CPU — no GPU required</a:t>
+            </a:r>
+          </a:p>
+          <a:p>
+            <a:pPr>
+              <a:spcAft>
+                <a:spcPts val="1400"/>
+              </a:spcAft>
+            </a:pPr>
+            <a:r>
+              <a:rPr sz="1800">
+                <a:solidFill>
+                  <a:srgbClr val="1F2A37"/>
+                </a:solidFill>
+                <a:latin typeface="Calibri"/>
+              </a:rPr>
+              <a:t>•  Live IMAP watcher over TLS, port 993</a:t>
+            </a:r>
+          </a:p>
+          <a:p>
+            <a:pPr>
+              <a:spcAft>
+                <a:spcPts val="1400"/>
+              </a:spcAft>
+            </a:pPr>
+            <a:r>
+              <a:rPr sz="1800">
+                <a:solidFill>
+                  <a:srgbClr val="1F2A37"/>
+                </a:solidFill>
+                <a:latin typeface="Calibri"/>
+              </a:rPr>
+              <a:t>•  Quarantine, review console, feedback store</a:t>
+            </a:r>
+          </a:p>
+        </p:txBody>
+      </p:sp>
+      <p:sp>
+        <p:nvSpPr>
+          <p:cNvPr id="5" name="Rounded Rectangle 4"/>
+          <p:cNvSpPr/>
+          <p:nvPr/>
+        </p:nvSpPr>
+        <p:spPr>
+          <a:xfrm>
+            <a:off x="6400800" y="1554480"/>
+            <a:ext cx="2377440" cy="1508760"/>
+          </a:xfrm>
+          <a:prstGeom prst="roundRect">
+            <a:avLst>
+              <a:gd name="adj" fmla="val 6000"/>
+            </a:avLst>
+          </a:prstGeom>
+          <a:solidFill>
+            <a:srgbClr val="EFF4FB"/>
+          </a:solidFill>
+          <a:ln w="15875">
+            <a:solidFill>
+              <a:srgbClr val="C7DAF2"/>
+            </a:solidFill>
+          </a:ln>
+          <a:effectLst/>
+        </p:spPr>
+        <p:style>
+          <a:lnRef idx="1">
+            <a:schemeClr val="accent1"/>
+          </a:lnRef>
+          <a:fillRef idx="3">
+            <a:schemeClr val="accent1"/>
+          </a:fillRef>
+          <a:effectRef idx="2">
+            <a:schemeClr val="accent1"/>
+          </a:effectRef>
+          <a:fontRef idx="minor">
+            <a:schemeClr val="lt1"/>
+          </a:fontRef>
+        </p:style>
+        <p:txBody>
+          <a:bodyPr rtlCol="0" anchor="ctr"/>
+          <a:lstStyle/>
+          <a:p>
+            <a:pPr algn="ctr"/>
+          </a:p>
+        </p:txBody>
+      </p:sp>
+      <p:sp>
+        <p:nvSpPr>
+          <p:cNvPr id="6" name="TextBox 5"/>
+          <p:cNvSpPr txBox="1"/>
+          <p:nvPr/>
+        </p:nvSpPr>
+        <p:spPr>
+          <a:xfrm>
+            <a:off x="6400800" y="1719072"/>
+            <a:ext cx="2377440" cy="1188720"/>
+          </a:xfrm>
+          <a:prstGeom prst="rect">
+            <a:avLst/>
+          </a:prstGeom>
+          <a:noFill/>
+        </p:spPr>
+        <p:txBody>
+          <a:bodyPr wrap="square">
+            <a:spAutoFit/>
+          </a:bodyPr>
+          <a:lstStyle/>
+          <a:p>
+            <a:pPr algn="ctr"/>
+            <a:r>
+              <a:rPr sz="3800" b="1">
+                <a:solidFill>
+                  <a:srgbClr val="1A73E8"/>
+                </a:solidFill>
+              </a:rPr>
+              <a:t>81,152</a:t>
+            </a:r>
+          </a:p>
+          <a:p>
+            <a:pPr algn="ctr"/>
+            <a:r>
+              <a:rPr sz="1300">
+                <a:solidFill>
+                  <a:srgbClr val="5B6672"/>
+                </a:solidFill>
+              </a:rPr>
+              <a:t>emails after de-duplication</a:t>
+            </a:r>
+          </a:p>
+        </p:txBody>
+      </p:sp>
+      <p:sp>
+        <p:nvSpPr>
+          <p:cNvPr id="7" name="Rounded Rectangle 6"/>
+          <p:cNvSpPr/>
+          <p:nvPr/>
+        </p:nvSpPr>
+        <p:spPr>
+          <a:xfrm>
+            <a:off x="9052560" y="1554480"/>
+            <a:ext cx="2377440" cy="1508760"/>
+          </a:xfrm>
+          <a:prstGeom prst="roundRect">
+            <a:avLst>
+              <a:gd name="adj" fmla="val 6000"/>
+            </a:avLst>
+          </a:prstGeom>
+          <a:solidFill>
+            <a:srgbClr val="EFF4FB"/>
+          </a:solidFill>
+          <a:ln w="15875">
+            <a:solidFill>
+              <a:srgbClr val="C7DAF2"/>
+            </a:solidFill>
+          </a:ln>
+          <a:effectLst/>
+        </p:spPr>
+        <p:style>
+          <a:lnRef idx="1">
+            <a:schemeClr val="accent1"/>
+          </a:lnRef>
+          <a:fillRef idx="3">
+            <a:schemeClr val="accent1"/>
+          </a:fillRef>
+          <a:effectRef idx="2">
+            <a:schemeClr val="accent1"/>
+          </a:effectRef>
+          <a:fontRef idx="minor">
+            <a:schemeClr val="lt1"/>
+          </a:fontRef>
+        </p:style>
+        <p:txBody>
+          <a:bodyPr rtlCol="0" anchor="ctr"/>
+          <a:lstStyle/>
+          <a:p>
+            <a:pPr algn="ctr"/>
+          </a:p>
+        </p:txBody>
+      </p:sp>
+      <p:sp>
+        <p:nvSpPr>
+          <p:cNvPr id="8" name="TextBox 7"/>
+          <p:cNvSpPr txBox="1"/>
+          <p:nvPr/>
+        </p:nvSpPr>
+        <p:spPr>
+          <a:xfrm>
+            <a:off x="9052560" y="1719072"/>
+            <a:ext cx="2377440" cy="1188720"/>
+          </a:xfrm>
+          <a:prstGeom prst="rect">
+            <a:avLst/>
+          </a:prstGeom>
+          <a:noFill/>
+        </p:spPr>
+        <p:txBody>
+          <a:bodyPr wrap="square">
+            <a:spAutoFit/>
+          </a:bodyPr>
+          <a:lstStyle/>
+          <a:p>
+            <a:pPr algn="ctr"/>
+            <a:r>
+              <a:rPr sz="3800" b="1">
+                <a:solidFill>
+                  <a:srgbClr val="1A73E8"/>
+                </a:solidFill>
+              </a:rPr>
+              <a:t>13 ms</a:t>
+            </a:r>
+          </a:p>
+          <a:p>
+            <a:pPr algn="ctr"/>
+            <a:r>
+              <a:rPr sz="1300">
+                <a:solidFill>
+                  <a:srgbClr val="5B6672"/>
+                </a:solidFill>
+              </a:rPr>
+              <a:t>median latency per email (CPU)</a:t>
+            </a:r>
+          </a:p>
+        </p:txBody>
+      </p:sp>
+      <p:sp>
+        <p:nvSpPr>
+          <p:cNvPr id="9" name="Rounded Rectangle 8"/>
+          <p:cNvSpPr/>
+          <p:nvPr/>
+        </p:nvSpPr>
+        <p:spPr>
+          <a:xfrm>
+            <a:off x="6400800" y="3383280"/>
+            <a:ext cx="2377440" cy="1508760"/>
+          </a:xfrm>
+          <a:prstGeom prst="roundRect">
+            <a:avLst>
+              <a:gd name="adj" fmla="val 6000"/>
+            </a:avLst>
+          </a:prstGeom>
+          <a:solidFill>
+            <a:srgbClr val="EFF4FB"/>
+          </a:solidFill>
+          <a:ln w="15875">
+            <a:solidFill>
+              <a:srgbClr val="C7DAF2"/>
+            </a:solidFill>
+          </a:ln>
+          <a:effectLst/>
+        </p:spPr>
+        <p:style>
+          <a:lnRef idx="1">
+            <a:schemeClr val="accent1"/>
+          </a:lnRef>
+          <a:fillRef idx="3">
+            <a:schemeClr val="accent1"/>
+          </a:fillRef>
+          <a:effectRef idx="2">
+            <a:schemeClr val="accent1"/>
+          </a:effectRef>
+          <a:fontRef idx="minor">
+            <a:schemeClr val="lt1"/>
+          </a:fontRef>
+        </p:style>
+        <p:txBody>
+          <a:bodyPr rtlCol="0" anchor="ctr"/>
+          <a:lstStyle/>
+          <a:p>
+            <a:pPr algn="ctr"/>
+          </a:p>
+        </p:txBody>
+      </p:sp>
+      <p:sp>
+        <p:nvSpPr>
+          <p:cNvPr id="10" name="TextBox 9"/>
+          <p:cNvSpPr txBox="1"/>
+          <p:nvPr/>
+        </p:nvSpPr>
+        <p:spPr>
+          <a:xfrm>
+            <a:off x="6400800" y="3547872"/>
+            <a:ext cx="2377440" cy="1188720"/>
+          </a:xfrm>
+          <a:prstGeom prst="rect">
+            <a:avLst/>
+          </a:prstGeom>
+          <a:noFill/>
+        </p:spPr>
+        <p:txBody>
+          <a:bodyPr wrap="square">
+            <a:spAutoFit/>
+          </a:bodyPr>
+          <a:lstStyle/>
+          <a:p>
+            <a:pPr algn="ctr"/>
+            <a:r>
+              <a:rPr sz="3800" b="1">
+                <a:solidFill>
+                  <a:srgbClr val="1A73E8"/>
+                </a:solidFill>
+              </a:rPr>
+              <a:t>13</a:t>
+            </a:r>
+          </a:p>
+          <a:p>
+            <a:pPr algn="ctr"/>
+            <a:r>
+              <a:rPr sz="1300">
+                <a:solidFill>
+                  <a:srgbClr val="5B6672"/>
+                </a:solidFill>
+              </a:rPr>
+              <a:t>structural metadata signals</a:t>
+            </a:r>
+          </a:p>
+        </p:txBody>
+      </p:sp>
+      <p:sp>
+        <p:nvSpPr>
+          <p:cNvPr id="11" name="Rounded Rectangle 10"/>
+          <p:cNvSpPr/>
+          <p:nvPr/>
+        </p:nvSpPr>
+        <p:spPr>
+          <a:xfrm>
+            <a:off x="9052560" y="3383280"/>
+            <a:ext cx="2377440" cy="1508760"/>
+          </a:xfrm>
+          <a:prstGeom prst="roundRect">
+            <a:avLst>
+              <a:gd name="adj" fmla="val 6000"/>
+            </a:avLst>
+          </a:prstGeom>
+          <a:solidFill>
+            <a:srgbClr val="EFF4FB"/>
+          </a:solidFill>
+          <a:ln w="15875">
+            <a:solidFill>
+              <a:srgbClr val="C7DAF2"/>
+            </a:solidFill>
+          </a:ln>
+          <a:effectLst/>
+        </p:spPr>
+        <p:style>
+          <a:lnRef idx="1">
+            <a:schemeClr val="accent1"/>
+          </a:lnRef>
+          <a:fillRef idx="3">
+            <a:schemeClr val="accent1"/>
+          </a:fillRef>
+          <a:effectRef idx="2">
+            <a:schemeClr val="accent1"/>
+          </a:effectRef>
+          <a:fontRef idx="minor">
+            <a:schemeClr val="lt1"/>
+          </a:fontRef>
+        </p:style>
+        <p:txBody>
+          <a:bodyPr rtlCol="0" anchor="ctr"/>
+          <a:lstStyle/>
+          <a:p>
+            <a:pPr algn="ctr"/>
+          </a:p>
+        </p:txBody>
+      </p:sp>
+      <p:sp>
+        <p:nvSpPr>
+          <p:cNvPr id="12" name="TextBox 11"/>
+          <p:cNvSpPr txBox="1"/>
+          <p:nvPr/>
+        </p:nvSpPr>
+        <p:spPr>
+          <a:xfrm>
+            <a:off x="9052560" y="3547872"/>
+            <a:ext cx="2377440" cy="1188720"/>
+          </a:xfrm>
+          <a:prstGeom prst="rect">
+            <a:avLst/>
+          </a:prstGeom>
+          <a:noFill/>
+        </p:spPr>
+        <p:txBody>
+          <a:bodyPr wrap="square">
+            <a:spAutoFit/>
+          </a:bodyPr>
+          <a:lstStyle/>
+          <a:p>
+            <a:pPr algn="ctr"/>
+            <a:r>
+              <a:rPr sz="3800" b="1">
+                <a:solidFill>
+                  <a:srgbClr val="1A73E8"/>
+                </a:solidFill>
+              </a:rPr>
+              <a:t>75 / 25</a:t>
+            </a:r>
+          </a:p>
+          <a:p>
+            <a:pPr algn="ctr"/>
+            <a:r>
+              <a:rPr sz="1300">
+                <a:solidFill>
+                  <a:srgbClr val="5B6672"/>
+                </a:solidFill>
+              </a:rPr>
+              <a:t>stratified train / test split</a:t>
+            </a:r>
+          </a:p>
+        </p:txBody>
+      </p:sp>
+    </p:spTree>
+  </p:cSld>
+  <p:clrMapOvr>
+    <a:masterClrMapping/>
+  </p:clrMapOvr>
+</p:sld>
+</file>
+
+<file path=ppt/slides/slide9.xml><?xml version="1.0" encoding="utf-8"?>
+<p:sld xmlns:a="http://schemas.openxmlformats.org/drawingml/2006/main" xmlns:p="http://schemas.openxmlformats.org/presentationml/2006/main" xmlns:r="http://schemas.openxmlformats.org/officeDocument/2006/relationships">
+  <p:cSld>
+    <p:spTree>
+      <p:nvGrpSpPr>
+        <p:cNvPr id="1" name=""/>
+        <p:cNvGrpSpPr/>
+        <p:nvPr/>
+      </p:nvGrpSpPr>
+      <p:grpSpPr/>
+      <p:sp>
+        <p:nvSpPr>
+          <p:cNvPr id="2" name="Rectangle 1"/>
+          <p:cNvSpPr/>
+          <p:nvPr/>
+        </p:nvSpPr>
+        <p:spPr>
+          <a:xfrm>
+            <a:off x="0" y="0"/>
+            <a:ext cx="12191695" cy="960120"/>
+          </a:xfrm>
+          <a:prstGeom prst="rect">
+            <a:avLst/>
+          </a:prstGeom>
+          <a:solidFill>
+            <a:srgbClr val="0B2B5B"/>
+          </a:solidFill>
+          <a:ln>
+            <a:noFill/>
+          </a:ln>
+          <a:effectLst/>
+        </p:spPr>
+        <p:style>
+          <a:lnRef idx="1">
+            <a:schemeClr val="accent1"/>
+          </a:lnRef>
+          <a:fillRef idx="3">
+            <a:schemeClr val="accent1"/>
+          </a:fillRef>
+          <a:effectRef idx="2">
+            <a:schemeClr val="accent1"/>
+          </a:effectRef>
+          <a:fontRef idx="minor">
+            <a:schemeClr val="lt1"/>
+          </a:fontRef>
+        </p:style>
+        <p:txBody>
+          <a:bodyPr rtlCol="0" anchor="ctr"/>
+          <a:lstStyle/>
+          <a:p>
+            <a:pPr algn="ctr"/>
+          </a:p>
+        </p:txBody>
+      </p:sp>
+      <p:sp>
+        <p:nvSpPr>
+          <p:cNvPr id="3" name="TextBox 2"/>
+          <p:cNvSpPr txBox="1"/>
+          <p:nvPr/>
+        </p:nvSpPr>
+        <p:spPr>
+          <a:xfrm>
+            <a:off x="502920" y="128016"/>
+            <a:ext cx="11155680" cy="731520"/>
+          </a:xfrm>
+          <a:prstGeom prst="rect">
+            <a:avLst/>
+          </a:prstGeom>
+          <a:noFill/>
+        </p:spPr>
+        <p:txBody>
+          <a:bodyPr wrap="square">
+            <a:spAutoFit/>
+          </a:bodyPr>
+          <a:lstStyle/>
+          <a:p>
+            <a:pPr>
+              <a:spcAft>
+                <a:spcPts val="0"/>
+              </a:spcAft>
+            </a:pPr>
+            <a:r>
+              <a:rPr sz="3000" b="1">
+                <a:solidFill>
+                  <a:srgbClr val="FFFFFF"/>
+                </a:solidFill>
+                <a:latin typeface="Calibri"/>
+              </a:rPr>
+              <a:t>Results — Held-out Test Split</a:t>
+            </a:r>
+          </a:p>
+          <a:p>
+            <a:pPr>
+              <a:spcAft>
+                <a:spcPts val="0"/>
+              </a:spcAft>
+            </a:pPr>
+            <a:r>
+              <a:rPr sz="1300" b="0">
+                <a:solidFill>
+                  <a:srgbClr val="C7DAF2"/>
+                </a:solidFill>
+                <a:latin typeface="Calibri"/>
+              </a:rPr>
+              <a:t>n = 20,288 emails never seen in training  •  deployed threshold 0.55</a:t>
+            </a:r>
+          </a:p>
+        </p:txBody>
+      </p:sp>
+      <p:sp>
+        <p:nvSpPr>
+          <p:cNvPr id="4" name="Rounded Rectangle 3"/>
+          <p:cNvSpPr/>
+          <p:nvPr/>
+        </p:nvSpPr>
+        <p:spPr>
+          <a:xfrm>
+            <a:off x="640080" y="1325880"/>
+            <a:ext cx="2651760" cy="1508760"/>
+          </a:xfrm>
+          <a:prstGeom prst="roundRect">
+            <a:avLst>
+              <a:gd name="adj" fmla="val 6000"/>
+            </a:avLst>
+          </a:prstGeom>
+          <a:solidFill>
+            <a:srgbClr val="EFF4FB"/>
+          </a:solidFill>
+          <a:ln w="15875">
+            <a:solidFill>
+              <a:srgbClr val="C7DAF2"/>
+            </a:solidFill>
+          </a:ln>
+          <a:effectLst/>
+        </p:spPr>
+        <p:style>
+          <a:lnRef idx="1">
+            <a:schemeClr val="accent1"/>
+          </a:lnRef>
+          <a:fillRef idx="3">
+            <a:schemeClr val="accent1"/>
+          </a:fillRef>
+          <a:effectRef idx="2">
+            <a:schemeClr val="accent1"/>
+          </a:effectRef>
+          <a:fontRef idx="minor">
+            <a:schemeClr val="lt1"/>
+          </a:fontRef>
+        </p:style>
+        <p:txBody>
+          <a:bodyPr rtlCol="0" anchor="ctr"/>
+          <a:lstStyle/>
+          <a:p>
+            <a:pPr algn="ctr"/>
+          </a:p>
+        </p:txBody>
+      </p:sp>
+      <p:sp>
+        <p:nvSpPr>
+          <p:cNvPr id="5" name="TextBox 4"/>
+          <p:cNvSpPr txBox="1"/>
+          <p:nvPr/>
+        </p:nvSpPr>
+        <p:spPr>
+          <a:xfrm>
+            <a:off x="640080" y="1490472"/>
+            <a:ext cx="2651760" cy="1188720"/>
+          </a:xfrm>
+          <a:prstGeom prst="rect">
+            <a:avLst/>
+          </a:prstGeom>
+          <a:noFill/>
+        </p:spPr>
+        <p:txBody>
+          <a:bodyPr wrap="square">
+            <a:spAutoFit/>
+          </a:bodyPr>
+          <a:lstStyle/>
+          <a:p>
+            <a:pPr algn="ctr"/>
+            <a:r>
+              <a:rPr sz="3800" b="1">
+                <a:solidFill>
+                  <a:srgbClr val="1A73E8"/>
+                </a:solidFill>
+              </a:rPr>
+              <a:t>99.2%</a:t>
+            </a:r>
+          </a:p>
+          <a:p>
+            <a:pPr algn="ctr"/>
+            <a:r>
+              <a:rPr sz="1300">
+                <a:solidFill>
+                  <a:srgbClr val="5B6672"/>
+                </a:solidFill>
+              </a:rPr>
+              <a:t>Accuracy</a:t>
+            </a:r>
+          </a:p>
+        </p:txBody>
+      </p:sp>
+      <p:sp>
+        <p:nvSpPr>
+          <p:cNvPr id="6" name="Rounded Rectangle 5"/>
+          <p:cNvSpPr/>
+          <p:nvPr/>
+        </p:nvSpPr>
+        <p:spPr>
+          <a:xfrm>
+            <a:off x="3429000" y="1325880"/>
+            <a:ext cx="2651760" cy="1508760"/>
+          </a:xfrm>
+          <a:prstGeom prst="roundRect">
+            <a:avLst>
+              <a:gd name="adj" fmla="val 6000"/>
+            </a:avLst>
+          </a:prstGeom>
+          <a:solidFill>
+            <a:srgbClr val="EFF4FB"/>
+          </a:solidFill>
+          <a:ln w="15875">
+            <a:solidFill>
+              <a:srgbClr val="C7DAF2"/>
+            </a:solidFill>
+          </a:ln>
+          <a:effectLst/>
+        </p:spPr>
+        <p:style>
+          <a:lnRef idx="1">
+            <a:schemeClr val="accent1"/>
+          </a:lnRef>
+          <a:fillRef idx="3">
+            <a:schemeClr val="accent1"/>
+          </a:fillRef>
+          <a:effectRef idx="2">
+            <a:schemeClr val="accent1"/>
+          </a:effectRef>
+          <a:fontRef idx="minor">
+            <a:schemeClr val="lt1"/>
+          </a:fontRef>
+        </p:style>
+        <p:txBody>
+          <a:bodyPr rtlCol="0" anchor="ctr"/>
+          <a:lstStyle/>
+          <a:p>
+            <a:pPr algn="ctr"/>
+          </a:p>
+        </p:txBody>
+      </p:sp>
+      <p:sp>
+        <p:nvSpPr>
+          <p:cNvPr id="7" name="TextBox 6"/>
+          <p:cNvSpPr txBox="1"/>
+          <p:nvPr/>
+        </p:nvSpPr>
+        <p:spPr>
+          <a:xfrm>
+            <a:off x="3429000" y="1490472"/>
+            <a:ext cx="2651760" cy="1188720"/>
+          </a:xfrm>
+          <a:prstGeom prst="rect">
+            <a:avLst/>
+          </a:prstGeom>
+          <a:noFill/>
+        </p:spPr>
+        <p:txBody>
+          <a:bodyPr wrap="square">
+            <a:spAutoFit/>
+          </a:bodyPr>
+          <a:lstStyle/>
+          <a:p>
+            <a:pPr algn="ctr"/>
+            <a:r>
+              <a:rPr sz="3800" b="1">
+                <a:solidFill>
+                  <a:srgbClr val="1A73E8"/>
+                </a:solidFill>
+              </a:rPr>
+              <a:t>0.991</a:t>
+            </a:r>
+          </a:p>
+          <a:p>
+            <a:pPr algn="ctr"/>
+            <a:r>
+              <a:rPr sz="1300">
+                <a:solidFill>
+                  <a:srgbClr val="5B6672"/>
+                </a:solidFill>
+              </a:rPr>
+              <a:t>Precision</a:t>
+            </a:r>
+          </a:p>
+        </p:txBody>
+      </p:sp>
+      <p:sp>
+        <p:nvSpPr>
+          <p:cNvPr id="8" name="Rounded Rectangle 7"/>
+          <p:cNvSpPr/>
+          <p:nvPr/>
+        </p:nvSpPr>
+        <p:spPr>
+          <a:xfrm>
+            <a:off x="6217920" y="1325880"/>
+            <a:ext cx="2651760" cy="1508760"/>
+          </a:xfrm>
+          <a:prstGeom prst="roundRect">
+            <a:avLst>
+              <a:gd name="adj" fmla="val 6000"/>
+            </a:avLst>
+          </a:prstGeom>
+          <a:solidFill>
+            <a:srgbClr val="EFF4FB"/>
+          </a:solidFill>
+          <a:ln w="15875">
+            <a:solidFill>
+              <a:srgbClr val="C7DAF2"/>
+            </a:solidFill>
+          </a:ln>
+          <a:effectLst/>
+        </p:spPr>
+        <p:style>
+          <a:lnRef idx="1">
+            <a:schemeClr val="accent1"/>
+          </a:lnRef>
+          <a:fillRef idx="3">
+            <a:schemeClr val="accent1"/>
+          </a:fillRef>
+          <a:effectRef idx="2">
+            <a:schemeClr val="accent1"/>
+          </a:effectRef>
+          <a:fontRef idx="minor">
+            <a:schemeClr val="lt1"/>
+          </a:fontRef>
+        </p:style>
+        <p:txBody>
+          <a:bodyPr rtlCol="0" anchor="ctr"/>
+          <a:lstStyle/>
+          <a:p>
+            <a:pPr algn="ctr"/>
+          </a:p>
+        </p:txBody>
+      </p:sp>
+      <p:sp>
+        <p:nvSpPr>
+          <p:cNvPr id="9" name="TextBox 8"/>
+          <p:cNvSpPr txBox="1"/>
+          <p:nvPr/>
+        </p:nvSpPr>
+        <p:spPr>
+          <a:xfrm>
+            <a:off x="6217920" y="1490472"/>
+            <a:ext cx="2651760" cy="1188720"/>
+          </a:xfrm>
+          <a:prstGeom prst="rect">
+            <a:avLst/>
+          </a:prstGeom>
+          <a:noFill/>
+        </p:spPr>
+        <p:txBody>
+          <a:bodyPr wrap="square">
+            <a:spAutoFit/>
+          </a:bodyPr>
+          <a:lstStyle/>
+          <a:p>
+            <a:pPr algn="ctr"/>
+            <a:r>
+              <a:rPr sz="3800" b="1">
+                <a:solidFill>
+                  <a:srgbClr val="1A73E8"/>
+                </a:solidFill>
+              </a:rPr>
+              <a:t>0.992</a:t>
+            </a:r>
+          </a:p>
+          <a:p>
+            <a:pPr algn="ctr"/>
+            <a:r>
+              <a:rPr sz="1300">
+                <a:solidFill>
+                  <a:srgbClr val="5B6672"/>
+                </a:solidFill>
+              </a:rPr>
+              <a:t>Recall</a:t>
+            </a:r>
+          </a:p>
+        </p:txBody>
+      </p:sp>
+      <p:sp>
+        <p:nvSpPr>
+          <p:cNvPr id="10" name="Rounded Rectangle 9"/>
+          <p:cNvSpPr/>
+          <p:nvPr/>
+        </p:nvSpPr>
+        <p:spPr>
+          <a:xfrm>
+            <a:off x="9006840" y="1325880"/>
+            <a:ext cx="2651760" cy="1508760"/>
+          </a:xfrm>
+          <a:prstGeom prst="roundRect">
+            <a:avLst>
+              <a:gd name="adj" fmla="val 6000"/>
+            </a:avLst>
+          </a:prstGeom>
+          <a:solidFill>
+            <a:srgbClr val="EFF4FB"/>
+          </a:solidFill>
+          <a:ln w="15875">
+            <a:solidFill>
+              <a:srgbClr val="C7DAF2"/>
+            </a:solidFill>
+          </a:ln>
+          <a:effectLst/>
+        </p:spPr>
+        <p:style>
+          <a:lnRef idx="1">
+            <a:schemeClr val="accent1"/>
+          </a:lnRef>
+          <a:fillRef idx="3">
+            <a:schemeClr val="accent1"/>
+          </a:fillRef>
+          <a:effectRef idx="2">
+            <a:schemeClr val="accent1"/>
+          </a:effectRef>
+          <a:fontRef idx="minor">
+            <a:schemeClr val="lt1"/>
+          </a:fontRef>
+        </p:style>
+        <p:txBody>
+          <a:bodyPr rtlCol="0" anchor="ctr"/>
+          <a:lstStyle/>
+          <a:p>
+            <a:pPr algn="ctr"/>
+          </a:p>
+        </p:txBody>
+      </p:sp>
+      <p:sp>
+        <p:nvSpPr>
+          <p:cNvPr id="11" name="TextBox 10"/>
+          <p:cNvSpPr txBox="1"/>
+          <p:nvPr/>
+        </p:nvSpPr>
+        <p:spPr>
+          <a:xfrm>
+            <a:off x="9006840" y="1490472"/>
+            <a:ext cx="2651760" cy="1188720"/>
+          </a:xfrm>
+          <a:prstGeom prst="rect">
+            <a:avLst/>
+          </a:prstGeom>
+          <a:noFill/>
+        </p:spPr>
+        <p:txBody>
+          <a:bodyPr wrap="square">
+            <a:spAutoFit/>
+          </a:bodyPr>
+          <a:lstStyle/>
+          <a:p>
+            <a:pPr algn="ctr"/>
+            <a:r>
+              <a:rPr sz="3800" b="1">
+                <a:solidFill>
+                  <a:srgbClr val="1A73E8"/>
+                </a:solidFill>
+              </a:rPr>
+              <a:t>1.000</a:t>
+            </a:r>
+          </a:p>
+          <a:p>
+            <a:pPr algn="ctr"/>
+            <a:r>
+              <a:rPr sz="1300">
+                <a:solidFill>
+                  <a:srgbClr val="5B6672"/>
+                </a:solidFill>
+              </a:rPr>
+              <a:t>ROC-AUC</a:t>
+            </a:r>
+          </a:p>
+        </p:txBody>
+      </p:sp>
+      <p:graphicFrame>
+        <p:nvGraphicFramePr>
+          <p:cNvPr id="12" name="Table 11"/>
+          <p:cNvGraphicFramePr>
+            <a:graphicFrameLocks noGrp="1"/>
+          </p:cNvGraphicFramePr>
+          <p:nvPr/>
+        </p:nvGraphicFramePr>
+        <p:xfrm>
+          <a:off x="731520" y="3200400"/>
+          <a:ext cx="5669280" cy="1920240"/>
+        </p:xfrm>
+        <a:graphic>
+          <a:graphicData uri="http://schemas.openxmlformats.org/drawingml/2006/table">
+            <a:tbl>
+              <a:tblPr firstRow="1" bandRow="1">
+                <a:tableStyleId>{5C22544A-7EE6-4342-B048-85BDC9FD1C3A}</a:tableStyleId>
+              </a:tblPr>
+              <a:tblGrid>
+                <a:gridCol w="3840480"/>
+                <a:gridCol w="1828800"/>
+              </a:tblGrid>
+              <a:tr h="384048">
+                <a:tc>
+                  <a:txBody>
+                    <a:bodyPr/>
+                    <a:lstStyle/>
+                    <a:p>
+                      <a:pPr algn="l"/>
+                      <a:r>
+                        <a:rPr sz="1400" b="1">
+                          <a:solidFill>
+                            <a:srgbClr val="FFFFFF"/>
+                          </a:solidFill>
+                          <a:latin typeface="Calibri"/>
+                        </a:rPr>
+                        <a:t>Confusion matrix</a:t>
+                      </a:r>
+                    </a:p>
+                  </a:txBody>
+                  <a:tcPr/>
+                </a:tc>
+                <a:tc>
+                  <a:txBody>
+                    <a:bodyPr/>
+                    <a:lstStyle/>
+                    <a:p>
+                      <a:pPr algn="ctr"/>
+                      <a:r>
+                        <a:rPr sz="1400" b="1">
+                          <a:solidFill>
+                            <a:srgbClr val="FFFFFF"/>
+                          </a:solidFill>
+                          <a:latin typeface="Calibri"/>
+                        </a:rPr>
+                        <a:t>Count</a:t>
+                      </a:r>
+                    </a:p>
+                  </a:txBody>
+                  <a:tcPr/>
+                </a:tc>
+              </a:tr>
+              <a:tr h="384048">
+                <a:tc>
+                  <a:txBody>
+                    <a:bodyPr/>
+                    <a:lstStyle/>
+                    <a:p>
+                      <a:pPr algn="l"/>
+                      <a:r>
+                        <a:rPr sz="1400" b="0">
+                          <a:solidFill>
+                            <a:srgbClr val="1F2A37"/>
+                          </a:solidFill>
+                          <a:latin typeface="Calibri"/>
+                        </a:rPr>
+                        <a:t>True positives (phishing caught)</a:t>
+                      </a:r>
+                    </a:p>
+                  </a:txBody>
+                  <a:tcPr/>
+                </a:tc>
+                <a:tc>
+                  <a:txBody>
+                    <a:bodyPr/>
+                    <a:lstStyle/>
+                    <a:p>
+                      <a:pPr algn="ctr"/>
+                      <a:r>
+                        <a:rPr sz="1400" b="0">
+                          <a:solidFill>
+                            <a:srgbClr val="1F2A37"/>
+                          </a:solidFill>
+                          <a:latin typeface="Calibri"/>
+                        </a:rPr>
+                        <a:t>10,399</a:t>
+                      </a:r>
+                    </a:p>
+                  </a:txBody>
+                  <a:tcPr/>
+                </a:tc>
+              </a:tr>
+              <a:tr h="384048">
+                <a:tc>
+                  <a:txBody>
+                    <a:bodyPr/>
+                    <a:lstStyle/>
+                    <a:p>
+                      <a:pPr algn="l"/>
+                      <a:r>
+                        <a:rPr sz="1400" b="0">
+                          <a:solidFill>
+                            <a:srgbClr val="1F2A37"/>
+                          </a:solidFill>
+                          <a:latin typeface="Calibri"/>
+                        </a:rPr>
+                        <a:t>False negatives (phishing missed)</a:t>
+                      </a:r>
+                    </a:p>
+                  </a:txBody>
+                  <a:tcPr/>
+                </a:tc>
+                <a:tc>
+                  <a:txBody>
+                    <a:bodyPr/>
+                    <a:lstStyle/>
+                    <a:p>
+                      <a:pPr algn="ctr"/>
+                      <a:r>
+                        <a:rPr sz="1400" b="0">
+                          <a:solidFill>
+                            <a:srgbClr val="1F2A37"/>
+                          </a:solidFill>
+                          <a:latin typeface="Calibri"/>
+                        </a:rPr>
+                        <a:t>80</a:t>
+                      </a:r>
+                    </a:p>
+                  </a:txBody>
+                  <a:tcPr/>
+                </a:tc>
+              </a:tr>
+              <a:tr h="384048">
+                <a:tc>
+                  <a:txBody>
+                    <a:bodyPr/>
+                    <a:lstStyle/>
+                    <a:p>
+                      <a:pPr algn="l"/>
+                      <a:r>
+                        <a:rPr sz="1400" b="0">
+                          <a:solidFill>
+                            <a:srgbClr val="1F2A37"/>
+                          </a:solidFill>
+                          <a:latin typeface="Calibri"/>
+                        </a:rPr>
+                        <a:t>True negatives (legitimate passed)</a:t>
+                      </a:r>
+                    </a:p>
+                  </a:txBody>
+                  <a:tcPr/>
+                </a:tc>
+                <a:tc>
+                  <a:txBody>
+                    <a:bodyPr/>
+                    <a:lstStyle/>
+                    <a:p>
+                      <a:pPr algn="ctr"/>
+                      <a:r>
+                        <a:rPr sz="1400" b="0">
+                          <a:solidFill>
+                            <a:srgbClr val="1F2A37"/>
+                          </a:solidFill>
+                          <a:latin typeface="Calibri"/>
+                        </a:rPr>
+                        <a:t>9,719</a:t>
+                      </a:r>
+                    </a:p>
+                  </a:txBody>
+                  <a:tcPr/>
+                </a:tc>
+              </a:tr>
+              <a:tr h="384048">
+                <a:tc>
+                  <a:txBody>
+                    <a:bodyPr/>
+                    <a:lstStyle/>
+                    <a:p>
+                      <a:pPr algn="l"/>
+                      <a:r>
+                        <a:rPr sz="1400" b="0">
+                          <a:solidFill>
+                            <a:srgbClr val="1F2A37"/>
+                          </a:solidFill>
+                          <a:latin typeface="Calibri"/>
+                        </a:rPr>
+                        <a:t>False positives (legitimate flagged)</a:t>
+                      </a:r>
+                    </a:p>
+                  </a:txBody>
+                  <a:tcPr/>
+                </a:tc>
+                <a:tc>
+                  <a:txBody>
+                    <a:bodyPr/>
+                    <a:lstStyle/>
+                    <a:p>
+                      <a:pPr algn="ctr"/>
+                      <a:r>
+                        <a:rPr sz="1400" b="0">
+                          <a:solidFill>
+                            <a:srgbClr val="1F2A37"/>
+                          </a:solidFill>
+                          <a:latin typeface="Calibri"/>
+                        </a:rPr>
+                        <a:t>90</a:t>
+                      </a:r>
+                    </a:p>
+                  </a:txBody>
+                  <a:tcPr/>
+                </a:tc>
+              </a:tr>
+            </a:tbl>
+          </a:graphicData>
+        </a:graphic>
+      </p:graphicFrame>
+      <p:sp>
+        <p:nvSpPr>
+          <p:cNvPr id="13" name="Rounded Rectangle 12"/>
+          <p:cNvSpPr/>
+          <p:nvPr/>
+        </p:nvSpPr>
+        <p:spPr>
+          <a:xfrm>
+            <a:off x="6858000" y="3200400"/>
+            <a:ext cx="4572000" cy="1920240"/>
+          </a:xfrm>
+          <a:prstGeom prst="roundRect">
+            <a:avLst>
+              <a:gd name="adj" fmla="val 6000"/>
+            </a:avLst>
+          </a:prstGeom>
+          <a:solidFill>
+            <a:srgbClr val="EFF4FB"/>
+          </a:solidFill>
+          <a:ln w="15875">
+            <a:solidFill>
+              <a:srgbClr val="C7DAF2"/>
+            </a:solidFill>
+          </a:ln>
+          <a:effectLst/>
+        </p:spPr>
+        <p:style>
+          <a:lnRef idx="1">
+            <a:schemeClr val="accent1"/>
+          </a:lnRef>
+          <a:fillRef idx="3">
+            <a:schemeClr val="accent1"/>
+          </a:fillRef>
+          <a:effectRef idx="2">
+            <a:schemeClr val="accent1"/>
+          </a:effectRef>
+          <a:fontRef idx="minor">
+            <a:schemeClr val="lt1"/>
+          </a:fontRef>
+        </p:style>
+        <p:txBody>
+          <a:bodyPr rtlCol="0" anchor="ctr"/>
+          <a:lstStyle/>
+          <a:p>
+            <a:pPr algn="ctr"/>
+          </a:p>
+        </p:txBody>
+      </p:sp>
+      <p:sp>
+        <p:nvSpPr>
+          <p:cNvPr id="14" name="TextBox 13"/>
+          <p:cNvSpPr txBox="1"/>
+          <p:nvPr/>
+        </p:nvSpPr>
+        <p:spPr>
+          <a:xfrm>
+            <a:off x="7132320" y="3429000"/>
+            <a:ext cx="4023360" cy="1554480"/>
+          </a:xfrm>
+          <a:prstGeom prst="rect">
+            <a:avLst/>
+          </a:prstGeom>
+          <a:noFill/>
+        </p:spPr>
+        <p:txBody>
+          <a:bodyPr wrap="square">
+            <a:spAutoFit/>
+          </a:bodyPr>
+          <a:lstStyle/>
+          <a:p>
+            <a:pPr>
+              <a:spcAft>
+                <a:spcPts val="600"/>
+              </a:spcAft>
+            </a:pPr>
+            <a:r>
+              <a:rPr sz="2000" b="1">
+                <a:solidFill>
+                  <a:srgbClr val="0B2B5B"/>
+                </a:solidFill>
+                <a:latin typeface="Calibri"/>
+              </a:rPr>
+              <a:t>False-positive rate ≈ 0.9%</a:t>
+            </a:r>
+          </a:p>
+          <a:p>
+            <a:pPr>
+              <a:spcAft>
+                <a:spcPts val="600"/>
+              </a:spcAft>
+            </a:pPr>
+            <a:r>
+              <a:rPr sz="1400" b="0">
+                <a:solidFill>
+                  <a:srgbClr val="1F2A37"/>
+                </a:solidFill>
+                <a:latin typeface="Calibri"/>
+              </a:rPr>
+              <a:t>90 of 9,809 legitimate messages flagged.</a:t>
+            </a:r>
+          </a:p>
+          <a:p>
+            <a:pPr>
+              <a:spcAft>
+                <a:spcPts val="600"/>
+              </a:spcAft>
+            </a:pPr>
+            <a:r>
+              <a:rPr sz="1300" b="0">
+                <a:solidFill>
+                  <a:srgbClr val="5B6672"/>
+                </a:solidFill>
+                <a:latin typeface="Calibri"/>
+              </a:rPr>
+              <a:t>Blocking legitimate mail is the costlier error, so this is the operationally important figure.</a:t>
             </a:r>
           </a:p>
         </p:txBody>

--- a/reports/slides/fyp2_viva.pptx
+++ b/reports/slides/fyp2_viva.pptx
@@ -18,6 +18,13 @@
     <p:sldId id="266" r:id="rId18"/>
     <p:sldId id="267" r:id="rId19"/>
     <p:sldId id="268" r:id="rId20"/>
+    <p:sldId id="269" r:id="rId21"/>
+    <p:sldId id="270" r:id="rId22"/>
+    <p:sldId id="271" r:id="rId23"/>
+    <p:sldId id="272" r:id="rId24"/>
+    <p:sldId id="273" r:id="rId25"/>
+    <p:sldId id="274" r:id="rId26"/>
+    <p:sldId id="275" r:id="rId27"/>
   </p:sldIdLst>
   <p:sldSz cx="12191695" cy="6858000" type="screen4x3"/>
   <p:notesSz cx="6858000" cy="9144000"/>
@@ -1064,6 +1071,461 @@
 </p:notes>
 </file>
 
+<file path=ppt/notesSlides/notesSlide14.xml><?xml version="1.0" encoding="utf-8"?>
+<p:notes xmlns:a="http://schemas.openxmlformats.org/drawingml/2006/main" xmlns:p="http://schemas.openxmlformats.org/presentationml/2006/main" xmlns:r="http://schemas.openxmlformats.org/officeDocument/2006/relationships">
+  <p:cSld>
+    <p:spTree>
+      <p:nvGrpSpPr>
+        <p:cNvPr id="1" name=""/>
+        <p:cNvGrpSpPr/>
+        <p:nvPr/>
+      </p:nvGrpSpPr>
+      <p:grpSpPr>
+        <a:xfrm>
+          <a:off x="0" y="0"/>
+          <a:ext cx="0" cy="0"/>
+          <a:chOff x="0" y="0"/>
+          <a:chExt cx="0" cy="0"/>
+        </a:xfrm>
+      </p:grpSpPr>
+      <p:sp>
+        <p:nvSpPr>
+          <p:cNvPr id="2" name="Slide Image Placeholder 1"/>
+          <p:cNvSpPr>
+            <a:spLocks noGrp="1"/>
+          </p:cNvSpPr>
+          <p:nvPr>
+            <p:ph type="sldImg" idx="2"/>
+          </p:nvPr>
+        </p:nvSpPr>
+        <p:spPr/>
+      </p:sp>
+      <p:sp>
+        <p:nvSpPr>
+          <p:cNvPr id="3" name="Notes Placeholder 2"/>
+          <p:cNvSpPr>
+            <a:spLocks noGrp="1"/>
+          </p:cNvSpPr>
+          <p:nvPr>
+            <p:ph type="body" idx="3" sz="quarter"/>
+          </p:nvPr>
+        </p:nvSpPr>
+        <p:spPr/>
+        <p:txBody>
+          <a:bodyPr/>
+          <a:lstStyle/>
+          <a:p>
+            <a:r>
+              <a:t>Divider. Do not present. Jump straight to the slide you need.</a:t>
+            </a:r>
+          </a:p>
+        </p:txBody>
+      </p:sp>
+      <p:sp>
+        <p:nvSpPr>
+          <p:cNvPr id="4" name="Slide Number Placeholder 3"/>
+          <p:cNvSpPr>
+            <a:spLocks noGrp="1"/>
+          </p:cNvSpPr>
+          <p:nvPr>
+            <p:ph type="sldNum" idx="5" sz="quarter"/>
+          </p:nvPr>
+        </p:nvSpPr>
+        <p:spPr/>
+      </p:sp>
+    </p:spTree>
+  </p:cSld>
+  <p:clrMapOvr>
+    <a:masterClrMapping/>
+  </p:clrMapOvr>
+</p:notes>
+</file>
+
+<file path=ppt/notesSlides/notesSlide15.xml><?xml version="1.0" encoding="utf-8"?>
+<p:notes xmlns:a="http://schemas.openxmlformats.org/drawingml/2006/main" xmlns:p="http://schemas.openxmlformats.org/presentationml/2006/main" xmlns:r="http://schemas.openxmlformats.org/officeDocument/2006/relationships">
+  <p:cSld>
+    <p:spTree>
+      <p:nvGrpSpPr>
+        <p:cNvPr id="1" name=""/>
+        <p:cNvGrpSpPr/>
+        <p:nvPr/>
+      </p:nvGrpSpPr>
+      <p:grpSpPr>
+        <a:xfrm>
+          <a:off x="0" y="0"/>
+          <a:ext cx="0" cy="0"/>
+          <a:chOff x="0" y="0"/>
+          <a:chExt cx="0" cy="0"/>
+        </a:xfrm>
+      </p:grpSpPr>
+      <p:sp>
+        <p:nvSpPr>
+          <p:cNvPr id="2" name="Slide Image Placeholder 1"/>
+          <p:cNvSpPr>
+            <a:spLocks noGrp="1"/>
+          </p:cNvSpPr>
+          <p:nvPr>
+            <p:ph type="sldImg" idx="2"/>
+          </p:nvPr>
+        </p:nvSpPr>
+        <p:spPr/>
+      </p:sp>
+      <p:sp>
+        <p:nvSpPr>
+          <p:cNvPr id="3" name="Notes Placeholder 2"/>
+          <p:cNvSpPr>
+            <a:spLocks noGrp="1"/>
+          </p:cNvSpPr>
+          <p:nvPr>
+            <p:ph type="body" idx="3" sz="quarter"/>
+          </p:nvPr>
+        </p:nvSpPr>
+        <p:spPr/>
+        <p:txBody>
+          <a:bodyPr/>
+          <a:lstStyle/>
+          <a:p>
+            <a:r>
+              <a:t>Of 9,809 legitimate messages, 90 were wrongly flagged - 0.9%. Of 10,479 phishing messages,</a:t>
+            </a:r>
+          </a:p>
+          <a:p>
+            <a:r>
+              <a:t>80 were missed. Because flagged mail is quarantined rather than deleted, a false positive is</a:t>
+            </a:r>
+          </a:p>
+          <a:p>
+            <a:r>
+              <a:t>recoverable by the user and correctable through the review console.</a:t>
+            </a:r>
+          </a:p>
+        </p:txBody>
+      </p:sp>
+      <p:sp>
+        <p:nvSpPr>
+          <p:cNvPr id="4" name="Slide Number Placeholder 3"/>
+          <p:cNvSpPr>
+            <a:spLocks noGrp="1"/>
+          </p:cNvSpPr>
+          <p:nvPr>
+            <p:ph type="sldNum" idx="5" sz="quarter"/>
+          </p:nvPr>
+        </p:nvSpPr>
+        <p:spPr/>
+      </p:sp>
+    </p:spTree>
+  </p:cSld>
+  <p:clrMapOvr>
+    <a:masterClrMapping/>
+  </p:clrMapOvr>
+</p:notes>
+</file>
+
+<file path=ppt/notesSlides/notesSlide16.xml><?xml version="1.0" encoding="utf-8"?>
+<p:notes xmlns:a="http://schemas.openxmlformats.org/drawingml/2006/main" xmlns:p="http://schemas.openxmlformats.org/presentationml/2006/main" xmlns:r="http://schemas.openxmlformats.org/officeDocument/2006/relationships">
+  <p:cSld>
+    <p:spTree>
+      <p:nvGrpSpPr>
+        <p:cNvPr id="1" name=""/>
+        <p:cNvGrpSpPr/>
+        <p:nvPr/>
+      </p:nvGrpSpPr>
+      <p:grpSpPr>
+        <a:xfrm>
+          <a:off x="0" y="0"/>
+          <a:ext cx="0" cy="0"/>
+          <a:chOff x="0" y="0"/>
+          <a:chExt cx="0" cy="0"/>
+        </a:xfrm>
+      </p:grpSpPr>
+      <p:sp>
+        <p:nvSpPr>
+          <p:cNvPr id="2" name="Slide Image Placeholder 1"/>
+          <p:cNvSpPr>
+            <a:spLocks noGrp="1"/>
+          </p:cNvSpPr>
+          <p:nvPr>
+            <p:ph type="sldImg" idx="2"/>
+          </p:nvPr>
+        </p:nvSpPr>
+        <p:spPr/>
+      </p:sp>
+      <p:sp>
+        <p:nvSpPr>
+          <p:cNvPr id="3" name="Notes Placeholder 2"/>
+          <p:cNvSpPr>
+            <a:spLocks noGrp="1"/>
+          </p:cNvSpPr>
+          <p:nvPr>
+            <p:ph type="body" idx="3" sz="quarter"/>
+          </p:nvPr>
+        </p:nvSpPr>
+        <p:spPr/>
+        <p:txBody>
+          <a:bodyPr/>
+          <a:lstStyle/>
+          <a:p>
+            <a:r>
+              <a:t>Reference table. The deployed configuration is the fourth row.</a:t>
+            </a:r>
+          </a:p>
+        </p:txBody>
+      </p:sp>
+      <p:sp>
+        <p:nvSpPr>
+          <p:cNvPr id="4" name="Slide Number Placeholder 3"/>
+          <p:cNvSpPr>
+            <a:spLocks noGrp="1"/>
+          </p:cNvSpPr>
+          <p:nvPr>
+            <p:ph type="sldNum" idx="5" sz="quarter"/>
+          </p:nvPr>
+        </p:nvSpPr>
+        <p:spPr/>
+      </p:sp>
+    </p:spTree>
+  </p:cSld>
+  <p:clrMapOvr>
+    <a:masterClrMapping/>
+  </p:clrMapOvr>
+</p:notes>
+</file>
+
+<file path=ppt/notesSlides/notesSlide17.xml><?xml version="1.0" encoding="utf-8"?>
+<p:notes xmlns:a="http://schemas.openxmlformats.org/drawingml/2006/main" xmlns:p="http://schemas.openxmlformats.org/presentationml/2006/main" xmlns:r="http://schemas.openxmlformats.org/officeDocument/2006/relationships">
+  <p:cSld>
+    <p:spTree>
+      <p:nvGrpSpPr>
+        <p:cNvPr id="1" name=""/>
+        <p:cNvGrpSpPr/>
+        <p:nvPr/>
+      </p:nvGrpSpPr>
+      <p:grpSpPr>
+        <a:xfrm>
+          <a:off x="0" y="0"/>
+          <a:ext cx="0" cy="0"/>
+          <a:chOff x="0" y="0"/>
+          <a:chExt cx="0" cy="0"/>
+        </a:xfrm>
+      </p:grpSpPr>
+      <p:sp>
+        <p:nvSpPr>
+          <p:cNvPr id="2" name="Slide Image Placeholder 1"/>
+          <p:cNvSpPr>
+            <a:spLocks noGrp="1"/>
+          </p:cNvSpPr>
+          <p:nvPr>
+            <p:ph type="sldImg" idx="2"/>
+          </p:nvPr>
+        </p:nvSpPr>
+        <p:spPr/>
+      </p:sp>
+      <p:sp>
+        <p:nvSpPr>
+          <p:cNvPr id="3" name="Notes Placeholder 2"/>
+          <p:cNvSpPr>
+            <a:spLocks noGrp="1"/>
+          </p:cNvSpPr>
+          <p:nvPr>
+            <p:ph type="body" idx="3" sz="quarter"/>
+          </p:nvPr>
+        </p:nvSpPr>
+        <p:spPr/>
+        <p:txBody>
+          <a:bodyPr/>
+          <a:lstStyle/>
+          <a:p>
+            <a:r>
+              <a:t>These are standardised before fusion so that raw magnitudes - body length can be several</a:t>
+            </a:r>
+          </a:p>
+          <a:p>
+            <a:r>
+              <a:t>thousand while TF-IDF values sit below one - do not dominate the text features.</a:t>
+            </a:r>
+          </a:p>
+        </p:txBody>
+      </p:sp>
+      <p:sp>
+        <p:nvSpPr>
+          <p:cNvPr id="4" name="Slide Number Placeholder 3"/>
+          <p:cNvSpPr>
+            <a:spLocks noGrp="1"/>
+          </p:cNvSpPr>
+          <p:nvPr>
+            <p:ph type="sldNum" idx="5" sz="quarter"/>
+          </p:nvPr>
+        </p:nvSpPr>
+        <p:spPr/>
+      </p:sp>
+    </p:spTree>
+  </p:cSld>
+  <p:clrMapOvr>
+    <a:masterClrMapping/>
+  </p:clrMapOvr>
+</p:notes>
+</file>
+
+<file path=ppt/notesSlides/notesSlide18.xml><?xml version="1.0" encoding="utf-8"?>
+<p:notes xmlns:a="http://schemas.openxmlformats.org/drawingml/2006/main" xmlns:p="http://schemas.openxmlformats.org/presentationml/2006/main" xmlns:r="http://schemas.openxmlformats.org/officeDocument/2006/relationships">
+  <p:cSld>
+    <p:spTree>
+      <p:nvGrpSpPr>
+        <p:cNvPr id="1" name=""/>
+        <p:cNvGrpSpPr/>
+        <p:nvPr/>
+      </p:nvGrpSpPr>
+      <p:grpSpPr>
+        <a:xfrm>
+          <a:off x="0" y="0"/>
+          <a:ext cx="0" cy="0"/>
+          <a:chOff x="0" y="0"/>
+          <a:chExt cx="0" cy="0"/>
+        </a:xfrm>
+      </p:grpSpPr>
+      <p:sp>
+        <p:nvSpPr>
+          <p:cNvPr id="2" name="Slide Image Placeholder 1"/>
+          <p:cNvSpPr>
+            <a:spLocks noGrp="1"/>
+          </p:cNvSpPr>
+          <p:nvPr>
+            <p:ph type="sldImg" idx="2"/>
+          </p:nvPr>
+        </p:nvSpPr>
+        <p:spPr/>
+      </p:sp>
+      <p:sp>
+        <p:nvSpPr>
+          <p:cNvPr id="3" name="Notes Placeholder 2"/>
+          <p:cNvSpPr>
+            <a:spLocks noGrp="1"/>
+          </p:cNvSpPr>
+          <p:nvPr>
+            <p:ph type="body" idx="3" sz="quarter"/>
+          </p:nvPr>
+        </p:nvSpPr>
+        <p:spPr/>
+        <p:txBody>
+          <a:bodyPr/>
+          <a:lstStyle/>
+          <a:p>
+            <a:r>
+              <a:t>Only use this if asked about commercial filters. Lead with the caveat: the test sets differ,</a:t>
+            </a:r>
+          </a:p>
+          <a:p>
+            <a:r>
+              <a:t>so this is context, not a comparison. Opara's study used 63 messages; mine used 4,986.</a:t>
+            </a:r>
+          </a:p>
+        </p:txBody>
+      </p:sp>
+      <p:sp>
+        <p:nvSpPr>
+          <p:cNvPr id="4" name="Slide Number Placeholder 3"/>
+          <p:cNvSpPr>
+            <a:spLocks noGrp="1"/>
+          </p:cNvSpPr>
+          <p:nvPr>
+            <p:ph type="sldNum" idx="5" sz="quarter"/>
+          </p:nvPr>
+        </p:nvSpPr>
+        <p:spPr/>
+      </p:sp>
+    </p:spTree>
+  </p:cSld>
+  <p:clrMapOvr>
+    <a:masterClrMapping/>
+  </p:clrMapOvr>
+</p:notes>
+</file>
+
+<file path=ppt/notesSlides/notesSlide19.xml><?xml version="1.0" encoding="utf-8"?>
+<p:notes xmlns:a="http://schemas.openxmlformats.org/drawingml/2006/main" xmlns:p="http://schemas.openxmlformats.org/presentationml/2006/main" xmlns:r="http://schemas.openxmlformats.org/officeDocument/2006/relationships">
+  <p:cSld>
+    <p:spTree>
+      <p:nvGrpSpPr>
+        <p:cNvPr id="1" name=""/>
+        <p:cNvGrpSpPr/>
+        <p:nvPr/>
+      </p:nvGrpSpPr>
+      <p:grpSpPr>
+        <a:xfrm>
+          <a:off x="0" y="0"/>
+          <a:ext cx="0" cy="0"/>
+          <a:chOff x="0" y="0"/>
+          <a:chExt cx="0" cy="0"/>
+        </a:xfrm>
+      </p:grpSpPr>
+      <p:sp>
+        <p:nvSpPr>
+          <p:cNvPr id="2" name="Slide Image Placeholder 1"/>
+          <p:cNvSpPr>
+            <a:spLocks noGrp="1"/>
+          </p:cNvSpPr>
+          <p:nvPr>
+            <p:ph type="sldImg" idx="2"/>
+          </p:nvPr>
+        </p:nvSpPr>
+        <p:spPr/>
+      </p:sp>
+      <p:sp>
+        <p:nvSpPr>
+          <p:cNvPr id="3" name="Notes Placeholder 2"/>
+          <p:cNvSpPr>
+            <a:spLocks noGrp="1"/>
+          </p:cNvSpPr>
+          <p:nvPr>
+            <p:ph type="body" idx="3" sz="quarter"/>
+          </p:nvPr>
+        </p:nvSpPr>
+        <p:spPr/>
+        <p:txBody>
+          <a:bodyPr/>
+          <a:lstStyle/>
+          <a:p>
+            <a:r>
+              <a:t>If asked about poisoning: be honest. The gate validates against a held-out split of the</a:t>
+            </a:r>
+          </a:p>
+          <a:p>
+            <a:r>
+              <a:t>historical corpus, so it catches general degradation but not corrections that are internally</a:t>
+            </a:r>
+          </a:p>
+          <a:p>
+            <a:r>
+              <a:t>consistent and mislabelled. That is why the reviewer checkpoint matters, and why every</a:t>
+            </a:r>
+          </a:p>
+          <a:p>
+            <a:r>
+              <a:t>replaced model is archived - I tested recovery and restored the exact previous version.</a:t>
+            </a:r>
+          </a:p>
+        </p:txBody>
+      </p:sp>
+      <p:sp>
+        <p:nvSpPr>
+          <p:cNvPr id="4" name="Slide Number Placeholder 3"/>
+          <p:cNvSpPr>
+            <a:spLocks noGrp="1"/>
+          </p:cNvSpPr>
+          <p:nvPr>
+            <p:ph type="sldNum" idx="5" sz="quarter"/>
+          </p:nvPr>
+        </p:nvSpPr>
+        <p:spPr/>
+      </p:sp>
+    </p:spTree>
+  </p:cSld>
+  <p:clrMapOvr>
+    <a:masterClrMapping/>
+  </p:clrMapOvr>
+</p:notes>
+</file>
+
 <file path=ppt/notesSlides/notesSlide2.xml><?xml version="1.0" encoding="utf-8"?>
 <p:notes xmlns:a="http://schemas.openxmlformats.org/drawingml/2006/main" xmlns:p="http://schemas.openxmlformats.org/presentationml/2006/main" xmlns:r="http://schemas.openxmlformats.org/officeDocument/2006/relationships">
   <p:cSld>
@@ -1120,6 +1582,81 @@
           <a:p>
             <a:r>
               <a:t>[30 seconds. The brief asks for an outline - this slide satisfies that.]</a:t>
+            </a:r>
+          </a:p>
+        </p:txBody>
+      </p:sp>
+      <p:sp>
+        <p:nvSpPr>
+          <p:cNvPr id="4" name="Slide Number Placeholder 3"/>
+          <p:cNvSpPr>
+            <a:spLocks noGrp="1"/>
+          </p:cNvSpPr>
+          <p:nvPr>
+            <p:ph type="sldNum" idx="5" sz="quarter"/>
+          </p:nvPr>
+        </p:nvSpPr>
+        <p:spPr/>
+      </p:sp>
+    </p:spTree>
+  </p:cSld>
+  <p:clrMapOvr>
+    <a:masterClrMapping/>
+  </p:clrMapOvr>
+</p:notes>
+</file>
+
+<file path=ppt/notesSlides/notesSlide20.xml><?xml version="1.0" encoding="utf-8"?>
+<p:notes xmlns:a="http://schemas.openxmlformats.org/drawingml/2006/main" xmlns:p="http://schemas.openxmlformats.org/presentationml/2006/main" xmlns:r="http://schemas.openxmlformats.org/officeDocument/2006/relationships">
+  <p:cSld>
+    <p:spTree>
+      <p:nvGrpSpPr>
+        <p:cNvPr id="1" name=""/>
+        <p:cNvGrpSpPr/>
+        <p:nvPr/>
+      </p:nvGrpSpPr>
+      <p:grpSpPr>
+        <a:xfrm>
+          <a:off x="0" y="0"/>
+          <a:ext cx="0" cy="0"/>
+          <a:chOff x="0" y="0"/>
+          <a:chExt cx="0" cy="0"/>
+        </a:xfrm>
+      </p:grpSpPr>
+      <p:sp>
+        <p:nvSpPr>
+          <p:cNvPr id="2" name="Slide Image Placeholder 1"/>
+          <p:cNvSpPr>
+            <a:spLocks noGrp="1"/>
+          </p:cNvSpPr>
+          <p:nvPr>
+            <p:ph type="sldImg" idx="2"/>
+          </p:nvPr>
+        </p:nvSpPr>
+        <p:spPr/>
+      </p:sp>
+      <p:sp>
+        <p:nvSpPr>
+          <p:cNvPr id="3" name="Notes Placeholder 2"/>
+          <p:cNvSpPr>
+            <a:spLocks noGrp="1"/>
+          </p:cNvSpPr>
+          <p:nvPr>
+            <p:ph type="body" idx="3" sz="quarter"/>
+          </p:nvPr>
+        </p:nvSpPr>
+        <p:spPr/>
+        <p:txBody>
+          <a:bodyPr/>
+          <a:lstStyle/>
+          <a:p>
+            <a:r>
+              <a:t>Use this if asked what went wrong during implementation. The metadata scaling issue is the most</a:t>
+            </a:r>
+          </a:p>
+          <a:p>
+            <a:r>
+              <a:t>interesting one - short phishing messages were misclassified until the scaler was added.</a:t>
             </a:r>
           </a:p>
         </p:txBody>
@@ -1471,44 +2008,39 @@
           <a:lstStyle/>
           <a:p>
             <a:r>
-              <a:t>The project tests two hypotheses.</a:t>
+              <a:t>Two research questions followed from the gap analysis.</a:t>
             </a:r>
           </a:p>
           <a:p/>
           <a:p>
             <a:r>
-              <a:t>The first is that combining textual content with structural metadata gives more robust</a:t>
-            </a:r>
-          </a:p>
-          <a:p>
-            <a:r>
-              <a:t>detection than content alone. I tested this directly by training every classifier twice - once</a:t>
-            </a:r>
-          </a:p>
-          <a:p>
-            <a:r>
-              <a:t>on content only, once on the fused feature set - under identical conditions.</a:t>
+              <a:t>The first: does combining textual content with structural metadata improve detection over</a:t>
+            </a:r>
+          </a:p>
+          <a:p>
+            <a:r>
+              <a:t>content alone? I answered this by training every classifier twice - once on content only, once</a:t>
+            </a:r>
+          </a:p>
+          <a:p>
+            <a:r>
+              <a:t>on the fused feature set - under identical conditions.</a:t>
             </a:r>
           </a:p>
           <a:p/>
           <a:p>
             <a:r>
-              <a:t>The second is that reviewed, validation-gated retraining improves detection of represented</a:t>
-            </a:r>
-          </a:p>
-          <a:p>
-            <a:r>
-              <a:t>modern threats while maintaining performance on the main corpus. I tested this with a</a:t>
-            </a:r>
-          </a:p>
-          <a:p>
-            <a:r>
-              <a:t>before-and-after experiment on a held-out modern-threat set, checking main-corpus accuracy</a:t>
-            </a:r>
-          </a:p>
-          <a:p>
-            <a:r>
-              <a:t>was not degraded.</a:t>
+              <a:t>The second: can reviewed, validation-gated retraining improve detection of represented modern</a:t>
+            </a:r>
+          </a:p>
+          <a:p>
+            <a:r>
+              <a:t>threats while maintaining main-corpus performance? I answered this with a before-and-after</a:t>
+            </a:r>
+          </a:p>
+          <a:p>
+            <a:r>
+              <a:t>experiment on a held-out modern-threat set, checking that main-corpus accuracy was not degraded.</a:t>
             </a:r>
           </a:p>
           <a:p/>
@@ -1519,7 +2051,12 @@
           </a:p>
           <a:p>
             <a:r>
-              <a:t>[1 minute. This slide connects your problem analysis directly to your experiments.]</a:t>
+              <a:t>[1 minute. NOTE: the report frames these as the research gap in Section 1.1 and answers them in</a:t>
+            </a:r>
+          </a:p>
+          <a:p>
+            <a:r>
+              <a:t>6.2.2 and 6.2.4 - it does not use the word "hypothesis". If asked, say exactly that.]</a:t>
             </a:r>
           </a:p>
         </p:txBody>
@@ -7335,7 +7872,7 @@
 </p:sld>
 </file>
 
-<file path=ppt/slides/slide2.xml><?xml version="1.0" encoding="utf-8"?>
+<file path=ppt/slides/slide14.xml><?xml version="1.0" encoding="utf-8"?>
 <p:sld xmlns:a="http://schemas.openxmlformats.org/drawingml/2006/main" xmlns:p="http://schemas.openxmlformats.org/presentationml/2006/main" xmlns:r="http://schemas.openxmlformats.org/officeDocument/2006/relationships">
   <p:cSld>
     <p:spTree>
@@ -7423,6 +7960,2851 @@
                 </a:solidFill>
                 <a:latin typeface="Calibri"/>
               </a:rPr>
+              <a:t>Backup Slides</a:t>
+            </a:r>
+          </a:p>
+          <a:p>
+            <a:pPr>
+              <a:spcAft>
+                <a:spcPts val="0"/>
+              </a:spcAft>
+            </a:pPr>
+            <a:r>
+              <a:rPr sz="1300" b="0">
+                <a:solidFill>
+                  <a:srgbClr val="C7DAF2"/>
+                </a:solidFill>
+                <a:latin typeface="Calibri"/>
+              </a:rPr>
+              <a:t>Not presented — reference material for questions</a:t>
+            </a:r>
+          </a:p>
+        </p:txBody>
+      </p:sp>
+      <p:sp>
+        <p:nvSpPr>
+          <p:cNvPr id="4" name="TextBox 3"/>
+          <p:cNvSpPr txBox="1"/>
+          <p:nvPr/>
+        </p:nvSpPr>
+        <p:spPr>
+          <a:xfrm>
+            <a:off x="1188720" y="1737360"/>
+            <a:ext cx="9601200" cy="4114800"/>
+          </a:xfrm>
+          <a:prstGeom prst="rect">
+            <a:avLst/>
+          </a:prstGeom>
+          <a:noFill/>
+        </p:spPr>
+        <p:txBody>
+          <a:bodyPr wrap="square">
+            <a:spAutoFit/>
+          </a:bodyPr>
+          <a:lstStyle/>
+          <a:p>
+            <a:pPr>
+              <a:spcAft>
+                <a:spcPts val="1400"/>
+              </a:spcAft>
+            </a:pPr>
+            <a:r>
+              <a:rPr sz="2000">
+                <a:solidFill>
+                  <a:srgbClr val="1F2A37"/>
+                </a:solidFill>
+                <a:latin typeface="Calibri"/>
+              </a:rPr>
+              <a:t>•  B1  Confusion matrix and error breakdown</a:t>
+            </a:r>
+          </a:p>
+          <a:p>
+            <a:pPr>
+              <a:spcAft>
+                <a:spcPts val="1400"/>
+              </a:spcAft>
+            </a:pPr>
+            <a:r>
+              <a:rPr sz="2000">
+                <a:solidFill>
+                  <a:srgbClr val="1F2A37"/>
+                </a:solidFill>
+                <a:latin typeface="Calibri"/>
+              </a:rPr>
+              <a:t>•  B2  Full classifier comparison (all five configurations)</a:t>
+            </a:r>
+          </a:p>
+          <a:p>
+            <a:pPr>
+              <a:spcAft>
+                <a:spcPts val="1400"/>
+              </a:spcAft>
+            </a:pPr>
+            <a:r>
+              <a:rPr sz="2000">
+                <a:solidFill>
+                  <a:srgbClr val="1F2A37"/>
+                </a:solidFill>
+                <a:latin typeface="Calibri"/>
+              </a:rPr>
+              <a:t>•  B3  Structural metadata signals</a:t>
+            </a:r>
+          </a:p>
+          <a:p>
+            <a:pPr>
+              <a:spcAft>
+                <a:spcPts val="1400"/>
+              </a:spcAft>
+            </a:pPr>
+            <a:r>
+              <a:rPr sz="2000">
+                <a:solidFill>
+                  <a:srgbClr val="1F2A37"/>
+                </a:solidFill>
+                <a:latin typeface="Calibri"/>
+              </a:rPr>
+              <a:t>•  B4  Commercial-filter context</a:t>
+            </a:r>
+          </a:p>
+          <a:p>
+            <a:pPr>
+              <a:spcAft>
+                <a:spcPts val="1400"/>
+              </a:spcAft>
+            </a:pPr>
+            <a:r>
+              <a:rPr sz="2000">
+                <a:solidFill>
+                  <a:srgbClr val="1F2A37"/>
+                </a:solidFill>
+                <a:latin typeface="Calibri"/>
+              </a:rPr>
+              <a:t>•  B5  Validation gate and its known limit</a:t>
+            </a:r>
+          </a:p>
+          <a:p>
+            <a:pPr>
+              <a:spcAft>
+                <a:spcPts val="1400"/>
+              </a:spcAft>
+            </a:pPr>
+            <a:r>
+              <a:rPr sz="2000">
+                <a:solidFill>
+                  <a:srgbClr val="1F2A37"/>
+                </a:solidFill>
+                <a:latin typeface="Calibri"/>
+              </a:rPr>
+              <a:t>•  B6  Implementation issues encountered</a:t>
+            </a:r>
+          </a:p>
+        </p:txBody>
+      </p:sp>
+    </p:spTree>
+  </p:cSld>
+  <p:clrMapOvr>
+    <a:masterClrMapping/>
+  </p:clrMapOvr>
+</p:sld>
+</file>
+
+<file path=ppt/slides/slide15.xml><?xml version="1.0" encoding="utf-8"?>
+<p:sld xmlns:a="http://schemas.openxmlformats.org/drawingml/2006/main" xmlns:p="http://schemas.openxmlformats.org/presentationml/2006/main" xmlns:r="http://schemas.openxmlformats.org/officeDocument/2006/relationships">
+  <p:cSld>
+    <p:spTree>
+      <p:nvGrpSpPr>
+        <p:cNvPr id="1" name=""/>
+        <p:cNvGrpSpPr/>
+        <p:nvPr/>
+      </p:nvGrpSpPr>
+      <p:grpSpPr/>
+      <p:sp>
+        <p:nvSpPr>
+          <p:cNvPr id="2" name="Rectangle 1"/>
+          <p:cNvSpPr/>
+          <p:nvPr/>
+        </p:nvSpPr>
+        <p:spPr>
+          <a:xfrm>
+            <a:off x="0" y="0"/>
+            <a:ext cx="12191695" cy="960120"/>
+          </a:xfrm>
+          <a:prstGeom prst="rect">
+            <a:avLst/>
+          </a:prstGeom>
+          <a:solidFill>
+            <a:srgbClr val="0B2B5B"/>
+          </a:solidFill>
+          <a:ln>
+            <a:noFill/>
+          </a:ln>
+          <a:effectLst/>
+        </p:spPr>
+        <p:style>
+          <a:lnRef idx="1">
+            <a:schemeClr val="accent1"/>
+          </a:lnRef>
+          <a:fillRef idx="3">
+            <a:schemeClr val="accent1"/>
+          </a:fillRef>
+          <a:effectRef idx="2">
+            <a:schemeClr val="accent1"/>
+          </a:effectRef>
+          <a:fontRef idx="minor">
+            <a:schemeClr val="lt1"/>
+          </a:fontRef>
+        </p:style>
+        <p:txBody>
+          <a:bodyPr rtlCol="0" anchor="ctr"/>
+          <a:lstStyle/>
+          <a:p>
+            <a:pPr algn="ctr"/>
+          </a:p>
+        </p:txBody>
+      </p:sp>
+      <p:sp>
+        <p:nvSpPr>
+          <p:cNvPr id="3" name="TextBox 2"/>
+          <p:cNvSpPr txBox="1"/>
+          <p:nvPr/>
+        </p:nvSpPr>
+        <p:spPr>
+          <a:xfrm>
+            <a:off x="502920" y="128016"/>
+            <a:ext cx="11155680" cy="731520"/>
+          </a:xfrm>
+          <a:prstGeom prst="rect">
+            <a:avLst/>
+          </a:prstGeom>
+          <a:noFill/>
+        </p:spPr>
+        <p:txBody>
+          <a:bodyPr wrap="square">
+            <a:spAutoFit/>
+          </a:bodyPr>
+          <a:lstStyle/>
+          <a:p>
+            <a:pPr>
+              <a:spcAft>
+                <a:spcPts val="0"/>
+              </a:spcAft>
+            </a:pPr>
+            <a:r>
+              <a:rPr sz="3000" b="1">
+                <a:solidFill>
+                  <a:srgbClr val="FFFFFF"/>
+                </a:solidFill>
+                <a:latin typeface="Calibri"/>
+              </a:rPr>
+              <a:t>B1  Confusion Matrix</a:t>
+            </a:r>
+          </a:p>
+          <a:p>
+            <a:pPr>
+              <a:spcAft>
+                <a:spcPts val="0"/>
+              </a:spcAft>
+            </a:pPr>
+            <a:r>
+              <a:rPr sz="1300" b="0">
+                <a:solidFill>
+                  <a:srgbClr val="C7DAF2"/>
+                </a:solidFill>
+                <a:latin typeface="Calibri"/>
+              </a:rPr>
+              <a:t>Held-out split, n = 20,288, threshold 0.55</a:t>
+            </a:r>
+          </a:p>
+        </p:txBody>
+      </p:sp>
+      <p:graphicFrame>
+        <p:nvGraphicFramePr>
+          <p:cNvPr id="4" name="Table 3"/>
+          <p:cNvGraphicFramePr>
+            <a:graphicFrameLocks noGrp="1"/>
+          </p:cNvGraphicFramePr>
+          <p:nvPr/>
+        </p:nvGraphicFramePr>
+        <p:xfrm>
+          <a:off x="1280160" y="1554480"/>
+          <a:ext cx="9601200" cy="1152144"/>
+        </p:xfrm>
+        <a:graphic>
+          <a:graphicData uri="http://schemas.openxmlformats.org/drawingml/2006/table">
+            <a:tbl>
+              <a:tblPr firstRow="1" bandRow="1">
+                <a:tableStyleId>{5C22544A-7EE6-4342-B048-85BDC9FD1C3A}</a:tableStyleId>
+              </a:tblPr>
+              <a:tblGrid>
+                <a:gridCol w="3200400"/>
+                <a:gridCol w="3200400"/>
+                <a:gridCol w="3200400"/>
+              </a:tblGrid>
+              <a:tr h="384048">
+                <a:tc>
+                  <a:txBody>
+                    <a:bodyPr/>
+                    <a:lstStyle/>
+                    <a:p>
+                      <a:pPr algn="l"/>
+                    </a:p>
+                  </a:txBody>
+                  <a:tcPr/>
+                </a:tc>
+                <a:tc>
+                  <a:txBody>
+                    <a:bodyPr/>
+                    <a:lstStyle/>
+                    <a:p>
+                      <a:pPr algn="ctr"/>
+                      <a:r>
+                        <a:rPr sz="1500" b="1">
+                          <a:solidFill>
+                            <a:srgbClr val="FFFFFF"/>
+                          </a:solidFill>
+                          <a:latin typeface="Calibri"/>
+                        </a:rPr>
+                        <a:t>Predicted spam</a:t>
+                      </a:r>
+                    </a:p>
+                  </a:txBody>
+                  <a:tcPr/>
+                </a:tc>
+                <a:tc>
+                  <a:txBody>
+                    <a:bodyPr/>
+                    <a:lstStyle/>
+                    <a:p>
+                      <a:pPr algn="ctr"/>
+                      <a:r>
+                        <a:rPr sz="1500" b="1">
+                          <a:solidFill>
+                            <a:srgbClr val="FFFFFF"/>
+                          </a:solidFill>
+                          <a:latin typeface="Calibri"/>
+                        </a:rPr>
+                        <a:t>Predicted legitimate</a:t>
+                      </a:r>
+                    </a:p>
+                  </a:txBody>
+                  <a:tcPr/>
+                </a:tc>
+              </a:tr>
+              <a:tr h="384048">
+                <a:tc>
+                  <a:txBody>
+                    <a:bodyPr/>
+                    <a:lstStyle/>
+                    <a:p>
+                      <a:pPr algn="l"/>
+                      <a:r>
+                        <a:rPr sz="1500" b="0">
+                          <a:solidFill>
+                            <a:srgbClr val="1F2A37"/>
+                          </a:solidFill>
+                          <a:latin typeface="Calibri"/>
+                        </a:rPr>
+                        <a:t>Actually phishing</a:t>
+                      </a:r>
+                    </a:p>
+                  </a:txBody>
+                  <a:tcPr/>
+                </a:tc>
+                <a:tc>
+                  <a:txBody>
+                    <a:bodyPr/>
+                    <a:lstStyle/>
+                    <a:p>
+                      <a:pPr algn="ctr"/>
+                      <a:r>
+                        <a:rPr sz="1500" b="0">
+                          <a:solidFill>
+                            <a:srgbClr val="1F2A37"/>
+                          </a:solidFill>
+                          <a:latin typeface="Calibri"/>
+                        </a:rPr>
+                        <a:t>10,399  (true positive)</a:t>
+                      </a:r>
+                    </a:p>
+                  </a:txBody>
+                  <a:tcPr/>
+                </a:tc>
+                <a:tc>
+                  <a:txBody>
+                    <a:bodyPr/>
+                    <a:lstStyle/>
+                    <a:p>
+                      <a:pPr algn="ctr"/>
+                      <a:r>
+                        <a:rPr sz="1500" b="0">
+                          <a:solidFill>
+                            <a:srgbClr val="1F2A37"/>
+                          </a:solidFill>
+                          <a:latin typeface="Calibri"/>
+                        </a:rPr>
+                        <a:t>80  (false negative)</a:t>
+                      </a:r>
+                    </a:p>
+                  </a:txBody>
+                  <a:tcPr/>
+                </a:tc>
+              </a:tr>
+              <a:tr h="384048">
+                <a:tc>
+                  <a:txBody>
+                    <a:bodyPr/>
+                    <a:lstStyle/>
+                    <a:p>
+                      <a:pPr algn="l"/>
+                      <a:r>
+                        <a:rPr sz="1500" b="0">
+                          <a:solidFill>
+                            <a:srgbClr val="1F2A37"/>
+                          </a:solidFill>
+                          <a:latin typeface="Calibri"/>
+                        </a:rPr>
+                        <a:t>Actually legitimate</a:t>
+                      </a:r>
+                    </a:p>
+                  </a:txBody>
+                  <a:tcPr/>
+                </a:tc>
+                <a:tc>
+                  <a:txBody>
+                    <a:bodyPr/>
+                    <a:lstStyle/>
+                    <a:p>
+                      <a:pPr algn="ctr"/>
+                      <a:r>
+                        <a:rPr sz="1500" b="0">
+                          <a:solidFill>
+                            <a:srgbClr val="1F2A37"/>
+                          </a:solidFill>
+                          <a:latin typeface="Calibri"/>
+                        </a:rPr>
+                        <a:t>90  (false positive)</a:t>
+                      </a:r>
+                    </a:p>
+                  </a:txBody>
+                  <a:tcPr/>
+                </a:tc>
+                <a:tc>
+                  <a:txBody>
+                    <a:bodyPr/>
+                    <a:lstStyle/>
+                    <a:p>
+                      <a:pPr algn="ctr"/>
+                      <a:r>
+                        <a:rPr sz="1500" b="0">
+                          <a:solidFill>
+                            <a:srgbClr val="1F2A37"/>
+                          </a:solidFill>
+                          <a:latin typeface="Calibri"/>
+                        </a:rPr>
+                        <a:t>9,719  (true negative)</a:t>
+                      </a:r>
+                    </a:p>
+                  </a:txBody>
+                  <a:tcPr/>
+                </a:tc>
+              </a:tr>
+            </a:tbl>
+          </a:graphicData>
+        </a:graphic>
+      </p:graphicFrame>
+      <p:sp>
+        <p:nvSpPr>
+          <p:cNvPr id="5" name="TextBox 4"/>
+          <p:cNvSpPr txBox="1"/>
+          <p:nvPr/>
+        </p:nvSpPr>
+        <p:spPr>
+          <a:xfrm>
+            <a:off x="1280160" y="3566160"/>
+            <a:ext cx="9601200" cy="2286000"/>
+          </a:xfrm>
+          <a:prstGeom prst="rect">
+            <a:avLst/>
+          </a:prstGeom>
+          <a:noFill/>
+        </p:spPr>
+        <p:txBody>
+          <a:bodyPr wrap="square">
+            <a:spAutoFit/>
+          </a:bodyPr>
+          <a:lstStyle/>
+          <a:p>
+            <a:pPr>
+              <a:spcAft>
+                <a:spcPts val="1400"/>
+              </a:spcAft>
+            </a:pPr>
+            <a:r>
+              <a:rPr sz="1800">
+                <a:solidFill>
+                  <a:srgbClr val="1F2A37"/>
+                </a:solidFill>
+                <a:latin typeface="Calibri"/>
+              </a:rPr>
+              <a:t>•  False-positive rate = 90 / 9,809 ≈ 0.9%</a:t>
+            </a:r>
+          </a:p>
+          <a:p>
+            <a:pPr>
+              <a:spcAft>
+                <a:spcPts val="1400"/>
+              </a:spcAft>
+            </a:pPr>
+            <a:r>
+              <a:rPr sz="1800">
+                <a:solidFill>
+                  <a:srgbClr val="1F2A37"/>
+                </a:solidFill>
+                <a:latin typeface="Calibri"/>
+              </a:rPr>
+              <a:t>•  False-negative rate = 80 / 10,479 ≈ 0.8%</a:t>
+            </a:r>
+          </a:p>
+          <a:p>
+            <a:pPr>
+              <a:spcAft>
+                <a:spcPts val="1400"/>
+              </a:spcAft>
+            </a:pPr>
+            <a:r>
+              <a:rPr sz="1800">
+                <a:solidFill>
+                  <a:srgbClr val="1F2A37"/>
+                </a:solidFill>
+                <a:latin typeface="Calibri"/>
+              </a:rPr>
+              <a:t>•  Flagged mail is quarantined, so a false positive is recoverable</a:t>
+            </a:r>
+          </a:p>
+        </p:txBody>
+      </p:sp>
+    </p:spTree>
+  </p:cSld>
+  <p:clrMapOvr>
+    <a:masterClrMapping/>
+  </p:clrMapOvr>
+</p:sld>
+</file>
+
+<file path=ppt/slides/slide16.xml><?xml version="1.0" encoding="utf-8"?>
+<p:sld xmlns:a="http://schemas.openxmlformats.org/drawingml/2006/main" xmlns:p="http://schemas.openxmlformats.org/presentationml/2006/main" xmlns:r="http://schemas.openxmlformats.org/officeDocument/2006/relationships">
+  <p:cSld>
+    <p:spTree>
+      <p:nvGrpSpPr>
+        <p:cNvPr id="1" name=""/>
+        <p:cNvGrpSpPr/>
+        <p:nvPr/>
+      </p:nvGrpSpPr>
+      <p:grpSpPr/>
+      <p:sp>
+        <p:nvSpPr>
+          <p:cNvPr id="2" name="Rectangle 1"/>
+          <p:cNvSpPr/>
+          <p:nvPr/>
+        </p:nvSpPr>
+        <p:spPr>
+          <a:xfrm>
+            <a:off x="0" y="0"/>
+            <a:ext cx="12191695" cy="960120"/>
+          </a:xfrm>
+          <a:prstGeom prst="rect">
+            <a:avLst/>
+          </a:prstGeom>
+          <a:solidFill>
+            <a:srgbClr val="0B2B5B"/>
+          </a:solidFill>
+          <a:ln>
+            <a:noFill/>
+          </a:ln>
+          <a:effectLst/>
+        </p:spPr>
+        <p:style>
+          <a:lnRef idx="1">
+            <a:schemeClr val="accent1"/>
+          </a:lnRef>
+          <a:fillRef idx="3">
+            <a:schemeClr val="accent1"/>
+          </a:fillRef>
+          <a:effectRef idx="2">
+            <a:schemeClr val="accent1"/>
+          </a:effectRef>
+          <a:fontRef idx="minor">
+            <a:schemeClr val="lt1"/>
+          </a:fontRef>
+        </p:style>
+        <p:txBody>
+          <a:bodyPr rtlCol="0" anchor="ctr"/>
+          <a:lstStyle/>
+          <a:p>
+            <a:pPr algn="ctr"/>
+          </a:p>
+        </p:txBody>
+      </p:sp>
+      <p:sp>
+        <p:nvSpPr>
+          <p:cNvPr id="3" name="TextBox 2"/>
+          <p:cNvSpPr txBox="1"/>
+          <p:nvPr/>
+        </p:nvSpPr>
+        <p:spPr>
+          <a:xfrm>
+            <a:off x="502920" y="128016"/>
+            <a:ext cx="11155680" cy="731520"/>
+          </a:xfrm>
+          <a:prstGeom prst="rect">
+            <a:avLst/>
+          </a:prstGeom>
+          <a:noFill/>
+        </p:spPr>
+        <p:txBody>
+          <a:bodyPr wrap="square">
+            <a:spAutoFit/>
+          </a:bodyPr>
+          <a:lstStyle/>
+          <a:p>
+            <a:pPr>
+              <a:spcAft>
+                <a:spcPts val="0"/>
+              </a:spcAft>
+            </a:pPr>
+            <a:r>
+              <a:rPr sz="3000" b="1">
+                <a:solidFill>
+                  <a:srgbClr val="FFFFFF"/>
+                </a:solidFill>
+                <a:latin typeface="Calibri"/>
+              </a:rPr>
+              <a:t>B2  Full Classifier Comparison</a:t>
+            </a:r>
+          </a:p>
+          <a:p>
+            <a:pPr>
+              <a:spcAft>
+                <a:spcPts val="0"/>
+              </a:spcAft>
+            </a:pPr>
+            <a:r>
+              <a:rPr sz="1300" b="0">
+                <a:solidFill>
+                  <a:srgbClr val="C7DAF2"/>
+                </a:solidFill>
+                <a:latin typeface="Calibri"/>
+              </a:rPr>
+              <a:t>Same split and preprocessing, default 0.5 threshold</a:t>
+            </a:r>
+          </a:p>
+        </p:txBody>
+      </p:sp>
+      <p:graphicFrame>
+        <p:nvGraphicFramePr>
+          <p:cNvPr id="4" name="Table 3"/>
+          <p:cNvGraphicFramePr>
+            <a:graphicFrameLocks noGrp="1"/>
+          </p:cNvGraphicFramePr>
+          <p:nvPr/>
+        </p:nvGraphicFramePr>
+        <p:xfrm>
+          <a:off x="640080" y="1463040"/>
+          <a:ext cx="10881360" cy="2304288"/>
+        </p:xfrm>
+        <a:graphic>
+          <a:graphicData uri="http://schemas.openxmlformats.org/drawingml/2006/table">
+            <a:tbl>
+              <a:tblPr firstRow="1" bandRow="1">
+                <a:tableStyleId>{5C22544A-7EE6-4342-B048-85BDC9FD1C3A}</a:tableStyleId>
+              </a:tblPr>
+              <a:tblGrid>
+                <a:gridCol w="4023360"/>
+                <a:gridCol w="1371600"/>
+                <a:gridCol w="1371600"/>
+                <a:gridCol w="1371600"/>
+                <a:gridCol w="1371600"/>
+                <a:gridCol w="1371600"/>
+              </a:tblGrid>
+              <a:tr h="384048">
+                <a:tc>
+                  <a:txBody>
+                    <a:bodyPr/>
+                    <a:lstStyle/>
+                    <a:p>
+                      <a:pPr algn="l"/>
+                      <a:r>
+                        <a:rPr sz="1400" b="1">
+                          <a:solidFill>
+                            <a:srgbClr val="FFFFFF"/>
+                          </a:solidFill>
+                          <a:latin typeface="Calibri"/>
+                        </a:rPr>
+                        <a:t>Configuration</a:t>
+                      </a:r>
+                    </a:p>
+                  </a:txBody>
+                  <a:tcPr/>
+                </a:tc>
+                <a:tc>
+                  <a:txBody>
+                    <a:bodyPr/>
+                    <a:lstStyle/>
+                    <a:p>
+                      <a:pPr algn="ctr"/>
+                      <a:r>
+                        <a:rPr sz="1400" b="1">
+                          <a:solidFill>
+                            <a:srgbClr val="FFFFFF"/>
+                          </a:solidFill>
+                          <a:latin typeface="Calibri"/>
+                        </a:rPr>
+                        <a:t>Accuracy</a:t>
+                      </a:r>
+                    </a:p>
+                  </a:txBody>
+                  <a:tcPr/>
+                </a:tc>
+                <a:tc>
+                  <a:txBody>
+                    <a:bodyPr/>
+                    <a:lstStyle/>
+                    <a:p>
+                      <a:pPr algn="ctr"/>
+                      <a:r>
+                        <a:rPr sz="1400" b="1">
+                          <a:solidFill>
+                            <a:srgbClr val="FFFFFF"/>
+                          </a:solidFill>
+                          <a:latin typeface="Calibri"/>
+                        </a:rPr>
+                        <a:t>Precision</a:t>
+                      </a:r>
+                    </a:p>
+                  </a:txBody>
+                  <a:tcPr/>
+                </a:tc>
+                <a:tc>
+                  <a:txBody>
+                    <a:bodyPr/>
+                    <a:lstStyle/>
+                    <a:p>
+                      <a:pPr algn="ctr"/>
+                      <a:r>
+                        <a:rPr sz="1400" b="1">
+                          <a:solidFill>
+                            <a:srgbClr val="FFFFFF"/>
+                          </a:solidFill>
+                          <a:latin typeface="Calibri"/>
+                        </a:rPr>
+                        <a:t>Recall</a:t>
+                      </a:r>
+                    </a:p>
+                  </a:txBody>
+                  <a:tcPr/>
+                </a:tc>
+                <a:tc>
+                  <a:txBody>
+                    <a:bodyPr/>
+                    <a:lstStyle/>
+                    <a:p>
+                      <a:pPr algn="ctr"/>
+                      <a:r>
+                        <a:rPr sz="1400" b="1">
+                          <a:solidFill>
+                            <a:srgbClr val="FFFFFF"/>
+                          </a:solidFill>
+                          <a:latin typeface="Calibri"/>
+                        </a:rPr>
+                        <a:t>F1</a:t>
+                      </a:r>
+                    </a:p>
+                  </a:txBody>
+                  <a:tcPr/>
+                </a:tc>
+                <a:tc>
+                  <a:txBody>
+                    <a:bodyPr/>
+                    <a:lstStyle/>
+                    <a:p>
+                      <a:pPr algn="ctr"/>
+                      <a:r>
+                        <a:rPr sz="1400" b="1">
+                          <a:solidFill>
+                            <a:srgbClr val="FFFFFF"/>
+                          </a:solidFill>
+                          <a:latin typeface="Calibri"/>
+                        </a:rPr>
+                        <a:t>ROC-AUC</a:t>
+                      </a:r>
+                    </a:p>
+                  </a:txBody>
+                  <a:tcPr/>
+                </a:tc>
+              </a:tr>
+              <a:tr h="384048">
+                <a:tc>
+                  <a:txBody>
+                    <a:bodyPr/>
+                    <a:lstStyle/>
+                    <a:p>
+                      <a:pPr algn="l"/>
+                      <a:r>
+                        <a:rPr sz="1400" b="0">
+                          <a:solidFill>
+                            <a:srgbClr val="1F2A37"/>
+                          </a:solidFill>
+                          <a:latin typeface="Calibri"/>
+                        </a:rPr>
+                        <a:t>Naïve Bayes (content only)</a:t>
+                      </a:r>
+                    </a:p>
+                  </a:txBody>
+                  <a:tcPr/>
+                </a:tc>
+                <a:tc>
+                  <a:txBody>
+                    <a:bodyPr/>
+                    <a:lstStyle/>
+                    <a:p>
+                      <a:pPr algn="ctr"/>
+                      <a:r>
+                        <a:rPr sz="1400" b="0">
+                          <a:solidFill>
+                            <a:srgbClr val="1F2A37"/>
+                          </a:solidFill>
+                          <a:latin typeface="Calibri"/>
+                        </a:rPr>
+                        <a:t>0.968</a:t>
+                      </a:r>
+                    </a:p>
+                  </a:txBody>
+                  <a:tcPr/>
+                </a:tc>
+                <a:tc>
+                  <a:txBody>
+                    <a:bodyPr/>
+                    <a:lstStyle/>
+                    <a:p>
+                      <a:pPr algn="ctr"/>
+                      <a:r>
+                        <a:rPr sz="1400" b="0">
+                          <a:solidFill>
+                            <a:srgbClr val="1F2A37"/>
+                          </a:solidFill>
+                          <a:latin typeface="Calibri"/>
+                        </a:rPr>
+                        <a:t>0.988</a:t>
+                      </a:r>
+                    </a:p>
+                  </a:txBody>
+                  <a:tcPr/>
+                </a:tc>
+                <a:tc>
+                  <a:txBody>
+                    <a:bodyPr/>
+                    <a:lstStyle/>
+                    <a:p>
+                      <a:pPr algn="ctr"/>
+                      <a:r>
+                        <a:rPr sz="1400" b="0">
+                          <a:solidFill>
+                            <a:srgbClr val="1F2A37"/>
+                          </a:solidFill>
+                          <a:latin typeface="Calibri"/>
+                        </a:rPr>
+                        <a:t>0.950</a:t>
+                      </a:r>
+                    </a:p>
+                  </a:txBody>
+                  <a:tcPr/>
+                </a:tc>
+                <a:tc>
+                  <a:txBody>
+                    <a:bodyPr/>
+                    <a:lstStyle/>
+                    <a:p>
+                      <a:pPr algn="ctr"/>
+                      <a:r>
+                        <a:rPr sz="1400" b="0">
+                          <a:solidFill>
+                            <a:srgbClr val="1F2A37"/>
+                          </a:solidFill>
+                          <a:latin typeface="Calibri"/>
+                        </a:rPr>
+                        <a:t>0.969</a:t>
+                      </a:r>
+                    </a:p>
+                  </a:txBody>
+                  <a:tcPr/>
+                </a:tc>
+                <a:tc>
+                  <a:txBody>
+                    <a:bodyPr/>
+                    <a:lstStyle/>
+                    <a:p>
+                      <a:pPr algn="ctr"/>
+                      <a:r>
+                        <a:rPr sz="1400" b="0">
+                          <a:solidFill>
+                            <a:srgbClr val="1F2A37"/>
+                          </a:solidFill>
+                          <a:latin typeface="Calibri"/>
+                        </a:rPr>
+                        <a:t>0.997</a:t>
+                      </a:r>
+                    </a:p>
+                  </a:txBody>
+                  <a:tcPr/>
+                </a:tc>
+              </a:tr>
+              <a:tr h="384048">
+                <a:tc>
+                  <a:txBody>
+                    <a:bodyPr/>
+                    <a:lstStyle/>
+                    <a:p>
+                      <a:pPr algn="l"/>
+                      <a:r>
+                        <a:rPr sz="1400" b="0">
+                          <a:solidFill>
+                            <a:srgbClr val="1F2A37"/>
+                          </a:solidFill>
+                          <a:latin typeface="Calibri"/>
+                        </a:rPr>
+                        <a:t>Logistic regression (content only)</a:t>
+                      </a:r>
+                    </a:p>
+                  </a:txBody>
+                  <a:tcPr/>
+                </a:tc>
+                <a:tc>
+                  <a:txBody>
+                    <a:bodyPr/>
+                    <a:lstStyle/>
+                    <a:p>
+                      <a:pPr algn="ctr"/>
+                      <a:r>
+                        <a:rPr sz="1400" b="0">
+                          <a:solidFill>
+                            <a:srgbClr val="1F2A37"/>
+                          </a:solidFill>
+                          <a:latin typeface="Calibri"/>
+                        </a:rPr>
+                        <a:t>0.988</a:t>
+                      </a:r>
+                    </a:p>
+                  </a:txBody>
+                  <a:tcPr/>
+                </a:tc>
+                <a:tc>
+                  <a:txBody>
+                    <a:bodyPr/>
+                    <a:lstStyle/>
+                    <a:p>
+                      <a:pPr algn="ctr"/>
+                      <a:r>
+                        <a:rPr sz="1400" b="0">
+                          <a:solidFill>
+                            <a:srgbClr val="1F2A37"/>
+                          </a:solidFill>
+                          <a:latin typeface="Calibri"/>
+                        </a:rPr>
+                        <a:t>0.987</a:t>
+                      </a:r>
+                    </a:p>
+                  </a:txBody>
+                  <a:tcPr/>
+                </a:tc>
+                <a:tc>
+                  <a:txBody>
+                    <a:bodyPr/>
+                    <a:lstStyle/>
+                    <a:p>
+                      <a:pPr algn="ctr"/>
+                      <a:r>
+                        <a:rPr sz="1400" b="0">
+                          <a:solidFill>
+                            <a:srgbClr val="1F2A37"/>
+                          </a:solidFill>
+                          <a:latin typeface="Calibri"/>
+                        </a:rPr>
+                        <a:t>0.990</a:t>
+                      </a:r>
+                    </a:p>
+                  </a:txBody>
+                  <a:tcPr/>
+                </a:tc>
+                <a:tc>
+                  <a:txBody>
+                    <a:bodyPr/>
+                    <a:lstStyle/>
+                    <a:p>
+                      <a:pPr algn="ctr"/>
+                      <a:r>
+                        <a:rPr sz="1400" b="0">
+                          <a:solidFill>
+                            <a:srgbClr val="1F2A37"/>
+                          </a:solidFill>
+                          <a:latin typeface="Calibri"/>
+                        </a:rPr>
+                        <a:t>0.989</a:t>
+                      </a:r>
+                    </a:p>
+                  </a:txBody>
+                  <a:tcPr/>
+                </a:tc>
+                <a:tc>
+                  <a:txBody>
+                    <a:bodyPr/>
+                    <a:lstStyle/>
+                    <a:p>
+                      <a:pPr algn="ctr"/>
+                      <a:r>
+                        <a:rPr sz="1400" b="0">
+                          <a:solidFill>
+                            <a:srgbClr val="1F2A37"/>
+                          </a:solidFill>
+                          <a:latin typeface="Calibri"/>
+                        </a:rPr>
+                        <a:t>0.999</a:t>
+                      </a:r>
+                    </a:p>
+                  </a:txBody>
+                  <a:tcPr/>
+                </a:tc>
+              </a:tr>
+              <a:tr h="384048">
+                <a:tc>
+                  <a:txBody>
+                    <a:bodyPr/>
+                    <a:lstStyle/>
+                    <a:p>
+                      <a:pPr algn="l"/>
+                      <a:r>
+                        <a:rPr sz="1400" b="0">
+                          <a:solidFill>
+                            <a:srgbClr val="1F2A37"/>
+                          </a:solidFill>
+                          <a:latin typeface="Calibri"/>
+                        </a:rPr>
+                        <a:t>Linear SVM (content only)</a:t>
+                      </a:r>
+                    </a:p>
+                  </a:txBody>
+                  <a:tcPr/>
+                </a:tc>
+                <a:tc>
+                  <a:txBody>
+                    <a:bodyPr/>
+                    <a:lstStyle/>
+                    <a:p>
+                      <a:pPr algn="ctr"/>
+                      <a:r>
+                        <a:rPr sz="1400" b="0">
+                          <a:solidFill>
+                            <a:srgbClr val="1F2A37"/>
+                          </a:solidFill>
+                          <a:latin typeface="Calibri"/>
+                        </a:rPr>
+                        <a:t>0.992</a:t>
+                      </a:r>
+                    </a:p>
+                  </a:txBody>
+                  <a:tcPr/>
+                </a:tc>
+                <a:tc>
+                  <a:txBody>
+                    <a:bodyPr/>
+                    <a:lstStyle/>
+                    <a:p>
+                      <a:pPr algn="ctr"/>
+                      <a:r>
+                        <a:rPr sz="1400" b="0">
+                          <a:solidFill>
+                            <a:srgbClr val="1F2A37"/>
+                          </a:solidFill>
+                          <a:latin typeface="Calibri"/>
+                        </a:rPr>
+                        <a:t>0.990</a:t>
+                      </a:r>
+                    </a:p>
+                  </a:txBody>
+                  <a:tcPr/>
+                </a:tc>
+                <a:tc>
+                  <a:txBody>
+                    <a:bodyPr/>
+                    <a:lstStyle/>
+                    <a:p>
+                      <a:pPr algn="ctr"/>
+                      <a:r>
+                        <a:rPr sz="1400" b="0">
+                          <a:solidFill>
+                            <a:srgbClr val="1F2A37"/>
+                          </a:solidFill>
+                          <a:latin typeface="Calibri"/>
+                        </a:rPr>
+                        <a:t>0.993</a:t>
+                      </a:r>
+                    </a:p>
+                  </a:txBody>
+                  <a:tcPr/>
+                </a:tc>
+                <a:tc>
+                  <a:txBody>
+                    <a:bodyPr/>
+                    <a:lstStyle/>
+                    <a:p>
+                      <a:pPr algn="ctr"/>
+                      <a:r>
+                        <a:rPr sz="1400" b="0">
+                          <a:solidFill>
+                            <a:srgbClr val="1F2A37"/>
+                          </a:solidFill>
+                          <a:latin typeface="Calibri"/>
+                        </a:rPr>
+                        <a:t>0.992</a:t>
+                      </a:r>
+                    </a:p>
+                  </a:txBody>
+                  <a:tcPr/>
+                </a:tc>
+                <a:tc>
+                  <a:txBody>
+                    <a:bodyPr/>
+                    <a:lstStyle/>
+                    <a:p>
+                      <a:pPr algn="ctr"/>
+                      <a:r>
+                        <a:rPr sz="1400" b="0">
+                          <a:solidFill>
+                            <a:srgbClr val="1F2A37"/>
+                          </a:solidFill>
+                          <a:latin typeface="Calibri"/>
+                        </a:rPr>
+                        <a:t>1.000</a:t>
+                      </a:r>
+                    </a:p>
+                  </a:txBody>
+                  <a:tcPr/>
+                </a:tc>
+              </a:tr>
+              <a:tr h="384048">
+                <a:tc>
+                  <a:txBody>
+                    <a:bodyPr/>
+                    <a:lstStyle/>
+                    <a:p>
+                      <a:pPr algn="l"/>
+                      <a:r>
+                        <a:rPr sz="1400" b="0">
+                          <a:solidFill>
+                            <a:srgbClr val="1F2A37"/>
+                          </a:solidFill>
+                          <a:latin typeface="Calibri"/>
+                        </a:rPr>
+                        <a:t>Logistic regression (fusion — deployed)</a:t>
+                      </a:r>
+                    </a:p>
+                  </a:txBody>
+                  <a:tcPr/>
+                </a:tc>
+                <a:tc>
+                  <a:txBody>
+                    <a:bodyPr/>
+                    <a:lstStyle/>
+                    <a:p>
+                      <a:pPr algn="ctr"/>
+                      <a:r>
+                        <a:rPr sz="1400" b="0">
+                          <a:solidFill>
+                            <a:srgbClr val="1F2A37"/>
+                          </a:solidFill>
+                          <a:latin typeface="Calibri"/>
+                        </a:rPr>
+                        <a:t>0.992</a:t>
+                      </a:r>
+                    </a:p>
+                  </a:txBody>
+                  <a:tcPr/>
+                </a:tc>
+                <a:tc>
+                  <a:txBody>
+                    <a:bodyPr/>
+                    <a:lstStyle/>
+                    <a:p>
+                      <a:pPr algn="ctr"/>
+                      <a:r>
+                        <a:rPr sz="1400" b="0">
+                          <a:solidFill>
+                            <a:srgbClr val="1F2A37"/>
+                          </a:solidFill>
+                          <a:latin typeface="Calibri"/>
+                        </a:rPr>
+                        <a:t>0.990</a:t>
+                      </a:r>
+                    </a:p>
+                  </a:txBody>
+                  <a:tcPr/>
+                </a:tc>
+                <a:tc>
+                  <a:txBody>
+                    <a:bodyPr/>
+                    <a:lstStyle/>
+                    <a:p>
+                      <a:pPr algn="ctr"/>
+                      <a:r>
+                        <a:rPr sz="1400" b="0">
+                          <a:solidFill>
+                            <a:srgbClr val="1F2A37"/>
+                          </a:solidFill>
+                          <a:latin typeface="Calibri"/>
+                        </a:rPr>
+                        <a:t>0.994</a:t>
+                      </a:r>
+                    </a:p>
+                  </a:txBody>
+                  <a:tcPr/>
+                </a:tc>
+                <a:tc>
+                  <a:txBody>
+                    <a:bodyPr/>
+                    <a:lstStyle/>
+                    <a:p>
+                      <a:pPr algn="ctr"/>
+                      <a:r>
+                        <a:rPr sz="1400" b="0">
+                          <a:solidFill>
+                            <a:srgbClr val="1F2A37"/>
+                          </a:solidFill>
+                          <a:latin typeface="Calibri"/>
+                        </a:rPr>
+                        <a:t>0.992</a:t>
+                      </a:r>
+                    </a:p>
+                  </a:txBody>
+                  <a:tcPr/>
+                </a:tc>
+                <a:tc>
+                  <a:txBody>
+                    <a:bodyPr/>
+                    <a:lstStyle/>
+                    <a:p>
+                      <a:pPr algn="ctr"/>
+                      <a:r>
+                        <a:rPr sz="1400" b="0">
+                          <a:solidFill>
+                            <a:srgbClr val="1F2A37"/>
+                          </a:solidFill>
+                          <a:latin typeface="Calibri"/>
+                        </a:rPr>
+                        <a:t>1.000</a:t>
+                      </a:r>
+                    </a:p>
+                  </a:txBody>
+                  <a:tcPr/>
+                </a:tc>
+              </a:tr>
+              <a:tr h="384048">
+                <a:tc>
+                  <a:txBody>
+                    <a:bodyPr/>
+                    <a:lstStyle/>
+                    <a:p>
+                      <a:pPr algn="l"/>
+                      <a:r>
+                        <a:rPr sz="1400" b="0">
+                          <a:solidFill>
+                            <a:srgbClr val="1F2A37"/>
+                          </a:solidFill>
+                          <a:latin typeface="Calibri"/>
+                        </a:rPr>
+                        <a:t>Linear SVM (fusion)</a:t>
+                      </a:r>
+                    </a:p>
+                  </a:txBody>
+                  <a:tcPr/>
+                </a:tc>
+                <a:tc>
+                  <a:txBody>
+                    <a:bodyPr/>
+                    <a:lstStyle/>
+                    <a:p>
+                      <a:pPr algn="ctr"/>
+                      <a:r>
+                        <a:rPr sz="1400" b="0">
+                          <a:solidFill>
+                            <a:srgbClr val="1F2A37"/>
+                          </a:solidFill>
+                          <a:latin typeface="Calibri"/>
+                        </a:rPr>
+                        <a:t>0.993</a:t>
+                      </a:r>
+                    </a:p>
+                  </a:txBody>
+                  <a:tcPr/>
+                </a:tc>
+                <a:tc>
+                  <a:txBody>
+                    <a:bodyPr/>
+                    <a:lstStyle/>
+                    <a:p>
+                      <a:pPr algn="ctr"/>
+                      <a:r>
+                        <a:rPr sz="1400" b="0">
+                          <a:solidFill>
+                            <a:srgbClr val="1F2A37"/>
+                          </a:solidFill>
+                          <a:latin typeface="Calibri"/>
+                        </a:rPr>
+                        <a:t>0.992</a:t>
+                      </a:r>
+                    </a:p>
+                  </a:txBody>
+                  <a:tcPr/>
+                </a:tc>
+                <a:tc>
+                  <a:txBody>
+                    <a:bodyPr/>
+                    <a:lstStyle/>
+                    <a:p>
+                      <a:pPr algn="ctr"/>
+                      <a:r>
+                        <a:rPr sz="1400" b="0">
+                          <a:solidFill>
+                            <a:srgbClr val="1F2A37"/>
+                          </a:solidFill>
+                          <a:latin typeface="Calibri"/>
+                        </a:rPr>
+                        <a:t>0.995</a:t>
+                      </a:r>
+                    </a:p>
+                  </a:txBody>
+                  <a:tcPr/>
+                </a:tc>
+                <a:tc>
+                  <a:txBody>
+                    <a:bodyPr/>
+                    <a:lstStyle/>
+                    <a:p>
+                      <a:pPr algn="ctr"/>
+                      <a:r>
+                        <a:rPr sz="1400" b="0">
+                          <a:solidFill>
+                            <a:srgbClr val="1F2A37"/>
+                          </a:solidFill>
+                          <a:latin typeface="Calibri"/>
+                        </a:rPr>
+                        <a:t>0.993</a:t>
+                      </a:r>
+                    </a:p>
+                  </a:txBody>
+                  <a:tcPr/>
+                </a:tc>
+                <a:tc>
+                  <a:txBody>
+                    <a:bodyPr/>
+                    <a:lstStyle/>
+                    <a:p>
+                      <a:pPr algn="ctr"/>
+                      <a:r>
+                        <a:rPr sz="1400" b="0">
+                          <a:solidFill>
+                            <a:srgbClr val="1F2A37"/>
+                          </a:solidFill>
+                          <a:latin typeface="Calibri"/>
+                        </a:rPr>
+                        <a:t>1.000</a:t>
+                      </a:r>
+                    </a:p>
+                  </a:txBody>
+                  <a:tcPr/>
+                </a:tc>
+              </a:tr>
+            </a:tbl>
+          </a:graphicData>
+        </a:graphic>
+      </p:graphicFrame>
+      <p:sp>
+        <p:nvSpPr>
+          <p:cNvPr id="5" name="TextBox 4"/>
+          <p:cNvSpPr txBox="1"/>
+          <p:nvPr/>
+        </p:nvSpPr>
+        <p:spPr>
+          <a:xfrm>
+            <a:off x="822960" y="4480560"/>
+            <a:ext cx="10515600" cy="1463040"/>
+          </a:xfrm>
+          <a:prstGeom prst="rect">
+            <a:avLst/>
+          </a:prstGeom>
+          <a:noFill/>
+        </p:spPr>
+        <p:txBody>
+          <a:bodyPr wrap="square">
+            <a:spAutoFit/>
+          </a:bodyPr>
+          <a:lstStyle/>
+          <a:p>
+            <a:pPr>
+              <a:spcAft>
+                <a:spcPts val="1400"/>
+              </a:spcAft>
+            </a:pPr>
+            <a:r>
+              <a:rPr sz="1600">
+                <a:solidFill>
+                  <a:srgbClr val="1F2A37"/>
+                </a:solidFill>
+                <a:latin typeface="Calibri"/>
+              </a:rPr>
+              <a:t>•  SVM iteration limit raised to 10,000; metrics stable beyond that point</a:t>
+            </a:r>
+          </a:p>
+          <a:p>
+            <a:pPr>
+              <a:spcAft>
+                <a:spcPts val="1400"/>
+              </a:spcAft>
+            </a:pPr>
+            <a:r>
+              <a:rPr sz="1600">
+                <a:solidFill>
+                  <a:srgbClr val="1F2A37"/>
+                </a:solidFill>
+                <a:latin typeface="Calibri"/>
+              </a:rPr>
+              <a:t>•  Deployed model runs at threshold 0.55, not the 0.5 used for this comparison</a:t>
+            </a:r>
+          </a:p>
+        </p:txBody>
+      </p:sp>
+    </p:spTree>
+  </p:cSld>
+  <p:clrMapOvr>
+    <a:masterClrMapping/>
+  </p:clrMapOvr>
+</p:sld>
+</file>
+
+<file path=ppt/slides/slide17.xml><?xml version="1.0" encoding="utf-8"?>
+<p:sld xmlns:a="http://schemas.openxmlformats.org/drawingml/2006/main" xmlns:p="http://schemas.openxmlformats.org/presentationml/2006/main" xmlns:r="http://schemas.openxmlformats.org/officeDocument/2006/relationships">
+  <p:cSld>
+    <p:spTree>
+      <p:nvGrpSpPr>
+        <p:cNvPr id="1" name=""/>
+        <p:cNvGrpSpPr/>
+        <p:nvPr/>
+      </p:nvGrpSpPr>
+      <p:grpSpPr/>
+      <p:sp>
+        <p:nvSpPr>
+          <p:cNvPr id="2" name="Rectangle 1"/>
+          <p:cNvSpPr/>
+          <p:nvPr/>
+        </p:nvSpPr>
+        <p:spPr>
+          <a:xfrm>
+            <a:off x="0" y="0"/>
+            <a:ext cx="12191695" cy="960120"/>
+          </a:xfrm>
+          <a:prstGeom prst="rect">
+            <a:avLst/>
+          </a:prstGeom>
+          <a:solidFill>
+            <a:srgbClr val="0B2B5B"/>
+          </a:solidFill>
+          <a:ln>
+            <a:noFill/>
+          </a:ln>
+          <a:effectLst/>
+        </p:spPr>
+        <p:style>
+          <a:lnRef idx="1">
+            <a:schemeClr val="accent1"/>
+          </a:lnRef>
+          <a:fillRef idx="3">
+            <a:schemeClr val="accent1"/>
+          </a:fillRef>
+          <a:effectRef idx="2">
+            <a:schemeClr val="accent1"/>
+          </a:effectRef>
+          <a:fontRef idx="minor">
+            <a:schemeClr val="lt1"/>
+          </a:fontRef>
+        </p:style>
+        <p:txBody>
+          <a:bodyPr rtlCol="0" anchor="ctr"/>
+          <a:lstStyle/>
+          <a:p>
+            <a:pPr algn="ctr"/>
+          </a:p>
+        </p:txBody>
+      </p:sp>
+      <p:sp>
+        <p:nvSpPr>
+          <p:cNvPr id="3" name="TextBox 2"/>
+          <p:cNvSpPr txBox="1"/>
+          <p:nvPr/>
+        </p:nvSpPr>
+        <p:spPr>
+          <a:xfrm>
+            <a:off x="502920" y="128016"/>
+            <a:ext cx="11155680" cy="731520"/>
+          </a:xfrm>
+          <a:prstGeom prst="rect">
+            <a:avLst/>
+          </a:prstGeom>
+          <a:noFill/>
+        </p:spPr>
+        <p:txBody>
+          <a:bodyPr wrap="square">
+            <a:spAutoFit/>
+          </a:bodyPr>
+          <a:lstStyle/>
+          <a:p>
+            <a:pPr>
+              <a:spcAft>
+                <a:spcPts val="0"/>
+              </a:spcAft>
+            </a:pPr>
+            <a:r>
+              <a:rPr sz="3000" b="1">
+                <a:solidFill>
+                  <a:srgbClr val="FFFFFF"/>
+                </a:solidFill>
+                <a:latin typeface="Calibri"/>
+              </a:rPr>
+              <a:t>B3  Structural Metadata Signals</a:t>
+            </a:r>
+          </a:p>
+        </p:txBody>
+      </p:sp>
+      <p:graphicFrame>
+        <p:nvGraphicFramePr>
+          <p:cNvPr id="4" name="Table 3"/>
+          <p:cNvGraphicFramePr>
+            <a:graphicFrameLocks noGrp="1"/>
+          </p:cNvGraphicFramePr>
+          <p:nvPr/>
+        </p:nvGraphicFramePr>
+        <p:xfrm>
+          <a:off x="822960" y="1417320"/>
+          <a:ext cx="10515600" cy="3840480"/>
+        </p:xfrm>
+        <a:graphic>
+          <a:graphicData uri="http://schemas.openxmlformats.org/drawingml/2006/table">
+            <a:tbl>
+              <a:tblPr firstRow="1" bandRow="1">
+                <a:tableStyleId>{5C22544A-7EE6-4342-B048-85BDC9FD1C3A}</a:tableStyleId>
+              </a:tblPr>
+              <a:tblGrid>
+                <a:gridCol w="4572000"/>
+                <a:gridCol w="5943600"/>
+              </a:tblGrid>
+              <a:tr h="384048">
+                <a:tc>
+                  <a:txBody>
+                    <a:bodyPr/>
+                    <a:lstStyle/>
+                    <a:p>
+                      <a:pPr algn="l"/>
+                      <a:r>
+                        <a:rPr sz="1400" b="1">
+                          <a:solidFill>
+                            <a:srgbClr val="FFFFFF"/>
+                          </a:solidFill>
+                          <a:latin typeface="Calibri"/>
+                        </a:rPr>
+                        <a:t>Signal</a:t>
+                      </a:r>
+                    </a:p>
+                  </a:txBody>
+                  <a:tcPr/>
+                </a:tc>
+                <a:tc>
+                  <a:txBody>
+                    <a:bodyPr/>
+                    <a:lstStyle/>
+                    <a:p>
+                      <a:pPr algn="ctr"/>
+                      <a:r>
+                        <a:rPr sz="1400" b="1">
+                          <a:solidFill>
+                            <a:srgbClr val="FFFFFF"/>
+                          </a:solidFill>
+                          <a:latin typeface="Calibri"/>
+                        </a:rPr>
+                        <a:t>What it captures</a:t>
+                      </a:r>
+                    </a:p>
+                  </a:txBody>
+                  <a:tcPr/>
+                </a:tc>
+              </a:tr>
+              <a:tr h="384048">
+                <a:tc>
+                  <a:txBody>
+                    <a:bodyPr/>
+                    <a:lstStyle/>
+                    <a:p>
+                      <a:pPr algn="l"/>
+                      <a:r>
+                        <a:rPr sz="1400" b="0">
+                          <a:solidFill>
+                            <a:srgbClr val="1F2A37"/>
+                          </a:solidFill>
+                          <a:latin typeface="Calibri"/>
+                        </a:rPr>
+                        <a:t>Subject length / body length</a:t>
+                      </a:r>
+                    </a:p>
+                  </a:txBody>
+                  <a:tcPr/>
+                </a:tc>
+                <a:tc>
+                  <a:txBody>
+                    <a:bodyPr/>
+                    <a:lstStyle/>
+                    <a:p>
+                      <a:pPr algn="ctr"/>
+                      <a:r>
+                        <a:rPr sz="1400" b="0">
+                          <a:solidFill>
+                            <a:srgbClr val="1F2A37"/>
+                          </a:solidFill>
+                          <a:latin typeface="Calibri"/>
+                        </a:rPr>
+                        <a:t>Unusually short or long messages</a:t>
+                      </a:r>
+                    </a:p>
+                  </a:txBody>
+                  <a:tcPr/>
+                </a:tc>
+              </a:tr>
+              <a:tr h="384048">
+                <a:tc>
+                  <a:txBody>
+                    <a:bodyPr/>
+                    <a:lstStyle/>
+                    <a:p>
+                      <a:pPr algn="l"/>
+                      <a:r>
+                        <a:rPr sz="1400" b="0">
+                          <a:solidFill>
+                            <a:srgbClr val="1F2A37"/>
+                          </a:solidFill>
+                          <a:latin typeface="Calibri"/>
+                        </a:rPr>
+                        <a:t>URL count / distinct link domains</a:t>
+                      </a:r>
+                    </a:p>
+                  </a:txBody>
+                  <a:tcPr/>
+                </a:tc>
+                <a:tc>
+                  <a:txBody>
+                    <a:bodyPr/>
+                    <a:lstStyle/>
+                    <a:p>
+                      <a:pPr algn="ctr"/>
+                      <a:r>
+                        <a:rPr sz="1400" b="0">
+                          <a:solidFill>
+                            <a:srgbClr val="1F2A37"/>
+                          </a:solidFill>
+                          <a:latin typeface="Calibri"/>
+                        </a:rPr>
+                        <a:t>Bulk campaigns and link-heavy mail</a:t>
+                      </a:r>
+                    </a:p>
+                  </a:txBody>
+                  <a:tcPr/>
+                </a:tc>
+              </a:tr>
+              <a:tr h="384048">
+                <a:tc>
+                  <a:txBody>
+                    <a:bodyPr/>
+                    <a:lstStyle/>
+                    <a:p>
+                      <a:pPr algn="l"/>
+                      <a:r>
+                        <a:rPr sz="1400" b="0">
+                          <a:solidFill>
+                            <a:srgbClr val="1F2A37"/>
+                          </a:solidFill>
+                          <a:latin typeface="Calibri"/>
+                        </a:rPr>
+                        <a:t>Attachment count</a:t>
+                      </a:r>
+                    </a:p>
+                  </a:txBody>
+                  <a:tcPr/>
+                </a:tc>
+                <a:tc>
+                  <a:txBody>
+                    <a:bodyPr/>
+                    <a:lstStyle/>
+                    <a:p>
+                      <a:pPr algn="ctr"/>
+                      <a:r>
+                        <a:rPr sz="1400" b="0">
+                          <a:solidFill>
+                            <a:srgbClr val="1F2A37"/>
+                          </a:solidFill>
+                          <a:latin typeface="Calibri"/>
+                        </a:rPr>
+                        <a:t>Payload delivery</a:t>
+                      </a:r>
+                    </a:p>
+                  </a:txBody>
+                  <a:tcPr/>
+                </a:tc>
+              </a:tr>
+              <a:tr h="384048">
+                <a:tc>
+                  <a:txBody>
+                    <a:bodyPr/>
+                    <a:lstStyle/>
+                    <a:p>
+                      <a:pPr algn="l"/>
+                      <a:r>
+                        <a:rPr sz="1400" b="0">
+                          <a:solidFill>
+                            <a:srgbClr val="1F2A37"/>
+                          </a:solidFill>
+                          <a:latin typeface="Calibri"/>
+                        </a:rPr>
+                        <a:t>Sender has domain</a:t>
+                      </a:r>
+                    </a:p>
+                  </a:txBody>
+                  <a:tcPr/>
+                </a:tc>
+                <a:tc>
+                  <a:txBody>
+                    <a:bodyPr/>
+                    <a:lstStyle/>
+                    <a:p>
+                      <a:pPr algn="ctr"/>
+                      <a:r>
+                        <a:rPr sz="1400" b="0">
+                          <a:solidFill>
+                            <a:srgbClr val="1F2A37"/>
+                          </a:solidFill>
+                          <a:latin typeface="Calibri"/>
+                        </a:rPr>
+                        <a:t>Malformed or missing sender address</a:t>
+                      </a:r>
+                    </a:p>
+                  </a:txBody>
+                  <a:tcPr/>
+                </a:tc>
+              </a:tr>
+              <a:tr h="384048">
+                <a:tc>
+                  <a:txBody>
+                    <a:bodyPr/>
+                    <a:lstStyle/>
+                    <a:p>
+                      <a:pPr algn="l"/>
+                      <a:r>
+                        <a:rPr sz="1400" b="0">
+                          <a:solidFill>
+                            <a:srgbClr val="1F2A37"/>
+                          </a:solidFill>
+                          <a:latin typeface="Calibri"/>
+                        </a:rPr>
+                        <a:t>Sender–link domain mismatch</a:t>
+                      </a:r>
+                    </a:p>
+                  </a:txBody>
+                  <a:tcPr/>
+                </a:tc>
+                <a:tc>
+                  <a:txBody>
+                    <a:bodyPr/>
+                    <a:lstStyle/>
+                    <a:p>
+                      <a:pPr algn="ctr"/>
+                      <a:r>
+                        <a:rPr sz="1400" b="0">
+                          <a:solidFill>
+                            <a:srgbClr val="1F2A37"/>
+                          </a:solidFill>
+                          <a:latin typeface="Calibri"/>
+                        </a:rPr>
+                        <a:t>Classic phishing indicator</a:t>
+                      </a:r>
+                    </a:p>
+                  </a:txBody>
+                  <a:tcPr/>
+                </a:tc>
+              </a:tr>
+              <a:tr h="384048">
+                <a:tc>
+                  <a:txBody>
+                    <a:bodyPr/>
+                    <a:lstStyle/>
+                    <a:p>
+                      <a:pPr algn="l"/>
+                      <a:r>
+                        <a:rPr sz="1400" b="0">
+                          <a:solidFill>
+                            <a:srgbClr val="1F2A37"/>
+                          </a:solidFill>
+                          <a:latin typeface="Calibri"/>
+                        </a:rPr>
+                        <a:t>Reply-To present</a:t>
+                      </a:r>
+                    </a:p>
+                  </a:txBody>
+                  <a:tcPr/>
+                </a:tc>
+                <a:tc>
+                  <a:txBody>
+                    <a:bodyPr/>
+                    <a:lstStyle/>
+                    <a:p>
+                      <a:pPr algn="ctr"/>
+                      <a:r>
+                        <a:rPr sz="1400" b="0">
+                          <a:solidFill>
+                            <a:srgbClr val="1F2A37"/>
+                          </a:solidFill>
+                          <a:latin typeface="Calibri"/>
+                        </a:rPr>
+                        <a:t>Replies redirected away from the sender</a:t>
+                      </a:r>
+                    </a:p>
+                  </a:txBody>
+                  <a:tcPr/>
+                </a:tc>
+              </a:tr>
+              <a:tr h="384048">
+                <a:tc>
+                  <a:txBody>
+                    <a:bodyPr/>
+                    <a:lstStyle/>
+                    <a:p>
+                      <a:pPr algn="l"/>
+                      <a:r>
+                        <a:rPr sz="1400" b="0">
+                          <a:solidFill>
+                            <a:srgbClr val="1F2A37"/>
+                          </a:solidFill>
+                          <a:latin typeface="Calibri"/>
+                        </a:rPr>
+                        <a:t>SPF result / DKIM present</a:t>
+                      </a:r>
+                    </a:p>
+                  </a:txBody>
+                  <a:tcPr/>
+                </a:tc>
+                <a:tc>
+                  <a:txBody>
+                    <a:bodyPr/>
+                    <a:lstStyle/>
+                    <a:p>
+                      <a:pPr algn="ctr"/>
+                      <a:r>
+                        <a:rPr sz="1400" b="0">
+                          <a:solidFill>
+                            <a:srgbClr val="1F2A37"/>
+                          </a:solidFill>
+                          <a:latin typeface="Calibri"/>
+                        </a:rPr>
+                        <a:t>Authentication indicators</a:t>
+                      </a:r>
+                    </a:p>
+                  </a:txBody>
+                  <a:tcPr/>
+                </a:tc>
+              </a:tr>
+              <a:tr h="384048">
+                <a:tc>
+                  <a:txBody>
+                    <a:bodyPr/>
+                    <a:lstStyle/>
+                    <a:p>
+                      <a:pPr algn="l"/>
+                      <a:r>
+                        <a:rPr sz="1400" b="0">
+                          <a:solidFill>
+                            <a:srgbClr val="1F2A37"/>
+                          </a:solidFill>
+                          <a:latin typeface="Calibri"/>
+                        </a:rPr>
+                        <a:t>Subject capitals ratio / exclamations</a:t>
+                      </a:r>
+                    </a:p>
+                  </a:txBody>
+                  <a:tcPr/>
+                </a:tc>
+                <a:tc>
+                  <a:txBody>
+                    <a:bodyPr/>
+                    <a:lstStyle/>
+                    <a:p>
+                      <a:pPr algn="ctr"/>
+                      <a:r>
+                        <a:rPr sz="1400" b="0">
+                          <a:solidFill>
+                            <a:srgbClr val="1F2A37"/>
+                          </a:solidFill>
+                          <a:latin typeface="Calibri"/>
+                        </a:rPr>
+                        <a:t>Shouting and urgency styling</a:t>
+                      </a:r>
+                    </a:p>
+                  </a:txBody>
+                  <a:tcPr/>
+                </a:tc>
+              </a:tr>
+              <a:tr h="384048">
+                <a:tc>
+                  <a:txBody>
+                    <a:bodyPr/>
+                    <a:lstStyle/>
+                    <a:p>
+                      <a:pPr algn="l"/>
+                      <a:r>
+                        <a:rPr sz="1400" b="0">
+                          <a:solidFill>
+                            <a:srgbClr val="1F2A37"/>
+                          </a:solidFill>
+                          <a:latin typeface="Calibri"/>
+                        </a:rPr>
+                        <a:t>Suspicious-term count</a:t>
+                      </a:r>
+                    </a:p>
+                  </a:txBody>
+                  <a:tcPr/>
+                </a:tc>
+                <a:tc>
+                  <a:txBody>
+                    <a:bodyPr/>
+                    <a:lstStyle/>
+                    <a:p>
+                      <a:pPr algn="ctr"/>
+                      <a:r>
+                        <a:rPr sz="1400" b="0">
+                          <a:solidFill>
+                            <a:srgbClr val="1F2A37"/>
+                          </a:solidFill>
+                          <a:latin typeface="Calibri"/>
+                        </a:rPr>
+                        <a:t>Urgency and verification vocabulary</a:t>
+                      </a:r>
+                    </a:p>
+                  </a:txBody>
+                  <a:tcPr/>
+                </a:tc>
+              </a:tr>
+            </a:tbl>
+          </a:graphicData>
+        </a:graphic>
+      </p:graphicFrame>
+    </p:spTree>
+  </p:cSld>
+  <p:clrMapOvr>
+    <a:masterClrMapping/>
+  </p:clrMapOvr>
+</p:sld>
+</file>
+
+<file path=ppt/slides/slide18.xml><?xml version="1.0" encoding="utf-8"?>
+<p:sld xmlns:a="http://schemas.openxmlformats.org/drawingml/2006/main" xmlns:p="http://schemas.openxmlformats.org/presentationml/2006/main" xmlns:r="http://schemas.openxmlformats.org/officeDocument/2006/relationships">
+  <p:cSld>
+    <p:spTree>
+      <p:nvGrpSpPr>
+        <p:cNvPr id="1" name=""/>
+        <p:cNvGrpSpPr/>
+        <p:nvPr/>
+      </p:nvGrpSpPr>
+      <p:grpSpPr/>
+      <p:sp>
+        <p:nvSpPr>
+          <p:cNvPr id="2" name="Rectangle 1"/>
+          <p:cNvSpPr/>
+          <p:nvPr/>
+        </p:nvSpPr>
+        <p:spPr>
+          <a:xfrm>
+            <a:off x="0" y="0"/>
+            <a:ext cx="12191695" cy="960120"/>
+          </a:xfrm>
+          <a:prstGeom prst="rect">
+            <a:avLst/>
+          </a:prstGeom>
+          <a:solidFill>
+            <a:srgbClr val="0B2B5B"/>
+          </a:solidFill>
+          <a:ln>
+            <a:noFill/>
+          </a:ln>
+          <a:effectLst/>
+        </p:spPr>
+        <p:style>
+          <a:lnRef idx="1">
+            <a:schemeClr val="accent1"/>
+          </a:lnRef>
+          <a:fillRef idx="3">
+            <a:schemeClr val="accent1"/>
+          </a:fillRef>
+          <a:effectRef idx="2">
+            <a:schemeClr val="accent1"/>
+          </a:effectRef>
+          <a:fontRef idx="minor">
+            <a:schemeClr val="lt1"/>
+          </a:fontRef>
+        </p:style>
+        <p:txBody>
+          <a:bodyPr rtlCol="0" anchor="ctr"/>
+          <a:lstStyle/>
+          <a:p>
+            <a:pPr algn="ctr"/>
+          </a:p>
+        </p:txBody>
+      </p:sp>
+      <p:sp>
+        <p:nvSpPr>
+          <p:cNvPr id="3" name="TextBox 2"/>
+          <p:cNvSpPr txBox="1"/>
+          <p:nvPr/>
+        </p:nvSpPr>
+        <p:spPr>
+          <a:xfrm>
+            <a:off x="502920" y="128016"/>
+            <a:ext cx="11155680" cy="731520"/>
+          </a:xfrm>
+          <a:prstGeom prst="rect">
+            <a:avLst/>
+          </a:prstGeom>
+          <a:noFill/>
+        </p:spPr>
+        <p:txBody>
+          <a:bodyPr wrap="square">
+            <a:spAutoFit/>
+          </a:bodyPr>
+          <a:lstStyle/>
+          <a:p>
+            <a:pPr>
+              <a:spcAft>
+                <a:spcPts val="0"/>
+              </a:spcAft>
+            </a:pPr>
+            <a:r>
+              <a:rPr sz="3000" b="1">
+                <a:solidFill>
+                  <a:srgbClr val="FFFFFF"/>
+                </a:solidFill>
+                <a:latin typeface="Calibri"/>
+              </a:rPr>
+              <a:t>B4  Commercial-Filter Context</a:t>
+            </a:r>
+          </a:p>
+          <a:p>
+            <a:pPr>
+              <a:spcAft>
+                <a:spcPts val="0"/>
+              </a:spcAft>
+            </a:pPr>
+            <a:r>
+              <a:rPr sz="1300" b="0">
+                <a:solidFill>
+                  <a:srgbClr val="C7DAF2"/>
+                </a:solidFill>
+                <a:latin typeface="Calibri"/>
+              </a:rPr>
+              <a:t>Different test sets — not a head-to-head comparison</a:t>
+            </a:r>
+          </a:p>
+        </p:txBody>
+      </p:sp>
+      <p:graphicFrame>
+        <p:nvGraphicFramePr>
+          <p:cNvPr id="4" name="Table 3"/>
+          <p:cNvGraphicFramePr>
+            <a:graphicFrameLocks noGrp="1"/>
+          </p:cNvGraphicFramePr>
+          <p:nvPr/>
+        </p:nvGraphicFramePr>
+        <p:xfrm>
+          <a:off x="731520" y="1463040"/>
+          <a:ext cx="10698480" cy="1920240"/>
+        </p:xfrm>
+        <a:graphic>
+          <a:graphicData uri="http://schemas.openxmlformats.org/drawingml/2006/table">
+            <a:tbl>
+              <a:tblPr firstRow="1" bandRow="1">
+                <a:tableStyleId>{5C22544A-7EE6-4342-B048-85BDC9FD1C3A}</a:tableStyleId>
+              </a:tblPr>
+              <a:tblGrid>
+                <a:gridCol w="3017520"/>
+                <a:gridCol w="4023360"/>
+                <a:gridCol w="3657600"/>
+              </a:tblGrid>
+              <a:tr h="384048">
+                <a:tc>
+                  <a:txBody>
+                    <a:bodyPr/>
+                    <a:lstStyle/>
+                    <a:p>
+                      <a:pPr algn="l"/>
+                      <a:r>
+                        <a:rPr sz="1400" b="1">
+                          <a:solidFill>
+                            <a:srgbClr val="FFFFFF"/>
+                          </a:solidFill>
+                          <a:latin typeface="Calibri"/>
+                        </a:rPr>
+                        <a:t>System</a:t>
+                      </a:r>
+                    </a:p>
+                  </a:txBody>
+                  <a:tcPr/>
+                </a:tc>
+                <a:tc>
+                  <a:txBody>
+                    <a:bodyPr/>
+                    <a:lstStyle/>
+                    <a:p>
+                      <a:pPr algn="ctr"/>
+                      <a:r>
+                        <a:rPr sz="1400" b="1">
+                          <a:solidFill>
+                            <a:srgbClr val="FFFFFF"/>
+                          </a:solidFill>
+                          <a:latin typeface="Calibri"/>
+                        </a:rPr>
+                        <a:t>AI-phishing flagged</a:t>
+                      </a:r>
+                    </a:p>
+                  </a:txBody>
+                  <a:tcPr/>
+                </a:tc>
+                <a:tc>
+                  <a:txBody>
+                    <a:bodyPr/>
+                    <a:lstStyle/>
+                    <a:p>
+                      <a:pPr algn="ctr"/>
+                      <a:r>
+                        <a:rPr sz="1400" b="1">
+                          <a:solidFill>
+                            <a:srgbClr val="FFFFFF"/>
+                          </a:solidFill>
+                          <a:latin typeface="Calibri"/>
+                        </a:rPr>
+                        <a:t>Legitimate AI mail wrongly flagged</a:t>
+                      </a:r>
+                    </a:p>
+                  </a:txBody>
+                  <a:tcPr/>
+                </a:tc>
+              </a:tr>
+              <a:tr h="384048">
+                <a:tc>
+                  <a:txBody>
+                    <a:bodyPr/>
+                    <a:lstStyle/>
+                    <a:p>
+                      <a:pPr algn="l"/>
+                      <a:r>
+                        <a:rPr sz="1400" b="0">
+                          <a:solidFill>
+                            <a:srgbClr val="1F2A37"/>
+                          </a:solidFill>
+                          <a:latin typeface="Calibri"/>
+                        </a:rPr>
+                        <a:t>Gmail</a:t>
+                      </a:r>
+                    </a:p>
+                  </a:txBody>
+                  <a:tcPr/>
+                </a:tc>
+                <a:tc>
+                  <a:txBody>
+                    <a:bodyPr/>
+                    <a:lstStyle/>
+                    <a:p>
+                      <a:pPr algn="ctr"/>
+                      <a:r>
+                        <a:rPr sz="1400" b="0">
+                          <a:solidFill>
+                            <a:srgbClr val="1F2A37"/>
+                          </a:solidFill>
+                          <a:latin typeface="Calibri"/>
+                        </a:rPr>
+                        <a:t>≈ 14%  (n = 63, Opara et al.)</a:t>
+                      </a:r>
+                    </a:p>
+                  </a:txBody>
+                  <a:tcPr/>
+                </a:tc>
+                <a:tc>
+                  <a:txBody>
+                    <a:bodyPr/>
+                    <a:lstStyle/>
+                    <a:p>
+                      <a:pPr algn="ctr"/>
+                      <a:r>
+                        <a:rPr sz="1400" b="0">
+                          <a:solidFill>
+                            <a:srgbClr val="1F2A37"/>
+                          </a:solidFill>
+                          <a:latin typeface="Calibri"/>
+                        </a:rPr>
+                        <a:t>Low  (≈ 1.6%)</a:t>
+                      </a:r>
+                    </a:p>
+                  </a:txBody>
+                  <a:tcPr/>
+                </a:tc>
+              </a:tr>
+              <a:tr h="384048">
+                <a:tc>
+                  <a:txBody>
+                    <a:bodyPr/>
+                    <a:lstStyle/>
+                    <a:p>
+                      <a:pPr algn="l"/>
+                      <a:r>
+                        <a:rPr sz="1400" b="0">
+                          <a:solidFill>
+                            <a:srgbClr val="1F2A37"/>
+                          </a:solidFill>
+                          <a:latin typeface="Calibri"/>
+                        </a:rPr>
+                        <a:t>Outlook</a:t>
+                      </a:r>
+                    </a:p>
+                  </a:txBody>
+                  <a:tcPr/>
+                </a:tc>
+                <a:tc>
+                  <a:txBody>
+                    <a:bodyPr/>
+                    <a:lstStyle/>
+                    <a:p>
+                      <a:pPr algn="ctr"/>
+                      <a:r>
+                        <a:rPr sz="1400" b="0">
+                          <a:solidFill>
+                            <a:srgbClr val="1F2A37"/>
+                          </a:solidFill>
+                          <a:latin typeface="Calibri"/>
+                        </a:rPr>
+                        <a:t>≈ 4%  (n = 63)</a:t>
+                      </a:r>
+                    </a:p>
+                  </a:txBody>
+                  <a:tcPr/>
+                </a:tc>
+                <a:tc>
+                  <a:txBody>
+                    <a:bodyPr/>
+                    <a:lstStyle/>
+                    <a:p>
+                      <a:pPr algn="ctr"/>
+                      <a:r>
+                        <a:rPr sz="1400" b="0">
+                          <a:solidFill>
+                            <a:srgbClr val="1F2A37"/>
+                          </a:solidFill>
+                          <a:latin typeface="Calibri"/>
+                        </a:rPr>
+                        <a:t>≈ 0%</a:t>
+                      </a:r>
+                    </a:p>
+                  </a:txBody>
+                  <a:tcPr/>
+                </a:tc>
+              </a:tr>
+              <a:tr h="384048">
+                <a:tc>
+                  <a:txBody>
+                    <a:bodyPr/>
+                    <a:lstStyle/>
+                    <a:p>
+                      <a:pPr algn="l"/>
+                      <a:r>
+                        <a:rPr sz="1400" b="0">
+                          <a:solidFill>
+                            <a:srgbClr val="1F2A37"/>
+                          </a:solidFill>
+                          <a:latin typeface="Calibri"/>
+                        </a:rPr>
+                        <a:t>Yahoo</a:t>
+                      </a:r>
+                    </a:p>
+                  </a:txBody>
+                  <a:tcPr/>
+                </a:tc>
+                <a:tc>
+                  <a:txBody>
+                    <a:bodyPr/>
+                    <a:lstStyle/>
+                    <a:p>
+                      <a:pPr algn="ctr"/>
+                      <a:r>
+                        <a:rPr sz="1400" b="0">
+                          <a:solidFill>
+                            <a:srgbClr val="1F2A37"/>
+                          </a:solidFill>
+                          <a:latin typeface="Calibri"/>
+                        </a:rPr>
+                        <a:t>≈ 90%  (n = 63)</a:t>
+                      </a:r>
+                    </a:p>
+                  </a:txBody>
+                  <a:tcPr/>
+                </a:tc>
+                <a:tc>
+                  <a:txBody>
+                    <a:bodyPr/>
+                    <a:lstStyle/>
+                    <a:p>
+                      <a:pPr algn="ctr"/>
+                      <a:r>
+                        <a:rPr sz="1400" b="0">
+                          <a:solidFill>
+                            <a:srgbClr val="1F2A37"/>
+                          </a:solidFill>
+                          <a:latin typeface="Calibri"/>
+                        </a:rPr>
+                        <a:t>High  (≈ 59–67%)</a:t>
+                      </a:r>
+                    </a:p>
+                  </a:txBody>
+                  <a:tcPr/>
+                </a:tc>
+              </a:tr>
+              <a:tr h="384048">
+                <a:tc>
+                  <a:txBody>
+                    <a:bodyPr/>
+                    <a:lstStyle/>
+                    <a:p>
+                      <a:pPr algn="l"/>
+                      <a:r>
+                        <a:rPr sz="1400" b="0">
+                          <a:solidFill>
+                            <a:srgbClr val="1F2A37"/>
+                          </a:solidFill>
+                          <a:latin typeface="Calibri"/>
+                        </a:rPr>
+                        <a:t>This project</a:t>
+                      </a:r>
+                    </a:p>
+                  </a:txBody>
+                  <a:tcPr/>
+                </a:tc>
+                <a:tc>
+                  <a:txBody>
+                    <a:bodyPr/>
+                    <a:lstStyle/>
+                    <a:p>
+                      <a:pPr algn="ctr"/>
+                      <a:r>
+                        <a:rPr sz="1400" b="0">
+                          <a:solidFill>
+                            <a:srgbClr val="1F2A37"/>
+                          </a:solidFill>
+                          <a:latin typeface="Calibri"/>
+                        </a:rPr>
+                        <a:t>92%  (n = 4,986)</a:t>
+                      </a:r>
+                    </a:p>
+                  </a:txBody>
+                  <a:tcPr/>
+                </a:tc>
+                <a:tc>
+                  <a:txBody>
+                    <a:bodyPr/>
+                    <a:lstStyle/>
+                    <a:p>
+                      <a:pPr algn="ctr"/>
+                      <a:r>
+                        <a:rPr sz="1400" b="0">
+                          <a:solidFill>
+                            <a:srgbClr val="1F2A37"/>
+                          </a:solidFill>
+                          <a:latin typeface="Calibri"/>
+                        </a:rPr>
+                        <a:t>≈ 0.9% FPR on held-out corpus</a:t>
+                      </a:r>
+                    </a:p>
+                  </a:txBody>
+                  <a:tcPr/>
+                </a:tc>
+              </a:tr>
+            </a:tbl>
+          </a:graphicData>
+        </a:graphic>
+      </p:graphicFrame>
+      <p:sp>
+        <p:nvSpPr>
+          <p:cNvPr id="5" name="TextBox 4"/>
+          <p:cNvSpPr txBox="1"/>
+          <p:nvPr/>
+        </p:nvSpPr>
+        <p:spPr>
+          <a:xfrm>
+            <a:off x="822960" y="4023360"/>
+            <a:ext cx="10515600" cy="1828800"/>
+          </a:xfrm>
+          <a:prstGeom prst="rect">
+            <a:avLst/>
+          </a:prstGeom>
+          <a:noFill/>
+        </p:spPr>
+        <p:txBody>
+          <a:bodyPr wrap="square">
+            <a:spAutoFit/>
+          </a:bodyPr>
+          <a:lstStyle/>
+          <a:p>
+            <a:pPr>
+              <a:spcAft>
+                <a:spcPts val="1400"/>
+              </a:spcAft>
+            </a:pPr>
+            <a:r>
+              <a:rPr sz="1600">
+                <a:solidFill>
+                  <a:srgbClr val="1F2A37"/>
+                </a:solidFill>
+                <a:latin typeface="Calibri"/>
+              </a:rPr>
+              <a:t>•  No claim of superiority: different corpora, different sample sizes, different protocol</a:t>
+            </a:r>
+          </a:p>
+          <a:p>
+            <a:pPr>
+              <a:spcAft>
+                <a:spcPts val="1400"/>
+              </a:spcAft>
+            </a:pPr>
+            <a:r>
+              <a:rPr sz="1600">
+                <a:solidFill>
+                  <a:srgbClr val="1F2A37"/>
+                </a:solidFill>
+                <a:latin typeface="Calibri"/>
+              </a:rPr>
+              <a:t>•  A head-to-head test on one shared labelled corpus is Recommendation 2</a:t>
+            </a:r>
+          </a:p>
+        </p:txBody>
+      </p:sp>
+    </p:spTree>
+  </p:cSld>
+  <p:clrMapOvr>
+    <a:masterClrMapping/>
+  </p:clrMapOvr>
+</p:sld>
+</file>
+
+<file path=ppt/slides/slide19.xml><?xml version="1.0" encoding="utf-8"?>
+<p:sld xmlns:a="http://schemas.openxmlformats.org/drawingml/2006/main" xmlns:p="http://schemas.openxmlformats.org/presentationml/2006/main" xmlns:r="http://schemas.openxmlformats.org/officeDocument/2006/relationships">
+  <p:cSld>
+    <p:spTree>
+      <p:nvGrpSpPr>
+        <p:cNvPr id="1" name=""/>
+        <p:cNvGrpSpPr/>
+        <p:nvPr/>
+      </p:nvGrpSpPr>
+      <p:grpSpPr/>
+      <p:sp>
+        <p:nvSpPr>
+          <p:cNvPr id="2" name="Rectangle 1"/>
+          <p:cNvSpPr/>
+          <p:nvPr/>
+        </p:nvSpPr>
+        <p:spPr>
+          <a:xfrm>
+            <a:off x="0" y="0"/>
+            <a:ext cx="12191695" cy="960120"/>
+          </a:xfrm>
+          <a:prstGeom prst="rect">
+            <a:avLst/>
+          </a:prstGeom>
+          <a:solidFill>
+            <a:srgbClr val="0B2B5B"/>
+          </a:solidFill>
+          <a:ln>
+            <a:noFill/>
+          </a:ln>
+          <a:effectLst/>
+        </p:spPr>
+        <p:style>
+          <a:lnRef idx="1">
+            <a:schemeClr val="accent1"/>
+          </a:lnRef>
+          <a:fillRef idx="3">
+            <a:schemeClr val="accent1"/>
+          </a:fillRef>
+          <a:effectRef idx="2">
+            <a:schemeClr val="accent1"/>
+          </a:effectRef>
+          <a:fontRef idx="minor">
+            <a:schemeClr val="lt1"/>
+          </a:fontRef>
+        </p:style>
+        <p:txBody>
+          <a:bodyPr rtlCol="0" anchor="ctr"/>
+          <a:lstStyle/>
+          <a:p>
+            <a:pPr algn="ctr"/>
+          </a:p>
+        </p:txBody>
+      </p:sp>
+      <p:sp>
+        <p:nvSpPr>
+          <p:cNvPr id="3" name="TextBox 2"/>
+          <p:cNvSpPr txBox="1"/>
+          <p:nvPr/>
+        </p:nvSpPr>
+        <p:spPr>
+          <a:xfrm>
+            <a:off x="502920" y="128016"/>
+            <a:ext cx="11155680" cy="731520"/>
+          </a:xfrm>
+          <a:prstGeom prst="rect">
+            <a:avLst/>
+          </a:prstGeom>
+          <a:noFill/>
+        </p:spPr>
+        <p:txBody>
+          <a:bodyPr wrap="square">
+            <a:spAutoFit/>
+          </a:bodyPr>
+          <a:lstStyle/>
+          <a:p>
+            <a:pPr>
+              <a:spcAft>
+                <a:spcPts val="0"/>
+              </a:spcAft>
+            </a:pPr>
+            <a:r>
+              <a:rPr sz="3000" b="1">
+                <a:solidFill>
+                  <a:srgbClr val="FFFFFF"/>
+                </a:solidFill>
+                <a:latin typeface="Calibri"/>
+              </a:rPr>
+              <a:t>B5  Validation Gate — and Its Limit</a:t>
+            </a:r>
+          </a:p>
+        </p:txBody>
+      </p:sp>
+      <p:sp>
+        <p:nvSpPr>
+          <p:cNvPr id="4" name="TextBox 3"/>
+          <p:cNvSpPr txBox="1"/>
+          <p:nvPr/>
+        </p:nvSpPr>
+        <p:spPr>
+          <a:xfrm>
+            <a:off x="822960" y="1463040"/>
+            <a:ext cx="10515600" cy="2377440"/>
+          </a:xfrm>
+          <a:prstGeom prst="rect">
+            <a:avLst/>
+          </a:prstGeom>
+          <a:noFill/>
+        </p:spPr>
+        <p:txBody>
+          <a:bodyPr wrap="square">
+            <a:spAutoFit/>
+          </a:bodyPr>
+          <a:lstStyle/>
+          <a:p>
+            <a:pPr>
+              <a:spcAft>
+                <a:spcPts val="1400"/>
+              </a:spcAft>
+            </a:pPr>
+            <a:r>
+              <a:rPr sz="1700">
+                <a:solidFill>
+                  <a:srgbClr val="1F2A37"/>
+                </a:solidFill>
+                <a:latin typeface="Calibri"/>
+              </a:rPr>
+              <a:t>•  Retraining is reviewer-initiated; the system never retrains on its own</a:t>
+            </a:r>
+          </a:p>
+          <a:p>
+            <a:pPr>
+              <a:spcAft>
+                <a:spcPts val="1400"/>
+              </a:spcAft>
+            </a:pPr>
+            <a:r>
+              <a:rPr sz="1700">
+                <a:solidFill>
+                  <a:srgbClr val="1F2A37"/>
+                </a:solidFill>
+                <a:latin typeface="Calibri"/>
+              </a:rPr>
+              <a:t>•  A candidate is trained on the corpus plus accumulated corrections</a:t>
+            </a:r>
+          </a:p>
+          <a:p>
+            <a:pPr>
+              <a:spcAft>
+                <a:spcPts val="1400"/>
+              </a:spcAft>
+            </a:pPr>
+            <a:r>
+              <a:rPr sz="1700">
+                <a:solidFill>
+                  <a:srgbClr val="1F2A37"/>
+                </a:solidFill>
+                <a:latin typeface="Calibri"/>
+              </a:rPr>
+              <a:t>•  Both models are scored on the same held-out split (fixed seed)</a:t>
+            </a:r>
+          </a:p>
+          <a:p>
+            <a:pPr>
+              <a:spcAft>
+                <a:spcPts val="1400"/>
+              </a:spcAft>
+            </a:pPr>
+            <a:r>
+              <a:rPr sz="1700">
+                <a:solidFill>
+                  <a:srgbClr val="1F2A37"/>
+                </a:solidFill>
+                <a:latin typeface="Calibri"/>
+              </a:rPr>
+              <a:t>•  The candidate is deployed only if ranking quality is not reduced</a:t>
+            </a:r>
+          </a:p>
+          <a:p>
+            <a:pPr>
+              <a:spcAft>
+                <a:spcPts val="1400"/>
+              </a:spcAft>
+            </a:pPr>
+            <a:r>
+              <a:rPr sz="1700">
+                <a:solidFill>
+                  <a:srgbClr val="1F2A37"/>
+                </a:solidFill>
+                <a:latin typeface="Calibri"/>
+              </a:rPr>
+              <a:t>•  The replaced model is archived, so the previous version can be restored</a:t>
+            </a:r>
+          </a:p>
+        </p:txBody>
+      </p:sp>
+      <p:sp>
+        <p:nvSpPr>
+          <p:cNvPr id="5" name="Rounded Rectangle 4"/>
+          <p:cNvSpPr/>
+          <p:nvPr/>
+        </p:nvSpPr>
+        <p:spPr>
+          <a:xfrm>
+            <a:off x="822960" y="4114800"/>
+            <a:ext cx="10515600" cy="1828800"/>
+          </a:xfrm>
+          <a:prstGeom prst="roundRect">
+            <a:avLst>
+              <a:gd name="adj" fmla="val 6000"/>
+            </a:avLst>
+          </a:prstGeom>
+          <a:solidFill>
+            <a:srgbClr val="FFF7E6"/>
+          </a:solidFill>
+          <a:ln w="15875">
+            <a:solidFill>
+              <a:srgbClr val="E8C46A"/>
+            </a:solidFill>
+          </a:ln>
+          <a:effectLst/>
+        </p:spPr>
+        <p:style>
+          <a:lnRef idx="1">
+            <a:schemeClr val="accent1"/>
+          </a:lnRef>
+          <a:fillRef idx="3">
+            <a:schemeClr val="accent1"/>
+          </a:fillRef>
+          <a:effectRef idx="2">
+            <a:schemeClr val="accent1"/>
+          </a:effectRef>
+          <a:fontRef idx="minor">
+            <a:schemeClr val="lt1"/>
+          </a:fontRef>
+        </p:style>
+        <p:txBody>
+          <a:bodyPr rtlCol="0" anchor="ctr"/>
+          <a:lstStyle/>
+          <a:p>
+            <a:pPr algn="ctr"/>
+          </a:p>
+        </p:txBody>
+      </p:sp>
+      <p:sp>
+        <p:nvSpPr>
+          <p:cNvPr id="6" name="TextBox 5"/>
+          <p:cNvSpPr txBox="1"/>
+          <p:nvPr/>
+        </p:nvSpPr>
+        <p:spPr>
+          <a:xfrm>
+            <a:off x="1097280" y="4343400"/>
+            <a:ext cx="9966960" cy="1463040"/>
+          </a:xfrm>
+          <a:prstGeom prst="rect">
+            <a:avLst/>
+          </a:prstGeom>
+          <a:noFill/>
+        </p:spPr>
+        <p:txBody>
+          <a:bodyPr wrap="square">
+            <a:spAutoFit/>
+          </a:bodyPr>
+          <a:lstStyle/>
+          <a:p>
+            <a:pPr>
+              <a:spcAft>
+                <a:spcPts val="600"/>
+              </a:spcAft>
+            </a:pPr>
+            <a:r>
+              <a:rPr sz="1700" b="1">
+                <a:solidFill>
+                  <a:srgbClr val="0B2B5B"/>
+                </a:solidFill>
+                <a:latin typeface="Calibri"/>
+              </a:rPr>
+              <a:t>Known limit</a:t>
+            </a:r>
+          </a:p>
+          <a:p>
+            <a:pPr>
+              <a:spcAft>
+                <a:spcPts val="600"/>
+              </a:spcAft>
+            </a:pPr>
+            <a:r>
+              <a:rPr sz="1400" b="0">
+                <a:solidFill>
+                  <a:srgbClr val="1F2A37"/>
+                </a:solidFill>
+                <a:latin typeface="Calibri"/>
+              </a:rPr>
+              <a:t>The held-out split is drawn from the historical corpus, so corrections that are internally consistent but mislabelled are never tested against. The gate catches general degradation, not deliberate label poisoning — which is why the reviewer checkpoint and model archiving matter.</a:t>
+            </a:r>
+          </a:p>
+        </p:txBody>
+      </p:sp>
+    </p:spTree>
+  </p:cSld>
+  <p:clrMapOvr>
+    <a:masterClrMapping/>
+  </p:clrMapOvr>
+</p:sld>
+</file>
+
+<file path=ppt/slides/slide2.xml><?xml version="1.0" encoding="utf-8"?>
+<p:sld xmlns:a="http://schemas.openxmlformats.org/drawingml/2006/main" xmlns:p="http://schemas.openxmlformats.org/presentationml/2006/main" xmlns:r="http://schemas.openxmlformats.org/officeDocument/2006/relationships">
+  <p:cSld>
+    <p:spTree>
+      <p:nvGrpSpPr>
+        <p:cNvPr id="1" name=""/>
+        <p:cNvGrpSpPr/>
+        <p:nvPr/>
+      </p:nvGrpSpPr>
+      <p:grpSpPr/>
+      <p:sp>
+        <p:nvSpPr>
+          <p:cNvPr id="2" name="Rectangle 1"/>
+          <p:cNvSpPr/>
+          <p:nvPr/>
+        </p:nvSpPr>
+        <p:spPr>
+          <a:xfrm>
+            <a:off x="0" y="0"/>
+            <a:ext cx="12191695" cy="960120"/>
+          </a:xfrm>
+          <a:prstGeom prst="rect">
+            <a:avLst/>
+          </a:prstGeom>
+          <a:solidFill>
+            <a:srgbClr val="0B2B5B"/>
+          </a:solidFill>
+          <a:ln>
+            <a:noFill/>
+          </a:ln>
+          <a:effectLst/>
+        </p:spPr>
+        <p:style>
+          <a:lnRef idx="1">
+            <a:schemeClr val="accent1"/>
+          </a:lnRef>
+          <a:fillRef idx="3">
+            <a:schemeClr val="accent1"/>
+          </a:fillRef>
+          <a:effectRef idx="2">
+            <a:schemeClr val="accent1"/>
+          </a:effectRef>
+          <a:fontRef idx="minor">
+            <a:schemeClr val="lt1"/>
+          </a:fontRef>
+        </p:style>
+        <p:txBody>
+          <a:bodyPr rtlCol="0" anchor="ctr"/>
+          <a:lstStyle/>
+          <a:p>
+            <a:pPr algn="ctr"/>
+          </a:p>
+        </p:txBody>
+      </p:sp>
+      <p:sp>
+        <p:nvSpPr>
+          <p:cNvPr id="3" name="TextBox 2"/>
+          <p:cNvSpPr txBox="1"/>
+          <p:nvPr/>
+        </p:nvSpPr>
+        <p:spPr>
+          <a:xfrm>
+            <a:off x="502920" y="128016"/>
+            <a:ext cx="11155680" cy="731520"/>
+          </a:xfrm>
+          <a:prstGeom prst="rect">
+            <a:avLst/>
+          </a:prstGeom>
+          <a:noFill/>
+        </p:spPr>
+        <p:txBody>
+          <a:bodyPr wrap="square">
+            <a:spAutoFit/>
+          </a:bodyPr>
+          <a:lstStyle/>
+          <a:p>
+            <a:pPr>
+              <a:spcAft>
+                <a:spcPts val="0"/>
+              </a:spcAft>
+            </a:pPr>
+            <a:r>
+              <a:rPr sz="3000" b="1">
+                <a:solidFill>
+                  <a:srgbClr val="FFFFFF"/>
+                </a:solidFill>
+                <a:latin typeface="Calibri"/>
+              </a:rPr>
               <a:t>Outline</a:t>
             </a:r>
           </a:p>
@@ -7547,6 +10929,373 @@
           </a:p>
         </p:txBody>
       </p:sp>
+    </p:spTree>
+  </p:cSld>
+  <p:clrMapOvr>
+    <a:masterClrMapping/>
+  </p:clrMapOvr>
+</p:sld>
+</file>
+
+<file path=ppt/slides/slide20.xml><?xml version="1.0" encoding="utf-8"?>
+<p:sld xmlns:a="http://schemas.openxmlformats.org/drawingml/2006/main" xmlns:p="http://schemas.openxmlformats.org/presentationml/2006/main" xmlns:r="http://schemas.openxmlformats.org/officeDocument/2006/relationships">
+  <p:cSld>
+    <p:spTree>
+      <p:nvGrpSpPr>
+        <p:cNvPr id="1" name=""/>
+        <p:cNvGrpSpPr/>
+        <p:nvPr/>
+      </p:nvGrpSpPr>
+      <p:grpSpPr/>
+      <p:sp>
+        <p:nvSpPr>
+          <p:cNvPr id="2" name="Rectangle 1"/>
+          <p:cNvSpPr/>
+          <p:nvPr/>
+        </p:nvSpPr>
+        <p:spPr>
+          <a:xfrm>
+            <a:off x="0" y="0"/>
+            <a:ext cx="12191695" cy="960120"/>
+          </a:xfrm>
+          <a:prstGeom prst="rect">
+            <a:avLst/>
+          </a:prstGeom>
+          <a:solidFill>
+            <a:srgbClr val="0B2B5B"/>
+          </a:solidFill>
+          <a:ln>
+            <a:noFill/>
+          </a:ln>
+          <a:effectLst/>
+        </p:spPr>
+        <p:style>
+          <a:lnRef idx="1">
+            <a:schemeClr val="accent1"/>
+          </a:lnRef>
+          <a:fillRef idx="3">
+            <a:schemeClr val="accent1"/>
+          </a:fillRef>
+          <a:effectRef idx="2">
+            <a:schemeClr val="accent1"/>
+          </a:effectRef>
+          <a:fontRef idx="minor">
+            <a:schemeClr val="lt1"/>
+          </a:fontRef>
+        </p:style>
+        <p:txBody>
+          <a:bodyPr rtlCol="0" anchor="ctr"/>
+          <a:lstStyle/>
+          <a:p>
+            <a:pPr algn="ctr"/>
+          </a:p>
+        </p:txBody>
+      </p:sp>
+      <p:sp>
+        <p:nvSpPr>
+          <p:cNvPr id="3" name="TextBox 2"/>
+          <p:cNvSpPr txBox="1"/>
+          <p:nvPr/>
+        </p:nvSpPr>
+        <p:spPr>
+          <a:xfrm>
+            <a:off x="502920" y="128016"/>
+            <a:ext cx="11155680" cy="731520"/>
+          </a:xfrm>
+          <a:prstGeom prst="rect">
+            <a:avLst/>
+          </a:prstGeom>
+          <a:noFill/>
+        </p:spPr>
+        <p:txBody>
+          <a:bodyPr wrap="square">
+            <a:spAutoFit/>
+          </a:bodyPr>
+          <a:lstStyle/>
+          <a:p>
+            <a:pPr>
+              <a:spcAft>
+                <a:spcPts val="0"/>
+              </a:spcAft>
+            </a:pPr>
+            <a:r>
+              <a:rPr sz="3000" b="1">
+                <a:solidFill>
+                  <a:srgbClr val="FFFFFF"/>
+                </a:solidFill>
+                <a:latin typeface="Calibri"/>
+              </a:rPr>
+              <a:t>B6  Implementation Issues Encountered</a:t>
+            </a:r>
+          </a:p>
+        </p:txBody>
+      </p:sp>
+      <p:graphicFrame>
+        <p:nvGraphicFramePr>
+          <p:cNvPr id="4" name="Table 3"/>
+          <p:cNvGraphicFramePr>
+            <a:graphicFrameLocks noGrp="1"/>
+          </p:cNvGraphicFramePr>
+          <p:nvPr/>
+        </p:nvGraphicFramePr>
+        <p:xfrm>
+          <a:off x="822960" y="1417320"/>
+          <a:ext cx="10515600" cy="2304288"/>
+        </p:xfrm>
+        <a:graphic>
+          <a:graphicData uri="http://schemas.openxmlformats.org/drawingml/2006/table">
+            <a:tbl>
+              <a:tblPr firstRow="1" bandRow="1">
+                <a:tableStyleId>{5C22544A-7EE6-4342-B048-85BDC9FD1C3A}</a:tableStyleId>
+              </a:tblPr>
+              <a:tblGrid>
+                <a:gridCol w="5760720"/>
+                <a:gridCol w="4754880"/>
+              </a:tblGrid>
+              <a:tr h="384048">
+                <a:tc>
+                  <a:txBody>
+                    <a:bodyPr/>
+                    <a:lstStyle/>
+                    <a:p>
+                      <a:pPr algn="l"/>
+                      <a:r>
+                        <a:rPr sz="1400" b="1">
+                          <a:solidFill>
+                            <a:srgbClr val="FFFFFF"/>
+                          </a:solidFill>
+                          <a:latin typeface="Calibri"/>
+                        </a:rPr>
+                        <a:t>Issue</a:t>
+                      </a:r>
+                    </a:p>
+                  </a:txBody>
+                  <a:tcPr/>
+                </a:tc>
+                <a:tc>
+                  <a:txBody>
+                    <a:bodyPr/>
+                    <a:lstStyle/>
+                    <a:p>
+                      <a:pPr algn="ctr"/>
+                      <a:r>
+                        <a:rPr sz="1400" b="1">
+                          <a:solidFill>
+                            <a:srgbClr val="FFFFFF"/>
+                          </a:solidFill>
+                          <a:latin typeface="Calibri"/>
+                        </a:rPr>
+                        <a:t>Resolution</a:t>
+                      </a:r>
+                    </a:p>
+                  </a:txBody>
+                  <a:tcPr/>
+                </a:tc>
+              </a:tr>
+              <a:tr h="384048">
+                <a:tc>
+                  <a:txBody>
+                    <a:bodyPr/>
+                    <a:lstStyle/>
+                    <a:p>
+                      <a:pPr algn="l"/>
+                      <a:r>
+                        <a:rPr sz="1400" b="0">
+                          <a:solidFill>
+                            <a:srgbClr val="1F2A37"/>
+                          </a:solidFill>
+                          <a:latin typeface="Calibri"/>
+                        </a:rPr>
+                        <a:t>Email bodies exceeded Python's CSV field limit</a:t>
+                      </a:r>
+                    </a:p>
+                  </a:txBody>
+                  <a:tcPr/>
+                </a:tc>
+                <a:tc>
+                  <a:txBody>
+                    <a:bodyPr/>
+                    <a:lstStyle/>
+                    <a:p>
+                      <a:pPr algn="ctr"/>
+                      <a:r>
+                        <a:rPr sz="1400" b="0">
+                          <a:solidFill>
+                            <a:srgbClr val="1F2A37"/>
+                          </a:solidFill>
+                          <a:latin typeface="Calibri"/>
+                        </a:rPr>
+                        <a:t>Raised the limit on package import</a:t>
+                      </a:r>
+                    </a:p>
+                  </a:txBody>
+                  <a:tcPr/>
+                </a:tc>
+              </a:tr>
+              <a:tr h="384048">
+                <a:tc>
+                  <a:txBody>
+                    <a:bodyPr/>
+                    <a:lstStyle/>
+                    <a:p>
+                      <a:pPr algn="l"/>
+                      <a:r>
+                        <a:rPr sz="1400" b="0">
+                          <a:solidFill>
+                            <a:srgbClr val="1F2A37"/>
+                          </a:solidFill>
+                          <a:latin typeface="Calibri"/>
+                        </a:rPr>
+                        <a:t>Bracketed and IPv6-like URLs crashed the parser</a:t>
+                      </a:r>
+                    </a:p>
+                  </a:txBody>
+                  <a:tcPr/>
+                </a:tc>
+                <a:tc>
+                  <a:txBody>
+                    <a:bodyPr/>
+                    <a:lstStyle/>
+                    <a:p>
+                      <a:pPr algn="ctr"/>
+                      <a:r>
+                        <a:rPr sz="1400" b="0">
+                          <a:solidFill>
+                            <a:srgbClr val="1F2A37"/>
+                          </a:solidFill>
+                          <a:latin typeface="Calibri"/>
+                        </a:rPr>
+                        <a:t>Crash-safe URL extraction with fallback</a:t>
+                      </a:r>
+                    </a:p>
+                  </a:txBody>
+                  <a:tcPr/>
+                </a:tc>
+              </a:tr>
+              <a:tr h="384048">
+                <a:tc>
+                  <a:txBody>
+                    <a:bodyPr/>
+                    <a:lstStyle/>
+                    <a:p>
+                      <a:pPr algn="l"/>
+                      <a:r>
+                        <a:rPr sz="1400" b="0">
+                          <a:solidFill>
+                            <a:srgbClr val="1F2A37"/>
+                          </a:solidFill>
+                          <a:latin typeface="Calibri"/>
+                        </a:rPr>
+                        <a:t>Raw lengths dominated normalised TF-IDF values</a:t>
+                      </a:r>
+                    </a:p>
+                  </a:txBody>
+                  <a:tcPr/>
+                </a:tc>
+                <a:tc>
+                  <a:txBody>
+                    <a:bodyPr/>
+                    <a:lstStyle/>
+                    <a:p>
+                      <a:pPr algn="ctr"/>
+                      <a:r>
+                        <a:rPr sz="1400" b="0">
+                          <a:solidFill>
+                            <a:srgbClr val="1F2A37"/>
+                          </a:solidFill>
+                          <a:latin typeface="Calibri"/>
+                        </a:rPr>
+                        <a:t>Standardised metadata before fusion</a:t>
+                      </a:r>
+                    </a:p>
+                  </a:txBody>
+                  <a:tcPr/>
+                </a:tc>
+              </a:tr>
+              <a:tr h="384048">
+                <a:tc>
+                  <a:txBody>
+                    <a:bodyPr/>
+                    <a:lstStyle/>
+                    <a:p>
+                      <a:pPr algn="l"/>
+                      <a:r>
+                        <a:rPr sz="1400" b="0">
+                          <a:solidFill>
+                            <a:srgbClr val="1F2A37"/>
+                          </a:solidFill>
+                          <a:latin typeface="Calibri"/>
+                        </a:rPr>
+                        <a:t>One source file duplicated others</a:t>
+                      </a:r>
+                    </a:p>
+                  </a:txBody>
+                  <a:tcPr/>
+                </a:tc>
+                <a:tc>
+                  <a:txBody>
+                    <a:bodyPr/>
+                    <a:lstStyle/>
+                    <a:p>
+                      <a:pPr algn="ctr"/>
+                      <a:r>
+                        <a:rPr sz="1400" b="0">
+                          <a:solidFill>
+                            <a:srgbClr val="1F2A37"/>
+                          </a:solidFill>
+                          <a:latin typeface="Calibri"/>
+                        </a:rPr>
+                        <a:t>SHA-1 de-duplication: 82,500 → 81,152</a:t>
+                      </a:r>
+                    </a:p>
+                  </a:txBody>
+                  <a:tcPr/>
+                </a:tc>
+              </a:tr>
+              <a:tr h="384048">
+                <a:tc>
+                  <a:txBody>
+                    <a:bodyPr/>
+                    <a:lstStyle/>
+                    <a:p>
+                      <a:pPr algn="l"/>
+                      <a:r>
+                        <a:rPr sz="1400" b="0">
+                          <a:solidFill>
+                            <a:srgbClr val="1F2A37"/>
+                          </a:solidFill>
+                          <a:latin typeface="Calibri"/>
+                        </a:rPr>
+                        <a:t>Body-only external sets contain a single class</a:t>
+                      </a:r>
+                    </a:p>
+                  </a:txBody>
+                  <a:tcPr/>
+                </a:tc>
+                <a:tc>
+                  <a:txBody>
+                    <a:bodyPr/>
+                    <a:lstStyle/>
+                    <a:p>
+                      <a:pPr algn="ctr"/>
+                      <a:r>
+                        <a:rPr sz="1400" b="0">
+                          <a:solidFill>
+                            <a:srgbClr val="1F2A37"/>
+                          </a:solidFill>
+                          <a:latin typeface="Calibri"/>
+                        </a:rPr>
+                        <a:t>Report catch rate and threshold sweep instead</a:t>
+                      </a:r>
+                    </a:p>
+                  </a:txBody>
+                  <a:tcPr/>
+                </a:tc>
+              </a:tr>
+            </a:tbl>
+          </a:graphicData>
+        </a:graphic>
+      </p:graphicFrame>
     </p:spTree>
   </p:cSld>
   <p:clrMapOvr>
@@ -8776,7 +12525,7 @@
                 </a:solidFill>
                 <a:latin typeface="Calibri"/>
               </a:rPr>
-              <a:t>Hypotheses</a:t>
+              <a:t>Research Questions</a:t>
             </a:r>
           </a:p>
           <a:p>
@@ -8792,7 +12541,7 @@
                 </a:solidFill>
                 <a:latin typeface="Calibri"/>
               </a:rPr>
-              <a:t>Each is tested by a specific experiment in Chapter 6</a:t>
+              <a:t>Each is answered by a specific experiment in Chapter 6</a:t>
             </a:r>
           </a:p>
         </p:txBody>
@@ -8879,7 +12628,7 @@
                 </a:solidFill>
                 <a:latin typeface="Calibri"/>
               </a:rPr>
-              <a:t>H1  Combining textual content with structural metadata gives more robust detection than content alone.</a:t>
+              <a:t>Q1  Does combining textual content with structural metadata improve detection over content alone?</a:t>
             </a:r>
           </a:p>
           <a:p>
@@ -8895,7 +12644,7 @@
                 </a:solidFill>
                 <a:latin typeface="Calibri"/>
               </a:rPr>
-              <a:t>Tested by the content-only versus content–metadata comparison (Table 6.2).</a:t>
+              <a:t>Answered by the content-only versus content–metadata comparison (Table 6.2).</a:t>
             </a:r>
           </a:p>
         </p:txBody>
@@ -8982,7 +12731,7 @@
                 </a:solidFill>
                 <a:latin typeface="Calibri"/>
               </a:rPr>
-              <a:t>H2  Reviewed, validation-gated retraining improves detection of represented modern threats while maintaining main-corpus performance.</a:t>
+              <a:t>Q2  Can reviewed, validation-gated retraining improve detection of represented modern threats while maintaining main-corpus performance?</a:t>
             </a:r>
           </a:p>
           <a:p>
@@ -8998,7 +12747,7 @@
                 </a:solidFill>
                 <a:latin typeface="Calibri"/>
               </a:rPr>
-              <a:t>Tested by the before/after adaptive-retraining experiment (Table 6.4).</a:t>
+              <a:t>Answered by the before/after adaptive-retraining experiment (Table 6.4).</a:t>
             </a:r>
           </a:p>
         </p:txBody>
